--- a/task_description/Brainstorming.pptx
+++ b/task_description/Brainstorming.pptx
@@ -4,6 +4,9 @@
   <p:sldMasterIdLst>
     <p:sldMasterId id="2147483648" r:id="rId1"/>
   </p:sldMasterIdLst>
+  <p:notesMasterIdLst>
+    <p:notesMasterId r:id="rId14"/>
+  </p:notesMasterIdLst>
   <p:sldIdLst>
     <p:sldId id="263" r:id="rId2"/>
     <p:sldId id="264" r:id="rId3"/>
@@ -115,7 +118,446 @@
       </a:defRPr>
     </a:lvl9pPr>
   </p:defaultTextStyle>
+  <p:extLst>
+    <p:ext uri="{EFAFB233-063F-42B5-8137-9DF3F51BA10A}">
+      <p15:sldGuideLst xmlns:p15="http://schemas.microsoft.com/office/powerpoint/2012/main"/>
+    </p:ext>
+  </p:extLst>
 </p:presentation>
+</file>
+
+<file path=ppt/notesMasters/notesMaster1.xml><?xml version="1.0" encoding="utf-8"?>
+<p:notesMaster xmlns:a="http://schemas.openxmlformats.org/drawingml/2006/main" xmlns:r="http://schemas.openxmlformats.org/officeDocument/2006/relationships" xmlns:p="http://schemas.openxmlformats.org/presentationml/2006/main">
+  <p:cSld>
+    <p:bg>
+      <p:bgRef idx="1001">
+        <a:schemeClr val="bg1"/>
+      </p:bgRef>
+    </p:bg>
+    <p:spTree>
+      <p:nvGrpSpPr>
+        <p:cNvPr id="1" name=""/>
+        <p:cNvGrpSpPr/>
+        <p:nvPr/>
+      </p:nvGrpSpPr>
+      <p:grpSpPr>
+        <a:xfrm>
+          <a:off x="0" y="0"/>
+          <a:ext cx="0" cy="0"/>
+          <a:chOff x="0" y="0"/>
+          <a:chExt cx="0" cy="0"/>
+        </a:xfrm>
+      </p:grpSpPr>
+      <p:sp>
+        <p:nvSpPr>
+          <p:cNvPr id="2" name="Header Placeholder 1"/>
+          <p:cNvSpPr>
+            <a:spLocks noGrp="1"/>
+          </p:cNvSpPr>
+          <p:nvPr>
+            <p:ph type="hdr" sz="quarter"/>
+          </p:nvPr>
+        </p:nvSpPr>
+        <p:spPr>
+          <a:xfrm>
+            <a:off x="0" y="0"/>
+            <a:ext cx="2971800" cy="458788"/>
+          </a:xfrm>
+          <a:prstGeom prst="rect">
+            <a:avLst/>
+          </a:prstGeom>
+        </p:spPr>
+        <p:txBody>
+          <a:bodyPr vert="horz" lIns="91440" tIns="45720" rIns="91440" bIns="45720" rtlCol="0"/>
+          <a:lstStyle>
+            <a:lvl1pPr algn="l">
+              <a:defRPr sz="1200"/>
+            </a:lvl1pPr>
+          </a:lstStyle>
+          <a:p>
+            <a:endParaRPr lang="de-CH"/>
+          </a:p>
+        </p:txBody>
+      </p:sp>
+      <p:sp>
+        <p:nvSpPr>
+          <p:cNvPr id="3" name="Date Placeholder 2"/>
+          <p:cNvSpPr>
+            <a:spLocks noGrp="1"/>
+          </p:cNvSpPr>
+          <p:nvPr>
+            <p:ph type="dt" idx="1"/>
+          </p:nvPr>
+        </p:nvSpPr>
+        <p:spPr>
+          <a:xfrm>
+            <a:off x="3884613" y="0"/>
+            <a:ext cx="2971800" cy="458788"/>
+          </a:xfrm>
+          <a:prstGeom prst="rect">
+            <a:avLst/>
+          </a:prstGeom>
+        </p:spPr>
+        <p:txBody>
+          <a:bodyPr vert="horz" lIns="91440" tIns="45720" rIns="91440" bIns="45720" rtlCol="0"/>
+          <a:lstStyle>
+            <a:lvl1pPr algn="r">
+              <a:defRPr sz="1200"/>
+            </a:lvl1pPr>
+          </a:lstStyle>
+          <a:p>
+            <a:fld id="{6A49B9B3-1D81-4150-A54C-4085A238B985}" type="datetimeFigureOut">
+              <a:rPr lang="de-CH" smtClean="0"/>
+              <a:t>03.05.2025</a:t>
+            </a:fld>
+            <a:endParaRPr lang="de-CH"/>
+          </a:p>
+        </p:txBody>
+      </p:sp>
+      <p:sp>
+        <p:nvSpPr>
+          <p:cNvPr id="4" name="Slide Image Placeholder 3"/>
+          <p:cNvSpPr>
+            <a:spLocks noGrp="1" noRot="1" noChangeAspect="1"/>
+          </p:cNvSpPr>
+          <p:nvPr>
+            <p:ph type="sldImg" idx="2"/>
+          </p:nvPr>
+        </p:nvSpPr>
+        <p:spPr>
+          <a:xfrm>
+            <a:off x="685800" y="1143000"/>
+            <a:ext cx="5486400" cy="3086100"/>
+          </a:xfrm>
+          <a:prstGeom prst="rect">
+            <a:avLst/>
+          </a:prstGeom>
+          <a:noFill/>
+          <a:ln w="12700">
+            <a:solidFill>
+              <a:prstClr val="black"/>
+            </a:solidFill>
+          </a:ln>
+        </p:spPr>
+        <p:txBody>
+          <a:bodyPr vert="horz" lIns="91440" tIns="45720" rIns="91440" bIns="45720" rtlCol="0" anchor="ctr"/>
+          <a:lstStyle/>
+          <a:p>
+            <a:endParaRPr lang="de-CH"/>
+          </a:p>
+        </p:txBody>
+      </p:sp>
+      <p:sp>
+        <p:nvSpPr>
+          <p:cNvPr id="5" name="Notes Placeholder 4"/>
+          <p:cNvSpPr>
+            <a:spLocks noGrp="1"/>
+          </p:cNvSpPr>
+          <p:nvPr>
+            <p:ph type="body" sz="quarter" idx="3"/>
+          </p:nvPr>
+        </p:nvSpPr>
+        <p:spPr>
+          <a:xfrm>
+            <a:off x="685800" y="4400550"/>
+            <a:ext cx="5486400" cy="3600450"/>
+          </a:xfrm>
+          <a:prstGeom prst="rect">
+            <a:avLst/>
+          </a:prstGeom>
+        </p:spPr>
+        <p:txBody>
+          <a:bodyPr vert="horz" lIns="91440" tIns="45720" rIns="91440" bIns="45720" rtlCol="0"/>
+          <a:lstStyle/>
+          <a:p>
+            <a:pPr lvl="0"/>
+            <a:r>
+              <a:rPr lang="en-US"/>
+              <a:t>Edit Master text styles</a:t>
+            </a:r>
+          </a:p>
+          <a:p>
+            <a:pPr lvl="1"/>
+            <a:r>
+              <a:rPr lang="en-US"/>
+              <a:t>Second level</a:t>
+            </a:r>
+          </a:p>
+          <a:p>
+            <a:pPr lvl="2"/>
+            <a:r>
+              <a:rPr lang="en-US"/>
+              <a:t>Third level</a:t>
+            </a:r>
+          </a:p>
+          <a:p>
+            <a:pPr lvl="3"/>
+            <a:r>
+              <a:rPr lang="en-US"/>
+              <a:t>Fourth level</a:t>
+            </a:r>
+          </a:p>
+          <a:p>
+            <a:pPr lvl="4"/>
+            <a:r>
+              <a:rPr lang="en-US"/>
+              <a:t>Fifth level</a:t>
+            </a:r>
+            <a:endParaRPr lang="de-CH"/>
+          </a:p>
+        </p:txBody>
+      </p:sp>
+      <p:sp>
+        <p:nvSpPr>
+          <p:cNvPr id="6" name="Footer Placeholder 5"/>
+          <p:cNvSpPr>
+            <a:spLocks noGrp="1"/>
+          </p:cNvSpPr>
+          <p:nvPr>
+            <p:ph type="ftr" sz="quarter" idx="4"/>
+          </p:nvPr>
+        </p:nvSpPr>
+        <p:spPr>
+          <a:xfrm>
+            <a:off x="0" y="8685213"/>
+            <a:ext cx="2971800" cy="458787"/>
+          </a:xfrm>
+          <a:prstGeom prst="rect">
+            <a:avLst/>
+          </a:prstGeom>
+        </p:spPr>
+        <p:txBody>
+          <a:bodyPr vert="horz" lIns="91440" tIns="45720" rIns="91440" bIns="45720" rtlCol="0" anchor="b"/>
+          <a:lstStyle>
+            <a:lvl1pPr algn="l">
+              <a:defRPr sz="1200"/>
+            </a:lvl1pPr>
+          </a:lstStyle>
+          <a:p>
+            <a:endParaRPr lang="de-CH"/>
+          </a:p>
+        </p:txBody>
+      </p:sp>
+      <p:sp>
+        <p:nvSpPr>
+          <p:cNvPr id="7" name="Slide Number Placeholder 6"/>
+          <p:cNvSpPr>
+            <a:spLocks noGrp="1"/>
+          </p:cNvSpPr>
+          <p:nvPr>
+            <p:ph type="sldNum" sz="quarter" idx="5"/>
+          </p:nvPr>
+        </p:nvSpPr>
+        <p:spPr>
+          <a:xfrm>
+            <a:off x="3884613" y="8685213"/>
+            <a:ext cx="2971800" cy="458787"/>
+          </a:xfrm>
+          <a:prstGeom prst="rect">
+            <a:avLst/>
+          </a:prstGeom>
+        </p:spPr>
+        <p:txBody>
+          <a:bodyPr vert="horz" lIns="91440" tIns="45720" rIns="91440" bIns="45720" rtlCol="0" anchor="b"/>
+          <a:lstStyle>
+            <a:lvl1pPr algn="r">
+              <a:defRPr sz="1200"/>
+            </a:lvl1pPr>
+          </a:lstStyle>
+          <a:p>
+            <a:fld id="{267259FC-14D1-48B2-B0B3-4EC7838B27A7}" type="slidenum">
+              <a:rPr lang="de-CH" smtClean="0"/>
+              <a:t>‹#›</a:t>
+            </a:fld>
+            <a:endParaRPr lang="de-CH"/>
+          </a:p>
+        </p:txBody>
+      </p:sp>
+    </p:spTree>
+    <p:extLst>
+      <p:ext uri="{BB962C8B-B14F-4D97-AF65-F5344CB8AC3E}">
+        <p14:creationId xmlns:p14="http://schemas.microsoft.com/office/powerpoint/2010/main" val="507856565"/>
+      </p:ext>
+    </p:extLst>
+  </p:cSld>
+  <p:clrMap bg1="lt1" tx1="dk1" bg2="lt2" tx2="dk2" accent1="accent1" accent2="accent2" accent3="accent3" accent4="accent4" accent5="accent5" accent6="accent6" hlink="hlink" folHlink="folHlink"/>
+  <p:notesStyle>
+    <a:lvl1pPr marL="0" algn="l" defTabSz="914400" rtl="0" eaLnBrk="1" latinLnBrk="0" hangingPunct="1">
+      <a:defRPr sz="1200" kern="1200">
+        <a:solidFill>
+          <a:schemeClr val="tx1"/>
+        </a:solidFill>
+        <a:latin typeface="+mn-lt"/>
+        <a:ea typeface="+mn-ea"/>
+        <a:cs typeface="+mn-cs"/>
+      </a:defRPr>
+    </a:lvl1pPr>
+    <a:lvl2pPr marL="457200" algn="l" defTabSz="914400" rtl="0" eaLnBrk="1" latinLnBrk="0" hangingPunct="1">
+      <a:defRPr sz="1200" kern="1200">
+        <a:solidFill>
+          <a:schemeClr val="tx1"/>
+        </a:solidFill>
+        <a:latin typeface="+mn-lt"/>
+        <a:ea typeface="+mn-ea"/>
+        <a:cs typeface="+mn-cs"/>
+      </a:defRPr>
+    </a:lvl2pPr>
+    <a:lvl3pPr marL="914400" algn="l" defTabSz="914400" rtl="0" eaLnBrk="1" latinLnBrk="0" hangingPunct="1">
+      <a:defRPr sz="1200" kern="1200">
+        <a:solidFill>
+          <a:schemeClr val="tx1"/>
+        </a:solidFill>
+        <a:latin typeface="+mn-lt"/>
+        <a:ea typeface="+mn-ea"/>
+        <a:cs typeface="+mn-cs"/>
+      </a:defRPr>
+    </a:lvl3pPr>
+    <a:lvl4pPr marL="1371600" algn="l" defTabSz="914400" rtl="0" eaLnBrk="1" latinLnBrk="0" hangingPunct="1">
+      <a:defRPr sz="1200" kern="1200">
+        <a:solidFill>
+          <a:schemeClr val="tx1"/>
+        </a:solidFill>
+        <a:latin typeface="+mn-lt"/>
+        <a:ea typeface="+mn-ea"/>
+        <a:cs typeface="+mn-cs"/>
+      </a:defRPr>
+    </a:lvl4pPr>
+    <a:lvl5pPr marL="1828800" algn="l" defTabSz="914400" rtl="0" eaLnBrk="1" latinLnBrk="0" hangingPunct="1">
+      <a:defRPr sz="1200" kern="1200">
+        <a:solidFill>
+          <a:schemeClr val="tx1"/>
+        </a:solidFill>
+        <a:latin typeface="+mn-lt"/>
+        <a:ea typeface="+mn-ea"/>
+        <a:cs typeface="+mn-cs"/>
+      </a:defRPr>
+    </a:lvl5pPr>
+    <a:lvl6pPr marL="2286000" algn="l" defTabSz="914400" rtl="0" eaLnBrk="1" latinLnBrk="0" hangingPunct="1">
+      <a:defRPr sz="1200" kern="1200">
+        <a:solidFill>
+          <a:schemeClr val="tx1"/>
+        </a:solidFill>
+        <a:latin typeface="+mn-lt"/>
+        <a:ea typeface="+mn-ea"/>
+        <a:cs typeface="+mn-cs"/>
+      </a:defRPr>
+    </a:lvl6pPr>
+    <a:lvl7pPr marL="2743200" algn="l" defTabSz="914400" rtl="0" eaLnBrk="1" latinLnBrk="0" hangingPunct="1">
+      <a:defRPr sz="1200" kern="1200">
+        <a:solidFill>
+          <a:schemeClr val="tx1"/>
+        </a:solidFill>
+        <a:latin typeface="+mn-lt"/>
+        <a:ea typeface="+mn-ea"/>
+        <a:cs typeface="+mn-cs"/>
+      </a:defRPr>
+    </a:lvl7pPr>
+    <a:lvl8pPr marL="3200400" algn="l" defTabSz="914400" rtl="0" eaLnBrk="1" latinLnBrk="0" hangingPunct="1">
+      <a:defRPr sz="1200" kern="1200">
+        <a:solidFill>
+          <a:schemeClr val="tx1"/>
+        </a:solidFill>
+        <a:latin typeface="+mn-lt"/>
+        <a:ea typeface="+mn-ea"/>
+        <a:cs typeface="+mn-cs"/>
+      </a:defRPr>
+    </a:lvl8pPr>
+    <a:lvl9pPr marL="3657600" algn="l" defTabSz="914400" rtl="0" eaLnBrk="1" latinLnBrk="0" hangingPunct="1">
+      <a:defRPr sz="1200" kern="1200">
+        <a:solidFill>
+          <a:schemeClr val="tx1"/>
+        </a:solidFill>
+        <a:latin typeface="+mn-lt"/>
+        <a:ea typeface="+mn-ea"/>
+        <a:cs typeface="+mn-cs"/>
+      </a:defRPr>
+    </a:lvl9pPr>
+  </p:notesStyle>
+</p:notesMaster>
+</file>
+
+<file path=ppt/notesSlides/notesSlide1.xml><?xml version="1.0" encoding="utf-8"?>
+<p:notes xmlns:a="http://schemas.openxmlformats.org/drawingml/2006/main" xmlns:r="http://schemas.openxmlformats.org/officeDocument/2006/relationships" xmlns:p="http://schemas.openxmlformats.org/presentationml/2006/main">
+  <p:cSld>
+    <p:spTree>
+      <p:nvGrpSpPr>
+        <p:cNvPr id="1" name=""/>
+        <p:cNvGrpSpPr/>
+        <p:nvPr/>
+      </p:nvGrpSpPr>
+      <p:grpSpPr>
+        <a:xfrm>
+          <a:off x="0" y="0"/>
+          <a:ext cx="0" cy="0"/>
+          <a:chOff x="0" y="0"/>
+          <a:chExt cx="0" cy="0"/>
+        </a:xfrm>
+      </p:grpSpPr>
+      <p:sp>
+        <p:nvSpPr>
+          <p:cNvPr id="2" name="Slide Image Placeholder 1"/>
+          <p:cNvSpPr>
+            <a:spLocks noGrp="1" noRot="1" noChangeAspect="1"/>
+          </p:cNvSpPr>
+          <p:nvPr>
+            <p:ph type="sldImg"/>
+          </p:nvPr>
+        </p:nvSpPr>
+        <p:spPr/>
+      </p:sp>
+      <p:sp>
+        <p:nvSpPr>
+          <p:cNvPr id="3" name="Notes Placeholder 2"/>
+          <p:cNvSpPr>
+            <a:spLocks noGrp="1"/>
+          </p:cNvSpPr>
+          <p:nvPr>
+            <p:ph type="body" idx="1"/>
+          </p:nvPr>
+        </p:nvSpPr>
+        <p:spPr/>
+        <p:txBody>
+          <a:bodyPr/>
+          <a:lstStyle/>
+          <a:p>
+            <a:endParaRPr lang="de-CH" dirty="0"/>
+          </a:p>
+        </p:txBody>
+      </p:sp>
+      <p:sp>
+        <p:nvSpPr>
+          <p:cNvPr id="4" name="Slide Number Placeholder 3"/>
+          <p:cNvSpPr>
+            <a:spLocks noGrp="1"/>
+          </p:cNvSpPr>
+          <p:nvPr>
+            <p:ph type="sldNum" sz="quarter" idx="5"/>
+          </p:nvPr>
+        </p:nvSpPr>
+        <p:spPr/>
+        <p:txBody>
+          <a:bodyPr/>
+          <a:lstStyle/>
+          <a:p>
+            <a:fld id="{267259FC-14D1-48B2-B0B3-4EC7838B27A7}" type="slidenum">
+              <a:rPr lang="de-CH" smtClean="0"/>
+              <a:t>4</a:t>
+            </a:fld>
+            <a:endParaRPr lang="de-CH"/>
+          </a:p>
+        </p:txBody>
+      </p:sp>
+    </p:spTree>
+    <p:extLst>
+      <p:ext uri="{BB962C8B-B14F-4D97-AF65-F5344CB8AC3E}">
+        <p14:creationId xmlns:p14="http://schemas.microsoft.com/office/powerpoint/2010/main" val="915171187"/>
+      </p:ext>
+    </p:extLst>
+  </p:cSld>
+  <p:clrMapOvr>
+    <a:masterClrMapping/>
+  </p:clrMapOvr>
+</p:notes>
 </file>
 
 <file path=ppt/slideLayouts/slideLayout1.xml><?xml version="1.0" encoding="utf-8"?>
@@ -267,7 +709,7 @@
           <a:p>
             <a:fld id="{15254E24-EA96-4AD7-89AE-40EF54F67658}" type="datetimeFigureOut">
               <a:rPr lang="de-CH" smtClean="0"/>
-              <a:t>02.05.2025</a:t>
+              <a:t>03.05.2025</a:t>
             </a:fld>
             <a:endParaRPr lang="de-CH"/>
           </a:p>
@@ -467,7 +909,7 @@
           <a:p>
             <a:fld id="{15254E24-EA96-4AD7-89AE-40EF54F67658}" type="datetimeFigureOut">
               <a:rPr lang="de-CH" smtClean="0"/>
-              <a:t>02.05.2025</a:t>
+              <a:t>03.05.2025</a:t>
             </a:fld>
             <a:endParaRPr lang="de-CH"/>
           </a:p>
@@ -677,7 +1119,7 @@
           <a:p>
             <a:fld id="{15254E24-EA96-4AD7-89AE-40EF54F67658}" type="datetimeFigureOut">
               <a:rPr lang="de-CH" smtClean="0"/>
-              <a:t>02.05.2025</a:t>
+              <a:t>03.05.2025</a:t>
             </a:fld>
             <a:endParaRPr lang="de-CH"/>
           </a:p>
@@ -877,7 +1319,7 @@
           <a:p>
             <a:fld id="{15254E24-EA96-4AD7-89AE-40EF54F67658}" type="datetimeFigureOut">
               <a:rPr lang="de-CH" smtClean="0"/>
-              <a:t>02.05.2025</a:t>
+              <a:t>03.05.2025</a:t>
             </a:fld>
             <a:endParaRPr lang="de-CH"/>
           </a:p>
@@ -1153,7 +1595,7 @@
           <a:p>
             <a:fld id="{15254E24-EA96-4AD7-89AE-40EF54F67658}" type="datetimeFigureOut">
               <a:rPr lang="de-CH" smtClean="0"/>
-              <a:t>02.05.2025</a:t>
+              <a:t>03.05.2025</a:t>
             </a:fld>
             <a:endParaRPr lang="de-CH"/>
           </a:p>
@@ -1421,7 +1863,7 @@
           <a:p>
             <a:fld id="{15254E24-EA96-4AD7-89AE-40EF54F67658}" type="datetimeFigureOut">
               <a:rPr lang="de-CH" smtClean="0"/>
-              <a:t>02.05.2025</a:t>
+              <a:t>03.05.2025</a:t>
             </a:fld>
             <a:endParaRPr lang="de-CH"/>
           </a:p>
@@ -1836,7 +2278,7 @@
           <a:p>
             <a:fld id="{15254E24-EA96-4AD7-89AE-40EF54F67658}" type="datetimeFigureOut">
               <a:rPr lang="de-CH" smtClean="0"/>
-              <a:t>02.05.2025</a:t>
+              <a:t>03.05.2025</a:t>
             </a:fld>
             <a:endParaRPr lang="de-CH"/>
           </a:p>
@@ -1978,7 +2420,7 @@
           <a:p>
             <a:fld id="{15254E24-EA96-4AD7-89AE-40EF54F67658}" type="datetimeFigureOut">
               <a:rPr lang="de-CH" smtClean="0"/>
-              <a:t>02.05.2025</a:t>
+              <a:t>03.05.2025</a:t>
             </a:fld>
             <a:endParaRPr lang="de-CH"/>
           </a:p>
@@ -2091,7 +2533,7 @@
           <a:p>
             <a:fld id="{15254E24-EA96-4AD7-89AE-40EF54F67658}" type="datetimeFigureOut">
               <a:rPr lang="de-CH" smtClean="0"/>
-              <a:t>02.05.2025</a:t>
+              <a:t>03.05.2025</a:t>
             </a:fld>
             <a:endParaRPr lang="de-CH"/>
           </a:p>
@@ -2404,7 +2846,7 @@
           <a:p>
             <a:fld id="{15254E24-EA96-4AD7-89AE-40EF54F67658}" type="datetimeFigureOut">
               <a:rPr lang="de-CH" smtClean="0"/>
-              <a:t>02.05.2025</a:t>
+              <a:t>03.05.2025</a:t>
             </a:fld>
             <a:endParaRPr lang="de-CH"/>
           </a:p>
@@ -2693,7 +3135,7 @@
           <a:p>
             <a:fld id="{15254E24-EA96-4AD7-89AE-40EF54F67658}" type="datetimeFigureOut">
               <a:rPr lang="de-CH" smtClean="0"/>
-              <a:t>02.05.2025</a:t>
+              <a:t>03.05.2025</a:t>
             </a:fld>
             <a:endParaRPr lang="de-CH"/>
           </a:p>
@@ -2936,7 +3378,7 @@
           <a:p>
             <a:fld id="{15254E24-EA96-4AD7-89AE-40EF54F67658}" type="datetimeFigureOut">
               <a:rPr lang="de-CH" smtClean="0"/>
-              <a:t>02.05.2025</a:t>
+              <a:t>03.05.2025</a:t>
             </a:fld>
             <a:endParaRPr lang="de-CH"/>
           </a:p>
@@ -10533,6 +10975,161 @@
       </p:grpSpPr>
       <p:sp>
         <p:nvSpPr>
+          <p:cNvPr id="61" name="Rectangle 60">
+            <a:extLst>
+              <a:ext uri="{FF2B5EF4-FFF2-40B4-BE49-F238E27FC236}">
+                <a16:creationId xmlns:a16="http://schemas.microsoft.com/office/drawing/2014/main" id="{A249ABC2-C6AC-434C-94AA-05C184D7F5BE}"/>
+              </a:ext>
+            </a:extLst>
+          </p:cNvPr>
+          <p:cNvSpPr/>
+          <p:nvPr/>
+        </p:nvSpPr>
+        <p:spPr>
+          <a:xfrm>
+            <a:off x="3580388" y="1095374"/>
+            <a:ext cx="2339166" cy="5340565"/>
+          </a:xfrm>
+          <a:prstGeom prst="rect">
+            <a:avLst/>
+          </a:prstGeom>
+          <a:noFill/>
+          <a:ln>
+            <a:solidFill>
+              <a:schemeClr val="tx1"/>
+            </a:solidFill>
+            <a:prstDash val="dash"/>
+          </a:ln>
+        </p:spPr>
+        <p:style>
+          <a:lnRef idx="2">
+            <a:schemeClr val="accent1">
+              <a:shade val="50000"/>
+            </a:schemeClr>
+          </a:lnRef>
+          <a:fillRef idx="1">
+            <a:schemeClr val="accent1"/>
+          </a:fillRef>
+          <a:effectRef idx="0">
+            <a:schemeClr val="accent1"/>
+          </a:effectRef>
+          <a:fontRef idx="minor">
+            <a:schemeClr val="lt1"/>
+          </a:fontRef>
+        </p:style>
+        <p:txBody>
+          <a:bodyPr rtlCol="0" anchor="ctr"/>
+          <a:lstStyle/>
+          <a:p>
+            <a:pPr algn="ctr"/>
+            <a:endParaRPr lang="de-CH"/>
+          </a:p>
+        </p:txBody>
+      </p:sp>
+      <p:sp>
+        <p:nvSpPr>
+          <p:cNvPr id="43" name="Speech Bubble: Rectangle 42">
+            <a:extLst>
+              <a:ext uri="{FF2B5EF4-FFF2-40B4-BE49-F238E27FC236}">
+                <a16:creationId xmlns:a16="http://schemas.microsoft.com/office/drawing/2014/main" id="{67250CD0-22D8-4CD9-A191-6EBAD39BA314}"/>
+              </a:ext>
+            </a:extLst>
+          </p:cNvPr>
+          <p:cNvSpPr/>
+          <p:nvPr/>
+        </p:nvSpPr>
+        <p:spPr>
+          <a:xfrm>
+            <a:off x="4244277" y="0"/>
+            <a:ext cx="2181485" cy="1487567"/>
+          </a:xfrm>
+          <a:prstGeom prst="wedgeRectCallout">
+            <a:avLst>
+              <a:gd name="adj1" fmla="val -89383"/>
+              <a:gd name="adj2" fmla="val 58018"/>
+            </a:avLst>
+          </a:prstGeom>
+          <a:solidFill>
+            <a:schemeClr val="bg1"/>
+          </a:solidFill>
+          <a:ln w="38100">
+            <a:solidFill>
+              <a:schemeClr val="tx1"/>
+            </a:solidFill>
+          </a:ln>
+        </p:spPr>
+        <p:style>
+          <a:lnRef idx="2">
+            <a:schemeClr val="accent1">
+              <a:shade val="50000"/>
+            </a:schemeClr>
+          </a:lnRef>
+          <a:fillRef idx="1">
+            <a:schemeClr val="accent1"/>
+          </a:fillRef>
+          <a:effectRef idx="0">
+            <a:schemeClr val="accent1"/>
+          </a:effectRef>
+          <a:fontRef idx="minor">
+            <a:schemeClr val="lt1"/>
+          </a:fontRef>
+        </p:style>
+        <p:txBody>
+          <a:bodyPr rtlCol="0" anchor="ctr"/>
+          <a:lstStyle/>
+          <a:p>
+            <a:pPr algn="ctr"/>
+            <a:endParaRPr lang="de-CH"/>
+          </a:p>
+        </p:txBody>
+      </p:sp>
+      <p:pic>
+        <p:nvPicPr>
+          <p:cNvPr id="41" name="Picture 40">
+            <a:extLst>
+              <a:ext uri="{FF2B5EF4-FFF2-40B4-BE49-F238E27FC236}">
+                <a16:creationId xmlns:a16="http://schemas.microsoft.com/office/drawing/2014/main" id="{C27B9DB7-A172-4E5E-817C-F2ED5001DA02}"/>
+              </a:ext>
+            </a:extLst>
+          </p:cNvPr>
+          <p:cNvPicPr>
+            <a:picLocks noChangeAspect="1"/>
+          </p:cNvPicPr>
+          <p:nvPr/>
+        </p:nvPicPr>
+        <p:blipFill rotWithShape="1">
+          <a:blip r:embed="rId3">
+            <a:clrChange>
+              <a:clrFrom>
+                <a:srgbClr val="FFFFFF"/>
+              </a:clrFrom>
+              <a:clrTo>
+                <a:srgbClr val="FFFFFF">
+                  <a:alpha val="0"/>
+                </a:srgbClr>
+              </a:clrTo>
+            </a:clrChange>
+            <a:extLst>
+              <a:ext uri="{28A0092B-C50C-407E-A947-70E740481C1C}">
+                <a14:useLocalDpi xmlns:a14="http://schemas.microsoft.com/office/drawing/2010/main" val="0"/>
+              </a:ext>
+            </a:extLst>
+          </a:blip>
+          <a:srcRect l="9151" r="3944"/>
+          <a:stretch/>
+        </p:blipFill>
+        <p:spPr>
+          <a:xfrm>
+            <a:off x="4223386" y="27076"/>
+            <a:ext cx="2221230" cy="1413836"/>
+          </a:xfrm>
+          <a:prstGeom prst="rect">
+            <a:avLst/>
+          </a:prstGeom>
+        </p:spPr>
+      </p:pic>
+      <p:sp>
+        <p:nvSpPr>
           <p:cNvPr id="19" name="Rectangle 1">
             <a:extLst>
               <a:ext uri="{FF2B5EF4-FFF2-40B4-BE49-F238E27FC236}">
@@ -10639,6 +11236,2559 @@
           </a:p>
         </p:txBody>
       </p:sp>
+      <p:sp>
+        <p:nvSpPr>
+          <p:cNvPr id="2" name="Rectangle 1">
+            <a:extLst>
+              <a:ext uri="{FF2B5EF4-FFF2-40B4-BE49-F238E27FC236}">
+                <a16:creationId xmlns:a16="http://schemas.microsoft.com/office/drawing/2014/main" id="{2708C8E2-4DAE-454F-80B8-D83197D99E3A}"/>
+              </a:ext>
+            </a:extLst>
+          </p:cNvPr>
+          <p:cNvSpPr/>
+          <p:nvPr/>
+        </p:nvSpPr>
+        <p:spPr>
+          <a:xfrm>
+            <a:off x="25572" y="1409700"/>
+            <a:ext cx="2457450" cy="683657"/>
+          </a:xfrm>
+          <a:prstGeom prst="rect">
+            <a:avLst/>
+          </a:prstGeom>
+        </p:spPr>
+        <p:style>
+          <a:lnRef idx="2">
+            <a:schemeClr val="accent1">
+              <a:shade val="50000"/>
+            </a:schemeClr>
+          </a:lnRef>
+          <a:fillRef idx="1">
+            <a:schemeClr val="accent1"/>
+          </a:fillRef>
+          <a:effectRef idx="0">
+            <a:schemeClr val="accent1"/>
+          </a:effectRef>
+          <a:fontRef idx="minor">
+            <a:schemeClr val="lt1"/>
+          </a:fontRef>
+        </p:style>
+        <p:txBody>
+          <a:bodyPr rtlCol="0" anchor="ctr"/>
+          <a:lstStyle/>
+          <a:p>
+            <a:pPr algn="ctr"/>
+            <a:endParaRPr lang="de-CH"/>
+          </a:p>
+        </p:txBody>
+      </p:sp>
+      <p:sp>
+        <p:nvSpPr>
+          <p:cNvPr id="3" name="TextBox 2">
+            <a:extLst>
+              <a:ext uri="{FF2B5EF4-FFF2-40B4-BE49-F238E27FC236}">
+                <a16:creationId xmlns:a16="http://schemas.microsoft.com/office/drawing/2014/main" id="{DCC28408-A15B-43E6-A932-A0074330C588}"/>
+              </a:ext>
+            </a:extLst>
+          </p:cNvPr>
+          <p:cNvSpPr txBox="1"/>
+          <p:nvPr/>
+        </p:nvSpPr>
+        <p:spPr>
+          <a:xfrm>
+            <a:off x="-41104" y="1095375"/>
+            <a:ext cx="1367106" cy="369332"/>
+          </a:xfrm>
+          <a:prstGeom prst="rect">
+            <a:avLst/>
+          </a:prstGeom>
+          <a:noFill/>
+        </p:spPr>
+        <p:txBody>
+          <a:bodyPr wrap="none" rtlCol="0">
+            <a:spAutoFit/>
+          </a:bodyPr>
+          <a:lstStyle/>
+          <a:p>
+            <a:r>
+              <a:rPr lang="de-CH" dirty="0"/>
+              <a:t>Government</a:t>
+            </a:r>
+          </a:p>
+        </p:txBody>
+      </p:sp>
+      <p:sp>
+        <p:nvSpPr>
+          <p:cNvPr id="5" name="Rectangle 4">
+            <a:extLst>
+              <a:ext uri="{FF2B5EF4-FFF2-40B4-BE49-F238E27FC236}">
+                <a16:creationId xmlns:a16="http://schemas.microsoft.com/office/drawing/2014/main" id="{D6762932-E240-4AC4-BDC3-73E14133493C}"/>
+              </a:ext>
+            </a:extLst>
+          </p:cNvPr>
+          <p:cNvSpPr/>
+          <p:nvPr/>
+        </p:nvSpPr>
+        <p:spPr>
+          <a:xfrm>
+            <a:off x="25572" y="2428399"/>
+            <a:ext cx="2457450" cy="1362075"/>
+          </a:xfrm>
+          <a:prstGeom prst="rect">
+            <a:avLst/>
+          </a:prstGeom>
+        </p:spPr>
+        <p:style>
+          <a:lnRef idx="2">
+            <a:schemeClr val="accent1">
+              <a:shade val="50000"/>
+            </a:schemeClr>
+          </a:lnRef>
+          <a:fillRef idx="1">
+            <a:schemeClr val="accent1"/>
+          </a:fillRef>
+          <a:effectRef idx="0">
+            <a:schemeClr val="accent1"/>
+          </a:effectRef>
+          <a:fontRef idx="minor">
+            <a:schemeClr val="lt1"/>
+          </a:fontRef>
+        </p:style>
+        <p:txBody>
+          <a:bodyPr rtlCol="0" anchor="ctr"/>
+          <a:lstStyle/>
+          <a:p>
+            <a:pPr algn="ctr"/>
+            <a:endParaRPr lang="de-CH"/>
+          </a:p>
+        </p:txBody>
+      </p:sp>
+      <p:sp>
+        <p:nvSpPr>
+          <p:cNvPr id="6" name="TextBox 5">
+            <a:extLst>
+              <a:ext uri="{FF2B5EF4-FFF2-40B4-BE49-F238E27FC236}">
+                <a16:creationId xmlns:a16="http://schemas.microsoft.com/office/drawing/2014/main" id="{D4354CEB-4FDD-41E7-ABEF-8392CE912576}"/>
+              </a:ext>
+            </a:extLst>
+          </p:cNvPr>
+          <p:cNvSpPr txBox="1"/>
+          <p:nvPr/>
+        </p:nvSpPr>
+        <p:spPr>
+          <a:xfrm>
+            <a:off x="-41104" y="2114074"/>
+            <a:ext cx="1226618" cy="369332"/>
+          </a:xfrm>
+          <a:prstGeom prst="rect">
+            <a:avLst/>
+          </a:prstGeom>
+          <a:noFill/>
+        </p:spPr>
+        <p:txBody>
+          <a:bodyPr wrap="none" rtlCol="0">
+            <a:spAutoFit/>
+          </a:bodyPr>
+          <a:lstStyle/>
+          <a:p>
+            <a:r>
+              <a:rPr lang="de-CH" dirty="0"/>
+              <a:t>Companies</a:t>
+            </a:r>
+          </a:p>
+        </p:txBody>
+      </p:sp>
+      <p:sp>
+        <p:nvSpPr>
+          <p:cNvPr id="7" name="Rectangle 6">
+            <a:extLst>
+              <a:ext uri="{FF2B5EF4-FFF2-40B4-BE49-F238E27FC236}">
+                <a16:creationId xmlns:a16="http://schemas.microsoft.com/office/drawing/2014/main" id="{38C0F885-97C1-4CAF-8EE6-A3BA39EC26D5}"/>
+              </a:ext>
+            </a:extLst>
+          </p:cNvPr>
+          <p:cNvSpPr/>
+          <p:nvPr/>
+        </p:nvSpPr>
+        <p:spPr>
+          <a:xfrm>
+            <a:off x="25572" y="4191595"/>
+            <a:ext cx="2457450" cy="683657"/>
+          </a:xfrm>
+          <a:prstGeom prst="rect">
+            <a:avLst/>
+          </a:prstGeom>
+        </p:spPr>
+        <p:style>
+          <a:lnRef idx="2">
+            <a:schemeClr val="accent1">
+              <a:shade val="50000"/>
+            </a:schemeClr>
+          </a:lnRef>
+          <a:fillRef idx="1">
+            <a:schemeClr val="accent1"/>
+          </a:fillRef>
+          <a:effectRef idx="0">
+            <a:schemeClr val="accent1"/>
+          </a:effectRef>
+          <a:fontRef idx="minor">
+            <a:schemeClr val="lt1"/>
+          </a:fontRef>
+        </p:style>
+        <p:txBody>
+          <a:bodyPr rtlCol="0" anchor="ctr"/>
+          <a:lstStyle/>
+          <a:p>
+            <a:pPr algn="ctr"/>
+            <a:endParaRPr lang="de-CH"/>
+          </a:p>
+        </p:txBody>
+      </p:sp>
+      <p:sp>
+        <p:nvSpPr>
+          <p:cNvPr id="8" name="TextBox 7">
+            <a:extLst>
+              <a:ext uri="{FF2B5EF4-FFF2-40B4-BE49-F238E27FC236}">
+                <a16:creationId xmlns:a16="http://schemas.microsoft.com/office/drawing/2014/main" id="{8229A9A0-B8B9-4C0D-BC67-8DE1717D7769}"/>
+              </a:ext>
+            </a:extLst>
+          </p:cNvPr>
+          <p:cNvSpPr txBox="1"/>
+          <p:nvPr/>
+        </p:nvSpPr>
+        <p:spPr>
+          <a:xfrm>
+            <a:off x="-41104" y="3877270"/>
+            <a:ext cx="2730940" cy="369332"/>
+          </a:xfrm>
+          <a:prstGeom prst="rect">
+            <a:avLst/>
+          </a:prstGeom>
+          <a:noFill/>
+        </p:spPr>
+        <p:txBody>
+          <a:bodyPr wrap="none" rtlCol="0">
+            <a:spAutoFit/>
+          </a:bodyPr>
+          <a:lstStyle/>
+          <a:p>
+            <a:r>
+              <a:rPr lang="de-CH" dirty="0"/>
+              <a:t>International </a:t>
+            </a:r>
+            <a:r>
+              <a:rPr lang="de-CH" dirty="0" err="1"/>
+              <a:t>Organizations</a:t>
+            </a:r>
+            <a:endParaRPr lang="de-CH" dirty="0"/>
+          </a:p>
+        </p:txBody>
+      </p:sp>
+      <p:sp>
+        <p:nvSpPr>
+          <p:cNvPr id="9" name="Rectangle 8">
+            <a:extLst>
+              <a:ext uri="{FF2B5EF4-FFF2-40B4-BE49-F238E27FC236}">
+                <a16:creationId xmlns:a16="http://schemas.microsoft.com/office/drawing/2014/main" id="{CAB29B96-9CE0-4459-A983-201E4BEC1DCC}"/>
+              </a:ext>
+            </a:extLst>
+          </p:cNvPr>
+          <p:cNvSpPr/>
+          <p:nvPr/>
+        </p:nvSpPr>
+        <p:spPr>
+          <a:xfrm>
+            <a:off x="25572" y="5276373"/>
+            <a:ext cx="2457450" cy="569339"/>
+          </a:xfrm>
+          <a:prstGeom prst="rect">
+            <a:avLst/>
+          </a:prstGeom>
+        </p:spPr>
+        <p:style>
+          <a:lnRef idx="2">
+            <a:schemeClr val="accent1">
+              <a:shade val="50000"/>
+            </a:schemeClr>
+          </a:lnRef>
+          <a:fillRef idx="1">
+            <a:schemeClr val="accent1"/>
+          </a:fillRef>
+          <a:effectRef idx="0">
+            <a:schemeClr val="accent1"/>
+          </a:effectRef>
+          <a:fontRef idx="minor">
+            <a:schemeClr val="lt1"/>
+          </a:fontRef>
+        </p:style>
+        <p:txBody>
+          <a:bodyPr rtlCol="0" anchor="ctr"/>
+          <a:lstStyle/>
+          <a:p>
+            <a:pPr algn="ctr"/>
+            <a:endParaRPr lang="de-CH"/>
+          </a:p>
+        </p:txBody>
+      </p:sp>
+      <p:sp>
+        <p:nvSpPr>
+          <p:cNvPr id="10" name="TextBox 9">
+            <a:extLst>
+              <a:ext uri="{FF2B5EF4-FFF2-40B4-BE49-F238E27FC236}">
+                <a16:creationId xmlns:a16="http://schemas.microsoft.com/office/drawing/2014/main" id="{EF2CB355-4929-4839-A8C4-1AC640E3E216}"/>
+              </a:ext>
+            </a:extLst>
+          </p:cNvPr>
+          <p:cNvSpPr txBox="1"/>
+          <p:nvPr/>
+        </p:nvSpPr>
+        <p:spPr>
+          <a:xfrm>
+            <a:off x="-41104" y="4962048"/>
+            <a:ext cx="1109278" cy="369332"/>
+          </a:xfrm>
+          <a:prstGeom prst="rect">
+            <a:avLst/>
+          </a:prstGeom>
+          <a:noFill/>
+        </p:spPr>
+        <p:txBody>
+          <a:bodyPr wrap="none" rtlCol="0">
+            <a:spAutoFit/>
+          </a:bodyPr>
+          <a:lstStyle/>
+          <a:p>
+            <a:r>
+              <a:rPr lang="de-CH" dirty="0"/>
+              <a:t>Academia</a:t>
+            </a:r>
+          </a:p>
+        </p:txBody>
+      </p:sp>
+      <p:sp>
+        <p:nvSpPr>
+          <p:cNvPr id="11" name="TextBox 10">
+            <a:extLst>
+              <a:ext uri="{FF2B5EF4-FFF2-40B4-BE49-F238E27FC236}">
+                <a16:creationId xmlns:a16="http://schemas.microsoft.com/office/drawing/2014/main" id="{20562C1A-7CBF-4F4C-937F-6F6511DFEAE8}"/>
+              </a:ext>
+            </a:extLst>
+          </p:cNvPr>
+          <p:cNvSpPr txBox="1"/>
+          <p:nvPr/>
+        </p:nvSpPr>
+        <p:spPr>
+          <a:xfrm>
+            <a:off x="295271" y="5376376"/>
+            <a:ext cx="2035365" cy="369332"/>
+          </a:xfrm>
+          <a:prstGeom prst="rect">
+            <a:avLst/>
+          </a:prstGeom>
+          <a:noFill/>
+        </p:spPr>
+        <p:txBody>
+          <a:bodyPr wrap="none" rtlCol="0">
+            <a:spAutoFit/>
+          </a:bodyPr>
+          <a:lstStyle/>
+          <a:p>
+            <a:r>
+              <a:rPr lang="de-CH" dirty="0"/>
+              <a:t>Geo-Data (</a:t>
+            </a:r>
+            <a:r>
+              <a:rPr lang="de-CH" dirty="0" err="1"/>
+              <a:t>UCDavis</a:t>
+            </a:r>
+            <a:r>
+              <a:rPr lang="de-CH" dirty="0"/>
+              <a:t>)</a:t>
+            </a:r>
+          </a:p>
+        </p:txBody>
+      </p:sp>
+      <p:sp>
+        <p:nvSpPr>
+          <p:cNvPr id="12" name="TextBox 11">
+            <a:extLst>
+              <a:ext uri="{FF2B5EF4-FFF2-40B4-BE49-F238E27FC236}">
+                <a16:creationId xmlns:a16="http://schemas.microsoft.com/office/drawing/2014/main" id="{09FCFF6C-BBD6-4231-A242-33C75D4746F4}"/>
+              </a:ext>
+            </a:extLst>
+          </p:cNvPr>
+          <p:cNvSpPr txBox="1"/>
+          <p:nvPr/>
+        </p:nvSpPr>
+        <p:spPr>
+          <a:xfrm>
+            <a:off x="323662" y="2570202"/>
+            <a:ext cx="1323696" cy="369332"/>
+          </a:xfrm>
+          <a:prstGeom prst="rect">
+            <a:avLst/>
+          </a:prstGeom>
+          <a:noFill/>
+        </p:spPr>
+        <p:txBody>
+          <a:bodyPr wrap="none" rtlCol="0">
+            <a:spAutoFit/>
+          </a:bodyPr>
+          <a:lstStyle/>
+          <a:p>
+            <a:r>
+              <a:rPr lang="de-CH" dirty="0" err="1"/>
+              <a:t>Azurepower</a:t>
+            </a:r>
+            <a:endParaRPr lang="de-CH" dirty="0"/>
+          </a:p>
+        </p:txBody>
+      </p:sp>
+      <p:sp>
+        <p:nvSpPr>
+          <p:cNvPr id="13" name="TextBox 12">
+            <a:extLst>
+              <a:ext uri="{FF2B5EF4-FFF2-40B4-BE49-F238E27FC236}">
+                <a16:creationId xmlns:a16="http://schemas.microsoft.com/office/drawing/2014/main" id="{8EF28765-A19A-4836-BF9F-5F34CB255107}"/>
+              </a:ext>
+            </a:extLst>
+          </p:cNvPr>
+          <p:cNvSpPr txBox="1"/>
+          <p:nvPr/>
+        </p:nvSpPr>
+        <p:spPr>
+          <a:xfrm>
+            <a:off x="323662" y="2939534"/>
+            <a:ext cx="778418" cy="369332"/>
+          </a:xfrm>
+          <a:prstGeom prst="rect">
+            <a:avLst/>
+          </a:prstGeom>
+          <a:noFill/>
+        </p:spPr>
+        <p:txBody>
+          <a:bodyPr wrap="none" rtlCol="0">
+            <a:spAutoFit/>
+          </a:bodyPr>
+          <a:lstStyle/>
+          <a:p>
+            <a:r>
+              <a:rPr lang="de-CH" dirty="0" err="1"/>
+              <a:t>renew</a:t>
+            </a:r>
+            <a:endParaRPr lang="de-CH" dirty="0"/>
+          </a:p>
+        </p:txBody>
+      </p:sp>
+      <p:sp>
+        <p:nvSpPr>
+          <p:cNvPr id="14" name="TextBox 13">
+            <a:extLst>
+              <a:ext uri="{FF2B5EF4-FFF2-40B4-BE49-F238E27FC236}">
+                <a16:creationId xmlns:a16="http://schemas.microsoft.com/office/drawing/2014/main" id="{D1C51E68-4835-4532-8BE9-79CFEBC5CE9D}"/>
+              </a:ext>
+            </a:extLst>
+          </p:cNvPr>
+          <p:cNvSpPr txBox="1"/>
+          <p:nvPr/>
+        </p:nvSpPr>
+        <p:spPr>
+          <a:xfrm>
+            <a:off x="295271" y="3322201"/>
+            <a:ext cx="1153393" cy="369332"/>
+          </a:xfrm>
+          <a:prstGeom prst="rect">
+            <a:avLst/>
+          </a:prstGeom>
+          <a:noFill/>
+        </p:spPr>
+        <p:txBody>
+          <a:bodyPr wrap="none" rtlCol="0">
+            <a:spAutoFit/>
+          </a:bodyPr>
+          <a:lstStyle/>
+          <a:p>
+            <a:r>
+              <a:rPr lang="de-CH" dirty="0" err="1"/>
+              <a:t>tatapower</a:t>
+            </a:r>
+            <a:endParaRPr lang="de-CH" dirty="0"/>
+          </a:p>
+        </p:txBody>
+      </p:sp>
+      <p:sp>
+        <p:nvSpPr>
+          <p:cNvPr id="15" name="TextBox 14">
+            <a:extLst>
+              <a:ext uri="{FF2B5EF4-FFF2-40B4-BE49-F238E27FC236}">
+                <a16:creationId xmlns:a16="http://schemas.microsoft.com/office/drawing/2014/main" id="{63257A8A-D0CA-4225-9494-2D252021D8A6}"/>
+              </a:ext>
+            </a:extLst>
+          </p:cNvPr>
+          <p:cNvSpPr txBox="1"/>
+          <p:nvPr/>
+        </p:nvSpPr>
+        <p:spPr>
+          <a:xfrm>
+            <a:off x="187952" y="1487567"/>
+            <a:ext cx="899542" cy="369332"/>
+          </a:xfrm>
+          <a:prstGeom prst="rect">
+            <a:avLst/>
+          </a:prstGeom>
+          <a:noFill/>
+        </p:spPr>
+        <p:txBody>
+          <a:bodyPr wrap="none" rtlCol="0">
+            <a:spAutoFit/>
+          </a:bodyPr>
+          <a:lstStyle/>
+          <a:p>
+            <a:r>
+              <a:rPr lang="de-CH" dirty="0" err="1"/>
+              <a:t>tenders</a:t>
+            </a:r>
+            <a:endParaRPr lang="de-CH" dirty="0"/>
+          </a:p>
+        </p:txBody>
+      </p:sp>
+      <p:sp>
+        <p:nvSpPr>
+          <p:cNvPr id="16" name="TextBox 15">
+            <a:extLst>
+              <a:ext uri="{FF2B5EF4-FFF2-40B4-BE49-F238E27FC236}">
+                <a16:creationId xmlns:a16="http://schemas.microsoft.com/office/drawing/2014/main" id="{2D296791-4976-4472-BC08-C51847D03FC0}"/>
+              </a:ext>
+            </a:extLst>
+          </p:cNvPr>
+          <p:cNvSpPr txBox="1"/>
+          <p:nvPr/>
+        </p:nvSpPr>
+        <p:spPr>
+          <a:xfrm>
+            <a:off x="732610" y="6435940"/>
+            <a:ext cx="814647" cy="369332"/>
+          </a:xfrm>
+          <a:prstGeom prst="rect">
+            <a:avLst/>
+          </a:prstGeom>
+          <a:noFill/>
+        </p:spPr>
+        <p:txBody>
+          <a:bodyPr wrap="none" rtlCol="0">
+            <a:spAutoFit/>
+          </a:bodyPr>
+          <a:lstStyle/>
+          <a:p>
+            <a:r>
+              <a:rPr lang="de-CH" b="1" dirty="0"/>
+              <a:t>Online</a:t>
+            </a:r>
+          </a:p>
+        </p:txBody>
+      </p:sp>
+      <p:sp>
+        <p:nvSpPr>
+          <p:cNvPr id="17" name="TextBox 16">
+            <a:extLst>
+              <a:ext uri="{FF2B5EF4-FFF2-40B4-BE49-F238E27FC236}">
+                <a16:creationId xmlns:a16="http://schemas.microsoft.com/office/drawing/2014/main" id="{6EEBD66C-A299-40C5-9D0E-64158C5FBBE8}"/>
+              </a:ext>
+            </a:extLst>
+          </p:cNvPr>
+          <p:cNvSpPr txBox="1"/>
+          <p:nvPr/>
+        </p:nvSpPr>
+        <p:spPr>
+          <a:xfrm>
+            <a:off x="4244277" y="6489399"/>
+            <a:ext cx="1047338" cy="369332"/>
+          </a:xfrm>
+          <a:prstGeom prst="rect">
+            <a:avLst/>
+          </a:prstGeom>
+          <a:noFill/>
+        </p:spPr>
+        <p:txBody>
+          <a:bodyPr wrap="none" rtlCol="0">
+            <a:spAutoFit/>
+          </a:bodyPr>
+          <a:lstStyle/>
+          <a:p>
+            <a:r>
+              <a:rPr lang="de-CH" b="1" dirty="0" err="1"/>
+              <a:t>RawData</a:t>
+            </a:r>
+            <a:endParaRPr lang="de-CH" b="1" dirty="0"/>
+          </a:p>
+        </p:txBody>
+      </p:sp>
+      <p:sp>
+        <p:nvSpPr>
+          <p:cNvPr id="4" name="Oval 3">
+            <a:extLst>
+              <a:ext uri="{FF2B5EF4-FFF2-40B4-BE49-F238E27FC236}">
+                <a16:creationId xmlns:a16="http://schemas.microsoft.com/office/drawing/2014/main" id="{9924402C-FBEA-468B-B482-4914058FEF59}"/>
+              </a:ext>
+            </a:extLst>
+          </p:cNvPr>
+          <p:cNvSpPr/>
+          <p:nvPr/>
+        </p:nvSpPr>
+        <p:spPr>
+          <a:xfrm>
+            <a:off x="2947005" y="2911299"/>
+            <a:ext cx="384003" cy="382667"/>
+          </a:xfrm>
+          <a:prstGeom prst="ellipse">
+            <a:avLst/>
+          </a:prstGeom>
+          <a:solidFill>
+            <a:schemeClr val="bg1">
+              <a:lumMod val="85000"/>
+            </a:schemeClr>
+          </a:solidFill>
+          <a:ln>
+            <a:noFill/>
+          </a:ln>
+        </p:spPr>
+        <p:style>
+          <a:lnRef idx="2">
+            <a:schemeClr val="accent1">
+              <a:shade val="50000"/>
+            </a:schemeClr>
+          </a:lnRef>
+          <a:fillRef idx="1">
+            <a:schemeClr val="accent1"/>
+          </a:fillRef>
+          <a:effectRef idx="0">
+            <a:schemeClr val="accent1"/>
+          </a:effectRef>
+          <a:fontRef idx="minor">
+            <a:schemeClr val="lt1"/>
+          </a:fontRef>
+        </p:style>
+        <p:txBody>
+          <a:bodyPr rtlCol="0" anchor="ctr"/>
+          <a:lstStyle/>
+          <a:p>
+            <a:pPr algn="ctr"/>
+            <a:endParaRPr lang="de-CH"/>
+          </a:p>
+        </p:txBody>
+      </p:sp>
+      <p:sp>
+        <p:nvSpPr>
+          <p:cNvPr id="20" name="Oval 19">
+            <a:extLst>
+              <a:ext uri="{FF2B5EF4-FFF2-40B4-BE49-F238E27FC236}">
+                <a16:creationId xmlns:a16="http://schemas.microsoft.com/office/drawing/2014/main" id="{2C088CBC-55CA-4974-A85D-0051A159E844}"/>
+              </a:ext>
+            </a:extLst>
+          </p:cNvPr>
+          <p:cNvSpPr/>
+          <p:nvPr/>
+        </p:nvSpPr>
+        <p:spPr>
+          <a:xfrm>
+            <a:off x="2947007" y="1560194"/>
+            <a:ext cx="384003" cy="382667"/>
+          </a:xfrm>
+          <a:prstGeom prst="ellipse">
+            <a:avLst/>
+          </a:prstGeom>
+          <a:solidFill>
+            <a:schemeClr val="bg1">
+              <a:lumMod val="85000"/>
+            </a:schemeClr>
+          </a:solidFill>
+          <a:ln>
+            <a:noFill/>
+          </a:ln>
+        </p:spPr>
+        <p:style>
+          <a:lnRef idx="2">
+            <a:schemeClr val="accent1">
+              <a:shade val="50000"/>
+            </a:schemeClr>
+          </a:lnRef>
+          <a:fillRef idx="1">
+            <a:schemeClr val="accent1"/>
+          </a:fillRef>
+          <a:effectRef idx="0">
+            <a:schemeClr val="accent1"/>
+          </a:effectRef>
+          <a:fontRef idx="minor">
+            <a:schemeClr val="lt1"/>
+          </a:fontRef>
+        </p:style>
+        <p:txBody>
+          <a:bodyPr rtlCol="0" anchor="ctr"/>
+          <a:lstStyle/>
+          <a:p>
+            <a:pPr algn="ctr"/>
+            <a:endParaRPr lang="de-CH"/>
+          </a:p>
+        </p:txBody>
+      </p:sp>
+      <p:sp>
+        <p:nvSpPr>
+          <p:cNvPr id="21" name="Oval 20">
+            <a:extLst>
+              <a:ext uri="{FF2B5EF4-FFF2-40B4-BE49-F238E27FC236}">
+                <a16:creationId xmlns:a16="http://schemas.microsoft.com/office/drawing/2014/main" id="{7F027868-4391-4AAB-B422-09B4DAE4CDBA}"/>
+              </a:ext>
+            </a:extLst>
+          </p:cNvPr>
+          <p:cNvSpPr/>
+          <p:nvPr/>
+        </p:nvSpPr>
+        <p:spPr>
+          <a:xfrm>
+            <a:off x="2947006" y="4346853"/>
+            <a:ext cx="384003" cy="382667"/>
+          </a:xfrm>
+          <a:prstGeom prst="ellipse">
+            <a:avLst/>
+          </a:prstGeom>
+          <a:solidFill>
+            <a:schemeClr val="bg1">
+              <a:lumMod val="85000"/>
+            </a:schemeClr>
+          </a:solidFill>
+          <a:ln>
+            <a:noFill/>
+          </a:ln>
+        </p:spPr>
+        <p:style>
+          <a:lnRef idx="2">
+            <a:schemeClr val="accent1">
+              <a:shade val="50000"/>
+            </a:schemeClr>
+          </a:lnRef>
+          <a:fillRef idx="1">
+            <a:schemeClr val="accent1"/>
+          </a:fillRef>
+          <a:effectRef idx="0">
+            <a:schemeClr val="accent1"/>
+          </a:effectRef>
+          <a:fontRef idx="minor">
+            <a:schemeClr val="lt1"/>
+          </a:fontRef>
+        </p:style>
+        <p:txBody>
+          <a:bodyPr rtlCol="0" anchor="ctr"/>
+          <a:lstStyle/>
+          <a:p>
+            <a:pPr algn="ctr"/>
+            <a:endParaRPr lang="de-CH"/>
+          </a:p>
+        </p:txBody>
+      </p:sp>
+      <p:sp>
+        <p:nvSpPr>
+          <p:cNvPr id="22" name="Oval 21">
+            <a:extLst>
+              <a:ext uri="{FF2B5EF4-FFF2-40B4-BE49-F238E27FC236}">
+                <a16:creationId xmlns:a16="http://schemas.microsoft.com/office/drawing/2014/main" id="{241C9089-2F59-4E00-8FE0-A34909103EA4}"/>
+              </a:ext>
+            </a:extLst>
+          </p:cNvPr>
+          <p:cNvSpPr/>
+          <p:nvPr/>
+        </p:nvSpPr>
+        <p:spPr>
+          <a:xfrm>
+            <a:off x="2947007" y="5376376"/>
+            <a:ext cx="384003" cy="382667"/>
+          </a:xfrm>
+          <a:prstGeom prst="ellipse">
+            <a:avLst/>
+          </a:prstGeom>
+          <a:solidFill>
+            <a:schemeClr val="bg1">
+              <a:lumMod val="85000"/>
+            </a:schemeClr>
+          </a:solidFill>
+          <a:ln>
+            <a:noFill/>
+          </a:ln>
+        </p:spPr>
+        <p:style>
+          <a:lnRef idx="2">
+            <a:schemeClr val="accent1">
+              <a:shade val="50000"/>
+            </a:schemeClr>
+          </a:lnRef>
+          <a:fillRef idx="1">
+            <a:schemeClr val="accent1"/>
+          </a:fillRef>
+          <a:effectRef idx="0">
+            <a:schemeClr val="accent1"/>
+          </a:effectRef>
+          <a:fontRef idx="minor">
+            <a:schemeClr val="lt1"/>
+          </a:fontRef>
+        </p:style>
+        <p:txBody>
+          <a:bodyPr rtlCol="0" anchor="ctr"/>
+          <a:lstStyle/>
+          <a:p>
+            <a:pPr algn="ctr"/>
+            <a:endParaRPr lang="de-CH"/>
+          </a:p>
+        </p:txBody>
+      </p:sp>
+      <p:cxnSp>
+        <p:nvCxnSpPr>
+          <p:cNvPr id="23" name="Straight Arrow Connector 22">
+            <a:extLst>
+              <a:ext uri="{FF2B5EF4-FFF2-40B4-BE49-F238E27FC236}">
+                <a16:creationId xmlns:a16="http://schemas.microsoft.com/office/drawing/2014/main" id="{22965C68-418E-46F4-BBC5-57742D899805}"/>
+              </a:ext>
+            </a:extLst>
+          </p:cNvPr>
+          <p:cNvCxnSpPr>
+            <a:stCxn id="2" idx="3"/>
+            <a:endCxn id="20" idx="2"/>
+          </p:cNvCxnSpPr>
+          <p:nvPr/>
+        </p:nvCxnSpPr>
+        <p:spPr>
+          <a:xfrm flipV="1">
+            <a:off x="2483022" y="1751528"/>
+            <a:ext cx="463985" cy="1"/>
+          </a:xfrm>
+          <a:prstGeom prst="straightConnector1">
+            <a:avLst/>
+          </a:prstGeom>
+          <a:ln>
+            <a:tailEnd type="triangle"/>
+          </a:ln>
+        </p:spPr>
+        <p:style>
+          <a:lnRef idx="1">
+            <a:schemeClr val="accent1"/>
+          </a:lnRef>
+          <a:fillRef idx="0">
+            <a:schemeClr val="accent1"/>
+          </a:fillRef>
+          <a:effectRef idx="0">
+            <a:schemeClr val="accent1"/>
+          </a:effectRef>
+          <a:fontRef idx="minor">
+            <a:schemeClr val="tx1"/>
+          </a:fontRef>
+        </p:style>
+      </p:cxnSp>
+      <p:cxnSp>
+        <p:nvCxnSpPr>
+          <p:cNvPr id="24" name="Straight Arrow Connector 23">
+            <a:extLst>
+              <a:ext uri="{FF2B5EF4-FFF2-40B4-BE49-F238E27FC236}">
+                <a16:creationId xmlns:a16="http://schemas.microsoft.com/office/drawing/2014/main" id="{039B9334-341E-49C9-9D38-7C1F8A54DB0E}"/>
+              </a:ext>
+            </a:extLst>
+          </p:cNvPr>
+          <p:cNvCxnSpPr>
+            <a:cxnSpLocks/>
+            <a:stCxn id="5" idx="3"/>
+            <a:endCxn id="4" idx="2"/>
+          </p:cNvCxnSpPr>
+          <p:nvPr/>
+        </p:nvCxnSpPr>
+        <p:spPr>
+          <a:xfrm flipV="1">
+            <a:off x="2483022" y="3102633"/>
+            <a:ext cx="463983" cy="6804"/>
+          </a:xfrm>
+          <a:prstGeom prst="straightConnector1">
+            <a:avLst/>
+          </a:prstGeom>
+          <a:ln>
+            <a:tailEnd type="triangle"/>
+          </a:ln>
+        </p:spPr>
+        <p:style>
+          <a:lnRef idx="1">
+            <a:schemeClr val="accent1"/>
+          </a:lnRef>
+          <a:fillRef idx="0">
+            <a:schemeClr val="accent1"/>
+          </a:fillRef>
+          <a:effectRef idx="0">
+            <a:schemeClr val="accent1"/>
+          </a:effectRef>
+          <a:fontRef idx="minor">
+            <a:schemeClr val="tx1"/>
+          </a:fontRef>
+        </p:style>
+      </p:cxnSp>
+      <p:cxnSp>
+        <p:nvCxnSpPr>
+          <p:cNvPr id="27" name="Straight Arrow Connector 26">
+            <a:extLst>
+              <a:ext uri="{FF2B5EF4-FFF2-40B4-BE49-F238E27FC236}">
+                <a16:creationId xmlns:a16="http://schemas.microsoft.com/office/drawing/2014/main" id="{5798837A-CECB-4DA4-8600-5E2BE5EFC9BC}"/>
+              </a:ext>
+            </a:extLst>
+          </p:cNvPr>
+          <p:cNvCxnSpPr>
+            <a:cxnSpLocks/>
+            <a:stCxn id="7" idx="3"/>
+            <a:endCxn id="21" idx="2"/>
+          </p:cNvCxnSpPr>
+          <p:nvPr/>
+        </p:nvCxnSpPr>
+        <p:spPr>
+          <a:xfrm>
+            <a:off x="2483022" y="4533424"/>
+            <a:ext cx="463984" cy="4763"/>
+          </a:xfrm>
+          <a:prstGeom prst="straightConnector1">
+            <a:avLst/>
+          </a:prstGeom>
+          <a:ln>
+            <a:tailEnd type="triangle"/>
+          </a:ln>
+        </p:spPr>
+        <p:style>
+          <a:lnRef idx="1">
+            <a:schemeClr val="accent1"/>
+          </a:lnRef>
+          <a:fillRef idx="0">
+            <a:schemeClr val="accent1"/>
+          </a:fillRef>
+          <a:effectRef idx="0">
+            <a:schemeClr val="accent1"/>
+          </a:effectRef>
+          <a:fontRef idx="minor">
+            <a:schemeClr val="tx1"/>
+          </a:fontRef>
+        </p:style>
+      </p:cxnSp>
+      <p:cxnSp>
+        <p:nvCxnSpPr>
+          <p:cNvPr id="30" name="Straight Arrow Connector 29">
+            <a:extLst>
+              <a:ext uri="{FF2B5EF4-FFF2-40B4-BE49-F238E27FC236}">
+                <a16:creationId xmlns:a16="http://schemas.microsoft.com/office/drawing/2014/main" id="{8131952E-BA49-4B3B-8DA1-B73D5CEE7289}"/>
+              </a:ext>
+            </a:extLst>
+          </p:cNvPr>
+          <p:cNvCxnSpPr>
+            <a:cxnSpLocks/>
+            <a:stCxn id="9" idx="3"/>
+            <a:endCxn id="22" idx="2"/>
+          </p:cNvCxnSpPr>
+          <p:nvPr/>
+        </p:nvCxnSpPr>
+        <p:spPr>
+          <a:xfrm>
+            <a:off x="2483022" y="5561043"/>
+            <a:ext cx="463985" cy="6667"/>
+          </a:xfrm>
+          <a:prstGeom prst="straightConnector1">
+            <a:avLst/>
+          </a:prstGeom>
+          <a:ln>
+            <a:tailEnd type="triangle"/>
+          </a:ln>
+        </p:spPr>
+        <p:style>
+          <a:lnRef idx="1">
+            <a:schemeClr val="accent1"/>
+          </a:lnRef>
+          <a:fillRef idx="0">
+            <a:schemeClr val="accent1"/>
+          </a:fillRef>
+          <a:effectRef idx="0">
+            <a:schemeClr val="accent1"/>
+          </a:effectRef>
+          <a:fontRef idx="minor">
+            <a:schemeClr val="tx1"/>
+          </a:fontRef>
+        </p:style>
+      </p:cxnSp>
+      <p:sp>
+        <p:nvSpPr>
+          <p:cNvPr id="37" name="TextBox 36">
+            <a:extLst>
+              <a:ext uri="{FF2B5EF4-FFF2-40B4-BE49-F238E27FC236}">
+                <a16:creationId xmlns:a16="http://schemas.microsoft.com/office/drawing/2014/main" id="{46E8ADA9-E0BC-4881-A259-338F93FB52CA}"/>
+              </a:ext>
+            </a:extLst>
+          </p:cNvPr>
+          <p:cNvSpPr txBox="1"/>
+          <p:nvPr/>
+        </p:nvSpPr>
+        <p:spPr>
+          <a:xfrm>
+            <a:off x="7225602" y="6488668"/>
+            <a:ext cx="1592937" cy="369332"/>
+          </a:xfrm>
+          <a:prstGeom prst="rect">
+            <a:avLst/>
+          </a:prstGeom>
+          <a:noFill/>
+        </p:spPr>
+        <p:txBody>
+          <a:bodyPr wrap="none" rtlCol="0">
+            <a:spAutoFit/>
+          </a:bodyPr>
+          <a:lstStyle/>
+          <a:p>
+            <a:r>
+              <a:rPr lang="de-CH" b="1" dirty="0" err="1"/>
+              <a:t>ProcessedData</a:t>
+            </a:r>
+            <a:endParaRPr lang="de-CH" b="1" dirty="0"/>
+          </a:p>
+        </p:txBody>
+      </p:sp>
+      <p:sp>
+        <p:nvSpPr>
+          <p:cNvPr id="38" name="TextBox 37">
+            <a:extLst>
+              <a:ext uri="{FF2B5EF4-FFF2-40B4-BE49-F238E27FC236}">
+                <a16:creationId xmlns:a16="http://schemas.microsoft.com/office/drawing/2014/main" id="{B69C2C28-2EF9-42E2-AFEB-1417D7283B3C}"/>
+              </a:ext>
+            </a:extLst>
+          </p:cNvPr>
+          <p:cNvSpPr txBox="1"/>
+          <p:nvPr/>
+        </p:nvSpPr>
+        <p:spPr>
+          <a:xfrm>
+            <a:off x="10171440" y="6488668"/>
+            <a:ext cx="1077987" cy="369332"/>
+          </a:xfrm>
+          <a:prstGeom prst="rect">
+            <a:avLst/>
+          </a:prstGeom>
+          <a:noFill/>
+        </p:spPr>
+        <p:txBody>
+          <a:bodyPr wrap="none" rtlCol="0">
+            <a:spAutoFit/>
+          </a:bodyPr>
+          <a:lstStyle/>
+          <a:p>
+            <a:r>
+              <a:rPr lang="de-CH" b="1" dirty="0"/>
+              <a:t>Database</a:t>
+            </a:r>
+          </a:p>
+        </p:txBody>
+      </p:sp>
+      <p:sp>
+        <p:nvSpPr>
+          <p:cNvPr id="42" name="TextBox 41">
+            <a:extLst>
+              <a:ext uri="{FF2B5EF4-FFF2-40B4-BE49-F238E27FC236}">
+                <a16:creationId xmlns:a16="http://schemas.microsoft.com/office/drawing/2014/main" id="{C4E99775-D76D-4DFF-91B2-7B15D4AAFC37}"/>
+              </a:ext>
+            </a:extLst>
+          </p:cNvPr>
+          <p:cNvSpPr txBox="1"/>
+          <p:nvPr/>
+        </p:nvSpPr>
+        <p:spPr>
+          <a:xfrm rot="16200000">
+            <a:off x="2657619" y="6095266"/>
+            <a:ext cx="977447" cy="369332"/>
+          </a:xfrm>
+          <a:prstGeom prst="rect">
+            <a:avLst/>
+          </a:prstGeom>
+          <a:noFill/>
+        </p:spPr>
+        <p:txBody>
+          <a:bodyPr wrap="none" rtlCol="0">
+            <a:spAutoFit/>
+          </a:bodyPr>
+          <a:lstStyle/>
+          <a:p>
+            <a:r>
+              <a:rPr lang="de-CH" dirty="0" err="1"/>
+              <a:t>Scrapers</a:t>
+            </a:r>
+            <a:endParaRPr lang="de-CH" dirty="0"/>
+          </a:p>
+        </p:txBody>
+      </p:sp>
+      <p:pic>
+        <p:nvPicPr>
+          <p:cNvPr id="45" name="Picture 44">
+            <a:extLst>
+              <a:ext uri="{FF2B5EF4-FFF2-40B4-BE49-F238E27FC236}">
+                <a16:creationId xmlns:a16="http://schemas.microsoft.com/office/drawing/2014/main" id="{848B4E52-51A6-4B22-81FE-5E58D842B5E8}"/>
+              </a:ext>
+            </a:extLst>
+          </p:cNvPr>
+          <p:cNvPicPr>
+            <a:picLocks noChangeAspect="1"/>
+          </p:cNvPicPr>
+          <p:nvPr/>
+        </p:nvPicPr>
+        <p:blipFill>
+          <a:blip r:embed="rId4">
+            <a:extLst>
+              <a:ext uri="{28A0092B-C50C-407E-A947-70E740481C1C}">
+                <a14:useLocalDpi xmlns:a14="http://schemas.microsoft.com/office/drawing/2010/main" val="0"/>
+              </a:ext>
+            </a:extLst>
+          </a:blip>
+          <a:stretch>
+            <a:fillRect/>
+          </a:stretch>
+        </p:blipFill>
+        <p:spPr>
+          <a:xfrm>
+            <a:off x="10025324" y="4958852"/>
+            <a:ext cx="1356818" cy="1356818"/>
+          </a:xfrm>
+          <a:prstGeom prst="rect">
+            <a:avLst/>
+          </a:prstGeom>
+        </p:spPr>
+      </p:pic>
+      <p:pic>
+        <p:nvPicPr>
+          <p:cNvPr id="47" name="Picture 46">
+            <a:extLst>
+              <a:ext uri="{FF2B5EF4-FFF2-40B4-BE49-F238E27FC236}">
+                <a16:creationId xmlns:a16="http://schemas.microsoft.com/office/drawing/2014/main" id="{B4BEEEAC-214B-469A-AAC5-CF5BFEE44134}"/>
+              </a:ext>
+            </a:extLst>
+          </p:cNvPr>
+          <p:cNvPicPr>
+            <a:picLocks noChangeAspect="1"/>
+          </p:cNvPicPr>
+          <p:nvPr/>
+        </p:nvPicPr>
+        <p:blipFill>
+          <a:blip r:embed="rId5">
+            <a:extLst>
+              <a:ext uri="{28A0092B-C50C-407E-A947-70E740481C1C}">
+                <a14:useLocalDpi xmlns:a14="http://schemas.microsoft.com/office/drawing/2010/main" val="0"/>
+              </a:ext>
+            </a:extLst>
+          </a:blip>
+          <a:stretch>
+            <a:fillRect/>
+          </a:stretch>
+        </p:blipFill>
+        <p:spPr>
+          <a:xfrm>
+            <a:off x="10706707" y="4759879"/>
+            <a:ext cx="675435" cy="696262"/>
+          </a:xfrm>
+          <a:prstGeom prst="rect">
+            <a:avLst/>
+          </a:prstGeom>
+        </p:spPr>
+      </p:pic>
+      <p:sp>
+        <p:nvSpPr>
+          <p:cNvPr id="49" name="TextBox 48">
+            <a:extLst>
+              <a:ext uri="{FF2B5EF4-FFF2-40B4-BE49-F238E27FC236}">
+                <a16:creationId xmlns:a16="http://schemas.microsoft.com/office/drawing/2014/main" id="{BE892F8D-486E-43BE-B384-29EFCD04977F}"/>
+              </a:ext>
+            </a:extLst>
+          </p:cNvPr>
+          <p:cNvSpPr txBox="1"/>
+          <p:nvPr/>
+        </p:nvSpPr>
+        <p:spPr>
+          <a:xfrm rot="21433965">
+            <a:off x="6440748" y="72359"/>
+            <a:ext cx="1055097" cy="646331"/>
+          </a:xfrm>
+          <a:prstGeom prst="rect">
+            <a:avLst/>
+          </a:prstGeom>
+          <a:noFill/>
+        </p:spPr>
+        <p:txBody>
+          <a:bodyPr wrap="none" rtlCol="0">
+            <a:spAutoFit/>
+          </a:bodyPr>
+          <a:lstStyle/>
+          <a:p>
+            <a:r>
+              <a:rPr lang="de-CH" dirty="0" err="1"/>
+              <a:t>Selenium</a:t>
+            </a:r>
+            <a:endParaRPr lang="de-CH" dirty="0"/>
+          </a:p>
+          <a:p>
+            <a:r>
+              <a:rPr lang="de-CH" dirty="0"/>
+              <a:t>Chrome</a:t>
+            </a:r>
+          </a:p>
+        </p:txBody>
+      </p:sp>
+      <p:sp>
+        <p:nvSpPr>
+          <p:cNvPr id="50" name="TextBox 49">
+            <a:extLst>
+              <a:ext uri="{FF2B5EF4-FFF2-40B4-BE49-F238E27FC236}">
+                <a16:creationId xmlns:a16="http://schemas.microsoft.com/office/drawing/2014/main" id="{F926D579-B1C0-474F-9915-63E1F400AD9E}"/>
+              </a:ext>
+            </a:extLst>
+          </p:cNvPr>
+          <p:cNvSpPr txBox="1"/>
+          <p:nvPr/>
+        </p:nvSpPr>
+        <p:spPr>
+          <a:xfrm rot="21433965">
+            <a:off x="10613388" y="4245678"/>
+            <a:ext cx="1245277" cy="369332"/>
+          </a:xfrm>
+          <a:prstGeom prst="rect">
+            <a:avLst/>
+          </a:prstGeom>
+          <a:noFill/>
+        </p:spPr>
+        <p:txBody>
+          <a:bodyPr wrap="none" rtlCol="0">
+            <a:spAutoFit/>
+          </a:bodyPr>
+          <a:lstStyle/>
+          <a:p>
+            <a:r>
+              <a:rPr lang="de-CH" dirty="0"/>
+              <a:t>PostgreSQL</a:t>
+            </a:r>
+          </a:p>
+        </p:txBody>
+      </p:sp>
+      <p:sp>
+        <p:nvSpPr>
+          <p:cNvPr id="51" name="Oval 50">
+            <a:extLst>
+              <a:ext uri="{FF2B5EF4-FFF2-40B4-BE49-F238E27FC236}">
+                <a16:creationId xmlns:a16="http://schemas.microsoft.com/office/drawing/2014/main" id="{8BE02B61-55DC-4BCD-93B0-863B97B85231}"/>
+              </a:ext>
+            </a:extLst>
+          </p:cNvPr>
+          <p:cNvSpPr/>
+          <p:nvPr/>
+        </p:nvSpPr>
+        <p:spPr>
+          <a:xfrm>
+            <a:off x="9177338" y="5445927"/>
+            <a:ext cx="384003" cy="382667"/>
+          </a:xfrm>
+          <a:prstGeom prst="ellipse">
+            <a:avLst/>
+          </a:prstGeom>
+          <a:solidFill>
+            <a:schemeClr val="bg1">
+              <a:lumMod val="85000"/>
+            </a:schemeClr>
+          </a:solidFill>
+          <a:ln>
+            <a:noFill/>
+          </a:ln>
+        </p:spPr>
+        <p:style>
+          <a:lnRef idx="2">
+            <a:schemeClr val="accent1">
+              <a:shade val="50000"/>
+            </a:schemeClr>
+          </a:lnRef>
+          <a:fillRef idx="1">
+            <a:schemeClr val="accent1"/>
+          </a:fillRef>
+          <a:effectRef idx="0">
+            <a:schemeClr val="accent1"/>
+          </a:effectRef>
+          <a:fontRef idx="minor">
+            <a:schemeClr val="lt1"/>
+          </a:fontRef>
+        </p:style>
+        <p:txBody>
+          <a:bodyPr rtlCol="0" anchor="ctr"/>
+          <a:lstStyle/>
+          <a:p>
+            <a:pPr algn="ctr"/>
+            <a:endParaRPr lang="de-CH"/>
+          </a:p>
+        </p:txBody>
+      </p:sp>
+      <p:cxnSp>
+        <p:nvCxnSpPr>
+          <p:cNvPr id="52" name="Straight Arrow Connector 51">
+            <a:extLst>
+              <a:ext uri="{FF2B5EF4-FFF2-40B4-BE49-F238E27FC236}">
+                <a16:creationId xmlns:a16="http://schemas.microsoft.com/office/drawing/2014/main" id="{2774C2E0-9528-420B-98C5-7E418B0CC5CB}"/>
+              </a:ext>
+            </a:extLst>
+          </p:cNvPr>
+          <p:cNvCxnSpPr>
+            <a:cxnSpLocks/>
+            <a:stCxn id="51" idx="6"/>
+            <a:endCxn id="45" idx="1"/>
+          </p:cNvCxnSpPr>
+          <p:nvPr/>
+        </p:nvCxnSpPr>
+        <p:spPr>
+          <a:xfrm>
+            <a:off x="9561341" y="5637261"/>
+            <a:ext cx="463983" cy="0"/>
+          </a:xfrm>
+          <a:prstGeom prst="straightConnector1">
+            <a:avLst/>
+          </a:prstGeom>
+          <a:ln>
+            <a:tailEnd type="triangle"/>
+          </a:ln>
+        </p:spPr>
+        <p:style>
+          <a:lnRef idx="1">
+            <a:schemeClr val="accent1"/>
+          </a:lnRef>
+          <a:fillRef idx="0">
+            <a:schemeClr val="accent1"/>
+          </a:fillRef>
+          <a:effectRef idx="0">
+            <a:schemeClr val="accent1"/>
+          </a:effectRef>
+          <a:fontRef idx="minor">
+            <a:schemeClr val="tx1"/>
+          </a:fontRef>
+        </p:style>
+      </p:cxnSp>
+      <p:sp>
+        <p:nvSpPr>
+          <p:cNvPr id="56" name="Oval 55">
+            <a:extLst>
+              <a:ext uri="{FF2B5EF4-FFF2-40B4-BE49-F238E27FC236}">
+                <a16:creationId xmlns:a16="http://schemas.microsoft.com/office/drawing/2014/main" id="{3BEB1B66-9005-4AA2-BC7D-3481CA7007AF}"/>
+              </a:ext>
+            </a:extLst>
+          </p:cNvPr>
+          <p:cNvSpPr/>
+          <p:nvPr/>
+        </p:nvSpPr>
+        <p:spPr>
+          <a:xfrm>
+            <a:off x="6183640" y="2741533"/>
+            <a:ext cx="384003" cy="382667"/>
+          </a:xfrm>
+          <a:prstGeom prst="ellipse">
+            <a:avLst/>
+          </a:prstGeom>
+          <a:solidFill>
+            <a:schemeClr val="bg1">
+              <a:lumMod val="85000"/>
+            </a:schemeClr>
+          </a:solidFill>
+          <a:ln>
+            <a:noFill/>
+          </a:ln>
+        </p:spPr>
+        <p:style>
+          <a:lnRef idx="2">
+            <a:schemeClr val="accent1">
+              <a:shade val="50000"/>
+            </a:schemeClr>
+          </a:lnRef>
+          <a:fillRef idx="1">
+            <a:schemeClr val="accent1"/>
+          </a:fillRef>
+          <a:effectRef idx="0">
+            <a:schemeClr val="accent1"/>
+          </a:effectRef>
+          <a:fontRef idx="minor">
+            <a:schemeClr val="lt1"/>
+          </a:fontRef>
+        </p:style>
+        <p:txBody>
+          <a:bodyPr rtlCol="0" anchor="ctr"/>
+          <a:lstStyle/>
+          <a:p>
+            <a:pPr algn="ctr"/>
+            <a:endParaRPr lang="de-CH"/>
+          </a:p>
+        </p:txBody>
+      </p:sp>
+      <p:sp>
+        <p:nvSpPr>
+          <p:cNvPr id="59" name="TextBox 58">
+            <a:extLst>
+              <a:ext uri="{FF2B5EF4-FFF2-40B4-BE49-F238E27FC236}">
+                <a16:creationId xmlns:a16="http://schemas.microsoft.com/office/drawing/2014/main" id="{FC82F039-66CB-4E29-8752-F6B1A7A72E95}"/>
+              </a:ext>
+            </a:extLst>
+          </p:cNvPr>
+          <p:cNvSpPr txBox="1"/>
+          <p:nvPr/>
+        </p:nvSpPr>
+        <p:spPr>
+          <a:xfrm rot="21433965">
+            <a:off x="7202592" y="747116"/>
+            <a:ext cx="852413" cy="369332"/>
+          </a:xfrm>
+          <a:prstGeom prst="rect">
+            <a:avLst/>
+          </a:prstGeom>
+          <a:noFill/>
+        </p:spPr>
+        <p:txBody>
+          <a:bodyPr wrap="none" rtlCol="0">
+            <a:spAutoFit/>
+          </a:bodyPr>
+          <a:lstStyle/>
+          <a:p>
+            <a:r>
+              <a:rPr lang="de-CH" dirty="0"/>
+              <a:t>Python</a:t>
+            </a:r>
+          </a:p>
+        </p:txBody>
+      </p:sp>
+      <p:sp>
+        <p:nvSpPr>
+          <p:cNvPr id="60" name="Rectangle 59">
+            <a:extLst>
+              <a:ext uri="{FF2B5EF4-FFF2-40B4-BE49-F238E27FC236}">
+                <a16:creationId xmlns:a16="http://schemas.microsoft.com/office/drawing/2014/main" id="{2DFEB928-3216-4169-86EA-00275512AB74}"/>
+              </a:ext>
+            </a:extLst>
+          </p:cNvPr>
+          <p:cNvSpPr/>
+          <p:nvPr/>
+        </p:nvSpPr>
+        <p:spPr>
+          <a:xfrm>
+            <a:off x="-47625" y="1095375"/>
+            <a:ext cx="2753245" cy="5340565"/>
+          </a:xfrm>
+          <a:prstGeom prst="rect">
+            <a:avLst/>
+          </a:prstGeom>
+          <a:noFill/>
+          <a:ln>
+            <a:solidFill>
+              <a:schemeClr val="tx1"/>
+            </a:solidFill>
+            <a:prstDash val="dash"/>
+          </a:ln>
+        </p:spPr>
+        <p:style>
+          <a:lnRef idx="2">
+            <a:schemeClr val="accent1">
+              <a:shade val="50000"/>
+            </a:schemeClr>
+          </a:lnRef>
+          <a:fillRef idx="1">
+            <a:schemeClr val="accent1"/>
+          </a:fillRef>
+          <a:effectRef idx="0">
+            <a:schemeClr val="accent1"/>
+          </a:effectRef>
+          <a:fontRef idx="minor">
+            <a:schemeClr val="lt1"/>
+          </a:fontRef>
+        </p:style>
+        <p:txBody>
+          <a:bodyPr rtlCol="0" anchor="ctr"/>
+          <a:lstStyle/>
+          <a:p>
+            <a:pPr algn="ctr"/>
+            <a:endParaRPr lang="de-CH"/>
+          </a:p>
+        </p:txBody>
+      </p:sp>
+      <p:sp>
+        <p:nvSpPr>
+          <p:cNvPr id="62" name="Oval 61">
+            <a:extLst>
+              <a:ext uri="{FF2B5EF4-FFF2-40B4-BE49-F238E27FC236}">
+                <a16:creationId xmlns:a16="http://schemas.microsoft.com/office/drawing/2014/main" id="{68BBDCDB-DFC0-4899-8B7B-96986B61FDBD}"/>
+              </a:ext>
+            </a:extLst>
+          </p:cNvPr>
+          <p:cNvSpPr/>
+          <p:nvPr/>
+        </p:nvSpPr>
+        <p:spPr>
+          <a:xfrm>
+            <a:off x="6188619" y="4262188"/>
+            <a:ext cx="384003" cy="382667"/>
+          </a:xfrm>
+          <a:prstGeom prst="ellipse">
+            <a:avLst/>
+          </a:prstGeom>
+          <a:solidFill>
+            <a:schemeClr val="bg1">
+              <a:lumMod val="85000"/>
+            </a:schemeClr>
+          </a:solidFill>
+          <a:ln>
+            <a:noFill/>
+          </a:ln>
+        </p:spPr>
+        <p:style>
+          <a:lnRef idx="2">
+            <a:schemeClr val="accent1">
+              <a:shade val="50000"/>
+            </a:schemeClr>
+          </a:lnRef>
+          <a:fillRef idx="1">
+            <a:schemeClr val="accent1"/>
+          </a:fillRef>
+          <a:effectRef idx="0">
+            <a:schemeClr val="accent1"/>
+          </a:effectRef>
+          <a:fontRef idx="minor">
+            <a:schemeClr val="lt1"/>
+          </a:fontRef>
+        </p:style>
+        <p:txBody>
+          <a:bodyPr rtlCol="0" anchor="ctr"/>
+          <a:lstStyle/>
+          <a:p>
+            <a:pPr algn="ctr"/>
+            <a:endParaRPr lang="de-CH"/>
+          </a:p>
+        </p:txBody>
+      </p:sp>
+      <p:sp>
+        <p:nvSpPr>
+          <p:cNvPr id="63" name="Rectangle 62">
+            <a:extLst>
+              <a:ext uri="{FF2B5EF4-FFF2-40B4-BE49-F238E27FC236}">
+                <a16:creationId xmlns:a16="http://schemas.microsoft.com/office/drawing/2014/main" id="{40D08E03-8FA9-4FCE-BEA3-DABC4A6EDDC4}"/>
+              </a:ext>
+            </a:extLst>
+          </p:cNvPr>
+          <p:cNvSpPr/>
+          <p:nvPr/>
+        </p:nvSpPr>
+        <p:spPr>
+          <a:xfrm>
+            <a:off x="6687360" y="1120190"/>
+            <a:ext cx="2339166" cy="5340565"/>
+          </a:xfrm>
+          <a:prstGeom prst="rect">
+            <a:avLst/>
+          </a:prstGeom>
+          <a:noFill/>
+          <a:ln>
+            <a:solidFill>
+              <a:schemeClr val="tx1"/>
+            </a:solidFill>
+            <a:prstDash val="dash"/>
+          </a:ln>
+        </p:spPr>
+        <p:style>
+          <a:lnRef idx="2">
+            <a:schemeClr val="accent1">
+              <a:shade val="50000"/>
+            </a:schemeClr>
+          </a:lnRef>
+          <a:fillRef idx="1">
+            <a:schemeClr val="accent1"/>
+          </a:fillRef>
+          <a:effectRef idx="0">
+            <a:schemeClr val="accent1"/>
+          </a:effectRef>
+          <a:fontRef idx="minor">
+            <a:schemeClr val="lt1"/>
+          </a:fontRef>
+        </p:style>
+        <p:txBody>
+          <a:bodyPr rtlCol="0" anchor="ctr"/>
+          <a:lstStyle/>
+          <a:p>
+            <a:pPr algn="ctr"/>
+            <a:endParaRPr lang="de-CH"/>
+          </a:p>
+        </p:txBody>
+      </p:sp>
+      <p:pic>
+        <p:nvPicPr>
+          <p:cNvPr id="58" name="Picture 57">
+            <a:extLst>
+              <a:ext uri="{FF2B5EF4-FFF2-40B4-BE49-F238E27FC236}">
+                <a16:creationId xmlns:a16="http://schemas.microsoft.com/office/drawing/2014/main" id="{D4416D2C-2FEA-4538-B24D-27DACA5FF8BC}"/>
+              </a:ext>
+            </a:extLst>
+          </p:cNvPr>
+          <p:cNvPicPr>
+            <a:picLocks noChangeAspect="1"/>
+          </p:cNvPicPr>
+          <p:nvPr/>
+        </p:nvPicPr>
+        <p:blipFill>
+          <a:blip r:embed="rId6">
+            <a:extLst>
+              <a:ext uri="{28A0092B-C50C-407E-A947-70E740481C1C}">
+                <a14:useLocalDpi xmlns:a14="http://schemas.microsoft.com/office/drawing/2010/main" val="0"/>
+              </a:ext>
+            </a:extLst>
+          </a:blip>
+          <a:stretch>
+            <a:fillRect/>
+          </a:stretch>
+        </p:blipFill>
+        <p:spPr>
+          <a:xfrm>
+            <a:off x="6546301" y="747244"/>
+            <a:ext cx="696262" cy="696262"/>
+          </a:xfrm>
+          <a:prstGeom prst="rect">
+            <a:avLst/>
+          </a:prstGeom>
+        </p:spPr>
+      </p:pic>
+      <p:sp>
+        <p:nvSpPr>
+          <p:cNvPr id="64" name="Oval 63">
+            <a:extLst>
+              <a:ext uri="{FF2B5EF4-FFF2-40B4-BE49-F238E27FC236}">
+                <a16:creationId xmlns:a16="http://schemas.microsoft.com/office/drawing/2014/main" id="{D499E57A-C6A7-48D2-A9D1-737E0F17D428}"/>
+              </a:ext>
+            </a:extLst>
+          </p:cNvPr>
+          <p:cNvSpPr/>
+          <p:nvPr/>
+        </p:nvSpPr>
+        <p:spPr>
+          <a:xfrm>
+            <a:off x="9141264" y="2697570"/>
+            <a:ext cx="384003" cy="382667"/>
+          </a:xfrm>
+          <a:prstGeom prst="ellipse">
+            <a:avLst/>
+          </a:prstGeom>
+          <a:solidFill>
+            <a:schemeClr val="bg1">
+              <a:lumMod val="85000"/>
+            </a:schemeClr>
+          </a:solidFill>
+          <a:ln>
+            <a:noFill/>
+          </a:ln>
+        </p:spPr>
+        <p:style>
+          <a:lnRef idx="2">
+            <a:schemeClr val="accent1">
+              <a:shade val="50000"/>
+            </a:schemeClr>
+          </a:lnRef>
+          <a:fillRef idx="1">
+            <a:schemeClr val="accent1"/>
+          </a:fillRef>
+          <a:effectRef idx="0">
+            <a:schemeClr val="accent1"/>
+          </a:effectRef>
+          <a:fontRef idx="minor">
+            <a:schemeClr val="lt1"/>
+          </a:fontRef>
+        </p:style>
+        <p:txBody>
+          <a:bodyPr rtlCol="0" anchor="ctr"/>
+          <a:lstStyle/>
+          <a:p>
+            <a:pPr algn="ctr"/>
+            <a:endParaRPr lang="de-CH"/>
+          </a:p>
+        </p:txBody>
+      </p:sp>
+      <p:sp>
+        <p:nvSpPr>
+          <p:cNvPr id="65" name="Oval 64">
+            <a:extLst>
+              <a:ext uri="{FF2B5EF4-FFF2-40B4-BE49-F238E27FC236}">
+                <a16:creationId xmlns:a16="http://schemas.microsoft.com/office/drawing/2014/main" id="{357F8866-E84E-4701-9272-CAA7ED7C6E1A}"/>
+              </a:ext>
+            </a:extLst>
+          </p:cNvPr>
+          <p:cNvSpPr/>
+          <p:nvPr/>
+        </p:nvSpPr>
+        <p:spPr>
+          <a:xfrm>
+            <a:off x="10413196" y="3322201"/>
+            <a:ext cx="384003" cy="382667"/>
+          </a:xfrm>
+          <a:prstGeom prst="ellipse">
+            <a:avLst/>
+          </a:prstGeom>
+          <a:solidFill>
+            <a:schemeClr val="bg1">
+              <a:lumMod val="85000"/>
+            </a:schemeClr>
+          </a:solidFill>
+          <a:ln>
+            <a:noFill/>
+          </a:ln>
+        </p:spPr>
+        <p:style>
+          <a:lnRef idx="2">
+            <a:schemeClr val="accent1">
+              <a:shade val="50000"/>
+            </a:schemeClr>
+          </a:lnRef>
+          <a:fillRef idx="1">
+            <a:schemeClr val="accent1"/>
+          </a:fillRef>
+          <a:effectRef idx="0">
+            <a:schemeClr val="accent1"/>
+          </a:effectRef>
+          <a:fontRef idx="minor">
+            <a:schemeClr val="lt1"/>
+          </a:fontRef>
+        </p:style>
+        <p:txBody>
+          <a:bodyPr rtlCol="0" anchor="ctr"/>
+          <a:lstStyle/>
+          <a:p>
+            <a:pPr algn="ctr"/>
+            <a:endParaRPr lang="de-CH"/>
+          </a:p>
+        </p:txBody>
+      </p:sp>
+      <p:cxnSp>
+        <p:nvCxnSpPr>
+          <p:cNvPr id="66" name="Straight Arrow Connector 65">
+            <a:extLst>
+              <a:ext uri="{FF2B5EF4-FFF2-40B4-BE49-F238E27FC236}">
+                <a16:creationId xmlns:a16="http://schemas.microsoft.com/office/drawing/2014/main" id="{78752445-C6FC-4C2D-823E-EC0B12137B64}"/>
+              </a:ext>
+            </a:extLst>
+          </p:cNvPr>
+          <p:cNvCxnSpPr>
+            <a:cxnSpLocks/>
+            <a:stCxn id="50" idx="1"/>
+            <a:endCxn id="65" idx="4"/>
+          </p:cNvCxnSpPr>
+          <p:nvPr/>
+        </p:nvCxnSpPr>
+        <p:spPr>
+          <a:xfrm flipH="1" flipV="1">
+            <a:off x="10605198" y="3704868"/>
+            <a:ext cx="8916" cy="755536"/>
+          </a:xfrm>
+          <a:prstGeom prst="straightConnector1">
+            <a:avLst/>
+          </a:prstGeom>
+          <a:ln>
+            <a:tailEnd type="triangle"/>
+          </a:ln>
+        </p:spPr>
+        <p:style>
+          <a:lnRef idx="1">
+            <a:schemeClr val="accent1"/>
+          </a:lnRef>
+          <a:fillRef idx="0">
+            <a:schemeClr val="accent1"/>
+          </a:fillRef>
+          <a:effectRef idx="0">
+            <a:schemeClr val="accent1"/>
+          </a:effectRef>
+          <a:fontRef idx="minor">
+            <a:schemeClr val="tx1"/>
+          </a:fontRef>
+        </p:style>
+      </p:cxnSp>
+      <p:cxnSp>
+        <p:nvCxnSpPr>
+          <p:cNvPr id="69" name="Straight Arrow Connector 68">
+            <a:extLst>
+              <a:ext uri="{FF2B5EF4-FFF2-40B4-BE49-F238E27FC236}">
+                <a16:creationId xmlns:a16="http://schemas.microsoft.com/office/drawing/2014/main" id="{6F28C591-752B-43F6-918A-5823E724C71A}"/>
+              </a:ext>
+            </a:extLst>
+          </p:cNvPr>
+          <p:cNvCxnSpPr>
+            <a:cxnSpLocks/>
+            <a:stCxn id="64" idx="6"/>
+          </p:cNvCxnSpPr>
+          <p:nvPr/>
+        </p:nvCxnSpPr>
+        <p:spPr>
+          <a:xfrm flipV="1">
+            <a:off x="9525267" y="2463935"/>
+            <a:ext cx="500057" cy="424969"/>
+          </a:xfrm>
+          <a:prstGeom prst="straightConnector1">
+            <a:avLst/>
+          </a:prstGeom>
+          <a:ln>
+            <a:tailEnd type="triangle"/>
+          </a:ln>
+        </p:spPr>
+        <p:style>
+          <a:lnRef idx="1">
+            <a:schemeClr val="accent1"/>
+          </a:lnRef>
+          <a:fillRef idx="0">
+            <a:schemeClr val="accent1"/>
+          </a:fillRef>
+          <a:effectRef idx="0">
+            <a:schemeClr val="accent1"/>
+          </a:effectRef>
+          <a:fontRef idx="minor">
+            <a:schemeClr val="tx1"/>
+          </a:fontRef>
+        </p:style>
+      </p:cxnSp>
+      <p:sp>
+        <p:nvSpPr>
+          <p:cNvPr id="72" name="Rectangle 71">
+            <a:extLst>
+              <a:ext uri="{FF2B5EF4-FFF2-40B4-BE49-F238E27FC236}">
+                <a16:creationId xmlns:a16="http://schemas.microsoft.com/office/drawing/2014/main" id="{85BE763E-7F01-4432-AED7-B339F21A6841}"/>
+              </a:ext>
+            </a:extLst>
+          </p:cNvPr>
+          <p:cNvSpPr/>
+          <p:nvPr/>
+        </p:nvSpPr>
+        <p:spPr>
+          <a:xfrm>
+            <a:off x="9179709" y="1095373"/>
+            <a:ext cx="2824339" cy="1330983"/>
+          </a:xfrm>
+          <a:prstGeom prst="rect">
+            <a:avLst/>
+          </a:prstGeom>
+          <a:noFill/>
+          <a:ln>
+            <a:solidFill>
+              <a:schemeClr val="tx1"/>
+            </a:solidFill>
+            <a:prstDash val="dash"/>
+          </a:ln>
+        </p:spPr>
+        <p:style>
+          <a:lnRef idx="2">
+            <a:schemeClr val="accent1">
+              <a:shade val="50000"/>
+            </a:schemeClr>
+          </a:lnRef>
+          <a:fillRef idx="1">
+            <a:schemeClr val="accent1"/>
+          </a:fillRef>
+          <a:effectRef idx="0">
+            <a:schemeClr val="accent1"/>
+          </a:effectRef>
+          <a:fontRef idx="minor">
+            <a:schemeClr val="lt1"/>
+          </a:fontRef>
+        </p:style>
+        <p:txBody>
+          <a:bodyPr rtlCol="0" anchor="ctr"/>
+          <a:lstStyle/>
+          <a:p>
+            <a:pPr algn="ctr"/>
+            <a:endParaRPr lang="de-CH"/>
+          </a:p>
+        </p:txBody>
+      </p:sp>
+      <p:sp>
+        <p:nvSpPr>
+          <p:cNvPr id="73" name="TextBox 72">
+            <a:extLst>
+              <a:ext uri="{FF2B5EF4-FFF2-40B4-BE49-F238E27FC236}">
+                <a16:creationId xmlns:a16="http://schemas.microsoft.com/office/drawing/2014/main" id="{EC424C64-8A18-43DA-8B53-15ACF8A0939B}"/>
+              </a:ext>
+            </a:extLst>
+          </p:cNvPr>
+          <p:cNvSpPr txBox="1"/>
+          <p:nvPr/>
+        </p:nvSpPr>
+        <p:spPr>
+          <a:xfrm>
+            <a:off x="10059584" y="668529"/>
+            <a:ext cx="1401089" cy="369332"/>
+          </a:xfrm>
+          <a:prstGeom prst="rect">
+            <a:avLst/>
+          </a:prstGeom>
+          <a:noFill/>
+        </p:spPr>
+        <p:txBody>
+          <a:bodyPr wrap="none" rtlCol="0">
+            <a:spAutoFit/>
+          </a:bodyPr>
+          <a:lstStyle/>
+          <a:p>
+            <a:r>
+              <a:rPr lang="de-CH" b="1" dirty="0" err="1"/>
+              <a:t>Visualization</a:t>
+            </a:r>
+            <a:endParaRPr lang="de-CH" b="1" dirty="0"/>
+          </a:p>
+        </p:txBody>
+      </p:sp>
+      <p:cxnSp>
+        <p:nvCxnSpPr>
+          <p:cNvPr id="76" name="Straight Arrow Connector 75">
+            <a:extLst>
+              <a:ext uri="{FF2B5EF4-FFF2-40B4-BE49-F238E27FC236}">
+                <a16:creationId xmlns:a16="http://schemas.microsoft.com/office/drawing/2014/main" id="{6FD7300A-81CE-456B-A888-8F5826F3EE4E}"/>
+              </a:ext>
+            </a:extLst>
+          </p:cNvPr>
+          <p:cNvCxnSpPr>
+            <a:cxnSpLocks/>
+            <a:stCxn id="65" idx="0"/>
+            <a:endCxn id="72" idx="2"/>
+          </p:cNvCxnSpPr>
+          <p:nvPr/>
+        </p:nvCxnSpPr>
+        <p:spPr>
+          <a:xfrm flipH="1" flipV="1">
+            <a:off x="10591879" y="2426356"/>
+            <a:ext cx="13319" cy="895845"/>
+          </a:xfrm>
+          <a:prstGeom prst="straightConnector1">
+            <a:avLst/>
+          </a:prstGeom>
+          <a:ln>
+            <a:tailEnd type="triangle"/>
+          </a:ln>
+        </p:spPr>
+        <p:style>
+          <a:lnRef idx="1">
+            <a:schemeClr val="accent1"/>
+          </a:lnRef>
+          <a:fillRef idx="0">
+            <a:schemeClr val="accent1"/>
+          </a:fillRef>
+          <a:effectRef idx="0">
+            <a:schemeClr val="accent1"/>
+          </a:effectRef>
+          <a:fontRef idx="minor">
+            <a:schemeClr val="tx1"/>
+          </a:fontRef>
+        </p:style>
+      </p:cxnSp>
+      <p:pic>
+        <p:nvPicPr>
+          <p:cNvPr id="80" name="Picture 79">
+            <a:extLst>
+              <a:ext uri="{FF2B5EF4-FFF2-40B4-BE49-F238E27FC236}">
+                <a16:creationId xmlns:a16="http://schemas.microsoft.com/office/drawing/2014/main" id="{79B2CDE4-9028-47EB-998B-703CBF515CD0}"/>
+              </a:ext>
+            </a:extLst>
+          </p:cNvPr>
+          <p:cNvPicPr>
+            <a:picLocks noChangeAspect="1"/>
+          </p:cNvPicPr>
+          <p:nvPr/>
+        </p:nvPicPr>
+        <p:blipFill>
+          <a:blip r:embed="rId7"/>
+          <a:stretch>
+            <a:fillRect/>
+          </a:stretch>
+        </p:blipFill>
+        <p:spPr>
+          <a:xfrm>
+            <a:off x="9287446" y="1010471"/>
+            <a:ext cx="2653335" cy="1448608"/>
+          </a:xfrm>
+          <a:prstGeom prst="rect">
+            <a:avLst/>
+          </a:prstGeom>
+        </p:spPr>
+      </p:pic>
+      <p:pic>
+        <p:nvPicPr>
+          <p:cNvPr id="82" name="Picture 81">
+            <a:extLst>
+              <a:ext uri="{FF2B5EF4-FFF2-40B4-BE49-F238E27FC236}">
+                <a16:creationId xmlns:a16="http://schemas.microsoft.com/office/drawing/2014/main" id="{61011012-DECE-4E86-88B7-A78883B6E08F}"/>
+              </a:ext>
+            </a:extLst>
+          </p:cNvPr>
+          <p:cNvPicPr>
+            <a:picLocks noChangeAspect="1"/>
+          </p:cNvPicPr>
+          <p:nvPr/>
+        </p:nvPicPr>
+        <p:blipFill>
+          <a:blip r:embed="rId8">
+            <a:extLst>
+              <a:ext uri="{28A0092B-C50C-407E-A947-70E740481C1C}">
+                <a14:useLocalDpi xmlns:a14="http://schemas.microsoft.com/office/drawing/2010/main" val="0"/>
+              </a:ext>
+            </a:extLst>
+          </a:blip>
+          <a:stretch>
+            <a:fillRect/>
+          </a:stretch>
+        </p:blipFill>
+        <p:spPr>
+          <a:xfrm>
+            <a:off x="10688889" y="38049"/>
+            <a:ext cx="1081452" cy="632965"/>
+          </a:xfrm>
+          <a:prstGeom prst="rect">
+            <a:avLst/>
+          </a:prstGeom>
+        </p:spPr>
+      </p:pic>
+      <p:pic>
+        <p:nvPicPr>
+          <p:cNvPr id="84" name="Picture 83">
+            <a:extLst>
+              <a:ext uri="{FF2B5EF4-FFF2-40B4-BE49-F238E27FC236}">
+                <a16:creationId xmlns:a16="http://schemas.microsoft.com/office/drawing/2014/main" id="{016BFE71-80AC-494E-85D4-F39F74B4384B}"/>
+              </a:ext>
+            </a:extLst>
+          </p:cNvPr>
+          <p:cNvPicPr>
+            <a:picLocks noChangeAspect="1"/>
+          </p:cNvPicPr>
+          <p:nvPr/>
+        </p:nvPicPr>
+        <p:blipFill>
+          <a:blip r:embed="rId9">
+            <a:extLst>
+              <a:ext uri="{28A0092B-C50C-407E-A947-70E740481C1C}">
+                <a14:useLocalDpi xmlns:a14="http://schemas.microsoft.com/office/drawing/2010/main" val="0"/>
+              </a:ext>
+            </a:extLst>
+          </a:blip>
+          <a:stretch>
+            <a:fillRect/>
+          </a:stretch>
+        </p:blipFill>
+        <p:spPr>
+          <a:xfrm>
+            <a:off x="9202788" y="151963"/>
+            <a:ext cx="1497739" cy="512441"/>
+          </a:xfrm>
+          <a:prstGeom prst="rect">
+            <a:avLst/>
+          </a:prstGeom>
+        </p:spPr>
+      </p:pic>
+      <p:pic>
+        <p:nvPicPr>
+          <p:cNvPr id="85" name="Picture 84">
+            <a:extLst>
+              <a:ext uri="{FF2B5EF4-FFF2-40B4-BE49-F238E27FC236}">
+                <a16:creationId xmlns:a16="http://schemas.microsoft.com/office/drawing/2014/main" id="{AE23BBE3-843F-4FD2-92C4-24855B47BF05}"/>
+              </a:ext>
+            </a:extLst>
+          </p:cNvPr>
+          <p:cNvPicPr>
+            <a:picLocks noChangeAspect="1"/>
+          </p:cNvPicPr>
+          <p:nvPr/>
+        </p:nvPicPr>
+        <p:blipFill>
+          <a:blip r:embed="rId6">
+            <a:extLst>
+              <a:ext uri="{28A0092B-C50C-407E-A947-70E740481C1C}">
+                <a14:useLocalDpi xmlns:a14="http://schemas.microsoft.com/office/drawing/2010/main" val="0"/>
+              </a:ext>
+            </a:extLst>
+          </a:blip>
+          <a:stretch>
+            <a:fillRect/>
+          </a:stretch>
+        </p:blipFill>
+        <p:spPr>
+          <a:xfrm>
+            <a:off x="11817518" y="408183"/>
+            <a:ext cx="393022" cy="393022"/>
+          </a:xfrm>
+          <a:prstGeom prst="rect">
+            <a:avLst/>
+          </a:prstGeom>
+        </p:spPr>
+      </p:pic>
+      <p:sp>
+        <p:nvSpPr>
+          <p:cNvPr id="86" name="Rectangle 85">
+            <a:extLst>
+              <a:ext uri="{FF2B5EF4-FFF2-40B4-BE49-F238E27FC236}">
+                <a16:creationId xmlns:a16="http://schemas.microsoft.com/office/drawing/2014/main" id="{792D895E-16AA-4ECD-AA8C-54C768871F3A}"/>
+              </a:ext>
+            </a:extLst>
+          </p:cNvPr>
+          <p:cNvSpPr/>
+          <p:nvPr/>
+        </p:nvSpPr>
+        <p:spPr>
+          <a:xfrm>
+            <a:off x="9664882" y="3969097"/>
+            <a:ext cx="2339166" cy="2501914"/>
+          </a:xfrm>
+          <a:prstGeom prst="rect">
+            <a:avLst/>
+          </a:prstGeom>
+          <a:noFill/>
+          <a:ln>
+            <a:solidFill>
+              <a:schemeClr val="tx1"/>
+            </a:solidFill>
+            <a:prstDash val="dash"/>
+          </a:ln>
+        </p:spPr>
+        <p:style>
+          <a:lnRef idx="2">
+            <a:schemeClr val="accent1">
+              <a:shade val="50000"/>
+            </a:schemeClr>
+          </a:lnRef>
+          <a:fillRef idx="1">
+            <a:schemeClr val="accent1"/>
+          </a:fillRef>
+          <a:effectRef idx="0">
+            <a:schemeClr val="accent1"/>
+          </a:effectRef>
+          <a:fontRef idx="minor">
+            <a:schemeClr val="lt1"/>
+          </a:fontRef>
+        </p:style>
+        <p:txBody>
+          <a:bodyPr rtlCol="0" anchor="ctr"/>
+          <a:lstStyle/>
+          <a:p>
+            <a:pPr algn="ctr"/>
+            <a:endParaRPr lang="de-CH"/>
+          </a:p>
+        </p:txBody>
+      </p:sp>
+      <p:sp>
+        <p:nvSpPr>
+          <p:cNvPr id="18" name="Rectangle 17">
+            <a:extLst>
+              <a:ext uri="{FF2B5EF4-FFF2-40B4-BE49-F238E27FC236}">
+                <a16:creationId xmlns:a16="http://schemas.microsoft.com/office/drawing/2014/main" id="{CCB8C28A-8AF0-4F74-8F80-7DFE3F26DDA6}"/>
+              </a:ext>
+            </a:extLst>
+          </p:cNvPr>
+          <p:cNvSpPr/>
+          <p:nvPr/>
+        </p:nvSpPr>
+        <p:spPr>
+          <a:xfrm>
+            <a:off x="118659" y="4271765"/>
+            <a:ext cx="1320307" cy="461665"/>
+          </a:xfrm>
+          <a:prstGeom prst="rect">
+            <a:avLst/>
+          </a:prstGeom>
+        </p:spPr>
+        <p:txBody>
+          <a:bodyPr wrap="square">
+            <a:spAutoFit/>
+          </a:bodyPr>
+          <a:lstStyle/>
+          <a:p>
+            <a:r>
+              <a:rPr lang="de-CH" sz="1200" dirty="0" err="1"/>
+              <a:t>Statistic</a:t>
+            </a:r>
+            <a:r>
+              <a:rPr lang="de-CH" sz="1200" dirty="0"/>
+              <a:t> Times</a:t>
+            </a:r>
+            <a:br>
+              <a:rPr lang="de-CH" sz="1200" dirty="0"/>
+            </a:br>
+            <a:r>
+              <a:rPr lang="de-CH" sz="1200" dirty="0"/>
+              <a:t>INCED</a:t>
+            </a:r>
+          </a:p>
+        </p:txBody>
+      </p:sp>
+      <p:sp>
+        <p:nvSpPr>
+          <p:cNvPr id="57" name="TextBox 56">
+            <a:extLst>
+              <a:ext uri="{FF2B5EF4-FFF2-40B4-BE49-F238E27FC236}">
+                <a16:creationId xmlns:a16="http://schemas.microsoft.com/office/drawing/2014/main" id="{68973681-C79F-408C-8B78-B559E7D4B5D3}"/>
+              </a:ext>
+            </a:extLst>
+          </p:cNvPr>
+          <p:cNvSpPr txBox="1"/>
+          <p:nvPr/>
+        </p:nvSpPr>
+        <p:spPr>
+          <a:xfrm>
+            <a:off x="3923386" y="1562763"/>
+            <a:ext cx="1140056" cy="369332"/>
+          </a:xfrm>
+          <a:prstGeom prst="rect">
+            <a:avLst/>
+          </a:prstGeom>
+          <a:noFill/>
+        </p:spPr>
+        <p:txBody>
+          <a:bodyPr wrap="none" rtlCol="0">
+            <a:spAutoFit/>
+          </a:bodyPr>
+          <a:lstStyle/>
+          <a:p>
+            <a:r>
+              <a:rPr lang="de-CH" dirty="0" err="1"/>
+              <a:t>Html_files</a:t>
+            </a:r>
+            <a:endParaRPr lang="de-CH" dirty="0"/>
+          </a:p>
+        </p:txBody>
+      </p:sp>
+      <p:sp>
+        <p:nvSpPr>
+          <p:cNvPr id="67" name="TextBox 66">
+            <a:extLst>
+              <a:ext uri="{FF2B5EF4-FFF2-40B4-BE49-F238E27FC236}">
+                <a16:creationId xmlns:a16="http://schemas.microsoft.com/office/drawing/2014/main" id="{5B2DEE84-9E18-4828-919F-7CDB40AEBB64}"/>
+              </a:ext>
+            </a:extLst>
+          </p:cNvPr>
+          <p:cNvSpPr txBox="1"/>
+          <p:nvPr/>
+        </p:nvSpPr>
+        <p:spPr>
+          <a:xfrm>
+            <a:off x="3967036" y="1800889"/>
+            <a:ext cx="986873" cy="369332"/>
+          </a:xfrm>
+          <a:prstGeom prst="rect">
+            <a:avLst/>
+          </a:prstGeom>
+          <a:noFill/>
+        </p:spPr>
+        <p:txBody>
+          <a:bodyPr wrap="none" rtlCol="0">
+            <a:spAutoFit/>
+          </a:bodyPr>
+          <a:lstStyle/>
+          <a:p>
+            <a:r>
+              <a:rPr lang="de-CH" i="1" dirty="0" err="1"/>
+              <a:t>Csv_files</a:t>
+            </a:r>
+            <a:endParaRPr lang="de-CH" i="1" dirty="0"/>
+          </a:p>
+        </p:txBody>
+      </p:sp>
+      <p:sp>
+        <p:nvSpPr>
+          <p:cNvPr id="68" name="TextBox 67">
+            <a:extLst>
+              <a:ext uri="{FF2B5EF4-FFF2-40B4-BE49-F238E27FC236}">
+                <a16:creationId xmlns:a16="http://schemas.microsoft.com/office/drawing/2014/main" id="{35326C4A-DB77-4C2B-A7FF-C41518AD5296}"/>
+              </a:ext>
+            </a:extLst>
+          </p:cNvPr>
+          <p:cNvSpPr txBox="1"/>
+          <p:nvPr/>
+        </p:nvSpPr>
+        <p:spPr>
+          <a:xfrm>
+            <a:off x="4049783" y="2725698"/>
+            <a:ext cx="1140056" cy="369332"/>
+          </a:xfrm>
+          <a:prstGeom prst="rect">
+            <a:avLst/>
+          </a:prstGeom>
+          <a:noFill/>
+        </p:spPr>
+        <p:txBody>
+          <a:bodyPr wrap="none" rtlCol="0">
+            <a:spAutoFit/>
+          </a:bodyPr>
+          <a:lstStyle/>
+          <a:p>
+            <a:r>
+              <a:rPr lang="de-CH" dirty="0" err="1"/>
+              <a:t>Html_files</a:t>
+            </a:r>
+            <a:endParaRPr lang="de-CH" dirty="0"/>
+          </a:p>
+        </p:txBody>
+      </p:sp>
+      <p:sp>
+        <p:nvSpPr>
+          <p:cNvPr id="70" name="TextBox 69">
+            <a:extLst>
+              <a:ext uri="{FF2B5EF4-FFF2-40B4-BE49-F238E27FC236}">
+                <a16:creationId xmlns:a16="http://schemas.microsoft.com/office/drawing/2014/main" id="{132AEB53-4E22-40A1-BE45-887D9D439445}"/>
+              </a:ext>
+            </a:extLst>
+          </p:cNvPr>
+          <p:cNvSpPr txBox="1"/>
+          <p:nvPr/>
+        </p:nvSpPr>
+        <p:spPr>
+          <a:xfrm>
+            <a:off x="4093433" y="2963824"/>
+            <a:ext cx="986873" cy="369332"/>
+          </a:xfrm>
+          <a:prstGeom prst="rect">
+            <a:avLst/>
+          </a:prstGeom>
+          <a:noFill/>
+        </p:spPr>
+        <p:txBody>
+          <a:bodyPr wrap="none" rtlCol="0">
+            <a:spAutoFit/>
+          </a:bodyPr>
+          <a:lstStyle/>
+          <a:p>
+            <a:r>
+              <a:rPr lang="de-CH" i="1" dirty="0" err="1"/>
+              <a:t>Csv_files</a:t>
+            </a:r>
+            <a:endParaRPr lang="de-CH" i="1" dirty="0"/>
+          </a:p>
+        </p:txBody>
+      </p:sp>
+      <p:sp>
+        <p:nvSpPr>
+          <p:cNvPr id="71" name="TextBox 70">
+            <a:extLst>
+              <a:ext uri="{FF2B5EF4-FFF2-40B4-BE49-F238E27FC236}">
+                <a16:creationId xmlns:a16="http://schemas.microsoft.com/office/drawing/2014/main" id="{2F732659-9B7D-44A4-8273-F8FD9C3327F7}"/>
+              </a:ext>
+            </a:extLst>
+          </p:cNvPr>
+          <p:cNvSpPr txBox="1"/>
+          <p:nvPr/>
+        </p:nvSpPr>
+        <p:spPr>
+          <a:xfrm>
+            <a:off x="4101227" y="4182973"/>
+            <a:ext cx="1140056" cy="369332"/>
+          </a:xfrm>
+          <a:prstGeom prst="rect">
+            <a:avLst/>
+          </a:prstGeom>
+          <a:noFill/>
+        </p:spPr>
+        <p:txBody>
+          <a:bodyPr wrap="none" rtlCol="0">
+            <a:spAutoFit/>
+          </a:bodyPr>
+          <a:lstStyle/>
+          <a:p>
+            <a:r>
+              <a:rPr lang="de-CH" dirty="0" err="1"/>
+              <a:t>Html_files</a:t>
+            </a:r>
+            <a:endParaRPr lang="de-CH" dirty="0"/>
+          </a:p>
+        </p:txBody>
+      </p:sp>
+      <p:sp>
+        <p:nvSpPr>
+          <p:cNvPr id="74" name="TextBox 73">
+            <a:extLst>
+              <a:ext uri="{FF2B5EF4-FFF2-40B4-BE49-F238E27FC236}">
+                <a16:creationId xmlns:a16="http://schemas.microsoft.com/office/drawing/2014/main" id="{9CD15625-025B-430C-9C17-4D660BFD0964}"/>
+              </a:ext>
+            </a:extLst>
+          </p:cNvPr>
+          <p:cNvSpPr txBox="1"/>
+          <p:nvPr/>
+        </p:nvSpPr>
+        <p:spPr>
+          <a:xfrm>
+            <a:off x="3516899" y="4493769"/>
+            <a:ext cx="1490729" cy="369332"/>
+          </a:xfrm>
+          <a:prstGeom prst="rect">
+            <a:avLst/>
+          </a:prstGeom>
+          <a:noFill/>
+        </p:spPr>
+        <p:txBody>
+          <a:bodyPr wrap="none" rtlCol="0">
+            <a:spAutoFit/>
+          </a:bodyPr>
+          <a:lstStyle/>
+          <a:p>
+            <a:r>
+              <a:rPr lang="de-CH" i="1" dirty="0"/>
+              <a:t>JPGs </a:t>
+            </a:r>
+            <a:r>
+              <a:rPr lang="de-CH" i="1" dirty="0" err="1"/>
+              <a:t>of</a:t>
+            </a:r>
+            <a:r>
+              <a:rPr lang="de-CH" i="1" dirty="0"/>
+              <a:t> </a:t>
+            </a:r>
+            <a:r>
+              <a:rPr lang="de-CH" i="1" dirty="0" err="1"/>
+              <a:t>Tables</a:t>
+            </a:r>
+            <a:endParaRPr lang="de-CH" i="1" dirty="0"/>
+          </a:p>
+        </p:txBody>
+      </p:sp>
+      <p:sp>
+        <p:nvSpPr>
+          <p:cNvPr id="75" name="TextBox 74">
+            <a:extLst>
+              <a:ext uri="{FF2B5EF4-FFF2-40B4-BE49-F238E27FC236}">
+                <a16:creationId xmlns:a16="http://schemas.microsoft.com/office/drawing/2014/main" id="{A9584F5C-2EBC-4CFB-9853-5669D321423C}"/>
+              </a:ext>
+            </a:extLst>
+          </p:cNvPr>
+          <p:cNvSpPr txBox="1"/>
+          <p:nvPr/>
+        </p:nvSpPr>
+        <p:spPr>
+          <a:xfrm>
+            <a:off x="3791782" y="5404474"/>
+            <a:ext cx="1571264" cy="369332"/>
+          </a:xfrm>
+          <a:prstGeom prst="rect">
+            <a:avLst/>
+          </a:prstGeom>
+          <a:noFill/>
+        </p:spPr>
+        <p:txBody>
+          <a:bodyPr wrap="none" rtlCol="0">
+            <a:spAutoFit/>
+          </a:bodyPr>
+          <a:lstStyle/>
+          <a:p>
+            <a:r>
+              <a:rPr lang="de-CH" dirty="0" err="1"/>
+              <a:t>Geo</a:t>
+            </a:r>
+            <a:r>
+              <a:rPr lang="de-CH" dirty="0"/>
+              <a:t> JSON Files</a:t>
+            </a:r>
+          </a:p>
+        </p:txBody>
+      </p:sp>
+      <p:sp>
+        <p:nvSpPr>
+          <p:cNvPr id="78" name="TextBox 77">
+            <a:extLst>
+              <a:ext uri="{FF2B5EF4-FFF2-40B4-BE49-F238E27FC236}">
+                <a16:creationId xmlns:a16="http://schemas.microsoft.com/office/drawing/2014/main" id="{0FA12E35-6A6C-4A0F-B080-71A2B1ABD09E}"/>
+              </a:ext>
+            </a:extLst>
+          </p:cNvPr>
+          <p:cNvSpPr txBox="1"/>
+          <p:nvPr/>
+        </p:nvSpPr>
+        <p:spPr>
+          <a:xfrm>
+            <a:off x="5208576" y="4486702"/>
+            <a:ext cx="649152" cy="369332"/>
+          </a:xfrm>
+          <a:prstGeom prst="rect">
+            <a:avLst/>
+          </a:prstGeom>
+          <a:noFill/>
+        </p:spPr>
+        <p:txBody>
+          <a:bodyPr wrap="none" rtlCol="0">
+            <a:spAutoFit/>
+          </a:bodyPr>
+          <a:lstStyle/>
+          <a:p>
+            <a:r>
+              <a:rPr lang="de-CH" i="1" dirty="0"/>
+              <a:t>Excel</a:t>
+            </a:r>
+          </a:p>
+        </p:txBody>
+      </p:sp>
+      <p:pic>
+        <p:nvPicPr>
+          <p:cNvPr id="1026" name="Picture 2" descr="Datei:Microsoft Office Excel (2019–present).svg – Wikipedia">
+            <a:hlinkClick r:id="rId10"/>
+            <a:extLst>
+              <a:ext uri="{FF2B5EF4-FFF2-40B4-BE49-F238E27FC236}">
+                <a16:creationId xmlns:a16="http://schemas.microsoft.com/office/drawing/2014/main" id="{4729707E-F5BD-4F98-A07B-07BF0B897F46}"/>
+              </a:ext>
+            </a:extLst>
+          </p:cNvPr>
+          <p:cNvPicPr>
+            <a:picLocks noChangeAspect="1" noChangeArrowheads="1"/>
+          </p:cNvPicPr>
+          <p:nvPr/>
+        </p:nvPicPr>
+        <p:blipFill>
+          <a:blip r:embed="rId11">
+            <a:extLst>
+              <a:ext uri="{28A0092B-C50C-407E-A947-70E740481C1C}">
+                <a14:useLocalDpi xmlns:a14="http://schemas.microsoft.com/office/drawing/2010/main" val="0"/>
+              </a:ext>
+            </a:extLst>
+          </a:blip>
+          <a:srcRect/>
+          <a:stretch>
+            <a:fillRect/>
+          </a:stretch>
+        </p:blipFill>
+        <p:spPr bwMode="auto">
+          <a:xfrm>
+            <a:off x="5562891" y="6106480"/>
+            <a:ext cx="777860" cy="724444"/>
+          </a:xfrm>
+          <a:prstGeom prst="rect">
+            <a:avLst/>
+          </a:prstGeom>
+          <a:noFill/>
+          <a:extLst>
+            <a:ext uri="{909E8E84-426E-40DD-AFC4-6F175D3DCCD1}">
+              <a14:hiddenFill xmlns:a14="http://schemas.microsoft.com/office/drawing/2010/main">
+                <a:solidFill>
+                  <a:srgbClr val="FFFFFF"/>
+                </a:solidFill>
+              </a14:hiddenFill>
+            </a:ext>
+          </a:extLst>
+        </p:spPr>
+      </p:pic>
+      <p:pic>
+        <p:nvPicPr>
+          <p:cNvPr id="25" name="Picture 24">
+            <a:extLst>
+              <a:ext uri="{FF2B5EF4-FFF2-40B4-BE49-F238E27FC236}">
+                <a16:creationId xmlns:a16="http://schemas.microsoft.com/office/drawing/2014/main" id="{98BB948E-446A-41FD-A1B4-327456CA9AF3}"/>
+              </a:ext>
+            </a:extLst>
+          </p:cNvPr>
+          <p:cNvPicPr>
+            <a:picLocks noChangeAspect="1"/>
+          </p:cNvPicPr>
+          <p:nvPr/>
+        </p:nvPicPr>
+        <p:blipFill>
+          <a:blip r:embed="rId12"/>
+          <a:stretch>
+            <a:fillRect/>
+          </a:stretch>
+        </p:blipFill>
+        <p:spPr>
+          <a:xfrm>
+            <a:off x="4469065" y="6088896"/>
+            <a:ext cx="1286037" cy="189258"/>
+          </a:xfrm>
+          <a:prstGeom prst="rect">
+            <a:avLst/>
+          </a:prstGeom>
+        </p:spPr>
+      </p:pic>
     </p:spTree>
     <p:extLst>
       <p:ext uri="{BB962C8B-B14F-4D97-AF65-F5344CB8AC3E}">
@@ -12676,6 +15826,45 @@
                 </a:solidFill>
               </a:rPr>
               <a:t>Markers</a:t>
+            </a:r>
+          </a:p>
+        </p:txBody>
+      </p:sp>
+      <p:sp>
+        <p:nvSpPr>
+          <p:cNvPr id="17" name="TextBox 16">
+            <a:extLst>
+              <a:ext uri="{FF2B5EF4-FFF2-40B4-BE49-F238E27FC236}">
+                <a16:creationId xmlns:a16="http://schemas.microsoft.com/office/drawing/2014/main" id="{BB5FBE32-7EDC-4C3C-9432-B4B984EB1002}"/>
+              </a:ext>
+            </a:extLst>
+          </p:cNvPr>
+          <p:cNvSpPr txBox="1"/>
+          <p:nvPr/>
+        </p:nvSpPr>
+        <p:spPr>
+          <a:xfrm>
+            <a:off x="7225256" y="5064490"/>
+            <a:ext cx="2033762" cy="369332"/>
+          </a:xfrm>
+          <a:prstGeom prst="rect">
+            <a:avLst/>
+          </a:prstGeom>
+          <a:noFill/>
+        </p:spPr>
+        <p:txBody>
+          <a:bodyPr wrap="none" rtlCol="0">
+            <a:spAutoFit/>
+          </a:bodyPr>
+          <a:lstStyle/>
+          <a:p>
+            <a:r>
+              <a:rPr lang="de-CH" dirty="0">
+                <a:solidFill>
+                  <a:schemeClr val="bg1"/>
+                </a:solidFill>
+              </a:rPr>
+              <a:t>Colors = Companies</a:t>
             </a:r>
           </a:p>
         </p:txBody>
@@ -12986,4 +16175,299 @@
     </a:ext>
   </a:extLst>
 </a:theme>
+</file>
+
+<file path=ppt/theme/theme2.xml><?xml version="1.0" encoding="utf-8"?>
+<a:theme xmlns:a="http://schemas.openxmlformats.org/drawingml/2006/main" name="Office Theme">
+  <a:themeElements>
+    <a:clrScheme name="Office">
+      <a:dk1>
+        <a:sysClr val="windowText" lastClr="000000"/>
+      </a:dk1>
+      <a:lt1>
+        <a:sysClr val="window" lastClr="FFFFFF"/>
+      </a:lt1>
+      <a:dk2>
+        <a:srgbClr val="44546A"/>
+      </a:dk2>
+      <a:lt2>
+        <a:srgbClr val="E7E6E6"/>
+      </a:lt2>
+      <a:accent1>
+        <a:srgbClr val="4472C4"/>
+      </a:accent1>
+      <a:accent2>
+        <a:srgbClr val="ED7D31"/>
+      </a:accent2>
+      <a:accent3>
+        <a:srgbClr val="A5A5A5"/>
+      </a:accent3>
+      <a:accent4>
+        <a:srgbClr val="FFC000"/>
+      </a:accent4>
+      <a:accent5>
+        <a:srgbClr val="5B9BD5"/>
+      </a:accent5>
+      <a:accent6>
+        <a:srgbClr val="70AD47"/>
+      </a:accent6>
+      <a:hlink>
+        <a:srgbClr val="0563C1"/>
+      </a:hlink>
+      <a:folHlink>
+        <a:srgbClr val="954F72"/>
+      </a:folHlink>
+    </a:clrScheme>
+    <a:fontScheme name="Office">
+      <a:majorFont>
+        <a:latin typeface="Calibri Light" panose="020F0302020204030204"/>
+        <a:ea typeface=""/>
+        <a:cs typeface=""/>
+        <a:font script="Jpan" typeface="游ゴシック Light"/>
+        <a:font script="Hang" typeface="맑은 고딕"/>
+        <a:font script="Hans" typeface="等线 Light"/>
+        <a:font script="Hant" typeface="新細明體"/>
+        <a:font script="Arab" typeface="Times New Roman"/>
+        <a:font script="Hebr" typeface="Times New Roman"/>
+        <a:font script="Thai" typeface="Angsana New"/>
+        <a:font script="Ethi" typeface="Nyala"/>
+        <a:font script="Beng" typeface="Vrinda"/>
+        <a:font script="Gujr" typeface="Shruti"/>
+        <a:font script="Khmr" typeface="MoolBoran"/>
+        <a:font script="Knda" typeface="Tunga"/>
+        <a:font script="Guru" typeface="Raavi"/>
+        <a:font script="Cans" typeface="Euphemia"/>
+        <a:font script="Cher" typeface="Plantagenet Cherokee"/>
+        <a:font script="Yiii" typeface="Microsoft Yi Baiti"/>
+        <a:font script="Tibt" typeface="Microsoft Himalaya"/>
+        <a:font script="Thaa" typeface="MV Boli"/>
+        <a:font script="Deva" typeface="Mangal"/>
+        <a:font script="Telu" typeface="Gautami"/>
+        <a:font script="Taml" typeface="Latha"/>
+        <a:font script="Syrc" typeface="Estrangelo Edessa"/>
+        <a:font script="Orya" typeface="Kalinga"/>
+        <a:font script="Mlym" typeface="Kartika"/>
+        <a:font script="Laoo" typeface="DokChampa"/>
+        <a:font script="Sinh" typeface="Iskoola Pota"/>
+        <a:font script="Mong" typeface="Mongolian Baiti"/>
+        <a:font script="Viet" typeface="Times New Roman"/>
+        <a:font script="Uigh" typeface="Microsoft Uighur"/>
+        <a:font script="Geor" typeface="Sylfaen"/>
+        <a:font script="Armn" typeface="Arial"/>
+        <a:font script="Bugi" typeface="Leelawadee UI"/>
+        <a:font script="Bopo" typeface="Microsoft JhengHei"/>
+        <a:font script="Java" typeface="Javanese Text"/>
+        <a:font script="Lisu" typeface="Segoe UI"/>
+        <a:font script="Mymr" typeface="Myanmar Text"/>
+        <a:font script="Nkoo" typeface="Ebrima"/>
+        <a:font script="Olck" typeface="Nirmala UI"/>
+        <a:font script="Osma" typeface="Ebrima"/>
+        <a:font script="Phag" typeface="Phagspa"/>
+        <a:font script="Syrn" typeface="Estrangelo Edessa"/>
+        <a:font script="Syrj" typeface="Estrangelo Edessa"/>
+        <a:font script="Syre" typeface="Estrangelo Edessa"/>
+        <a:font script="Sora" typeface="Nirmala UI"/>
+        <a:font script="Tale" typeface="Microsoft Tai Le"/>
+        <a:font script="Talu" typeface="Microsoft New Tai Lue"/>
+        <a:font script="Tfng" typeface="Ebrima"/>
+      </a:majorFont>
+      <a:minorFont>
+        <a:latin typeface="Calibri" panose="020F0502020204030204"/>
+        <a:ea typeface=""/>
+        <a:cs typeface=""/>
+        <a:font script="Jpan" typeface="游ゴシック"/>
+        <a:font script="Hang" typeface="맑은 고딕"/>
+        <a:font script="Hans" typeface="等线"/>
+        <a:font script="Hant" typeface="新細明體"/>
+        <a:font script="Arab" typeface="Arial"/>
+        <a:font script="Hebr" typeface="Arial"/>
+        <a:font script="Thai" typeface="Cordia New"/>
+        <a:font script="Ethi" typeface="Nyala"/>
+        <a:font script="Beng" typeface="Vrinda"/>
+        <a:font script="Gujr" typeface="Shruti"/>
+        <a:font script="Khmr" typeface="DaunPenh"/>
+        <a:font script="Knda" typeface="Tunga"/>
+        <a:font script="Guru" typeface="Raavi"/>
+        <a:font script="Cans" typeface="Euphemia"/>
+        <a:font script="Cher" typeface="Plantagenet Cherokee"/>
+        <a:font script="Yiii" typeface="Microsoft Yi Baiti"/>
+        <a:font script="Tibt" typeface="Microsoft Himalaya"/>
+        <a:font script="Thaa" typeface="MV Boli"/>
+        <a:font script="Deva" typeface="Mangal"/>
+        <a:font script="Telu" typeface="Gautami"/>
+        <a:font script="Taml" typeface="Latha"/>
+        <a:font script="Syrc" typeface="Estrangelo Edessa"/>
+        <a:font script="Orya" typeface="Kalinga"/>
+        <a:font script="Mlym" typeface="Kartika"/>
+        <a:font script="Laoo" typeface="DokChampa"/>
+        <a:font script="Sinh" typeface="Iskoola Pota"/>
+        <a:font script="Mong" typeface="Mongolian Baiti"/>
+        <a:font script="Viet" typeface="Arial"/>
+        <a:font script="Uigh" typeface="Microsoft Uighur"/>
+        <a:font script="Geor" typeface="Sylfaen"/>
+        <a:font script="Armn" typeface="Arial"/>
+        <a:font script="Bugi" typeface="Leelawadee UI"/>
+        <a:font script="Bopo" typeface="Microsoft JhengHei"/>
+        <a:font script="Java" typeface="Javanese Text"/>
+        <a:font script="Lisu" typeface="Segoe UI"/>
+        <a:font script="Mymr" typeface="Myanmar Text"/>
+        <a:font script="Nkoo" typeface="Ebrima"/>
+        <a:font script="Olck" typeface="Nirmala UI"/>
+        <a:font script="Osma" typeface="Ebrima"/>
+        <a:font script="Phag" typeface="Phagspa"/>
+        <a:font script="Syrn" typeface="Estrangelo Edessa"/>
+        <a:font script="Syrj" typeface="Estrangelo Edessa"/>
+        <a:font script="Syre" typeface="Estrangelo Edessa"/>
+        <a:font script="Sora" typeface="Nirmala UI"/>
+        <a:font script="Tale" typeface="Microsoft Tai Le"/>
+        <a:font script="Talu" typeface="Microsoft New Tai Lue"/>
+        <a:font script="Tfng" typeface="Ebrima"/>
+      </a:minorFont>
+    </a:fontScheme>
+    <a:fmtScheme name="Office">
+      <a:fillStyleLst>
+        <a:solidFill>
+          <a:schemeClr val="phClr"/>
+        </a:solidFill>
+        <a:gradFill rotWithShape="1">
+          <a:gsLst>
+            <a:gs pos="0">
+              <a:schemeClr val="phClr">
+                <a:lumMod val="110000"/>
+                <a:satMod val="105000"/>
+                <a:tint val="67000"/>
+              </a:schemeClr>
+            </a:gs>
+            <a:gs pos="50000">
+              <a:schemeClr val="phClr">
+                <a:lumMod val="105000"/>
+                <a:satMod val="103000"/>
+                <a:tint val="73000"/>
+              </a:schemeClr>
+            </a:gs>
+            <a:gs pos="100000">
+              <a:schemeClr val="phClr">
+                <a:lumMod val="105000"/>
+                <a:satMod val="109000"/>
+                <a:tint val="81000"/>
+              </a:schemeClr>
+            </a:gs>
+          </a:gsLst>
+          <a:lin ang="5400000" scaled="0"/>
+        </a:gradFill>
+        <a:gradFill rotWithShape="1">
+          <a:gsLst>
+            <a:gs pos="0">
+              <a:schemeClr val="phClr">
+                <a:satMod val="103000"/>
+                <a:lumMod val="102000"/>
+                <a:tint val="94000"/>
+              </a:schemeClr>
+            </a:gs>
+            <a:gs pos="50000">
+              <a:schemeClr val="phClr">
+                <a:satMod val="110000"/>
+                <a:lumMod val="100000"/>
+                <a:shade val="100000"/>
+              </a:schemeClr>
+            </a:gs>
+            <a:gs pos="100000">
+              <a:schemeClr val="phClr">
+                <a:lumMod val="99000"/>
+                <a:satMod val="120000"/>
+                <a:shade val="78000"/>
+              </a:schemeClr>
+            </a:gs>
+          </a:gsLst>
+          <a:lin ang="5400000" scaled="0"/>
+        </a:gradFill>
+      </a:fillStyleLst>
+      <a:lnStyleLst>
+        <a:ln w="6350" cap="flat" cmpd="sng" algn="ctr">
+          <a:solidFill>
+            <a:schemeClr val="phClr"/>
+          </a:solidFill>
+          <a:prstDash val="solid"/>
+          <a:miter lim="800000"/>
+        </a:ln>
+        <a:ln w="12700" cap="flat" cmpd="sng" algn="ctr">
+          <a:solidFill>
+            <a:schemeClr val="phClr"/>
+          </a:solidFill>
+          <a:prstDash val="solid"/>
+          <a:miter lim="800000"/>
+        </a:ln>
+        <a:ln w="19050" cap="flat" cmpd="sng" algn="ctr">
+          <a:solidFill>
+            <a:schemeClr val="phClr"/>
+          </a:solidFill>
+          <a:prstDash val="solid"/>
+          <a:miter lim="800000"/>
+        </a:ln>
+      </a:lnStyleLst>
+      <a:effectStyleLst>
+        <a:effectStyle>
+          <a:effectLst/>
+        </a:effectStyle>
+        <a:effectStyle>
+          <a:effectLst/>
+        </a:effectStyle>
+        <a:effectStyle>
+          <a:effectLst>
+            <a:outerShdw blurRad="57150" dist="19050" dir="5400000" algn="ctr" rotWithShape="0">
+              <a:srgbClr val="000000">
+                <a:alpha val="63000"/>
+              </a:srgbClr>
+            </a:outerShdw>
+          </a:effectLst>
+        </a:effectStyle>
+      </a:effectStyleLst>
+      <a:bgFillStyleLst>
+        <a:solidFill>
+          <a:schemeClr val="phClr"/>
+        </a:solidFill>
+        <a:solidFill>
+          <a:schemeClr val="phClr">
+            <a:tint val="95000"/>
+            <a:satMod val="170000"/>
+          </a:schemeClr>
+        </a:solidFill>
+        <a:gradFill rotWithShape="1">
+          <a:gsLst>
+            <a:gs pos="0">
+              <a:schemeClr val="phClr">
+                <a:tint val="93000"/>
+                <a:satMod val="150000"/>
+                <a:shade val="98000"/>
+                <a:lumMod val="102000"/>
+              </a:schemeClr>
+            </a:gs>
+            <a:gs pos="50000">
+              <a:schemeClr val="phClr">
+                <a:tint val="98000"/>
+                <a:satMod val="130000"/>
+                <a:shade val="90000"/>
+                <a:lumMod val="103000"/>
+              </a:schemeClr>
+            </a:gs>
+            <a:gs pos="100000">
+              <a:schemeClr val="phClr">
+                <a:shade val="63000"/>
+                <a:satMod val="120000"/>
+              </a:schemeClr>
+            </a:gs>
+          </a:gsLst>
+          <a:lin ang="5400000" scaled="0"/>
+        </a:gradFill>
+      </a:bgFillStyleLst>
+    </a:fmtScheme>
+  </a:themeElements>
+  <a:objectDefaults/>
+  <a:extraClrSchemeLst/>
+  <a:extLst>
+    <a:ext uri="{05A4C25C-085E-4340-85A3-A5531E510DB2}">
+      <thm15:themeFamily xmlns:thm15="http://schemas.microsoft.com/office/thememl/2012/main" name="Office Theme" id="{62F939B6-93AF-4DB8-9C6B-D6C7DFDC589F}" vid="{4A3C46E8-61CC-4603-A589-7422A47A8E4A}"/>
+    </a:ext>
+  </a:extLst>
+</a:theme>
 </file>
--- a/task_description/Brainstorming.pptx
+++ b/task_description/Brainstorming.pptx
@@ -12577,7 +12577,7 @@
         </p:nvSpPr>
         <p:spPr>
           <a:xfrm>
-            <a:off x="6183640" y="2741533"/>
+            <a:off x="6148749" y="3520696"/>
             <a:ext cx="384003" cy="382667"/>
           </a:xfrm>
           <a:prstGeom prst="ellipse">
@@ -12678,60 +12678,6 @@
               <a:schemeClr val="tx1"/>
             </a:solidFill>
             <a:prstDash val="dash"/>
-          </a:ln>
-        </p:spPr>
-        <p:style>
-          <a:lnRef idx="2">
-            <a:schemeClr val="accent1">
-              <a:shade val="50000"/>
-            </a:schemeClr>
-          </a:lnRef>
-          <a:fillRef idx="1">
-            <a:schemeClr val="accent1"/>
-          </a:fillRef>
-          <a:effectRef idx="0">
-            <a:schemeClr val="accent1"/>
-          </a:effectRef>
-          <a:fontRef idx="minor">
-            <a:schemeClr val="lt1"/>
-          </a:fontRef>
-        </p:style>
-        <p:txBody>
-          <a:bodyPr rtlCol="0" anchor="ctr"/>
-          <a:lstStyle/>
-          <a:p>
-            <a:pPr algn="ctr"/>
-            <a:endParaRPr lang="de-CH"/>
-          </a:p>
-        </p:txBody>
-      </p:sp>
-      <p:sp>
-        <p:nvSpPr>
-          <p:cNvPr id="62" name="Oval 61">
-            <a:extLst>
-              <a:ext uri="{FF2B5EF4-FFF2-40B4-BE49-F238E27FC236}">
-                <a16:creationId xmlns:a16="http://schemas.microsoft.com/office/drawing/2014/main" id="{68BBDCDB-DFC0-4899-8B7B-96986B61FDBD}"/>
-              </a:ext>
-            </a:extLst>
-          </p:cNvPr>
-          <p:cNvSpPr/>
-          <p:nvPr/>
-        </p:nvSpPr>
-        <p:spPr>
-          <a:xfrm>
-            <a:off x="6188619" y="4262188"/>
-            <a:ext cx="384003" cy="382667"/>
-          </a:xfrm>
-          <a:prstGeom prst="ellipse">
-            <a:avLst/>
-          </a:prstGeom>
-          <a:solidFill>
-            <a:schemeClr val="bg1">
-              <a:lumMod val="85000"/>
-            </a:schemeClr>
-          </a:solidFill>
-          <a:ln>
-            <a:noFill/>
           </a:ln>
         </p:spPr>
         <p:style>
@@ -13789,6 +13735,453 @@
           </a:prstGeom>
         </p:spPr>
       </p:pic>
+      <p:pic>
+        <p:nvPicPr>
+          <p:cNvPr id="28" name="Picture 27">
+            <a:extLst>
+              <a:ext uri="{FF2B5EF4-FFF2-40B4-BE49-F238E27FC236}">
+                <a16:creationId xmlns:a16="http://schemas.microsoft.com/office/drawing/2014/main" id="{A3F6ACB2-99E9-4A3A-9A7F-421838BFD0CD}"/>
+              </a:ext>
+            </a:extLst>
+          </p:cNvPr>
+          <p:cNvPicPr>
+            <a:picLocks noChangeAspect="1"/>
+          </p:cNvPicPr>
+          <p:nvPr/>
+        </p:nvPicPr>
+        <p:blipFill>
+          <a:blip r:embed="rId13">
+            <a:extLst>
+              <a:ext uri="{28A0092B-C50C-407E-A947-70E740481C1C}">
+                <a14:useLocalDpi xmlns:a14="http://schemas.microsoft.com/office/drawing/2010/main" val="0"/>
+              </a:ext>
+            </a:extLst>
+          </a:blip>
+          <a:stretch>
+            <a:fillRect/>
+          </a:stretch>
+        </p:blipFill>
+        <p:spPr>
+          <a:xfrm>
+            <a:off x="4744750" y="2322264"/>
+            <a:ext cx="1040990" cy="446139"/>
+          </a:xfrm>
+          <a:prstGeom prst="rect">
+            <a:avLst/>
+          </a:prstGeom>
+          <a:effectLst>
+            <a:outerShdw blurRad="63500" sx="102000" sy="102000" algn="ctr" rotWithShape="0">
+              <a:prstClr val="black">
+                <a:alpha val="40000"/>
+              </a:prstClr>
+            </a:outerShdw>
+          </a:effectLst>
+        </p:spPr>
+      </p:pic>
+      <p:sp>
+        <p:nvSpPr>
+          <p:cNvPr id="77" name="TextBox 76">
+            <a:extLst>
+              <a:ext uri="{FF2B5EF4-FFF2-40B4-BE49-F238E27FC236}">
+                <a16:creationId xmlns:a16="http://schemas.microsoft.com/office/drawing/2014/main" id="{5C16668D-9760-4A5A-A992-0DE508EE34E4}"/>
+              </a:ext>
+            </a:extLst>
+          </p:cNvPr>
+          <p:cNvSpPr txBox="1"/>
+          <p:nvPr/>
+        </p:nvSpPr>
+        <p:spPr>
+          <a:xfrm>
+            <a:off x="7091998" y="3429938"/>
+            <a:ext cx="1376659" cy="369332"/>
+          </a:xfrm>
+          <a:prstGeom prst="rect">
+            <a:avLst/>
+          </a:prstGeom>
+          <a:noFill/>
+        </p:spPr>
+        <p:txBody>
+          <a:bodyPr wrap="none" rtlCol="0">
+            <a:spAutoFit/>
+          </a:bodyPr>
+          <a:lstStyle/>
+          <a:p>
+            <a:r>
+              <a:rPr lang="de-CH" dirty="0" err="1"/>
+              <a:t>Project_data</a:t>
+            </a:r>
+            <a:endParaRPr lang="de-CH" dirty="0"/>
+          </a:p>
+        </p:txBody>
+      </p:sp>
+      <p:sp>
+        <p:nvSpPr>
+          <p:cNvPr id="79" name="TextBox 78">
+            <a:extLst>
+              <a:ext uri="{FF2B5EF4-FFF2-40B4-BE49-F238E27FC236}">
+                <a16:creationId xmlns:a16="http://schemas.microsoft.com/office/drawing/2014/main" id="{8555C5A5-4555-41AE-969C-D3B90DD725AA}"/>
+              </a:ext>
+            </a:extLst>
+          </p:cNvPr>
+          <p:cNvSpPr txBox="1"/>
+          <p:nvPr/>
+        </p:nvSpPr>
+        <p:spPr>
+          <a:xfrm>
+            <a:off x="7244907" y="1631632"/>
+            <a:ext cx="1361463" cy="369332"/>
+          </a:xfrm>
+          <a:prstGeom prst="rect">
+            <a:avLst/>
+          </a:prstGeom>
+          <a:noFill/>
+        </p:spPr>
+        <p:txBody>
+          <a:bodyPr wrap="none" rtlCol="0">
+            <a:spAutoFit/>
+          </a:bodyPr>
+          <a:lstStyle/>
+          <a:p>
+            <a:r>
+              <a:rPr lang="de-CH" dirty="0" err="1"/>
+              <a:t>Tender_data</a:t>
+            </a:r>
+            <a:endParaRPr lang="de-CH" dirty="0"/>
+          </a:p>
+        </p:txBody>
+      </p:sp>
+      <p:sp>
+        <p:nvSpPr>
+          <p:cNvPr id="81" name="TextBox 80">
+            <a:extLst>
+              <a:ext uri="{FF2B5EF4-FFF2-40B4-BE49-F238E27FC236}">
+                <a16:creationId xmlns:a16="http://schemas.microsoft.com/office/drawing/2014/main" id="{65292287-E578-4788-8E2F-333F1E8A43D4}"/>
+              </a:ext>
+            </a:extLst>
+          </p:cNvPr>
+          <p:cNvSpPr txBox="1"/>
+          <p:nvPr/>
+        </p:nvSpPr>
+        <p:spPr>
+          <a:xfrm>
+            <a:off x="6642251" y="5007044"/>
+            <a:ext cx="2429383" cy="369332"/>
+          </a:xfrm>
+          <a:prstGeom prst="rect">
+            <a:avLst/>
+          </a:prstGeom>
+          <a:noFill/>
+        </p:spPr>
+        <p:txBody>
+          <a:bodyPr wrap="none" rtlCol="0">
+            <a:spAutoFit/>
+          </a:bodyPr>
+          <a:lstStyle/>
+          <a:p>
+            <a:r>
+              <a:rPr lang="de-CH" dirty="0" err="1"/>
+              <a:t>National_statistics_data</a:t>
+            </a:r>
+            <a:endParaRPr lang="de-CH" dirty="0"/>
+          </a:p>
+        </p:txBody>
+      </p:sp>
+      <p:cxnSp>
+        <p:nvCxnSpPr>
+          <p:cNvPr id="83" name="Straight Arrow Connector 82">
+            <a:extLst>
+              <a:ext uri="{FF2B5EF4-FFF2-40B4-BE49-F238E27FC236}">
+                <a16:creationId xmlns:a16="http://schemas.microsoft.com/office/drawing/2014/main" id="{7BDBEE61-082D-4E0F-B10A-F006F0D7849C}"/>
+              </a:ext>
+            </a:extLst>
+          </p:cNvPr>
+          <p:cNvCxnSpPr>
+            <a:cxnSpLocks/>
+            <a:endCxn id="56" idx="1"/>
+          </p:cNvCxnSpPr>
+          <p:nvPr/>
+        </p:nvCxnSpPr>
+        <p:spPr>
+          <a:xfrm>
+            <a:off x="5432583" y="3060216"/>
+            <a:ext cx="772402" cy="516520"/>
+          </a:xfrm>
+          <a:prstGeom prst="straightConnector1">
+            <a:avLst/>
+          </a:prstGeom>
+          <a:ln>
+            <a:tailEnd type="triangle"/>
+          </a:ln>
+        </p:spPr>
+        <p:style>
+          <a:lnRef idx="1">
+            <a:schemeClr val="accent1"/>
+          </a:lnRef>
+          <a:fillRef idx="0">
+            <a:schemeClr val="accent1"/>
+          </a:fillRef>
+          <a:effectRef idx="0">
+            <a:schemeClr val="accent1"/>
+          </a:effectRef>
+          <a:fontRef idx="minor">
+            <a:schemeClr val="tx1"/>
+          </a:fontRef>
+        </p:style>
+      </p:cxnSp>
+      <p:cxnSp>
+        <p:nvCxnSpPr>
+          <p:cNvPr id="87" name="Straight Arrow Connector 86">
+            <a:extLst>
+              <a:ext uri="{FF2B5EF4-FFF2-40B4-BE49-F238E27FC236}">
+                <a16:creationId xmlns:a16="http://schemas.microsoft.com/office/drawing/2014/main" id="{C9C2C1D1-7A62-420A-8A5C-E973D1D1DC28}"/>
+              </a:ext>
+            </a:extLst>
+          </p:cNvPr>
+          <p:cNvCxnSpPr>
+            <a:cxnSpLocks/>
+            <a:stCxn id="78" idx="3"/>
+            <a:endCxn id="56" idx="3"/>
+          </p:cNvCxnSpPr>
+          <p:nvPr/>
+        </p:nvCxnSpPr>
+        <p:spPr>
+          <a:xfrm flipV="1">
+            <a:off x="5857728" y="3847323"/>
+            <a:ext cx="347257" cy="824045"/>
+          </a:xfrm>
+          <a:prstGeom prst="straightConnector1">
+            <a:avLst/>
+          </a:prstGeom>
+          <a:ln>
+            <a:tailEnd type="triangle"/>
+          </a:ln>
+        </p:spPr>
+        <p:style>
+          <a:lnRef idx="1">
+            <a:schemeClr val="accent1"/>
+          </a:lnRef>
+          <a:fillRef idx="0">
+            <a:schemeClr val="accent1"/>
+          </a:fillRef>
+          <a:effectRef idx="0">
+            <a:schemeClr val="accent1"/>
+          </a:effectRef>
+          <a:fontRef idx="minor">
+            <a:schemeClr val="tx1"/>
+          </a:fontRef>
+        </p:style>
+      </p:cxnSp>
+      <p:cxnSp>
+        <p:nvCxnSpPr>
+          <p:cNvPr id="88" name="Straight Arrow Connector 87">
+            <a:extLst>
+              <a:ext uri="{FF2B5EF4-FFF2-40B4-BE49-F238E27FC236}">
+                <a16:creationId xmlns:a16="http://schemas.microsoft.com/office/drawing/2014/main" id="{A9BAEB93-313A-4F23-9776-3F3801F40268}"/>
+              </a:ext>
+            </a:extLst>
+          </p:cNvPr>
+          <p:cNvCxnSpPr>
+            <a:cxnSpLocks/>
+            <a:endCxn id="56" idx="4"/>
+          </p:cNvCxnSpPr>
+          <p:nvPr/>
+        </p:nvCxnSpPr>
+        <p:spPr>
+          <a:xfrm flipV="1">
+            <a:off x="5442231" y="3903363"/>
+            <a:ext cx="898520" cy="1706504"/>
+          </a:xfrm>
+          <a:prstGeom prst="straightConnector1">
+            <a:avLst/>
+          </a:prstGeom>
+          <a:ln>
+            <a:tailEnd type="triangle"/>
+          </a:ln>
+        </p:spPr>
+        <p:style>
+          <a:lnRef idx="1">
+            <a:schemeClr val="accent1"/>
+          </a:lnRef>
+          <a:fillRef idx="0">
+            <a:schemeClr val="accent1"/>
+          </a:fillRef>
+          <a:effectRef idx="0">
+            <a:schemeClr val="accent1"/>
+          </a:effectRef>
+          <a:fontRef idx="minor">
+            <a:schemeClr val="tx1"/>
+          </a:fontRef>
+        </p:style>
+      </p:cxnSp>
+      <p:cxnSp>
+        <p:nvCxnSpPr>
+          <p:cNvPr id="89" name="Straight Arrow Connector 88">
+            <a:extLst>
+              <a:ext uri="{FF2B5EF4-FFF2-40B4-BE49-F238E27FC236}">
+                <a16:creationId xmlns:a16="http://schemas.microsoft.com/office/drawing/2014/main" id="{75DCB1E8-9328-4B01-AE83-F4FD9B769108}"/>
+              </a:ext>
+            </a:extLst>
+          </p:cNvPr>
+          <p:cNvCxnSpPr>
+            <a:cxnSpLocks/>
+            <a:endCxn id="56" idx="0"/>
+          </p:cNvCxnSpPr>
+          <p:nvPr/>
+        </p:nvCxnSpPr>
+        <p:spPr>
+          <a:xfrm>
+            <a:off x="5297426" y="1877736"/>
+            <a:ext cx="1043325" cy="1642960"/>
+          </a:xfrm>
+          <a:prstGeom prst="straightConnector1">
+            <a:avLst/>
+          </a:prstGeom>
+          <a:ln>
+            <a:tailEnd type="triangle"/>
+          </a:ln>
+        </p:spPr>
+        <p:style>
+          <a:lnRef idx="1">
+            <a:schemeClr val="accent1"/>
+          </a:lnRef>
+          <a:fillRef idx="0">
+            <a:schemeClr val="accent1"/>
+          </a:fillRef>
+          <a:effectRef idx="0">
+            <a:schemeClr val="accent1"/>
+          </a:effectRef>
+          <a:fontRef idx="minor">
+            <a:schemeClr val="tx1"/>
+          </a:fontRef>
+        </p:style>
+      </p:cxnSp>
+      <p:cxnSp>
+        <p:nvCxnSpPr>
+          <p:cNvPr id="90" name="Straight Arrow Connector 89">
+            <a:extLst>
+              <a:ext uri="{FF2B5EF4-FFF2-40B4-BE49-F238E27FC236}">
+                <a16:creationId xmlns:a16="http://schemas.microsoft.com/office/drawing/2014/main" id="{3D9AE8B7-47C0-49F4-A300-614323C5EDCE}"/>
+              </a:ext>
+            </a:extLst>
+          </p:cNvPr>
+          <p:cNvCxnSpPr>
+            <a:cxnSpLocks/>
+            <a:stCxn id="56" idx="7"/>
+          </p:cNvCxnSpPr>
+          <p:nvPr/>
+        </p:nvCxnSpPr>
+        <p:spPr>
+          <a:xfrm flipV="1">
+            <a:off x="6476516" y="1856900"/>
+            <a:ext cx="695894" cy="1719836"/>
+          </a:xfrm>
+          <a:prstGeom prst="straightConnector1">
+            <a:avLst/>
+          </a:prstGeom>
+          <a:ln>
+            <a:tailEnd type="triangle"/>
+          </a:ln>
+        </p:spPr>
+        <p:style>
+          <a:lnRef idx="1">
+            <a:schemeClr val="accent1"/>
+          </a:lnRef>
+          <a:fillRef idx="0">
+            <a:schemeClr val="accent1"/>
+          </a:fillRef>
+          <a:effectRef idx="0">
+            <a:schemeClr val="accent1"/>
+          </a:effectRef>
+          <a:fontRef idx="minor">
+            <a:schemeClr val="tx1"/>
+          </a:fontRef>
+        </p:style>
+      </p:cxnSp>
+      <p:cxnSp>
+        <p:nvCxnSpPr>
+          <p:cNvPr id="91" name="Straight Arrow Connector 90">
+            <a:extLst>
+              <a:ext uri="{FF2B5EF4-FFF2-40B4-BE49-F238E27FC236}">
+                <a16:creationId xmlns:a16="http://schemas.microsoft.com/office/drawing/2014/main" id="{763D4D26-67DF-49C1-95B4-2A92ED49F100}"/>
+              </a:ext>
+            </a:extLst>
+          </p:cNvPr>
+          <p:cNvCxnSpPr>
+            <a:cxnSpLocks/>
+            <a:stCxn id="56" idx="6"/>
+          </p:cNvCxnSpPr>
+          <p:nvPr/>
+        </p:nvCxnSpPr>
+        <p:spPr>
+          <a:xfrm flipV="1">
+            <a:off x="6532752" y="3643924"/>
+            <a:ext cx="493000" cy="68106"/>
+          </a:xfrm>
+          <a:prstGeom prst="straightConnector1">
+            <a:avLst/>
+          </a:prstGeom>
+          <a:ln>
+            <a:tailEnd type="triangle"/>
+          </a:ln>
+        </p:spPr>
+        <p:style>
+          <a:lnRef idx="1">
+            <a:schemeClr val="accent1"/>
+          </a:lnRef>
+          <a:fillRef idx="0">
+            <a:schemeClr val="accent1"/>
+          </a:fillRef>
+          <a:effectRef idx="0">
+            <a:schemeClr val="accent1"/>
+          </a:effectRef>
+          <a:fontRef idx="minor">
+            <a:schemeClr val="tx1"/>
+          </a:fontRef>
+        </p:style>
+      </p:cxnSp>
+      <p:cxnSp>
+        <p:nvCxnSpPr>
+          <p:cNvPr id="92" name="Straight Arrow Connector 91">
+            <a:extLst>
+              <a:ext uri="{FF2B5EF4-FFF2-40B4-BE49-F238E27FC236}">
+                <a16:creationId xmlns:a16="http://schemas.microsoft.com/office/drawing/2014/main" id="{87E4324B-C57A-4B7B-B3D2-812C320F4604}"/>
+              </a:ext>
+            </a:extLst>
+          </p:cNvPr>
+          <p:cNvCxnSpPr>
+            <a:cxnSpLocks/>
+            <a:stCxn id="56" idx="6"/>
+            <a:endCxn id="81" idx="1"/>
+          </p:cNvCxnSpPr>
+          <p:nvPr/>
+        </p:nvCxnSpPr>
+        <p:spPr>
+          <a:xfrm>
+            <a:off x="6532752" y="3712030"/>
+            <a:ext cx="109499" cy="1479680"/>
+          </a:xfrm>
+          <a:prstGeom prst="straightConnector1">
+            <a:avLst/>
+          </a:prstGeom>
+          <a:ln>
+            <a:tailEnd type="triangle"/>
+          </a:ln>
+        </p:spPr>
+        <p:style>
+          <a:lnRef idx="1">
+            <a:schemeClr val="accent1"/>
+          </a:lnRef>
+          <a:fillRef idx="0">
+            <a:schemeClr val="accent1"/>
+          </a:fillRef>
+          <a:effectRef idx="0">
+            <a:schemeClr val="accent1"/>
+          </a:effectRef>
+          <a:fontRef idx="minor">
+            <a:schemeClr val="tx1"/>
+          </a:fontRef>
+        </p:style>
+      </p:cxnSp>
     </p:spTree>
     <p:extLst>
       <p:ext uri="{BB962C8B-B14F-4D97-AF65-F5344CB8AC3E}">

--- a/task_description/Brainstorming.pptx
+++ b/task_description/Brainstorming.pptx
@@ -5,21 +5,20 @@
     <p:sldMasterId id="2147483648" r:id="rId1"/>
   </p:sldMasterIdLst>
   <p:notesMasterIdLst>
-    <p:notesMasterId r:id="rId14"/>
+    <p:notesMasterId r:id="rId13"/>
   </p:notesMasterIdLst>
   <p:sldIdLst>
-    <p:sldId id="263" r:id="rId2"/>
-    <p:sldId id="264" r:id="rId3"/>
-    <p:sldId id="256" r:id="rId4"/>
-    <p:sldId id="265" r:id="rId5"/>
-    <p:sldId id="267" r:id="rId6"/>
-    <p:sldId id="266" r:id="rId7"/>
-    <p:sldId id="262" r:id="rId8"/>
-    <p:sldId id="261" r:id="rId9"/>
-    <p:sldId id="257" r:id="rId10"/>
-    <p:sldId id="259" r:id="rId11"/>
-    <p:sldId id="260" r:id="rId12"/>
-    <p:sldId id="258" r:id="rId13"/>
+    <p:sldId id="268" r:id="rId2"/>
+    <p:sldId id="263" r:id="rId3"/>
+    <p:sldId id="264" r:id="rId4"/>
+    <p:sldId id="256" r:id="rId5"/>
+    <p:sldId id="265" r:id="rId6"/>
+    <p:sldId id="262" r:id="rId7"/>
+    <p:sldId id="261" r:id="rId8"/>
+    <p:sldId id="257" r:id="rId9"/>
+    <p:sldId id="259" r:id="rId10"/>
+    <p:sldId id="260" r:id="rId11"/>
+    <p:sldId id="258" r:id="rId12"/>
   </p:sldIdLst>
   <p:sldSz cx="12192000" cy="6858000"/>
   <p:notesSz cx="6858000" cy="9144000"/>
@@ -541,7 +540,91 @@
           <a:p>
             <a:fld id="{267259FC-14D1-48B2-B0B3-4EC7838B27A7}" type="slidenum">
               <a:rPr lang="de-CH" smtClean="0"/>
-              <a:t>4</a:t>
+              <a:t>1</a:t>
+            </a:fld>
+            <a:endParaRPr lang="de-CH"/>
+          </a:p>
+        </p:txBody>
+      </p:sp>
+    </p:spTree>
+    <p:extLst>
+      <p:ext uri="{BB962C8B-B14F-4D97-AF65-F5344CB8AC3E}">
+        <p14:creationId xmlns:p14="http://schemas.microsoft.com/office/powerpoint/2010/main" val="4052541421"/>
+      </p:ext>
+    </p:extLst>
+  </p:cSld>
+  <p:clrMapOvr>
+    <a:masterClrMapping/>
+  </p:clrMapOvr>
+</p:notes>
+</file>
+
+<file path=ppt/notesSlides/notesSlide2.xml><?xml version="1.0" encoding="utf-8"?>
+<p:notes xmlns:a="http://schemas.openxmlformats.org/drawingml/2006/main" xmlns:r="http://schemas.openxmlformats.org/officeDocument/2006/relationships" xmlns:p="http://schemas.openxmlformats.org/presentationml/2006/main">
+  <p:cSld>
+    <p:spTree>
+      <p:nvGrpSpPr>
+        <p:cNvPr id="1" name=""/>
+        <p:cNvGrpSpPr/>
+        <p:nvPr/>
+      </p:nvGrpSpPr>
+      <p:grpSpPr>
+        <a:xfrm>
+          <a:off x="0" y="0"/>
+          <a:ext cx="0" cy="0"/>
+          <a:chOff x="0" y="0"/>
+          <a:chExt cx="0" cy="0"/>
+        </a:xfrm>
+      </p:grpSpPr>
+      <p:sp>
+        <p:nvSpPr>
+          <p:cNvPr id="2" name="Slide Image Placeholder 1"/>
+          <p:cNvSpPr>
+            <a:spLocks noGrp="1" noRot="1" noChangeAspect="1"/>
+          </p:cNvSpPr>
+          <p:nvPr>
+            <p:ph type="sldImg"/>
+          </p:nvPr>
+        </p:nvSpPr>
+        <p:spPr/>
+      </p:sp>
+      <p:sp>
+        <p:nvSpPr>
+          <p:cNvPr id="3" name="Notes Placeholder 2"/>
+          <p:cNvSpPr>
+            <a:spLocks noGrp="1"/>
+          </p:cNvSpPr>
+          <p:nvPr>
+            <p:ph type="body" idx="1"/>
+          </p:nvPr>
+        </p:nvSpPr>
+        <p:spPr/>
+        <p:txBody>
+          <a:bodyPr/>
+          <a:lstStyle/>
+          <a:p>
+            <a:endParaRPr lang="de-CH" dirty="0"/>
+          </a:p>
+        </p:txBody>
+      </p:sp>
+      <p:sp>
+        <p:nvSpPr>
+          <p:cNvPr id="4" name="Slide Number Placeholder 3"/>
+          <p:cNvSpPr>
+            <a:spLocks noGrp="1"/>
+          </p:cNvSpPr>
+          <p:nvPr>
+            <p:ph type="sldNum" sz="quarter" idx="5"/>
+          </p:nvPr>
+        </p:nvSpPr>
+        <p:spPr/>
+        <p:txBody>
+          <a:bodyPr/>
+          <a:lstStyle/>
+          <a:p>
+            <a:fld id="{267259FC-14D1-48B2-B0B3-4EC7838B27A7}" type="slidenum">
+              <a:rPr lang="de-CH" smtClean="0"/>
+              <a:t>5</a:t>
             </a:fld>
             <a:endParaRPr lang="de-CH"/>
           </a:p>
@@ -3797,10 +3880,203 @@
       </p:grpSpPr>
       <p:sp>
         <p:nvSpPr>
-          <p:cNvPr id="17" name="Rectangle 16">
-            <a:extLst>
-              <a:ext uri="{FF2B5EF4-FFF2-40B4-BE49-F238E27FC236}">
-                <a16:creationId xmlns:a16="http://schemas.microsoft.com/office/drawing/2014/main" id="{3C3D6B3A-1E47-4A30-8332-F24929504714}"/>
+          <p:cNvPr id="19" name="Rectangle 1">
+            <a:extLst>
+              <a:ext uri="{FF2B5EF4-FFF2-40B4-BE49-F238E27FC236}">
+                <a16:creationId xmlns:a16="http://schemas.microsoft.com/office/drawing/2014/main" id="{FE4FD1BF-8831-496E-B5AE-8E686BB32105}"/>
+              </a:ext>
+            </a:extLst>
+          </p:cNvPr>
+          <p:cNvSpPr>
+            <a:spLocks noChangeArrowheads="1"/>
+          </p:cNvSpPr>
+          <p:nvPr/>
+        </p:nvSpPr>
+        <p:spPr bwMode="auto">
+          <a:xfrm>
+            <a:off x="177971" y="200752"/>
+            <a:ext cx="5674951" cy="661720"/>
+          </a:xfrm>
+          <a:prstGeom prst="rect">
+            <a:avLst/>
+          </a:prstGeom>
+          <a:noFill/>
+          <a:ln>
+            <a:noFill/>
+          </a:ln>
+          <a:effectLst/>
+          <a:extLst>
+            <a:ext uri="{909E8E84-426E-40DD-AFC4-6F175D3DCCD1}">
+              <a14:hiddenFill xmlns:a14="http://schemas.microsoft.com/office/drawing/2010/main">
+                <a:solidFill>
+                  <a:schemeClr val="accent1"/>
+                </a:solidFill>
+              </a14:hiddenFill>
+            </a:ext>
+            <a:ext uri="{91240B29-F687-4F45-9708-019B960494DF}">
+              <a14:hiddenLine xmlns:a14="http://schemas.microsoft.com/office/drawing/2010/main" w="9525">
+                <a:solidFill>
+                  <a:schemeClr val="tx1"/>
+                </a:solidFill>
+                <a:miter lim="800000"/>
+                <a:headEnd/>
+                <a:tailEnd/>
+              </a14:hiddenLine>
+            </a:ext>
+            <a:ext uri="{AF507438-7753-43E0-B8FC-AC1667EBCBE1}">
+              <a14:hiddenEffects xmlns:a14="http://schemas.microsoft.com/office/drawing/2010/main">
+                <a:effectLst>
+                  <a:outerShdw dist="35921" dir="2700000" algn="ctr" rotWithShape="0">
+                    <a:schemeClr val="bg2"/>
+                  </a:outerShdw>
+                </a:effectLst>
+              </a14:hiddenEffects>
+            </a:ext>
+          </a:extLst>
+        </p:spPr>
+        <p:txBody>
+          <a:bodyPr vert="horz" wrap="none" lIns="91440" tIns="45720" rIns="91440" bIns="0" numCol="1" anchor="ctr" anchorCtr="0" compatLnSpc="1">
+            <a:prstTxWarp prst="textNoShape">
+              <a:avLst/>
+            </a:prstTxWarp>
+            <a:spAutoFit/>
+          </a:bodyPr>
+          <a:lstStyle/>
+          <a:p>
+            <a:pPr marL="0" marR="0" lvl="0" indent="0" algn="l" defTabSz="914400" rtl="0" eaLnBrk="0" fontAlgn="base" latinLnBrk="0" hangingPunct="0">
+              <a:lnSpc>
+                <a:spcPct val="100000"/>
+              </a:lnSpc>
+              <a:spcBef>
+                <a:spcPct val="0"/>
+              </a:spcBef>
+              <a:spcAft>
+                <a:spcPct val="0"/>
+              </a:spcAft>
+              <a:buClrTx/>
+              <a:buSzTx/>
+              <a:buFontTx/>
+              <a:buNone/>
+              <a:tabLst/>
+            </a:pPr>
+            <a:r>
+              <a:rPr kumimoji="0" lang="de-CH" altLang="de-DE" sz="4000" b="1" i="0" u="none" strike="noStrike" cap="none" normalizeH="0" baseline="0" dirty="0" err="1">
+                <a:ln>
+                  <a:noFill/>
+                </a:ln>
+                <a:solidFill>
+                  <a:schemeClr val="tx1"/>
+                </a:solidFill>
+                <a:effectLst/>
+                <a:latin typeface="Abadi" panose="020B0604020104020204" pitchFamily="34" charset="0"/>
+                <a:ea typeface="Arial" panose="020B0604020202020204" pitchFamily="34" charset="0"/>
+                <a:cs typeface="Arial" panose="020B0604020202020204" pitchFamily="34" charset="0"/>
+              </a:rPr>
+              <a:t>Agentic</a:t>
+            </a:r>
+            <a:r>
+              <a:rPr kumimoji="0" lang="de-CH" altLang="de-DE" sz="4000" b="1" i="0" u="none" strike="noStrike" cap="none" normalizeH="0" baseline="0" dirty="0">
+                <a:ln>
+                  <a:noFill/>
+                </a:ln>
+                <a:solidFill>
+                  <a:schemeClr val="tx1"/>
+                </a:solidFill>
+                <a:effectLst/>
+                <a:latin typeface="Abadi" panose="020B0604020104020204" pitchFamily="34" charset="0"/>
+                <a:ea typeface="Arial" panose="020B0604020202020204" pitchFamily="34" charset="0"/>
+                <a:cs typeface="Arial" panose="020B0604020202020204" pitchFamily="34" charset="0"/>
+              </a:rPr>
+              <a:t> </a:t>
+            </a:r>
+            <a:r>
+              <a:rPr kumimoji="0" lang="de-CH" altLang="de-DE" sz="4000" b="1" i="0" u="none" strike="noStrike" cap="none" normalizeH="0" baseline="0" dirty="0" err="1">
+                <a:ln>
+                  <a:noFill/>
+                </a:ln>
+                <a:solidFill>
+                  <a:schemeClr val="tx1"/>
+                </a:solidFill>
+                <a:effectLst/>
+                <a:latin typeface="Abadi" panose="020B0604020104020204" pitchFamily="34" charset="0"/>
+                <a:ea typeface="Arial" panose="020B0604020202020204" pitchFamily="34" charset="0"/>
+                <a:cs typeface="Arial" panose="020B0604020202020204" pitchFamily="34" charset="0"/>
+              </a:rPr>
+              <a:t>Scraping</a:t>
+            </a:r>
+            <a:r>
+              <a:rPr kumimoji="0" lang="de-CH" altLang="de-DE" sz="4000" b="1" i="0" u="none" strike="noStrike" cap="none" normalizeH="0" baseline="0" dirty="0">
+                <a:ln>
+                  <a:noFill/>
+                </a:ln>
+                <a:solidFill>
+                  <a:schemeClr val="tx1"/>
+                </a:solidFill>
+                <a:effectLst/>
+                <a:latin typeface="Abadi" panose="020B0604020104020204" pitchFamily="34" charset="0"/>
+                <a:ea typeface="Arial" panose="020B0604020202020204" pitchFamily="34" charset="0"/>
+                <a:cs typeface="Arial" panose="020B0604020202020204" pitchFamily="34" charset="0"/>
+              </a:rPr>
+              <a:t> Pipeline</a:t>
+            </a:r>
+            <a:endParaRPr kumimoji="0" lang="de-CH" altLang="de-DE" sz="6000" b="0" i="0" u="none" strike="noStrike" cap="none" normalizeH="0" baseline="0" dirty="0">
+              <a:ln>
+                <a:noFill/>
+              </a:ln>
+              <a:solidFill>
+                <a:schemeClr val="tx1"/>
+              </a:solidFill>
+              <a:effectLst/>
+              <a:latin typeface="Abadi" panose="020B0604020104020204" pitchFamily="34" charset="0"/>
+              <a:cs typeface="Arial" panose="020B0604020202020204" pitchFamily="34" charset="0"/>
+            </a:endParaRPr>
+          </a:p>
+        </p:txBody>
+      </p:sp>
+      <p:sp>
+        <p:nvSpPr>
+          <p:cNvPr id="93" name="TextBox 92">
+            <a:extLst>
+              <a:ext uri="{FF2B5EF4-FFF2-40B4-BE49-F238E27FC236}">
+                <a16:creationId xmlns:a16="http://schemas.microsoft.com/office/drawing/2014/main" id="{45766659-1230-4C0F-B079-C6ADF3A748CE}"/>
+              </a:ext>
+            </a:extLst>
+          </p:cNvPr>
+          <p:cNvSpPr txBox="1"/>
+          <p:nvPr/>
+        </p:nvSpPr>
+        <p:spPr>
+          <a:xfrm>
+            <a:off x="836240" y="6472582"/>
+            <a:ext cx="1632178" cy="369332"/>
+          </a:xfrm>
+          <a:prstGeom prst="rect">
+            <a:avLst/>
+          </a:prstGeom>
+          <a:noFill/>
+        </p:spPr>
+        <p:txBody>
+          <a:bodyPr wrap="none" rtlCol="0">
+            <a:spAutoFit/>
+          </a:bodyPr>
+          <a:lstStyle/>
+          <a:p>
+            <a:r>
+              <a:rPr lang="de-CH" b="1" dirty="0">
+                <a:latin typeface="Abadi" panose="020B0604020104020204" pitchFamily="34" charset="0"/>
+                <a:cs typeface="Arial" panose="020B0604020202020204" pitchFamily="34" charset="0"/>
+              </a:rPr>
+              <a:t>Online Sources</a:t>
+            </a:r>
+          </a:p>
+        </p:txBody>
+      </p:sp>
+      <p:sp>
+        <p:nvSpPr>
+          <p:cNvPr id="94" name="Rectangle 93">
+            <a:extLst>
+              <a:ext uri="{FF2B5EF4-FFF2-40B4-BE49-F238E27FC236}">
+                <a16:creationId xmlns:a16="http://schemas.microsoft.com/office/drawing/2014/main" id="{5D551BA1-E3A9-4EE4-AC61-0679E34D1A01}"/>
               </a:ext>
             </a:extLst>
           </p:cNvPr>
@@ -3809,15 +4085,19 @@
         </p:nvSpPr>
         <p:spPr>
           <a:xfrm>
-            <a:off x="0" y="0"/>
-            <a:ext cx="12192000" cy="6858000"/>
-          </a:xfrm>
-          <a:prstGeom prst="rect">
-            <a:avLst/>
-          </a:prstGeom>
-          <a:solidFill>
-            <a:schemeClr val="tx1"/>
-          </a:solidFill>
+            <a:off x="409575" y="3322546"/>
+            <a:ext cx="2753245" cy="3166121"/>
+          </a:xfrm>
+          <a:prstGeom prst="rect">
+            <a:avLst/>
+          </a:prstGeom>
+          <a:noFill/>
+          <a:ln>
+            <a:solidFill>
+              <a:schemeClr val="tx1"/>
+            </a:solidFill>
+            <a:prstDash val="dash"/>
+          </a:ln>
         </p:spPr>
         <p:style>
           <a:lnRef idx="2">
@@ -3840,16 +4120,75 @@
           <a:lstStyle/>
           <a:p>
             <a:pPr algn="ctr"/>
-            <a:endParaRPr lang="de-CH"/>
-          </a:p>
-        </p:txBody>
-      </p:sp>
-      <p:sp>
-        <p:nvSpPr>
-          <p:cNvPr id="18" name="TextBox 17">
-            <a:extLst>
-              <a:ext uri="{FF2B5EF4-FFF2-40B4-BE49-F238E27FC236}">
-                <a16:creationId xmlns:a16="http://schemas.microsoft.com/office/drawing/2014/main" id="{AB84F5A7-AB1C-4142-9533-07AF62B0F607}"/>
+            <a:endParaRPr lang="de-CH">
+              <a:latin typeface="Arial" panose="020B0604020202020204" pitchFamily="34" charset="0"/>
+              <a:cs typeface="Arial" panose="020B0604020202020204" pitchFamily="34" charset="0"/>
+            </a:endParaRPr>
+          </a:p>
+        </p:txBody>
+      </p:sp>
+      <p:sp>
+        <p:nvSpPr>
+          <p:cNvPr id="95" name="Rectangle 94">
+            <a:extLst>
+              <a:ext uri="{FF2B5EF4-FFF2-40B4-BE49-F238E27FC236}">
+                <a16:creationId xmlns:a16="http://schemas.microsoft.com/office/drawing/2014/main" id="{94FE3009-B2DE-430A-B416-2CD4394B0B53}"/>
+              </a:ext>
+            </a:extLst>
+          </p:cNvPr>
+          <p:cNvSpPr/>
+          <p:nvPr/>
+        </p:nvSpPr>
+        <p:spPr>
+          <a:xfrm>
+            <a:off x="3571355" y="3322546"/>
+            <a:ext cx="2029345" cy="3166122"/>
+          </a:xfrm>
+          <a:prstGeom prst="rect">
+            <a:avLst/>
+          </a:prstGeom>
+          <a:noFill/>
+          <a:ln>
+            <a:solidFill>
+              <a:schemeClr val="tx1"/>
+            </a:solidFill>
+            <a:prstDash val="dash"/>
+          </a:ln>
+        </p:spPr>
+        <p:style>
+          <a:lnRef idx="2">
+            <a:schemeClr val="accent1">
+              <a:shade val="50000"/>
+            </a:schemeClr>
+          </a:lnRef>
+          <a:fillRef idx="1">
+            <a:schemeClr val="accent1"/>
+          </a:fillRef>
+          <a:effectRef idx="0">
+            <a:schemeClr val="accent1"/>
+          </a:effectRef>
+          <a:fontRef idx="minor">
+            <a:schemeClr val="lt1"/>
+          </a:fontRef>
+        </p:style>
+        <p:txBody>
+          <a:bodyPr rtlCol="0" anchor="ctr"/>
+          <a:lstStyle/>
+          <a:p>
+            <a:pPr algn="ctr"/>
+            <a:endParaRPr lang="de-CH">
+              <a:latin typeface="Arial" panose="020B0604020202020204" pitchFamily="34" charset="0"/>
+              <a:cs typeface="Arial" panose="020B0604020202020204" pitchFamily="34" charset="0"/>
+            </a:endParaRPr>
+          </a:p>
+        </p:txBody>
+      </p:sp>
+      <p:sp>
+        <p:nvSpPr>
+          <p:cNvPr id="96" name="TextBox 95">
+            <a:extLst>
+              <a:ext uri="{FF2B5EF4-FFF2-40B4-BE49-F238E27FC236}">
+                <a16:creationId xmlns:a16="http://schemas.microsoft.com/office/drawing/2014/main" id="{C3F4BA95-3A0D-4352-96D1-F1C63DB49896}"/>
               </a:ext>
             </a:extLst>
           </p:cNvPr>
@@ -3858,8 +4197,8 @@
         </p:nvSpPr>
         <p:spPr>
           <a:xfrm>
-            <a:off x="647621" y="2875002"/>
-            <a:ext cx="11544379" cy="1107996"/>
+            <a:off x="3674866" y="6497982"/>
+            <a:ext cx="1622560" cy="369332"/>
           </a:xfrm>
           <a:prstGeom prst="rect">
             <a:avLst/>
@@ -3873,20 +4212,3236 @@
           <a:lstStyle/>
           <a:p>
             <a:r>
-              <a:rPr lang="de-CH" sz="6600" b="1" dirty="0">
+              <a:rPr lang="de-CH" b="1" dirty="0">
+                <a:latin typeface="Abadi" panose="020B0604020104020204" pitchFamily="34" charset="0"/>
+                <a:cs typeface="Arial" panose="020B0604020202020204" pitchFamily="34" charset="0"/>
+              </a:rPr>
+              <a:t>Raw Data Lake</a:t>
+            </a:r>
+          </a:p>
+        </p:txBody>
+      </p:sp>
+      <p:sp>
+        <p:nvSpPr>
+          <p:cNvPr id="97" name="TextBox 96">
+            <a:extLst>
+              <a:ext uri="{FF2B5EF4-FFF2-40B4-BE49-F238E27FC236}">
+                <a16:creationId xmlns:a16="http://schemas.microsoft.com/office/drawing/2014/main" id="{7E34F6D2-7060-4964-BCD0-CE570FF59896}"/>
+              </a:ext>
+            </a:extLst>
+          </p:cNvPr>
+          <p:cNvSpPr txBox="1"/>
+          <p:nvPr/>
+        </p:nvSpPr>
+        <p:spPr>
+          <a:xfrm rot="16200000">
+            <a:off x="-403113" y="4648101"/>
+            <a:ext cx="1162498" cy="369332"/>
+          </a:xfrm>
+          <a:prstGeom prst="rect">
+            <a:avLst/>
+          </a:prstGeom>
+          <a:noFill/>
+        </p:spPr>
+        <p:txBody>
+          <a:bodyPr wrap="none" rtlCol="0">
+            <a:spAutoFit/>
+          </a:bodyPr>
+          <a:lstStyle/>
+          <a:p>
+            <a:r>
+              <a:rPr lang="de-CH" b="1" dirty="0">
+                <a:latin typeface="Abadi" panose="020B0604020104020204" pitchFamily="34" charset="0"/>
+                <a:cs typeface="Arial" panose="020B0604020202020204" pitchFamily="34" charset="0"/>
+              </a:rPr>
+              <a:t>Data Flow</a:t>
+            </a:r>
+          </a:p>
+        </p:txBody>
+      </p:sp>
+      <p:sp>
+        <p:nvSpPr>
+          <p:cNvPr id="98" name="TextBox 97">
+            <a:extLst>
+              <a:ext uri="{FF2B5EF4-FFF2-40B4-BE49-F238E27FC236}">
+                <a16:creationId xmlns:a16="http://schemas.microsoft.com/office/drawing/2014/main" id="{5C8C3050-A14F-46BE-AB7E-06C6BD9806DA}"/>
+              </a:ext>
+            </a:extLst>
+          </p:cNvPr>
+          <p:cNvSpPr txBox="1"/>
+          <p:nvPr/>
+        </p:nvSpPr>
+        <p:spPr>
+          <a:xfrm rot="16200000">
+            <a:off x="-528782" y="2187050"/>
+            <a:ext cx="1452642" cy="369332"/>
+          </a:xfrm>
+          <a:prstGeom prst="rect">
+            <a:avLst/>
+          </a:prstGeom>
+          <a:noFill/>
+        </p:spPr>
+        <p:txBody>
+          <a:bodyPr wrap="none" rtlCol="0">
+            <a:spAutoFit/>
+          </a:bodyPr>
+          <a:lstStyle/>
+          <a:p>
+            <a:r>
+              <a:rPr lang="de-CH" b="1" dirty="0">
+                <a:latin typeface="Abadi" panose="020B0604020104020204" pitchFamily="34" charset="0"/>
+                <a:cs typeface="Arial" panose="020B0604020202020204" pitchFamily="34" charset="0"/>
+              </a:rPr>
+              <a:t>Technologies</a:t>
+            </a:r>
+          </a:p>
+        </p:txBody>
+      </p:sp>
+      <p:sp>
+        <p:nvSpPr>
+          <p:cNvPr id="99" name="Rectangle 98">
+            <a:extLst>
+              <a:ext uri="{FF2B5EF4-FFF2-40B4-BE49-F238E27FC236}">
+                <a16:creationId xmlns:a16="http://schemas.microsoft.com/office/drawing/2014/main" id="{3DDA1F39-A991-4CDA-9604-46F2AA76C474}"/>
+              </a:ext>
+            </a:extLst>
+          </p:cNvPr>
+          <p:cNvSpPr/>
+          <p:nvPr/>
+        </p:nvSpPr>
+        <p:spPr>
+          <a:xfrm>
+            <a:off x="1919718" y="1534080"/>
+            <a:ext cx="2661807" cy="1543567"/>
+          </a:xfrm>
+          <a:prstGeom prst="rect">
+            <a:avLst/>
+          </a:prstGeom>
+          <a:noFill/>
+          <a:ln>
+            <a:solidFill>
+              <a:schemeClr val="tx1"/>
+            </a:solidFill>
+            <a:prstDash val="dash"/>
+          </a:ln>
+        </p:spPr>
+        <p:style>
+          <a:lnRef idx="2">
+            <a:schemeClr val="accent1">
+              <a:shade val="50000"/>
+            </a:schemeClr>
+          </a:lnRef>
+          <a:fillRef idx="1">
+            <a:schemeClr val="accent1"/>
+          </a:fillRef>
+          <a:effectRef idx="0">
+            <a:schemeClr val="accent1"/>
+          </a:effectRef>
+          <a:fontRef idx="minor">
+            <a:schemeClr val="lt1"/>
+          </a:fontRef>
+        </p:style>
+        <p:txBody>
+          <a:bodyPr rtlCol="0" anchor="ctr"/>
+          <a:lstStyle/>
+          <a:p>
+            <a:pPr algn="ctr"/>
+            <a:endParaRPr lang="de-CH">
+              <a:latin typeface="Arial" panose="020B0604020202020204" pitchFamily="34" charset="0"/>
+              <a:cs typeface="Arial" panose="020B0604020202020204" pitchFamily="34" charset="0"/>
+            </a:endParaRPr>
+          </a:p>
+        </p:txBody>
+      </p:sp>
+      <p:sp>
+        <p:nvSpPr>
+          <p:cNvPr id="26" name="Isosceles Triangle 25">
+            <a:extLst>
+              <a:ext uri="{FF2B5EF4-FFF2-40B4-BE49-F238E27FC236}">
+                <a16:creationId xmlns:a16="http://schemas.microsoft.com/office/drawing/2014/main" id="{0730BCD5-BAD1-4F42-B25E-E21D9123E19D}"/>
+              </a:ext>
+            </a:extLst>
+          </p:cNvPr>
+          <p:cNvSpPr/>
+          <p:nvPr/>
+        </p:nvSpPr>
+        <p:spPr>
+          <a:xfrm rot="5400000">
+            <a:off x="3203748" y="4890807"/>
+            <a:ext cx="374839" cy="185473"/>
+          </a:xfrm>
+          <a:prstGeom prst="triangle">
+            <a:avLst/>
+          </a:prstGeom>
+          <a:solidFill>
+            <a:schemeClr val="tx1"/>
+          </a:solidFill>
+          <a:ln>
+            <a:noFill/>
+          </a:ln>
+        </p:spPr>
+        <p:style>
+          <a:lnRef idx="2">
+            <a:schemeClr val="accent1">
+              <a:shade val="50000"/>
+            </a:schemeClr>
+          </a:lnRef>
+          <a:fillRef idx="1">
+            <a:schemeClr val="accent1"/>
+          </a:fillRef>
+          <a:effectRef idx="0">
+            <a:schemeClr val="accent1"/>
+          </a:effectRef>
+          <a:fontRef idx="minor">
+            <a:schemeClr val="lt1"/>
+          </a:fontRef>
+        </p:style>
+        <p:txBody>
+          <a:bodyPr rtlCol="0" anchor="ctr"/>
+          <a:lstStyle/>
+          <a:p>
+            <a:pPr algn="ctr"/>
+            <a:endParaRPr lang="de-CH">
+              <a:latin typeface="Arial" panose="020B0604020202020204" pitchFamily="34" charset="0"/>
+              <a:cs typeface="Arial" panose="020B0604020202020204" pitchFamily="34" charset="0"/>
+            </a:endParaRPr>
+          </a:p>
+        </p:txBody>
+      </p:sp>
+      <p:sp>
+        <p:nvSpPr>
+          <p:cNvPr id="100" name="Isosceles Triangle 99">
+            <a:extLst>
+              <a:ext uri="{FF2B5EF4-FFF2-40B4-BE49-F238E27FC236}">
+                <a16:creationId xmlns:a16="http://schemas.microsoft.com/office/drawing/2014/main" id="{5C45AAB5-9B01-4985-98BE-E998E9246D6C}"/>
+              </a:ext>
+            </a:extLst>
+          </p:cNvPr>
+          <p:cNvSpPr/>
+          <p:nvPr/>
+        </p:nvSpPr>
+        <p:spPr>
+          <a:xfrm rot="5400000">
+            <a:off x="5626541" y="4890807"/>
+            <a:ext cx="374839" cy="185473"/>
+          </a:xfrm>
+          <a:prstGeom prst="triangle">
+            <a:avLst/>
+          </a:prstGeom>
+          <a:solidFill>
+            <a:schemeClr val="tx1"/>
+          </a:solidFill>
+          <a:ln>
+            <a:noFill/>
+          </a:ln>
+        </p:spPr>
+        <p:style>
+          <a:lnRef idx="2">
+            <a:schemeClr val="accent1">
+              <a:shade val="50000"/>
+            </a:schemeClr>
+          </a:lnRef>
+          <a:fillRef idx="1">
+            <a:schemeClr val="accent1"/>
+          </a:fillRef>
+          <a:effectRef idx="0">
+            <a:schemeClr val="accent1"/>
+          </a:effectRef>
+          <a:fontRef idx="minor">
+            <a:schemeClr val="lt1"/>
+          </a:fontRef>
+        </p:style>
+        <p:txBody>
+          <a:bodyPr rtlCol="0" anchor="ctr"/>
+          <a:lstStyle/>
+          <a:p>
+            <a:pPr algn="ctr"/>
+            <a:endParaRPr lang="de-CH">
+              <a:latin typeface="Arial" panose="020B0604020202020204" pitchFamily="34" charset="0"/>
+              <a:cs typeface="Arial" panose="020B0604020202020204" pitchFamily="34" charset="0"/>
+            </a:endParaRPr>
+          </a:p>
+        </p:txBody>
+      </p:sp>
+      <p:sp>
+        <p:nvSpPr>
+          <p:cNvPr id="101" name="Rectangle 100">
+            <a:extLst>
+              <a:ext uri="{FF2B5EF4-FFF2-40B4-BE49-F238E27FC236}">
+                <a16:creationId xmlns:a16="http://schemas.microsoft.com/office/drawing/2014/main" id="{16235EDB-7825-417C-88C6-618C161AFB20}"/>
+              </a:ext>
+            </a:extLst>
+          </p:cNvPr>
+          <p:cNvSpPr/>
+          <p:nvPr/>
+        </p:nvSpPr>
+        <p:spPr>
+          <a:xfrm>
+            <a:off x="5988027" y="3322544"/>
+            <a:ext cx="2110388" cy="3166123"/>
+          </a:xfrm>
+          <a:prstGeom prst="rect">
+            <a:avLst/>
+          </a:prstGeom>
+          <a:noFill/>
+          <a:ln>
+            <a:solidFill>
+              <a:schemeClr val="tx1"/>
+            </a:solidFill>
+            <a:prstDash val="dash"/>
+          </a:ln>
+        </p:spPr>
+        <p:style>
+          <a:lnRef idx="2">
+            <a:schemeClr val="accent1">
+              <a:shade val="50000"/>
+            </a:schemeClr>
+          </a:lnRef>
+          <a:fillRef idx="1">
+            <a:schemeClr val="accent1"/>
+          </a:fillRef>
+          <a:effectRef idx="0">
+            <a:schemeClr val="accent1"/>
+          </a:effectRef>
+          <a:fontRef idx="minor">
+            <a:schemeClr val="lt1"/>
+          </a:fontRef>
+        </p:style>
+        <p:txBody>
+          <a:bodyPr rtlCol="0" anchor="ctr"/>
+          <a:lstStyle/>
+          <a:p>
+            <a:pPr algn="ctr"/>
+            <a:endParaRPr lang="de-CH">
+              <a:latin typeface="Arial" panose="020B0604020202020204" pitchFamily="34" charset="0"/>
+              <a:cs typeface="Arial" panose="020B0604020202020204" pitchFamily="34" charset="0"/>
+            </a:endParaRPr>
+          </a:p>
+        </p:txBody>
+      </p:sp>
+      <p:sp>
+        <p:nvSpPr>
+          <p:cNvPr id="102" name="TextBox 101">
+            <a:extLst>
+              <a:ext uri="{FF2B5EF4-FFF2-40B4-BE49-F238E27FC236}">
+                <a16:creationId xmlns:a16="http://schemas.microsoft.com/office/drawing/2014/main" id="{92EB079F-D70B-470A-A6FB-BB0B063707A6}"/>
+              </a:ext>
+            </a:extLst>
+          </p:cNvPr>
+          <p:cNvSpPr txBox="1"/>
+          <p:nvPr/>
+        </p:nvSpPr>
+        <p:spPr>
+          <a:xfrm>
+            <a:off x="6074659" y="6497982"/>
+            <a:ext cx="1689886" cy="369332"/>
+          </a:xfrm>
+          <a:prstGeom prst="rect">
+            <a:avLst/>
+          </a:prstGeom>
+          <a:noFill/>
+        </p:spPr>
+        <p:txBody>
+          <a:bodyPr wrap="none" rtlCol="0">
+            <a:spAutoFit/>
+          </a:bodyPr>
+          <a:lstStyle/>
+          <a:p>
+            <a:r>
+              <a:rPr lang="de-CH" b="1" dirty="0" err="1">
+                <a:latin typeface="Abadi" panose="020B0604020104020204" pitchFamily="34" charset="0"/>
+                <a:cs typeface="Arial" panose="020B0604020202020204" pitchFamily="34" charset="0"/>
+              </a:rPr>
+              <a:t>Processed</a:t>
+            </a:r>
+            <a:r>
+              <a:rPr lang="de-CH" b="1" dirty="0">
+                <a:latin typeface="Abadi" panose="020B0604020104020204" pitchFamily="34" charset="0"/>
+                <a:cs typeface="Arial" panose="020B0604020202020204" pitchFamily="34" charset="0"/>
+              </a:rPr>
+              <a:t> Data</a:t>
+            </a:r>
+          </a:p>
+        </p:txBody>
+      </p:sp>
+      <p:sp>
+        <p:nvSpPr>
+          <p:cNvPr id="103" name="Rectangle 102">
+            <a:extLst>
+              <a:ext uri="{FF2B5EF4-FFF2-40B4-BE49-F238E27FC236}">
+                <a16:creationId xmlns:a16="http://schemas.microsoft.com/office/drawing/2014/main" id="{70BE43EB-2636-4C57-B38C-4174AC2606D1}"/>
+              </a:ext>
+            </a:extLst>
+          </p:cNvPr>
+          <p:cNvSpPr/>
+          <p:nvPr/>
+        </p:nvSpPr>
+        <p:spPr>
+          <a:xfrm>
+            <a:off x="8464527" y="5652970"/>
+            <a:ext cx="3317898" cy="845011"/>
+          </a:xfrm>
+          <a:prstGeom prst="rect">
+            <a:avLst/>
+          </a:prstGeom>
+          <a:noFill/>
+          <a:ln>
+            <a:solidFill>
+              <a:schemeClr val="tx1"/>
+            </a:solidFill>
+            <a:prstDash val="dash"/>
+          </a:ln>
+        </p:spPr>
+        <p:style>
+          <a:lnRef idx="2">
+            <a:schemeClr val="accent1">
+              <a:shade val="50000"/>
+            </a:schemeClr>
+          </a:lnRef>
+          <a:fillRef idx="1">
+            <a:schemeClr val="accent1"/>
+          </a:fillRef>
+          <a:effectRef idx="0">
+            <a:schemeClr val="accent1"/>
+          </a:effectRef>
+          <a:fontRef idx="minor">
+            <a:schemeClr val="lt1"/>
+          </a:fontRef>
+        </p:style>
+        <p:txBody>
+          <a:bodyPr rtlCol="0" anchor="ctr"/>
+          <a:lstStyle/>
+          <a:p>
+            <a:pPr algn="ctr"/>
+            <a:endParaRPr lang="de-CH">
+              <a:latin typeface="Arial" panose="020B0604020202020204" pitchFamily="34" charset="0"/>
+              <a:cs typeface="Arial" panose="020B0604020202020204" pitchFamily="34" charset="0"/>
+            </a:endParaRPr>
+          </a:p>
+        </p:txBody>
+      </p:sp>
+      <p:sp>
+        <p:nvSpPr>
+          <p:cNvPr id="104" name="TextBox 103">
+            <a:extLst>
+              <a:ext uri="{FF2B5EF4-FFF2-40B4-BE49-F238E27FC236}">
+                <a16:creationId xmlns:a16="http://schemas.microsoft.com/office/drawing/2014/main" id="{7AEBDA37-0807-4BD0-84E4-46EC9848E639}"/>
+              </a:ext>
+            </a:extLst>
+          </p:cNvPr>
+          <p:cNvSpPr txBox="1"/>
+          <p:nvPr/>
+        </p:nvSpPr>
+        <p:spPr>
+          <a:xfrm>
+            <a:off x="9581276" y="6497982"/>
+            <a:ext cx="1095172" cy="369332"/>
+          </a:xfrm>
+          <a:prstGeom prst="rect">
+            <a:avLst/>
+          </a:prstGeom>
+          <a:noFill/>
+        </p:spPr>
+        <p:txBody>
+          <a:bodyPr wrap="none" rtlCol="0">
+            <a:spAutoFit/>
+          </a:bodyPr>
+          <a:lstStyle/>
+          <a:p>
+            <a:r>
+              <a:rPr lang="de-CH" b="1" dirty="0" err="1">
+                <a:latin typeface="Abadi" panose="020B0604020104020204" pitchFamily="34" charset="0"/>
+                <a:cs typeface="Arial" panose="020B0604020202020204" pitchFamily="34" charset="0"/>
+              </a:rPr>
+              <a:t>DataBase</a:t>
+            </a:r>
+            <a:endParaRPr lang="de-CH" b="1" dirty="0">
+              <a:latin typeface="Abadi" panose="020B0604020104020204" pitchFamily="34" charset="0"/>
+              <a:cs typeface="Arial" panose="020B0604020202020204" pitchFamily="34" charset="0"/>
+            </a:endParaRPr>
+          </a:p>
+        </p:txBody>
+      </p:sp>
+      <p:sp>
+        <p:nvSpPr>
+          <p:cNvPr id="105" name="Isosceles Triangle 104">
+            <a:extLst>
+              <a:ext uri="{FF2B5EF4-FFF2-40B4-BE49-F238E27FC236}">
+                <a16:creationId xmlns:a16="http://schemas.microsoft.com/office/drawing/2014/main" id="{2D70F2D1-F1A5-4067-8545-FB0032287F27}"/>
+              </a:ext>
+            </a:extLst>
+          </p:cNvPr>
+          <p:cNvSpPr/>
+          <p:nvPr/>
+        </p:nvSpPr>
+        <p:spPr>
+          <a:xfrm rot="5400000">
+            <a:off x="8100914" y="6117792"/>
+            <a:ext cx="374839" cy="185473"/>
+          </a:xfrm>
+          <a:prstGeom prst="triangle">
+            <a:avLst/>
+          </a:prstGeom>
+          <a:solidFill>
+            <a:schemeClr val="tx1"/>
+          </a:solidFill>
+          <a:ln>
+            <a:noFill/>
+          </a:ln>
+        </p:spPr>
+        <p:style>
+          <a:lnRef idx="2">
+            <a:schemeClr val="accent1">
+              <a:shade val="50000"/>
+            </a:schemeClr>
+          </a:lnRef>
+          <a:fillRef idx="1">
+            <a:schemeClr val="accent1"/>
+          </a:fillRef>
+          <a:effectRef idx="0">
+            <a:schemeClr val="accent1"/>
+          </a:effectRef>
+          <a:fontRef idx="minor">
+            <a:schemeClr val="lt1"/>
+          </a:fontRef>
+        </p:style>
+        <p:txBody>
+          <a:bodyPr rtlCol="0" anchor="ctr"/>
+          <a:lstStyle/>
+          <a:p>
+            <a:pPr algn="ctr"/>
+            <a:endParaRPr lang="de-CH">
+              <a:latin typeface="Arial" panose="020B0604020202020204" pitchFamily="34" charset="0"/>
+              <a:cs typeface="Arial" panose="020B0604020202020204" pitchFamily="34" charset="0"/>
+            </a:endParaRPr>
+          </a:p>
+        </p:txBody>
+      </p:sp>
+      <p:sp>
+        <p:nvSpPr>
+          <p:cNvPr id="106" name="Isosceles Triangle 105">
+            <a:extLst>
+              <a:ext uri="{FF2B5EF4-FFF2-40B4-BE49-F238E27FC236}">
+                <a16:creationId xmlns:a16="http://schemas.microsoft.com/office/drawing/2014/main" id="{F9EE43D5-7C35-4781-8B85-72D9EB8C4955}"/>
+              </a:ext>
+            </a:extLst>
+          </p:cNvPr>
+          <p:cNvSpPr/>
+          <p:nvPr/>
+        </p:nvSpPr>
+        <p:spPr>
+          <a:xfrm>
+            <a:off x="9936055" y="5321052"/>
+            <a:ext cx="374839" cy="185473"/>
+          </a:xfrm>
+          <a:prstGeom prst="triangle">
+            <a:avLst/>
+          </a:prstGeom>
+          <a:solidFill>
+            <a:schemeClr val="tx1"/>
+          </a:solidFill>
+          <a:ln>
+            <a:noFill/>
+          </a:ln>
+        </p:spPr>
+        <p:style>
+          <a:lnRef idx="2">
+            <a:schemeClr val="accent1">
+              <a:shade val="50000"/>
+            </a:schemeClr>
+          </a:lnRef>
+          <a:fillRef idx="1">
+            <a:schemeClr val="accent1"/>
+          </a:fillRef>
+          <a:effectRef idx="0">
+            <a:schemeClr val="accent1"/>
+          </a:effectRef>
+          <a:fontRef idx="minor">
+            <a:schemeClr val="lt1"/>
+          </a:fontRef>
+        </p:style>
+        <p:txBody>
+          <a:bodyPr rtlCol="0" anchor="ctr"/>
+          <a:lstStyle/>
+          <a:p>
+            <a:pPr algn="ctr"/>
+            <a:endParaRPr lang="de-CH">
+              <a:latin typeface="Arial" panose="020B0604020202020204" pitchFamily="34" charset="0"/>
+              <a:cs typeface="Arial" panose="020B0604020202020204" pitchFamily="34" charset="0"/>
+            </a:endParaRPr>
+          </a:p>
+        </p:txBody>
+      </p:sp>
+      <p:sp>
+        <p:nvSpPr>
+          <p:cNvPr id="107" name="Rectangle 106">
+            <a:extLst>
+              <a:ext uri="{FF2B5EF4-FFF2-40B4-BE49-F238E27FC236}">
+                <a16:creationId xmlns:a16="http://schemas.microsoft.com/office/drawing/2014/main" id="{45BF9900-B0B9-4A50-8011-9F300E3C4DEC}"/>
+              </a:ext>
+            </a:extLst>
+          </p:cNvPr>
+          <p:cNvSpPr/>
+          <p:nvPr/>
+        </p:nvSpPr>
+        <p:spPr>
+          <a:xfrm>
+            <a:off x="8446042" y="3339185"/>
+            <a:ext cx="3317898" cy="1923534"/>
+          </a:xfrm>
+          <a:prstGeom prst="rect">
+            <a:avLst/>
+          </a:prstGeom>
+          <a:noFill/>
+          <a:ln>
+            <a:solidFill>
+              <a:schemeClr val="tx1"/>
+            </a:solidFill>
+            <a:prstDash val="dash"/>
+          </a:ln>
+        </p:spPr>
+        <p:style>
+          <a:lnRef idx="2">
+            <a:schemeClr val="accent1">
+              <a:shade val="50000"/>
+            </a:schemeClr>
+          </a:lnRef>
+          <a:fillRef idx="1">
+            <a:schemeClr val="accent1"/>
+          </a:fillRef>
+          <a:effectRef idx="0">
+            <a:schemeClr val="accent1"/>
+          </a:effectRef>
+          <a:fontRef idx="minor">
+            <a:schemeClr val="lt1"/>
+          </a:fontRef>
+        </p:style>
+        <p:txBody>
+          <a:bodyPr rtlCol="0" anchor="ctr"/>
+          <a:lstStyle/>
+          <a:p>
+            <a:pPr algn="ctr"/>
+            <a:endParaRPr lang="de-CH">
+              <a:latin typeface="Arial" panose="020B0604020202020204" pitchFamily="34" charset="0"/>
+              <a:cs typeface="Arial" panose="020B0604020202020204" pitchFamily="34" charset="0"/>
+            </a:endParaRPr>
+          </a:p>
+        </p:txBody>
+      </p:sp>
+      <p:sp>
+        <p:nvSpPr>
+          <p:cNvPr id="108" name="TextBox 107">
+            <a:extLst>
+              <a:ext uri="{FF2B5EF4-FFF2-40B4-BE49-F238E27FC236}">
+                <a16:creationId xmlns:a16="http://schemas.microsoft.com/office/drawing/2014/main" id="{3592F9AC-79F5-4B51-B2D6-A46532E82AF5}"/>
+              </a:ext>
+            </a:extLst>
+          </p:cNvPr>
+          <p:cNvSpPr txBox="1"/>
+          <p:nvPr/>
+        </p:nvSpPr>
+        <p:spPr>
+          <a:xfrm>
+            <a:off x="8446042" y="3280852"/>
+            <a:ext cx="2014334" cy="369332"/>
+          </a:xfrm>
+          <a:prstGeom prst="rect">
+            <a:avLst/>
+          </a:prstGeom>
+          <a:noFill/>
+        </p:spPr>
+        <p:txBody>
+          <a:bodyPr wrap="none" rtlCol="0">
+            <a:spAutoFit/>
+          </a:bodyPr>
+          <a:lstStyle/>
+          <a:p>
+            <a:r>
+              <a:rPr lang="de-CH" b="1" dirty="0" err="1">
+                <a:latin typeface="Arial" panose="020B0604020202020204" pitchFamily="34" charset="0"/>
+                <a:cs typeface="Arial" panose="020B0604020202020204" pitchFamily="34" charset="0"/>
+              </a:rPr>
+              <a:t>Visualization</a:t>
+            </a:r>
+            <a:r>
+              <a:rPr lang="de-CH" b="1" dirty="0">
+                <a:latin typeface="Arial" panose="020B0604020202020204" pitchFamily="34" charset="0"/>
+                <a:cs typeface="Arial" panose="020B0604020202020204" pitchFamily="34" charset="0"/>
+              </a:rPr>
+              <a:t> / UI</a:t>
+            </a:r>
+          </a:p>
+        </p:txBody>
+      </p:sp>
+      <p:pic>
+        <p:nvPicPr>
+          <p:cNvPr id="109" name="Picture 108">
+            <a:extLst>
+              <a:ext uri="{FF2B5EF4-FFF2-40B4-BE49-F238E27FC236}">
+                <a16:creationId xmlns:a16="http://schemas.microsoft.com/office/drawing/2014/main" id="{EEA53A9E-D47C-4A86-9DDA-09BE4F3F42BB}"/>
+              </a:ext>
+            </a:extLst>
+          </p:cNvPr>
+          <p:cNvPicPr>
+            <a:picLocks noChangeAspect="1"/>
+          </p:cNvPicPr>
+          <p:nvPr/>
+        </p:nvPicPr>
+        <p:blipFill>
+          <a:blip r:embed="rId3"/>
+          <a:stretch>
+            <a:fillRect/>
+          </a:stretch>
+        </p:blipFill>
+        <p:spPr>
+          <a:xfrm>
+            <a:off x="8778323" y="3624038"/>
+            <a:ext cx="2653335" cy="1448608"/>
+          </a:xfrm>
+          <a:prstGeom prst="rect">
+            <a:avLst/>
+          </a:prstGeom>
+        </p:spPr>
+      </p:pic>
+      <p:pic>
+        <p:nvPicPr>
+          <p:cNvPr id="110" name="Picture 109">
+            <a:extLst>
+              <a:ext uri="{FF2B5EF4-FFF2-40B4-BE49-F238E27FC236}">
+                <a16:creationId xmlns:a16="http://schemas.microsoft.com/office/drawing/2014/main" id="{A6D5E4EF-677C-471E-AD18-55CC431CA291}"/>
+              </a:ext>
+            </a:extLst>
+          </p:cNvPr>
+          <p:cNvPicPr>
+            <a:picLocks noChangeAspect="1"/>
+          </p:cNvPicPr>
+          <p:nvPr/>
+        </p:nvPicPr>
+        <p:blipFill rotWithShape="1">
+          <a:blip r:embed="rId4">
+            <a:clrChange>
+              <a:clrFrom>
+                <a:srgbClr val="FFFFFF"/>
+              </a:clrFrom>
+              <a:clrTo>
+                <a:srgbClr val="FFFFFF">
+                  <a:alpha val="0"/>
+                </a:srgbClr>
+              </a:clrTo>
+            </a:clrChange>
+            <a:extLst>
+              <a:ext uri="{28A0092B-C50C-407E-A947-70E740481C1C}">
+                <a14:useLocalDpi xmlns:a14="http://schemas.microsoft.com/office/drawing/2010/main" val="0"/>
+              </a:ext>
+            </a:extLst>
+          </a:blip>
+          <a:srcRect l="9151" r="3944"/>
+          <a:stretch/>
+        </p:blipFill>
+        <p:spPr>
+          <a:xfrm>
+            <a:off x="2090268" y="2406601"/>
+            <a:ext cx="942018" cy="599605"/>
+          </a:xfrm>
+          <a:prstGeom prst="rect">
+            <a:avLst/>
+          </a:prstGeom>
+        </p:spPr>
+      </p:pic>
+      <p:pic>
+        <p:nvPicPr>
+          <p:cNvPr id="111" name="Picture 110">
+            <a:extLst>
+              <a:ext uri="{FF2B5EF4-FFF2-40B4-BE49-F238E27FC236}">
+                <a16:creationId xmlns:a16="http://schemas.microsoft.com/office/drawing/2014/main" id="{98CEC46D-880C-4B28-9FD1-53DEBA7DC4EA}"/>
+              </a:ext>
+            </a:extLst>
+          </p:cNvPr>
+          <p:cNvPicPr>
+            <a:picLocks noChangeAspect="1"/>
+          </p:cNvPicPr>
+          <p:nvPr/>
+        </p:nvPicPr>
+        <p:blipFill>
+          <a:blip r:embed="rId5">
+            <a:extLst>
+              <a:ext uri="{28A0092B-C50C-407E-A947-70E740481C1C}">
+                <a14:useLocalDpi xmlns:a14="http://schemas.microsoft.com/office/drawing/2010/main" val="0"/>
+              </a:ext>
+            </a:extLst>
+          </a:blip>
+          <a:stretch>
+            <a:fillRect/>
+          </a:stretch>
+        </p:blipFill>
+        <p:spPr>
+          <a:xfrm>
+            <a:off x="3754450" y="1624994"/>
+            <a:ext cx="523112" cy="523112"/>
+          </a:xfrm>
+          <a:prstGeom prst="rect">
+            <a:avLst/>
+          </a:prstGeom>
+        </p:spPr>
+      </p:pic>
+      <p:pic>
+        <p:nvPicPr>
+          <p:cNvPr id="112" name="Picture 2" descr="Datei:Microsoft Office Excel (2019–present).svg – Wikipedia">
+            <a:hlinkClick r:id="rId6"/>
+            <a:extLst>
+              <a:ext uri="{FF2B5EF4-FFF2-40B4-BE49-F238E27FC236}">
+                <a16:creationId xmlns:a16="http://schemas.microsoft.com/office/drawing/2014/main" id="{1BFFDE6A-FA14-4E6D-B81D-BAF421EBF1BB}"/>
+              </a:ext>
+            </a:extLst>
+          </p:cNvPr>
+          <p:cNvPicPr>
+            <a:picLocks noChangeAspect="1" noChangeArrowheads="1"/>
+          </p:cNvPicPr>
+          <p:nvPr/>
+        </p:nvPicPr>
+        <p:blipFill>
+          <a:blip r:embed="rId7">
+            <a:extLst>
+              <a:ext uri="{28A0092B-C50C-407E-A947-70E740481C1C}">
+                <a14:useLocalDpi xmlns:a14="http://schemas.microsoft.com/office/drawing/2010/main" val="0"/>
+              </a:ext>
+            </a:extLst>
+          </a:blip>
+          <a:srcRect/>
+          <a:stretch>
+            <a:fillRect/>
+          </a:stretch>
+        </p:blipFill>
+        <p:spPr bwMode="auto">
+          <a:xfrm>
+            <a:off x="6760114" y="1624994"/>
+            <a:ext cx="439081" cy="408930"/>
+          </a:xfrm>
+          <a:prstGeom prst="rect">
+            <a:avLst/>
+          </a:prstGeom>
+          <a:noFill/>
+          <a:extLst>
+            <a:ext uri="{909E8E84-426E-40DD-AFC4-6F175D3DCCD1}">
+              <a14:hiddenFill xmlns:a14="http://schemas.microsoft.com/office/drawing/2010/main">
                 <a:solidFill>
-                  <a:schemeClr val="bg1"/>
+                  <a:srgbClr val="FFFFFF"/>
                 </a:solidFill>
+              </a14:hiddenFill>
+            </a:ext>
+          </a:extLst>
+        </p:spPr>
+      </p:pic>
+      <p:pic>
+        <p:nvPicPr>
+          <p:cNvPr id="113" name="Picture 112">
+            <a:extLst>
+              <a:ext uri="{FF2B5EF4-FFF2-40B4-BE49-F238E27FC236}">
+                <a16:creationId xmlns:a16="http://schemas.microsoft.com/office/drawing/2014/main" id="{1A3CF814-E1B7-45E6-8C0A-CDC31CD618D3}"/>
+              </a:ext>
+            </a:extLst>
+          </p:cNvPr>
+          <p:cNvPicPr>
+            <a:picLocks noChangeAspect="1"/>
+          </p:cNvPicPr>
+          <p:nvPr/>
+        </p:nvPicPr>
+        <p:blipFill>
+          <a:blip r:embed="rId8"/>
+          <a:stretch>
+            <a:fillRect/>
+          </a:stretch>
+        </p:blipFill>
+        <p:spPr>
+          <a:xfrm>
+            <a:off x="5060461" y="1645869"/>
+            <a:ext cx="1169125" cy="172053"/>
+          </a:xfrm>
+          <a:prstGeom prst="rect">
+            <a:avLst/>
+          </a:prstGeom>
+        </p:spPr>
+      </p:pic>
+      <p:pic>
+        <p:nvPicPr>
+          <p:cNvPr id="114" name="Picture 113">
+            <a:extLst>
+              <a:ext uri="{FF2B5EF4-FFF2-40B4-BE49-F238E27FC236}">
+                <a16:creationId xmlns:a16="http://schemas.microsoft.com/office/drawing/2014/main" id="{065FF160-545E-4C99-A1E2-10C7DC542124}"/>
+              </a:ext>
+            </a:extLst>
+          </p:cNvPr>
+          <p:cNvPicPr>
+            <a:picLocks noChangeAspect="1"/>
+          </p:cNvPicPr>
+          <p:nvPr/>
+        </p:nvPicPr>
+        <p:blipFill>
+          <a:blip r:embed="rId9">
+            <a:extLst>
+              <a:ext uri="{28A0092B-C50C-407E-A947-70E740481C1C}">
+                <a14:useLocalDpi xmlns:a14="http://schemas.microsoft.com/office/drawing/2010/main" val="0"/>
+              </a:ext>
+            </a:extLst>
+          </a:blip>
+          <a:stretch>
+            <a:fillRect/>
+          </a:stretch>
+        </p:blipFill>
+        <p:spPr>
+          <a:xfrm>
+            <a:off x="6663827" y="2322019"/>
+            <a:ext cx="580599" cy="248828"/>
+          </a:xfrm>
+          <a:prstGeom prst="rect">
+            <a:avLst/>
+          </a:prstGeom>
+          <a:effectLst>
+            <a:outerShdw blurRad="63500" sx="102000" sy="102000" algn="ctr" rotWithShape="0">
+              <a:prstClr val="black">
+                <a:alpha val="40000"/>
+              </a:prstClr>
+            </a:outerShdw>
+          </a:effectLst>
+        </p:spPr>
+      </p:pic>
+      <p:pic>
+        <p:nvPicPr>
+          <p:cNvPr id="115" name="Picture 114">
+            <a:extLst>
+              <a:ext uri="{FF2B5EF4-FFF2-40B4-BE49-F238E27FC236}">
+                <a16:creationId xmlns:a16="http://schemas.microsoft.com/office/drawing/2014/main" id="{919CF74C-1097-4C2A-B29E-709FFCFC6727}"/>
+              </a:ext>
+            </a:extLst>
+          </p:cNvPr>
+          <p:cNvPicPr>
+            <a:picLocks noChangeAspect="1"/>
+          </p:cNvPicPr>
+          <p:nvPr/>
+        </p:nvPicPr>
+        <p:blipFill>
+          <a:blip r:embed="rId10">
+            <a:extLst>
+              <a:ext uri="{28A0092B-C50C-407E-A947-70E740481C1C}">
+                <a14:useLocalDpi xmlns:a14="http://schemas.microsoft.com/office/drawing/2010/main" val="0"/>
+              </a:ext>
+            </a:extLst>
+          </a:blip>
+          <a:stretch>
+            <a:fillRect/>
+          </a:stretch>
+        </p:blipFill>
+        <p:spPr>
+          <a:xfrm>
+            <a:off x="4996848" y="2478554"/>
+            <a:ext cx="527652" cy="527652"/>
+          </a:xfrm>
+          <a:prstGeom prst="rect">
+            <a:avLst/>
+          </a:prstGeom>
+        </p:spPr>
+      </p:pic>
+      <p:sp>
+        <p:nvSpPr>
+          <p:cNvPr id="116" name="TextBox 115">
+            <a:extLst>
+              <a:ext uri="{FF2B5EF4-FFF2-40B4-BE49-F238E27FC236}">
+                <a16:creationId xmlns:a16="http://schemas.microsoft.com/office/drawing/2014/main" id="{270CE816-632F-424E-B5B3-9778ECAD15F5}"/>
+              </a:ext>
+            </a:extLst>
+          </p:cNvPr>
+          <p:cNvSpPr txBox="1"/>
+          <p:nvPr/>
+        </p:nvSpPr>
+        <p:spPr>
+          <a:xfrm>
+            <a:off x="2239095" y="1693189"/>
+            <a:ext cx="1586382" cy="430887"/>
+          </a:xfrm>
+          <a:prstGeom prst="rect">
+            <a:avLst/>
+          </a:prstGeom>
+          <a:noFill/>
+        </p:spPr>
+        <p:txBody>
+          <a:bodyPr wrap="square" rtlCol="0">
+            <a:spAutoFit/>
+          </a:bodyPr>
+          <a:lstStyle/>
+          <a:p>
+            <a:r>
+              <a:rPr lang="de-CH" sz="1050" b="1" dirty="0">
+                <a:latin typeface="Arial" panose="020B0604020202020204" pitchFamily="34" charset="0"/>
+                <a:cs typeface="Arial" panose="020B0604020202020204" pitchFamily="34" charset="0"/>
               </a:rPr>
-              <a:t>DELIVERABLES FOR HACKATHON</a:t>
-            </a:r>
-          </a:p>
-        </p:txBody>
-      </p:sp>
+              <a:t>Python – </a:t>
+            </a:r>
+            <a:r>
+              <a:rPr lang="de-CH" sz="1050" dirty="0">
+                <a:latin typeface="Arial" panose="020B0604020202020204" pitchFamily="34" charset="0"/>
+                <a:cs typeface="Arial" panose="020B0604020202020204" pitchFamily="34" charset="0"/>
+              </a:rPr>
+              <a:t>For </a:t>
+            </a:r>
+            <a:r>
+              <a:rPr lang="de-CH" sz="1050" dirty="0" err="1">
+                <a:latin typeface="Arial" panose="020B0604020202020204" pitchFamily="34" charset="0"/>
+                <a:cs typeface="Arial" panose="020B0604020202020204" pitchFamily="34" charset="0"/>
+              </a:rPr>
+              <a:t>running</a:t>
+            </a:r>
+            <a:r>
+              <a:rPr lang="de-CH" sz="1050" dirty="0">
+                <a:latin typeface="Arial" panose="020B0604020202020204" pitchFamily="34" charset="0"/>
+                <a:cs typeface="Arial" panose="020B0604020202020204" pitchFamily="34" charset="0"/>
+              </a:rPr>
+              <a:t> </a:t>
+            </a:r>
+            <a:br>
+              <a:rPr lang="de-CH" sz="1050" dirty="0">
+                <a:latin typeface="Arial" panose="020B0604020202020204" pitchFamily="34" charset="0"/>
+                <a:cs typeface="Arial" panose="020B0604020202020204" pitchFamily="34" charset="0"/>
+              </a:rPr>
+            </a:br>
+            <a:r>
+              <a:rPr lang="de-CH" sz="1050" dirty="0" err="1">
+                <a:latin typeface="Arial" panose="020B0604020202020204" pitchFamily="34" charset="0"/>
+                <a:cs typeface="Arial" panose="020B0604020202020204" pitchFamily="34" charset="0"/>
+              </a:rPr>
+              <a:t>agentic</a:t>
+            </a:r>
+            <a:r>
+              <a:rPr lang="de-CH" sz="1050" dirty="0">
+                <a:latin typeface="Arial" panose="020B0604020202020204" pitchFamily="34" charset="0"/>
+                <a:cs typeface="Arial" panose="020B0604020202020204" pitchFamily="34" charset="0"/>
+              </a:rPr>
+              <a:t> </a:t>
+            </a:r>
+            <a:r>
+              <a:rPr lang="de-CH" sz="1050" dirty="0" err="1">
+                <a:latin typeface="Arial" panose="020B0604020202020204" pitchFamily="34" charset="0"/>
+                <a:cs typeface="Arial" panose="020B0604020202020204" pitchFamily="34" charset="0"/>
+              </a:rPr>
+              <a:t>scrapers</a:t>
+            </a:r>
+            <a:endParaRPr lang="de-CH" sz="1050" b="1" dirty="0">
+              <a:latin typeface="Arial" panose="020B0604020202020204" pitchFamily="34" charset="0"/>
+              <a:cs typeface="Arial" panose="020B0604020202020204" pitchFamily="34" charset="0"/>
+            </a:endParaRPr>
+          </a:p>
+        </p:txBody>
+      </p:sp>
+      <p:sp>
+        <p:nvSpPr>
+          <p:cNvPr id="117" name="TextBox 116">
+            <a:extLst>
+              <a:ext uri="{FF2B5EF4-FFF2-40B4-BE49-F238E27FC236}">
+                <a16:creationId xmlns:a16="http://schemas.microsoft.com/office/drawing/2014/main" id="{CC27A8A7-8858-4B19-8916-30E00A0B1183}"/>
+              </a:ext>
+            </a:extLst>
+          </p:cNvPr>
+          <p:cNvSpPr txBox="1"/>
+          <p:nvPr/>
+        </p:nvSpPr>
+        <p:spPr>
+          <a:xfrm>
+            <a:off x="2983257" y="2335160"/>
+            <a:ext cx="1586382" cy="415498"/>
+          </a:xfrm>
+          <a:prstGeom prst="rect">
+            <a:avLst/>
+          </a:prstGeom>
+          <a:noFill/>
+        </p:spPr>
+        <p:txBody>
+          <a:bodyPr wrap="square" rtlCol="0">
+            <a:spAutoFit/>
+          </a:bodyPr>
+          <a:lstStyle/>
+          <a:p>
+            <a:r>
+              <a:rPr lang="de-CH" sz="1050" b="1" dirty="0" err="1">
+                <a:latin typeface="Arial" panose="020B0604020202020204" pitchFamily="34" charset="0"/>
+                <a:cs typeface="Arial" panose="020B0604020202020204" pitchFamily="34" charset="0"/>
+              </a:rPr>
+              <a:t>Selenium</a:t>
+            </a:r>
+            <a:r>
+              <a:rPr lang="de-CH" sz="1050" b="1" dirty="0">
+                <a:latin typeface="Arial" panose="020B0604020202020204" pitchFamily="34" charset="0"/>
+                <a:cs typeface="Arial" panose="020B0604020202020204" pitchFamily="34" charset="0"/>
+              </a:rPr>
+              <a:t> &amp; Chrome – </a:t>
+            </a:r>
+            <a:br>
+              <a:rPr lang="de-CH" sz="1050" b="1" dirty="0">
+                <a:latin typeface="Arial" panose="020B0604020202020204" pitchFamily="34" charset="0"/>
+                <a:cs typeface="Arial" panose="020B0604020202020204" pitchFamily="34" charset="0"/>
+              </a:rPr>
+            </a:br>
+            <a:r>
+              <a:rPr lang="de-CH" sz="1050" dirty="0">
+                <a:latin typeface="Arial" panose="020B0604020202020204" pitchFamily="34" charset="0"/>
+                <a:cs typeface="Arial" panose="020B0604020202020204" pitchFamily="34" charset="0"/>
+              </a:rPr>
+              <a:t>for </a:t>
+            </a:r>
+            <a:r>
+              <a:rPr lang="de-CH" sz="1050" dirty="0" err="1">
+                <a:latin typeface="Arial" panose="020B0604020202020204" pitchFamily="34" charset="0"/>
+                <a:cs typeface="Arial" panose="020B0604020202020204" pitchFamily="34" charset="0"/>
+              </a:rPr>
+              <a:t>browser</a:t>
+            </a:r>
+            <a:r>
+              <a:rPr lang="de-CH" sz="1050" dirty="0">
+                <a:latin typeface="Arial" panose="020B0604020202020204" pitchFamily="34" charset="0"/>
+                <a:cs typeface="Arial" panose="020B0604020202020204" pitchFamily="34" charset="0"/>
+              </a:rPr>
+              <a:t> </a:t>
+            </a:r>
+            <a:r>
+              <a:rPr lang="de-CH" sz="1050" dirty="0" err="1">
+                <a:latin typeface="Arial" panose="020B0604020202020204" pitchFamily="34" charset="0"/>
+                <a:cs typeface="Arial" panose="020B0604020202020204" pitchFamily="34" charset="0"/>
+              </a:rPr>
+              <a:t>automation</a:t>
+            </a:r>
+            <a:endParaRPr lang="de-CH" sz="1050" b="1" dirty="0">
+              <a:latin typeface="Arial" panose="020B0604020202020204" pitchFamily="34" charset="0"/>
+              <a:cs typeface="Arial" panose="020B0604020202020204" pitchFamily="34" charset="0"/>
+            </a:endParaRPr>
+          </a:p>
+        </p:txBody>
+      </p:sp>
+      <p:sp>
+        <p:nvSpPr>
+          <p:cNvPr id="118" name="Rectangle 117">
+            <a:extLst>
+              <a:ext uri="{FF2B5EF4-FFF2-40B4-BE49-F238E27FC236}">
+                <a16:creationId xmlns:a16="http://schemas.microsoft.com/office/drawing/2014/main" id="{49DA22AD-1410-4534-9852-1B7F351C123A}"/>
+              </a:ext>
+            </a:extLst>
+          </p:cNvPr>
+          <p:cNvSpPr/>
+          <p:nvPr/>
+        </p:nvSpPr>
+        <p:spPr>
+          <a:xfrm>
+            <a:off x="4938735" y="1520050"/>
+            <a:ext cx="2356746" cy="1543567"/>
+          </a:xfrm>
+          <a:prstGeom prst="rect">
+            <a:avLst/>
+          </a:prstGeom>
+          <a:noFill/>
+          <a:ln>
+            <a:solidFill>
+              <a:schemeClr val="tx1"/>
+            </a:solidFill>
+            <a:prstDash val="dash"/>
+          </a:ln>
+        </p:spPr>
+        <p:style>
+          <a:lnRef idx="2">
+            <a:schemeClr val="accent1">
+              <a:shade val="50000"/>
+            </a:schemeClr>
+          </a:lnRef>
+          <a:fillRef idx="1">
+            <a:schemeClr val="accent1"/>
+          </a:fillRef>
+          <a:effectRef idx="0">
+            <a:schemeClr val="accent1"/>
+          </a:effectRef>
+          <a:fontRef idx="minor">
+            <a:schemeClr val="lt1"/>
+          </a:fontRef>
+        </p:style>
+        <p:txBody>
+          <a:bodyPr rtlCol="0" anchor="ctr"/>
+          <a:lstStyle/>
+          <a:p>
+            <a:pPr algn="ctr"/>
+            <a:endParaRPr lang="de-CH">
+              <a:latin typeface="Arial" panose="020B0604020202020204" pitchFamily="34" charset="0"/>
+              <a:cs typeface="Arial" panose="020B0604020202020204" pitchFamily="34" charset="0"/>
+            </a:endParaRPr>
+          </a:p>
+        </p:txBody>
+      </p:sp>
+      <p:sp>
+        <p:nvSpPr>
+          <p:cNvPr id="119" name="TextBox 118">
+            <a:extLst>
+              <a:ext uri="{FF2B5EF4-FFF2-40B4-BE49-F238E27FC236}">
+                <a16:creationId xmlns:a16="http://schemas.microsoft.com/office/drawing/2014/main" id="{C0E17B4B-ACEF-41C7-A2FA-2E56B76F732C}"/>
+              </a:ext>
+            </a:extLst>
+          </p:cNvPr>
+          <p:cNvSpPr txBox="1"/>
+          <p:nvPr/>
+        </p:nvSpPr>
+        <p:spPr>
+          <a:xfrm>
+            <a:off x="4957026" y="1789734"/>
+            <a:ext cx="1706801" cy="430887"/>
+          </a:xfrm>
+          <a:prstGeom prst="rect">
+            <a:avLst/>
+          </a:prstGeom>
+          <a:noFill/>
+        </p:spPr>
+        <p:txBody>
+          <a:bodyPr wrap="square" rtlCol="0">
+            <a:spAutoFit/>
+          </a:bodyPr>
+          <a:lstStyle/>
+          <a:p>
+            <a:r>
+              <a:rPr lang="de-CH" sz="1050" dirty="0">
+                <a:latin typeface="Arial" panose="020B0604020202020204" pitchFamily="34" charset="0"/>
+                <a:cs typeface="Arial" panose="020B0604020202020204" pitchFamily="34" charset="0"/>
+              </a:rPr>
+              <a:t>for OCR </a:t>
+            </a:r>
+            <a:r>
+              <a:rPr lang="de-CH" sz="1050" dirty="0" err="1">
+                <a:latin typeface="Arial" panose="020B0604020202020204" pitchFamily="34" charset="0"/>
+                <a:cs typeface="Arial" panose="020B0604020202020204" pitchFamily="34" charset="0"/>
+              </a:rPr>
+              <a:t>table</a:t>
+            </a:r>
+            <a:r>
+              <a:rPr lang="de-CH" sz="1050" dirty="0">
+                <a:latin typeface="Arial" panose="020B0604020202020204" pitchFamily="34" charset="0"/>
+                <a:cs typeface="Arial" panose="020B0604020202020204" pitchFamily="34" charset="0"/>
+              </a:rPr>
+              <a:t> </a:t>
+            </a:r>
+            <a:r>
+              <a:rPr lang="de-CH" sz="1050" dirty="0" err="1">
+                <a:latin typeface="Arial" panose="020B0604020202020204" pitchFamily="34" charset="0"/>
+                <a:cs typeface="Arial" panose="020B0604020202020204" pitchFamily="34" charset="0"/>
+              </a:rPr>
+              <a:t>extraction</a:t>
+            </a:r>
+            <a:r>
+              <a:rPr lang="de-CH" sz="1050" dirty="0">
+                <a:latin typeface="Arial" panose="020B0604020202020204" pitchFamily="34" charset="0"/>
+                <a:cs typeface="Arial" panose="020B0604020202020204" pitchFamily="34" charset="0"/>
+              </a:rPr>
+              <a:t> </a:t>
+            </a:r>
+            <a:r>
+              <a:rPr lang="de-CH" sz="1050" dirty="0" err="1">
+                <a:latin typeface="Arial" panose="020B0604020202020204" pitchFamily="34" charset="0"/>
+                <a:cs typeface="Arial" panose="020B0604020202020204" pitchFamily="34" charset="0"/>
+              </a:rPr>
+              <a:t>from</a:t>
+            </a:r>
+            <a:r>
+              <a:rPr lang="de-CH" sz="1050" dirty="0">
+                <a:latin typeface="Arial" panose="020B0604020202020204" pitchFamily="34" charset="0"/>
+                <a:cs typeface="Arial" panose="020B0604020202020204" pitchFamily="34" charset="0"/>
+              </a:rPr>
+              <a:t> </a:t>
+            </a:r>
+            <a:r>
+              <a:rPr lang="de-CH" sz="1050" dirty="0" err="1">
+                <a:latin typeface="Arial" panose="020B0604020202020204" pitchFamily="34" charset="0"/>
+                <a:cs typeface="Arial" panose="020B0604020202020204" pitchFamily="34" charset="0"/>
+              </a:rPr>
+              <a:t>images</a:t>
+            </a:r>
+            <a:endParaRPr lang="de-CH" sz="1050" dirty="0">
+              <a:latin typeface="Arial" panose="020B0604020202020204" pitchFamily="34" charset="0"/>
+              <a:cs typeface="Arial" panose="020B0604020202020204" pitchFamily="34" charset="0"/>
+            </a:endParaRPr>
+          </a:p>
+        </p:txBody>
+      </p:sp>
+      <p:sp>
+        <p:nvSpPr>
+          <p:cNvPr id="120" name="TextBox 119">
+            <a:extLst>
+              <a:ext uri="{FF2B5EF4-FFF2-40B4-BE49-F238E27FC236}">
+                <a16:creationId xmlns:a16="http://schemas.microsoft.com/office/drawing/2014/main" id="{8CD71105-3D4D-48C9-8FDF-35F0F67F25CC}"/>
+              </a:ext>
+            </a:extLst>
+          </p:cNvPr>
+          <p:cNvSpPr txBox="1"/>
+          <p:nvPr/>
+        </p:nvSpPr>
+        <p:spPr>
+          <a:xfrm>
+            <a:off x="5436478" y="2628433"/>
+            <a:ext cx="1706801" cy="415498"/>
+          </a:xfrm>
+          <a:prstGeom prst="rect">
+            <a:avLst/>
+          </a:prstGeom>
+          <a:noFill/>
+        </p:spPr>
+        <p:txBody>
+          <a:bodyPr wrap="square" rtlCol="0">
+            <a:spAutoFit/>
+          </a:bodyPr>
+          <a:lstStyle/>
+          <a:p>
+            <a:r>
+              <a:rPr lang="de-CH" sz="1050" dirty="0">
+                <a:latin typeface="Arial" panose="020B0604020202020204" pitchFamily="34" charset="0"/>
+                <a:cs typeface="Arial" panose="020B0604020202020204" pitchFamily="34" charset="0"/>
+              </a:rPr>
+              <a:t>For </a:t>
+            </a:r>
+            <a:r>
+              <a:rPr lang="de-CH" sz="1050" dirty="0" err="1">
+                <a:latin typeface="Arial" panose="020B0604020202020204" pitchFamily="34" charset="0"/>
+                <a:cs typeface="Arial" panose="020B0604020202020204" pitchFamily="34" charset="0"/>
+              </a:rPr>
+              <a:t>coordination</a:t>
+            </a:r>
+            <a:r>
+              <a:rPr lang="de-CH" sz="1050" dirty="0">
+                <a:latin typeface="Arial" panose="020B0604020202020204" pitchFamily="34" charset="0"/>
+                <a:cs typeface="Arial" panose="020B0604020202020204" pitchFamily="34" charset="0"/>
+              </a:rPr>
+              <a:t> / </a:t>
+            </a:r>
+            <a:r>
+              <a:rPr lang="de-CH" sz="1050" dirty="0" err="1">
+                <a:latin typeface="Arial" panose="020B0604020202020204" pitchFamily="34" charset="0"/>
+                <a:cs typeface="Arial" panose="020B0604020202020204" pitchFamily="34" charset="0"/>
+              </a:rPr>
+              <a:t>location</a:t>
+            </a:r>
+            <a:r>
+              <a:rPr lang="de-CH" sz="1050" dirty="0">
+                <a:latin typeface="Arial" panose="020B0604020202020204" pitchFamily="34" charset="0"/>
+                <a:cs typeface="Arial" panose="020B0604020202020204" pitchFamily="34" charset="0"/>
+              </a:rPr>
+              <a:t> </a:t>
+            </a:r>
+            <a:r>
+              <a:rPr lang="de-CH" sz="1050" dirty="0" err="1">
+                <a:latin typeface="Arial" panose="020B0604020202020204" pitchFamily="34" charset="0"/>
+                <a:cs typeface="Arial" panose="020B0604020202020204" pitchFamily="34" charset="0"/>
+              </a:rPr>
+              <a:t>retrieval</a:t>
+            </a:r>
+            <a:endParaRPr lang="de-CH" sz="1050" dirty="0">
+              <a:latin typeface="Arial" panose="020B0604020202020204" pitchFamily="34" charset="0"/>
+              <a:cs typeface="Arial" panose="020B0604020202020204" pitchFamily="34" charset="0"/>
+            </a:endParaRPr>
+          </a:p>
+        </p:txBody>
+      </p:sp>
+      <p:sp>
+        <p:nvSpPr>
+          <p:cNvPr id="121" name="TextBox 120">
+            <a:extLst>
+              <a:ext uri="{FF2B5EF4-FFF2-40B4-BE49-F238E27FC236}">
+                <a16:creationId xmlns:a16="http://schemas.microsoft.com/office/drawing/2014/main" id="{85222CED-83CF-407C-96CE-CF5D10917A5A}"/>
+              </a:ext>
+            </a:extLst>
+          </p:cNvPr>
+          <p:cNvSpPr txBox="1"/>
+          <p:nvPr/>
+        </p:nvSpPr>
+        <p:spPr>
+          <a:xfrm>
+            <a:off x="5567299" y="2312705"/>
+            <a:ext cx="1142877" cy="415498"/>
+          </a:xfrm>
+          <a:prstGeom prst="rect">
+            <a:avLst/>
+          </a:prstGeom>
+          <a:noFill/>
+        </p:spPr>
+        <p:txBody>
+          <a:bodyPr wrap="square" rtlCol="0">
+            <a:spAutoFit/>
+          </a:bodyPr>
+          <a:lstStyle/>
+          <a:p>
+            <a:r>
+              <a:rPr lang="de-CH" sz="1050" dirty="0">
+                <a:latin typeface="Arial" panose="020B0604020202020204" pitchFamily="34" charset="0"/>
+                <a:cs typeface="Arial" panose="020B0604020202020204" pitchFamily="34" charset="0"/>
+              </a:rPr>
+              <a:t>For HTML </a:t>
+            </a:r>
+            <a:r>
+              <a:rPr lang="de-CH" sz="1050" dirty="0" err="1">
+                <a:latin typeface="Arial" panose="020B0604020202020204" pitchFamily="34" charset="0"/>
+                <a:cs typeface="Arial" panose="020B0604020202020204" pitchFamily="34" charset="0"/>
+              </a:rPr>
+              <a:t>parsing</a:t>
+            </a:r>
+            <a:endParaRPr lang="de-CH" sz="1050" dirty="0">
+              <a:latin typeface="Arial" panose="020B0604020202020204" pitchFamily="34" charset="0"/>
+              <a:cs typeface="Arial" panose="020B0604020202020204" pitchFamily="34" charset="0"/>
+            </a:endParaRPr>
+          </a:p>
+        </p:txBody>
+      </p:sp>
+      <p:pic>
+        <p:nvPicPr>
+          <p:cNvPr id="122" name="Picture 121">
+            <a:extLst>
+              <a:ext uri="{FF2B5EF4-FFF2-40B4-BE49-F238E27FC236}">
+                <a16:creationId xmlns:a16="http://schemas.microsoft.com/office/drawing/2014/main" id="{4634E84D-185C-41DB-80D1-13B450E5E134}"/>
+              </a:ext>
+            </a:extLst>
+          </p:cNvPr>
+          <p:cNvPicPr>
+            <a:picLocks noChangeAspect="1"/>
+          </p:cNvPicPr>
+          <p:nvPr/>
+        </p:nvPicPr>
+        <p:blipFill>
+          <a:blip r:embed="rId11">
+            <a:extLst>
+              <a:ext uri="{28A0092B-C50C-407E-A947-70E740481C1C}">
+                <a14:useLocalDpi xmlns:a14="http://schemas.microsoft.com/office/drawing/2010/main" val="0"/>
+              </a:ext>
+            </a:extLst>
+          </a:blip>
+          <a:stretch>
+            <a:fillRect/>
+          </a:stretch>
+        </p:blipFill>
+        <p:spPr>
+          <a:xfrm>
+            <a:off x="10720177" y="1565680"/>
+            <a:ext cx="812511" cy="475556"/>
+          </a:xfrm>
+          <a:prstGeom prst="rect">
+            <a:avLst/>
+          </a:prstGeom>
+        </p:spPr>
+      </p:pic>
+      <p:pic>
+        <p:nvPicPr>
+          <p:cNvPr id="123" name="Picture 122">
+            <a:extLst>
+              <a:ext uri="{FF2B5EF4-FFF2-40B4-BE49-F238E27FC236}">
+                <a16:creationId xmlns:a16="http://schemas.microsoft.com/office/drawing/2014/main" id="{D5328B2C-982A-4ADA-81AF-E9844203A145}"/>
+              </a:ext>
+            </a:extLst>
+          </p:cNvPr>
+          <p:cNvPicPr>
+            <a:picLocks noChangeAspect="1"/>
+          </p:cNvPicPr>
+          <p:nvPr/>
+        </p:nvPicPr>
+        <p:blipFill>
+          <a:blip r:embed="rId12">
+            <a:extLst>
+              <a:ext uri="{28A0092B-C50C-407E-A947-70E740481C1C}">
+                <a14:useLocalDpi xmlns:a14="http://schemas.microsoft.com/office/drawing/2010/main" val="0"/>
+              </a:ext>
+            </a:extLst>
+          </a:blip>
+          <a:stretch>
+            <a:fillRect/>
+          </a:stretch>
+        </p:blipFill>
+        <p:spPr>
+          <a:xfrm>
+            <a:off x="8600816" y="2056936"/>
+            <a:ext cx="929978" cy="318186"/>
+          </a:xfrm>
+          <a:prstGeom prst="rect">
+            <a:avLst/>
+          </a:prstGeom>
+        </p:spPr>
+      </p:pic>
+      <p:sp>
+        <p:nvSpPr>
+          <p:cNvPr id="124" name="Rectangle 123">
+            <a:extLst>
+              <a:ext uri="{FF2B5EF4-FFF2-40B4-BE49-F238E27FC236}">
+                <a16:creationId xmlns:a16="http://schemas.microsoft.com/office/drawing/2014/main" id="{9B2A11A0-0D63-432C-A2DC-76F018453AB7}"/>
+              </a:ext>
+            </a:extLst>
+          </p:cNvPr>
+          <p:cNvSpPr/>
+          <p:nvPr/>
+        </p:nvSpPr>
+        <p:spPr>
+          <a:xfrm>
+            <a:off x="8446042" y="1542233"/>
+            <a:ext cx="3336383" cy="1543567"/>
+          </a:xfrm>
+          <a:prstGeom prst="rect">
+            <a:avLst/>
+          </a:prstGeom>
+          <a:noFill/>
+          <a:ln>
+            <a:solidFill>
+              <a:schemeClr val="tx1"/>
+            </a:solidFill>
+            <a:prstDash val="dash"/>
+          </a:ln>
+        </p:spPr>
+        <p:style>
+          <a:lnRef idx="2">
+            <a:schemeClr val="accent1">
+              <a:shade val="50000"/>
+            </a:schemeClr>
+          </a:lnRef>
+          <a:fillRef idx="1">
+            <a:schemeClr val="accent1"/>
+          </a:fillRef>
+          <a:effectRef idx="0">
+            <a:schemeClr val="accent1"/>
+          </a:effectRef>
+          <a:fontRef idx="minor">
+            <a:schemeClr val="lt1"/>
+          </a:fontRef>
+        </p:style>
+        <p:txBody>
+          <a:bodyPr rtlCol="0" anchor="ctr"/>
+          <a:lstStyle/>
+          <a:p>
+            <a:pPr algn="ctr"/>
+            <a:endParaRPr lang="de-CH">
+              <a:latin typeface="Arial" panose="020B0604020202020204" pitchFamily="34" charset="0"/>
+              <a:cs typeface="Arial" panose="020B0604020202020204" pitchFamily="34" charset="0"/>
+            </a:endParaRPr>
+          </a:p>
+        </p:txBody>
+      </p:sp>
+      <p:pic>
+        <p:nvPicPr>
+          <p:cNvPr id="125" name="Picture 124">
+            <a:extLst>
+              <a:ext uri="{FF2B5EF4-FFF2-40B4-BE49-F238E27FC236}">
+                <a16:creationId xmlns:a16="http://schemas.microsoft.com/office/drawing/2014/main" id="{2643F0DD-EC79-4CC1-B559-6F7AEA4ED6E9}"/>
+              </a:ext>
+            </a:extLst>
+          </p:cNvPr>
+          <p:cNvPicPr>
+            <a:picLocks noChangeAspect="1"/>
+          </p:cNvPicPr>
+          <p:nvPr/>
+        </p:nvPicPr>
+        <p:blipFill>
+          <a:blip r:embed="rId13">
+            <a:extLst>
+              <a:ext uri="{28A0092B-C50C-407E-A947-70E740481C1C}">
+                <a14:useLocalDpi xmlns:a14="http://schemas.microsoft.com/office/drawing/2010/main" val="0"/>
+              </a:ext>
+            </a:extLst>
+          </a:blip>
+          <a:stretch>
+            <a:fillRect/>
+          </a:stretch>
+        </p:blipFill>
+        <p:spPr>
+          <a:xfrm>
+            <a:off x="9568066" y="2447242"/>
+            <a:ext cx="381266" cy="393022"/>
+          </a:xfrm>
+          <a:prstGeom prst="rect">
+            <a:avLst/>
+          </a:prstGeom>
+        </p:spPr>
+      </p:pic>
+      <p:sp>
+        <p:nvSpPr>
+          <p:cNvPr id="126" name="TextBox 125">
+            <a:extLst>
+              <a:ext uri="{FF2B5EF4-FFF2-40B4-BE49-F238E27FC236}">
+                <a16:creationId xmlns:a16="http://schemas.microsoft.com/office/drawing/2014/main" id="{227A1194-907D-47B5-B7A7-141AC38F71E4}"/>
+              </a:ext>
+            </a:extLst>
+          </p:cNvPr>
+          <p:cNvSpPr txBox="1"/>
+          <p:nvPr/>
+        </p:nvSpPr>
+        <p:spPr>
+          <a:xfrm>
+            <a:off x="9983555" y="2441027"/>
+            <a:ext cx="1285461" cy="415498"/>
+          </a:xfrm>
+          <a:prstGeom prst="rect">
+            <a:avLst/>
+          </a:prstGeom>
+          <a:noFill/>
+        </p:spPr>
+        <p:txBody>
+          <a:bodyPr wrap="square" rtlCol="0">
+            <a:spAutoFit/>
+          </a:bodyPr>
+          <a:lstStyle/>
+          <a:p>
+            <a:r>
+              <a:rPr lang="de-CH" sz="1050" dirty="0">
+                <a:latin typeface="Arial" panose="020B0604020202020204" pitchFamily="34" charset="0"/>
+                <a:cs typeface="Arial" panose="020B0604020202020204" pitchFamily="34" charset="0"/>
+              </a:rPr>
+              <a:t>For </a:t>
+            </a:r>
+            <a:r>
+              <a:rPr lang="de-CH" sz="1050" dirty="0" err="1">
+                <a:latin typeface="Arial" panose="020B0604020202020204" pitchFamily="34" charset="0"/>
+                <a:cs typeface="Arial" panose="020B0604020202020204" pitchFamily="34" charset="0"/>
+              </a:rPr>
+              <a:t>Scalable</a:t>
+            </a:r>
+            <a:r>
+              <a:rPr lang="de-CH" sz="1050" dirty="0">
+                <a:latin typeface="Arial" panose="020B0604020202020204" pitchFamily="34" charset="0"/>
+                <a:cs typeface="Arial" panose="020B0604020202020204" pitchFamily="34" charset="0"/>
+              </a:rPr>
+              <a:t> &amp; Fast </a:t>
+            </a:r>
+            <a:r>
+              <a:rPr lang="de-CH" sz="1050" dirty="0" err="1">
+                <a:latin typeface="Arial" panose="020B0604020202020204" pitchFamily="34" charset="0"/>
+                <a:cs typeface="Arial" panose="020B0604020202020204" pitchFamily="34" charset="0"/>
+              </a:rPr>
+              <a:t>PostGreSQL</a:t>
+            </a:r>
+            <a:endParaRPr lang="de-CH" sz="1050" dirty="0">
+              <a:latin typeface="Arial" panose="020B0604020202020204" pitchFamily="34" charset="0"/>
+              <a:cs typeface="Arial" panose="020B0604020202020204" pitchFamily="34" charset="0"/>
+            </a:endParaRPr>
+          </a:p>
+        </p:txBody>
+      </p:sp>
+      <p:sp>
+        <p:nvSpPr>
+          <p:cNvPr id="127" name="TextBox 126">
+            <a:extLst>
+              <a:ext uri="{FF2B5EF4-FFF2-40B4-BE49-F238E27FC236}">
+                <a16:creationId xmlns:a16="http://schemas.microsoft.com/office/drawing/2014/main" id="{545771C1-4C05-45D2-BB9F-E1EA238483B2}"/>
+              </a:ext>
+            </a:extLst>
+          </p:cNvPr>
+          <p:cNvSpPr txBox="1"/>
+          <p:nvPr/>
+        </p:nvSpPr>
+        <p:spPr>
+          <a:xfrm>
+            <a:off x="9568066" y="1694706"/>
+            <a:ext cx="1360315" cy="577081"/>
+          </a:xfrm>
+          <a:prstGeom prst="rect">
+            <a:avLst/>
+          </a:prstGeom>
+          <a:noFill/>
+        </p:spPr>
+        <p:txBody>
+          <a:bodyPr wrap="square" rtlCol="0">
+            <a:spAutoFit/>
+          </a:bodyPr>
+          <a:lstStyle/>
+          <a:p>
+            <a:r>
+              <a:rPr lang="de-CH" sz="1050" dirty="0">
+                <a:latin typeface="Arial" panose="020B0604020202020204" pitchFamily="34" charset="0"/>
+                <a:cs typeface="Arial" panose="020B0604020202020204" pitchFamily="34" charset="0"/>
+              </a:rPr>
+              <a:t>For Python-</a:t>
+            </a:r>
+            <a:r>
+              <a:rPr lang="de-CH" sz="1050" dirty="0" err="1">
+                <a:latin typeface="Arial" panose="020B0604020202020204" pitchFamily="34" charset="0"/>
+                <a:cs typeface="Arial" panose="020B0604020202020204" pitchFamily="34" charset="0"/>
+              </a:rPr>
+              <a:t>based</a:t>
+            </a:r>
+            <a:r>
+              <a:rPr lang="de-CH" sz="1050" dirty="0">
+                <a:latin typeface="Arial" panose="020B0604020202020204" pitchFamily="34" charset="0"/>
+                <a:cs typeface="Arial" panose="020B0604020202020204" pitchFamily="34" charset="0"/>
+              </a:rPr>
+              <a:t> front end in Browser</a:t>
+            </a:r>
+          </a:p>
+        </p:txBody>
+      </p:sp>
+      <p:pic>
+        <p:nvPicPr>
+          <p:cNvPr id="129" name="Picture 128">
+            <a:extLst>
+              <a:ext uri="{FF2B5EF4-FFF2-40B4-BE49-F238E27FC236}">
+                <a16:creationId xmlns:a16="http://schemas.microsoft.com/office/drawing/2014/main" id="{78A959E5-447D-4867-8F4C-D0BE69FCD68A}"/>
+              </a:ext>
+            </a:extLst>
+          </p:cNvPr>
+          <p:cNvPicPr>
+            <a:picLocks noChangeAspect="1"/>
+          </p:cNvPicPr>
+          <p:nvPr/>
+        </p:nvPicPr>
+        <p:blipFill>
+          <a:blip r:embed="rId14">
+            <a:extLst>
+              <a:ext uri="{28A0092B-C50C-407E-A947-70E740481C1C}">
+                <a14:useLocalDpi xmlns:a14="http://schemas.microsoft.com/office/drawing/2010/main" val="0"/>
+              </a:ext>
+            </a:extLst>
+          </a:blip>
+          <a:stretch>
+            <a:fillRect/>
+          </a:stretch>
+        </p:blipFill>
+        <p:spPr>
+          <a:xfrm>
+            <a:off x="9907312" y="5920979"/>
+            <a:ext cx="432324" cy="432324"/>
+          </a:xfrm>
+          <a:prstGeom prst="rect">
+            <a:avLst/>
+          </a:prstGeom>
+        </p:spPr>
+      </p:pic>
+      <p:sp>
+        <p:nvSpPr>
+          <p:cNvPr id="131" name="TextBox 130">
+            <a:extLst>
+              <a:ext uri="{FF2B5EF4-FFF2-40B4-BE49-F238E27FC236}">
+                <a16:creationId xmlns:a16="http://schemas.microsoft.com/office/drawing/2014/main" id="{D3C39FC0-AF29-4691-8525-67D9E4D46ADB}"/>
+              </a:ext>
+            </a:extLst>
+          </p:cNvPr>
+          <p:cNvSpPr txBox="1"/>
+          <p:nvPr/>
+        </p:nvSpPr>
+        <p:spPr>
+          <a:xfrm>
+            <a:off x="699216" y="3565803"/>
+            <a:ext cx="2094869" cy="461665"/>
+          </a:xfrm>
+          <a:prstGeom prst="rect">
+            <a:avLst/>
+          </a:prstGeom>
+          <a:noFill/>
+        </p:spPr>
+        <p:txBody>
+          <a:bodyPr wrap="none" rtlCol="0">
+            <a:spAutoFit/>
+          </a:bodyPr>
+          <a:lstStyle/>
+          <a:p>
+            <a:r>
+              <a:rPr lang="de-CH" sz="1200" b="1" dirty="0">
+                <a:latin typeface="Arial" panose="020B0604020202020204" pitchFamily="34" charset="0"/>
+                <a:cs typeface="Arial" panose="020B0604020202020204" pitchFamily="34" charset="0"/>
+              </a:rPr>
+              <a:t>Government</a:t>
+            </a:r>
+          </a:p>
+          <a:p>
+            <a:pPr marL="171450" indent="-171450">
+              <a:buFont typeface="Wingdings" panose="05000000000000000000" pitchFamily="2" charset="2"/>
+              <a:buChar char="§"/>
+            </a:pPr>
+            <a:r>
+              <a:rPr lang="de-CH" sz="1200" dirty="0">
+                <a:latin typeface="Arial" panose="020B0604020202020204" pitchFamily="34" charset="0"/>
+                <a:cs typeface="Arial" panose="020B0604020202020204" pitchFamily="34" charset="0"/>
+              </a:rPr>
+              <a:t>Public Tender Information</a:t>
+            </a:r>
+          </a:p>
+        </p:txBody>
+      </p:sp>
+      <p:sp>
+        <p:nvSpPr>
+          <p:cNvPr id="144" name="TextBox 143">
+            <a:extLst>
+              <a:ext uri="{FF2B5EF4-FFF2-40B4-BE49-F238E27FC236}">
+                <a16:creationId xmlns:a16="http://schemas.microsoft.com/office/drawing/2014/main" id="{554860CE-E445-4F8C-B2DA-2A86057F0A07}"/>
+              </a:ext>
+            </a:extLst>
+          </p:cNvPr>
+          <p:cNvSpPr txBox="1"/>
+          <p:nvPr/>
+        </p:nvSpPr>
+        <p:spPr>
+          <a:xfrm>
+            <a:off x="690415" y="4099152"/>
+            <a:ext cx="1236236" cy="830997"/>
+          </a:xfrm>
+          <a:prstGeom prst="rect">
+            <a:avLst/>
+          </a:prstGeom>
+          <a:noFill/>
+        </p:spPr>
+        <p:txBody>
+          <a:bodyPr wrap="none" rtlCol="0">
+            <a:spAutoFit/>
+          </a:bodyPr>
+          <a:lstStyle/>
+          <a:p>
+            <a:r>
+              <a:rPr lang="de-CH" sz="1200" b="1" dirty="0">
+                <a:latin typeface="Arial" panose="020B0604020202020204" pitchFamily="34" charset="0"/>
+                <a:cs typeface="Arial" panose="020B0604020202020204" pitchFamily="34" charset="0"/>
+              </a:rPr>
+              <a:t>Companies</a:t>
+            </a:r>
+          </a:p>
+          <a:p>
+            <a:pPr marL="171450" indent="-171450">
+              <a:buFont typeface="Wingdings" panose="05000000000000000000" pitchFamily="2" charset="2"/>
+              <a:buChar char="§"/>
+            </a:pPr>
+            <a:r>
+              <a:rPr lang="de-CH" sz="1200" dirty="0">
+                <a:latin typeface="Arial" panose="020B0604020202020204" pitchFamily="34" charset="0"/>
+                <a:cs typeface="Arial" panose="020B0604020202020204" pitchFamily="34" charset="0"/>
+              </a:rPr>
+              <a:t>Azure Power</a:t>
+            </a:r>
+          </a:p>
+          <a:p>
+            <a:pPr marL="171450" indent="-171450">
+              <a:buFont typeface="Wingdings" panose="05000000000000000000" pitchFamily="2" charset="2"/>
+              <a:buChar char="§"/>
+            </a:pPr>
+            <a:r>
+              <a:rPr lang="de-CH" sz="1200" dirty="0" err="1">
+                <a:latin typeface="Arial" panose="020B0604020202020204" pitchFamily="34" charset="0"/>
+                <a:cs typeface="Arial" panose="020B0604020202020204" pitchFamily="34" charset="0"/>
+              </a:rPr>
+              <a:t>Renew</a:t>
+            </a:r>
+            <a:endParaRPr lang="de-CH" sz="1200" dirty="0">
+              <a:latin typeface="Arial" panose="020B0604020202020204" pitchFamily="34" charset="0"/>
+              <a:cs typeface="Arial" panose="020B0604020202020204" pitchFamily="34" charset="0"/>
+            </a:endParaRPr>
+          </a:p>
+          <a:p>
+            <a:pPr marL="171450" indent="-171450">
+              <a:buFont typeface="Wingdings" panose="05000000000000000000" pitchFamily="2" charset="2"/>
+              <a:buChar char="§"/>
+            </a:pPr>
+            <a:r>
+              <a:rPr lang="de-CH" sz="1200" dirty="0" err="1">
+                <a:latin typeface="Arial" panose="020B0604020202020204" pitchFamily="34" charset="0"/>
+                <a:cs typeface="Arial" panose="020B0604020202020204" pitchFamily="34" charset="0"/>
+              </a:rPr>
+              <a:t>Tata</a:t>
+            </a:r>
+            <a:r>
+              <a:rPr lang="de-CH" sz="1200" dirty="0">
+                <a:latin typeface="Arial" panose="020B0604020202020204" pitchFamily="34" charset="0"/>
+                <a:cs typeface="Arial" panose="020B0604020202020204" pitchFamily="34" charset="0"/>
+              </a:rPr>
+              <a:t> Power</a:t>
+            </a:r>
+          </a:p>
+        </p:txBody>
+      </p:sp>
+      <p:sp>
+        <p:nvSpPr>
+          <p:cNvPr id="145" name="TextBox 144">
+            <a:extLst>
+              <a:ext uri="{FF2B5EF4-FFF2-40B4-BE49-F238E27FC236}">
+                <a16:creationId xmlns:a16="http://schemas.microsoft.com/office/drawing/2014/main" id="{D9947723-322E-4BCE-9357-4B467BA674DA}"/>
+              </a:ext>
+            </a:extLst>
+          </p:cNvPr>
+          <p:cNvSpPr txBox="1"/>
+          <p:nvPr/>
+        </p:nvSpPr>
+        <p:spPr>
+          <a:xfrm>
+            <a:off x="701407" y="5039951"/>
+            <a:ext cx="2188420" cy="646331"/>
+          </a:xfrm>
+          <a:prstGeom prst="rect">
+            <a:avLst/>
+          </a:prstGeom>
+          <a:noFill/>
+        </p:spPr>
+        <p:txBody>
+          <a:bodyPr wrap="none" rtlCol="0">
+            <a:spAutoFit/>
+          </a:bodyPr>
+          <a:lstStyle/>
+          <a:p>
+            <a:r>
+              <a:rPr lang="de-CH" sz="1200" b="1" dirty="0">
+                <a:latin typeface="Arial" panose="020B0604020202020204" pitchFamily="34" charset="0"/>
+                <a:cs typeface="Arial" panose="020B0604020202020204" pitchFamily="34" charset="0"/>
+              </a:rPr>
+              <a:t>International </a:t>
+            </a:r>
+            <a:r>
+              <a:rPr lang="de-CH" sz="1200" b="1" dirty="0" err="1">
+                <a:latin typeface="Arial" panose="020B0604020202020204" pitchFamily="34" charset="0"/>
+                <a:cs typeface="Arial" panose="020B0604020202020204" pitchFamily="34" charset="0"/>
+              </a:rPr>
+              <a:t>Organisations</a:t>
+            </a:r>
+            <a:endParaRPr lang="de-CH" sz="1200" b="1" dirty="0">
+              <a:latin typeface="Arial" panose="020B0604020202020204" pitchFamily="34" charset="0"/>
+              <a:cs typeface="Arial" panose="020B0604020202020204" pitchFamily="34" charset="0"/>
+            </a:endParaRPr>
+          </a:p>
+          <a:p>
+            <a:pPr marL="171450" indent="-171450">
+              <a:buFont typeface="Wingdings" panose="05000000000000000000" pitchFamily="2" charset="2"/>
+              <a:buChar char="§"/>
+            </a:pPr>
+            <a:r>
+              <a:rPr lang="de-CH" sz="1200" dirty="0" err="1">
+                <a:latin typeface="Arial" panose="020B0604020202020204" pitchFamily="34" charset="0"/>
+                <a:cs typeface="Arial" panose="020B0604020202020204" pitchFamily="34" charset="0"/>
+              </a:rPr>
+              <a:t>StatisticTimes</a:t>
+            </a:r>
+            <a:endParaRPr lang="de-CH" sz="1200" dirty="0">
+              <a:latin typeface="Arial" panose="020B0604020202020204" pitchFamily="34" charset="0"/>
+              <a:cs typeface="Arial" panose="020B0604020202020204" pitchFamily="34" charset="0"/>
+            </a:endParaRPr>
+          </a:p>
+          <a:p>
+            <a:pPr marL="171450" indent="-171450">
+              <a:buFont typeface="Wingdings" panose="05000000000000000000" pitchFamily="2" charset="2"/>
+              <a:buChar char="§"/>
+            </a:pPr>
+            <a:r>
+              <a:rPr lang="de-CH" sz="1200" dirty="0">
+                <a:latin typeface="Arial" panose="020B0604020202020204" pitchFamily="34" charset="0"/>
+                <a:cs typeface="Arial" panose="020B0604020202020204" pitchFamily="34" charset="0"/>
+              </a:rPr>
+              <a:t>INCED</a:t>
+            </a:r>
+          </a:p>
+        </p:txBody>
+      </p:sp>
+      <p:sp>
+        <p:nvSpPr>
+          <p:cNvPr id="146" name="TextBox 145">
+            <a:extLst>
+              <a:ext uri="{FF2B5EF4-FFF2-40B4-BE49-F238E27FC236}">
+                <a16:creationId xmlns:a16="http://schemas.microsoft.com/office/drawing/2014/main" id="{9D428D33-D97A-46A5-8F85-8788ABA284E5}"/>
+              </a:ext>
+            </a:extLst>
+          </p:cNvPr>
+          <p:cNvSpPr txBox="1"/>
+          <p:nvPr/>
+        </p:nvSpPr>
+        <p:spPr>
+          <a:xfrm>
+            <a:off x="699216" y="5752334"/>
+            <a:ext cx="1773242" cy="461665"/>
+          </a:xfrm>
+          <a:prstGeom prst="rect">
+            <a:avLst/>
+          </a:prstGeom>
+          <a:noFill/>
+        </p:spPr>
+        <p:txBody>
+          <a:bodyPr wrap="none" rtlCol="0">
+            <a:spAutoFit/>
+          </a:bodyPr>
+          <a:lstStyle/>
+          <a:p>
+            <a:r>
+              <a:rPr lang="de-CH" sz="1200" b="1" dirty="0">
+                <a:latin typeface="Arial" panose="020B0604020202020204" pitchFamily="34" charset="0"/>
+                <a:cs typeface="Arial" panose="020B0604020202020204" pitchFamily="34" charset="0"/>
+              </a:rPr>
+              <a:t>Academia</a:t>
+            </a:r>
+          </a:p>
+          <a:p>
+            <a:pPr marL="171450" indent="-171450">
+              <a:buFont typeface="Wingdings" panose="05000000000000000000" pitchFamily="2" charset="2"/>
+              <a:buChar char="§"/>
+            </a:pPr>
+            <a:r>
+              <a:rPr lang="de-CH" sz="1200" dirty="0">
+                <a:latin typeface="Arial" panose="020B0604020202020204" pitchFamily="34" charset="0"/>
+                <a:cs typeface="Arial" panose="020B0604020202020204" pitchFamily="34" charset="0"/>
+              </a:rPr>
+              <a:t>Geo-Data (</a:t>
+            </a:r>
+            <a:r>
+              <a:rPr lang="de-CH" sz="1200" dirty="0" err="1">
+                <a:latin typeface="Arial" panose="020B0604020202020204" pitchFamily="34" charset="0"/>
+                <a:cs typeface="Arial" panose="020B0604020202020204" pitchFamily="34" charset="0"/>
+              </a:rPr>
+              <a:t>UCDavis</a:t>
+            </a:r>
+            <a:r>
+              <a:rPr lang="de-CH" sz="1200" dirty="0">
+                <a:latin typeface="Arial" panose="020B0604020202020204" pitchFamily="34" charset="0"/>
+                <a:cs typeface="Arial" panose="020B0604020202020204" pitchFamily="34" charset="0"/>
+              </a:rPr>
+              <a:t>)</a:t>
+            </a:r>
+          </a:p>
+        </p:txBody>
+      </p:sp>
+      <p:pic>
+        <p:nvPicPr>
+          <p:cNvPr id="35" name="Picture 34">
+            <a:extLst>
+              <a:ext uri="{FF2B5EF4-FFF2-40B4-BE49-F238E27FC236}">
+                <a16:creationId xmlns:a16="http://schemas.microsoft.com/office/drawing/2014/main" id="{667C09F9-1931-474C-90F3-D55DC04FCC93}"/>
+              </a:ext>
+            </a:extLst>
+          </p:cNvPr>
+          <p:cNvPicPr>
+            <a:picLocks noChangeAspect="1"/>
+          </p:cNvPicPr>
+          <p:nvPr/>
+        </p:nvPicPr>
+        <p:blipFill>
+          <a:blip r:embed="rId15">
+            <a:extLst>
+              <a:ext uri="{28A0092B-C50C-407E-A947-70E740481C1C}">
+                <a14:useLocalDpi xmlns:a14="http://schemas.microsoft.com/office/drawing/2010/main" val="0"/>
+              </a:ext>
+            </a:extLst>
+          </a:blip>
+          <a:stretch>
+            <a:fillRect/>
+          </a:stretch>
+        </p:blipFill>
+        <p:spPr>
+          <a:xfrm>
+            <a:off x="1786864" y="4327925"/>
+            <a:ext cx="157760" cy="157760"/>
+          </a:xfrm>
+          <a:prstGeom prst="rect">
+            <a:avLst/>
+          </a:prstGeom>
+        </p:spPr>
+      </p:pic>
+      <p:pic>
+        <p:nvPicPr>
+          <p:cNvPr id="39" name="Picture 38">
+            <a:extLst>
+              <a:ext uri="{FF2B5EF4-FFF2-40B4-BE49-F238E27FC236}">
+                <a16:creationId xmlns:a16="http://schemas.microsoft.com/office/drawing/2014/main" id="{0FBB5BEC-B688-47C0-A816-8DB18BB7FB74}"/>
+              </a:ext>
+            </a:extLst>
+          </p:cNvPr>
+          <p:cNvPicPr>
+            <a:picLocks noChangeAspect="1"/>
+          </p:cNvPicPr>
+          <p:nvPr/>
+        </p:nvPicPr>
+        <p:blipFill>
+          <a:blip r:embed="rId16">
+            <a:extLst>
+              <a:ext uri="{28A0092B-C50C-407E-A947-70E740481C1C}">
+                <a14:useLocalDpi xmlns:a14="http://schemas.microsoft.com/office/drawing/2010/main" val="0"/>
+              </a:ext>
+            </a:extLst>
+          </a:blip>
+          <a:stretch>
+            <a:fillRect/>
+          </a:stretch>
+        </p:blipFill>
+        <p:spPr>
+          <a:xfrm>
+            <a:off x="2200287" y="5992590"/>
+            <a:ext cx="173536" cy="173536"/>
+          </a:xfrm>
+          <a:prstGeom prst="rect">
+            <a:avLst/>
+          </a:prstGeom>
+        </p:spPr>
+      </p:pic>
+      <p:pic>
+        <p:nvPicPr>
+          <p:cNvPr id="149" name="Picture 148">
+            <a:extLst>
+              <a:ext uri="{FF2B5EF4-FFF2-40B4-BE49-F238E27FC236}">
+                <a16:creationId xmlns:a16="http://schemas.microsoft.com/office/drawing/2014/main" id="{E9DDA6D5-CF91-4014-95FA-FCA24825F5F5}"/>
+              </a:ext>
+            </a:extLst>
+          </p:cNvPr>
+          <p:cNvPicPr>
+            <a:picLocks noChangeAspect="1"/>
+          </p:cNvPicPr>
+          <p:nvPr/>
+        </p:nvPicPr>
+        <p:blipFill>
+          <a:blip r:embed="rId15">
+            <a:extLst>
+              <a:ext uri="{28A0092B-C50C-407E-A947-70E740481C1C}">
+                <a14:useLocalDpi xmlns:a14="http://schemas.microsoft.com/office/drawing/2010/main" val="0"/>
+              </a:ext>
+            </a:extLst>
+          </a:blip>
+          <a:stretch>
+            <a:fillRect/>
+          </a:stretch>
+        </p:blipFill>
+        <p:spPr>
+          <a:xfrm>
+            <a:off x="1415874" y="4549979"/>
+            <a:ext cx="157760" cy="157760"/>
+          </a:xfrm>
+          <a:prstGeom prst="rect">
+            <a:avLst/>
+          </a:prstGeom>
+        </p:spPr>
+      </p:pic>
+      <p:pic>
+        <p:nvPicPr>
+          <p:cNvPr id="150" name="Picture 149">
+            <a:extLst>
+              <a:ext uri="{FF2B5EF4-FFF2-40B4-BE49-F238E27FC236}">
+                <a16:creationId xmlns:a16="http://schemas.microsoft.com/office/drawing/2014/main" id="{7970DF47-D2EB-4AD6-87C1-349867CAD213}"/>
+              </a:ext>
+            </a:extLst>
+          </p:cNvPr>
+          <p:cNvPicPr>
+            <a:picLocks noChangeAspect="1"/>
+          </p:cNvPicPr>
+          <p:nvPr/>
+        </p:nvPicPr>
+        <p:blipFill>
+          <a:blip r:embed="rId15">
+            <a:extLst>
+              <a:ext uri="{28A0092B-C50C-407E-A947-70E740481C1C}">
+                <a14:useLocalDpi xmlns:a14="http://schemas.microsoft.com/office/drawing/2010/main" val="0"/>
+              </a:ext>
+            </a:extLst>
+          </a:blip>
+          <a:stretch>
+            <a:fillRect/>
+          </a:stretch>
+        </p:blipFill>
+        <p:spPr>
+          <a:xfrm>
+            <a:off x="1669844" y="4715687"/>
+            <a:ext cx="157760" cy="157760"/>
+          </a:xfrm>
+          <a:prstGeom prst="rect">
+            <a:avLst/>
+          </a:prstGeom>
+        </p:spPr>
+      </p:pic>
+      <p:pic>
+        <p:nvPicPr>
+          <p:cNvPr id="151" name="Picture 150">
+            <a:extLst>
+              <a:ext uri="{FF2B5EF4-FFF2-40B4-BE49-F238E27FC236}">
+                <a16:creationId xmlns:a16="http://schemas.microsoft.com/office/drawing/2014/main" id="{838556BF-FA15-4FFE-A52C-3A4F7927EAF4}"/>
+              </a:ext>
+            </a:extLst>
+          </p:cNvPr>
+          <p:cNvPicPr>
+            <a:picLocks noChangeAspect="1"/>
+          </p:cNvPicPr>
+          <p:nvPr/>
+        </p:nvPicPr>
+        <p:blipFill>
+          <a:blip r:embed="rId15">
+            <a:extLst>
+              <a:ext uri="{28A0092B-C50C-407E-A947-70E740481C1C}">
+                <a14:useLocalDpi xmlns:a14="http://schemas.microsoft.com/office/drawing/2010/main" val="0"/>
+              </a:ext>
+            </a:extLst>
+          </a:blip>
+          <a:stretch>
+            <a:fillRect/>
+          </a:stretch>
+        </p:blipFill>
+        <p:spPr>
+          <a:xfrm>
+            <a:off x="1856529" y="5292883"/>
+            <a:ext cx="157760" cy="157760"/>
+          </a:xfrm>
+          <a:prstGeom prst="rect">
+            <a:avLst/>
+          </a:prstGeom>
+        </p:spPr>
+      </p:pic>
+      <p:pic>
+        <p:nvPicPr>
+          <p:cNvPr id="152" name="Picture 151">
+            <a:extLst>
+              <a:ext uri="{FF2B5EF4-FFF2-40B4-BE49-F238E27FC236}">
+                <a16:creationId xmlns:a16="http://schemas.microsoft.com/office/drawing/2014/main" id="{28295171-40C3-4F03-BD75-5B7F152BE92A}"/>
+              </a:ext>
+            </a:extLst>
+          </p:cNvPr>
+          <p:cNvPicPr>
+            <a:picLocks noChangeAspect="1"/>
+          </p:cNvPicPr>
+          <p:nvPr/>
+        </p:nvPicPr>
+        <p:blipFill>
+          <a:blip r:embed="rId15">
+            <a:extLst>
+              <a:ext uri="{28A0092B-C50C-407E-A947-70E740481C1C}">
+                <a14:useLocalDpi xmlns:a14="http://schemas.microsoft.com/office/drawing/2010/main" val="0"/>
+              </a:ext>
+            </a:extLst>
+          </a:blip>
+          <a:stretch>
+            <a:fillRect/>
+          </a:stretch>
+        </p:blipFill>
+        <p:spPr>
+          <a:xfrm>
+            <a:off x="2596468" y="3820788"/>
+            <a:ext cx="157760" cy="157760"/>
+          </a:xfrm>
+          <a:prstGeom prst="rect">
+            <a:avLst/>
+          </a:prstGeom>
+        </p:spPr>
+      </p:pic>
+      <p:pic>
+        <p:nvPicPr>
+          <p:cNvPr id="44" name="Picture 43">
+            <a:extLst>
+              <a:ext uri="{FF2B5EF4-FFF2-40B4-BE49-F238E27FC236}">
+                <a16:creationId xmlns:a16="http://schemas.microsoft.com/office/drawing/2014/main" id="{C6744158-9FB6-4994-A4EE-E78F8130B0B7}"/>
+              </a:ext>
+            </a:extLst>
+          </p:cNvPr>
+          <p:cNvPicPr>
+            <a:picLocks noChangeAspect="1"/>
+          </p:cNvPicPr>
+          <p:nvPr/>
+        </p:nvPicPr>
+        <p:blipFill>
+          <a:blip r:embed="rId17">
+            <a:extLst>
+              <a:ext uri="{28A0092B-C50C-407E-A947-70E740481C1C}">
+                <a14:useLocalDpi xmlns:a14="http://schemas.microsoft.com/office/drawing/2010/main" val="0"/>
+              </a:ext>
+            </a:extLst>
+          </a:blip>
+          <a:stretch>
+            <a:fillRect/>
+          </a:stretch>
+        </p:blipFill>
+        <p:spPr>
+          <a:xfrm>
+            <a:off x="1387925" y="5481297"/>
+            <a:ext cx="132099" cy="132099"/>
+          </a:xfrm>
+          <a:prstGeom prst="rect">
+            <a:avLst/>
+          </a:prstGeom>
+        </p:spPr>
+      </p:pic>
+      <p:pic>
+        <p:nvPicPr>
+          <p:cNvPr id="48" name="Picture 47">
+            <a:extLst>
+              <a:ext uri="{FF2B5EF4-FFF2-40B4-BE49-F238E27FC236}">
+                <a16:creationId xmlns:a16="http://schemas.microsoft.com/office/drawing/2014/main" id="{822ACC7A-7C9E-457C-8F12-D2A223F8A4BD}"/>
+              </a:ext>
+            </a:extLst>
+          </p:cNvPr>
+          <p:cNvPicPr>
+            <a:picLocks noChangeAspect="1"/>
+          </p:cNvPicPr>
+          <p:nvPr/>
+        </p:nvPicPr>
+        <p:blipFill>
+          <a:blip r:embed="rId18">
+            <a:extLst>
+              <a:ext uri="{28A0092B-C50C-407E-A947-70E740481C1C}">
+                <a14:useLocalDpi xmlns:a14="http://schemas.microsoft.com/office/drawing/2010/main" val="0"/>
+              </a:ext>
+            </a:extLst>
+          </a:blip>
+          <a:stretch>
+            <a:fillRect/>
+          </a:stretch>
+        </p:blipFill>
+        <p:spPr>
+          <a:xfrm>
+            <a:off x="6138737" y="3862017"/>
+            <a:ext cx="307431" cy="307431"/>
+          </a:xfrm>
+          <a:prstGeom prst="rect">
+            <a:avLst/>
+          </a:prstGeom>
+        </p:spPr>
+      </p:pic>
+      <p:pic>
+        <p:nvPicPr>
+          <p:cNvPr id="154" name="Picture 153">
+            <a:extLst>
+              <a:ext uri="{FF2B5EF4-FFF2-40B4-BE49-F238E27FC236}">
+                <a16:creationId xmlns:a16="http://schemas.microsoft.com/office/drawing/2014/main" id="{429CF145-9D7C-470A-BD31-782D662BFAC9}"/>
+              </a:ext>
+            </a:extLst>
+          </p:cNvPr>
+          <p:cNvPicPr>
+            <a:picLocks noChangeAspect="1"/>
+          </p:cNvPicPr>
+          <p:nvPr/>
+        </p:nvPicPr>
+        <p:blipFill>
+          <a:blip r:embed="rId18">
+            <a:extLst>
+              <a:ext uri="{28A0092B-C50C-407E-A947-70E740481C1C}">
+                <a14:useLocalDpi xmlns:a14="http://schemas.microsoft.com/office/drawing/2010/main" val="0"/>
+              </a:ext>
+            </a:extLst>
+          </a:blip>
+          <a:stretch>
+            <a:fillRect/>
+          </a:stretch>
+        </p:blipFill>
+        <p:spPr>
+          <a:xfrm>
+            <a:off x="6138737" y="4403390"/>
+            <a:ext cx="307431" cy="307431"/>
+          </a:xfrm>
+          <a:prstGeom prst="rect">
+            <a:avLst/>
+          </a:prstGeom>
+        </p:spPr>
+      </p:pic>
+      <p:pic>
+        <p:nvPicPr>
+          <p:cNvPr id="155" name="Picture 154">
+            <a:extLst>
+              <a:ext uri="{FF2B5EF4-FFF2-40B4-BE49-F238E27FC236}">
+                <a16:creationId xmlns:a16="http://schemas.microsoft.com/office/drawing/2014/main" id="{A4A0793B-2801-4D38-BDAC-41B1F3C0EE2C}"/>
+              </a:ext>
+            </a:extLst>
+          </p:cNvPr>
+          <p:cNvPicPr>
+            <a:picLocks noChangeAspect="1"/>
+          </p:cNvPicPr>
+          <p:nvPr/>
+        </p:nvPicPr>
+        <p:blipFill>
+          <a:blip r:embed="rId18">
+            <a:extLst>
+              <a:ext uri="{28A0092B-C50C-407E-A947-70E740481C1C}">
+                <a14:useLocalDpi xmlns:a14="http://schemas.microsoft.com/office/drawing/2010/main" val="0"/>
+              </a:ext>
+            </a:extLst>
+          </a:blip>
+          <a:stretch>
+            <a:fillRect/>
+          </a:stretch>
+        </p:blipFill>
+        <p:spPr>
+          <a:xfrm>
+            <a:off x="6138737" y="5015527"/>
+            <a:ext cx="307431" cy="307431"/>
+          </a:xfrm>
+          <a:prstGeom prst="rect">
+            <a:avLst/>
+          </a:prstGeom>
+        </p:spPr>
+      </p:pic>
+      <p:sp>
+        <p:nvSpPr>
+          <p:cNvPr id="156" name="TextBox 155">
+            <a:extLst>
+              <a:ext uri="{FF2B5EF4-FFF2-40B4-BE49-F238E27FC236}">
+                <a16:creationId xmlns:a16="http://schemas.microsoft.com/office/drawing/2014/main" id="{967FF6C8-224C-43E4-87A2-D74897DADAD6}"/>
+              </a:ext>
+            </a:extLst>
+          </p:cNvPr>
+          <p:cNvSpPr txBox="1"/>
+          <p:nvPr/>
+        </p:nvSpPr>
+        <p:spPr>
+          <a:xfrm>
+            <a:off x="6439820" y="3884286"/>
+            <a:ext cx="1080745" cy="276999"/>
+          </a:xfrm>
+          <a:prstGeom prst="rect">
+            <a:avLst/>
+          </a:prstGeom>
+          <a:noFill/>
+        </p:spPr>
+        <p:txBody>
+          <a:bodyPr wrap="none" rtlCol="0">
+            <a:spAutoFit/>
+          </a:bodyPr>
+          <a:lstStyle/>
+          <a:p>
+            <a:r>
+              <a:rPr lang="de-CH" sz="1200" b="1" dirty="0">
+                <a:latin typeface="Arial" panose="020B0604020202020204" pitchFamily="34" charset="0"/>
+                <a:cs typeface="Arial" panose="020B0604020202020204" pitchFamily="34" charset="0"/>
+              </a:rPr>
+              <a:t>Project Data</a:t>
+            </a:r>
+          </a:p>
+        </p:txBody>
+      </p:sp>
+      <p:sp>
+        <p:nvSpPr>
+          <p:cNvPr id="157" name="TextBox 156">
+            <a:extLst>
+              <a:ext uri="{FF2B5EF4-FFF2-40B4-BE49-F238E27FC236}">
+                <a16:creationId xmlns:a16="http://schemas.microsoft.com/office/drawing/2014/main" id="{02E42646-EBB1-4DB1-A1F0-38426B2FA8D3}"/>
+              </a:ext>
+            </a:extLst>
+          </p:cNvPr>
+          <p:cNvSpPr txBox="1"/>
+          <p:nvPr/>
+        </p:nvSpPr>
+        <p:spPr>
+          <a:xfrm>
+            <a:off x="6452745" y="4348342"/>
+            <a:ext cx="1439625" cy="461665"/>
+          </a:xfrm>
+          <a:prstGeom prst="rect">
+            <a:avLst/>
+          </a:prstGeom>
+          <a:noFill/>
+        </p:spPr>
+        <p:txBody>
+          <a:bodyPr wrap="square" rtlCol="0">
+            <a:spAutoFit/>
+          </a:bodyPr>
+          <a:lstStyle/>
+          <a:p>
+            <a:r>
+              <a:rPr lang="de-CH" sz="1200" b="1" dirty="0">
+                <a:latin typeface="Arial" panose="020B0604020202020204" pitchFamily="34" charset="0"/>
+                <a:cs typeface="Arial" panose="020B0604020202020204" pitchFamily="34" charset="0"/>
+              </a:rPr>
+              <a:t>National </a:t>
+            </a:r>
+            <a:r>
+              <a:rPr lang="de-CH" sz="1200" b="1" dirty="0" err="1">
+                <a:latin typeface="Arial" panose="020B0604020202020204" pitchFamily="34" charset="0"/>
+                <a:cs typeface="Arial" panose="020B0604020202020204" pitchFamily="34" charset="0"/>
+              </a:rPr>
+              <a:t>Statistics</a:t>
+            </a:r>
+            <a:r>
+              <a:rPr lang="de-CH" sz="1200" b="1" dirty="0">
+                <a:latin typeface="Arial" panose="020B0604020202020204" pitchFamily="34" charset="0"/>
+                <a:cs typeface="Arial" panose="020B0604020202020204" pitchFamily="34" charset="0"/>
+              </a:rPr>
+              <a:t> Data</a:t>
+            </a:r>
+          </a:p>
+        </p:txBody>
+      </p:sp>
+      <p:sp>
+        <p:nvSpPr>
+          <p:cNvPr id="158" name="TextBox 157">
+            <a:extLst>
+              <a:ext uri="{FF2B5EF4-FFF2-40B4-BE49-F238E27FC236}">
+                <a16:creationId xmlns:a16="http://schemas.microsoft.com/office/drawing/2014/main" id="{830DDE08-E244-4D4E-ABEE-F518C1AE981F}"/>
+              </a:ext>
+            </a:extLst>
+          </p:cNvPr>
+          <p:cNvSpPr txBox="1"/>
+          <p:nvPr/>
+        </p:nvSpPr>
+        <p:spPr>
+          <a:xfrm>
+            <a:off x="6439820" y="5027953"/>
+            <a:ext cx="1061316" cy="276999"/>
+          </a:xfrm>
+          <a:prstGeom prst="rect">
+            <a:avLst/>
+          </a:prstGeom>
+          <a:noFill/>
+        </p:spPr>
+        <p:txBody>
+          <a:bodyPr wrap="none" rtlCol="0">
+            <a:spAutoFit/>
+          </a:bodyPr>
+          <a:lstStyle/>
+          <a:p>
+            <a:r>
+              <a:rPr lang="de-CH" sz="1200" b="1" dirty="0">
+                <a:latin typeface="Arial" panose="020B0604020202020204" pitchFamily="34" charset="0"/>
+                <a:cs typeface="Arial" panose="020B0604020202020204" pitchFamily="34" charset="0"/>
+              </a:rPr>
+              <a:t>Tender Data</a:t>
+            </a:r>
+          </a:p>
+        </p:txBody>
+      </p:sp>
+      <p:pic>
+        <p:nvPicPr>
+          <p:cNvPr id="54" name="Picture 53">
+            <a:extLst>
+              <a:ext uri="{FF2B5EF4-FFF2-40B4-BE49-F238E27FC236}">
+                <a16:creationId xmlns:a16="http://schemas.microsoft.com/office/drawing/2014/main" id="{046FDFB0-39F2-438C-9726-6A222B7D292D}"/>
+              </a:ext>
+            </a:extLst>
+          </p:cNvPr>
+          <p:cNvPicPr>
+            <a:picLocks noChangeAspect="1"/>
+          </p:cNvPicPr>
+          <p:nvPr/>
+        </p:nvPicPr>
+        <p:blipFill>
+          <a:blip r:embed="rId19">
+            <a:extLst>
+              <a:ext uri="{28A0092B-C50C-407E-A947-70E740481C1C}">
+                <a14:useLocalDpi xmlns:a14="http://schemas.microsoft.com/office/drawing/2010/main" val="0"/>
+              </a:ext>
+            </a:extLst>
+          </a:blip>
+          <a:stretch>
+            <a:fillRect/>
+          </a:stretch>
+        </p:blipFill>
+        <p:spPr>
+          <a:xfrm>
+            <a:off x="6138737" y="5659293"/>
+            <a:ext cx="270676" cy="270676"/>
+          </a:xfrm>
+          <a:prstGeom prst="rect">
+            <a:avLst/>
+          </a:prstGeom>
+        </p:spPr>
+      </p:pic>
+      <p:sp>
+        <p:nvSpPr>
+          <p:cNvPr id="159" name="TextBox 158">
+            <a:extLst>
+              <a:ext uri="{FF2B5EF4-FFF2-40B4-BE49-F238E27FC236}">
+                <a16:creationId xmlns:a16="http://schemas.microsoft.com/office/drawing/2014/main" id="{34ECCDB9-2F9F-42E8-9255-06BD91B9A018}"/>
+              </a:ext>
+            </a:extLst>
+          </p:cNvPr>
+          <p:cNvSpPr txBox="1"/>
+          <p:nvPr/>
+        </p:nvSpPr>
+        <p:spPr>
+          <a:xfrm>
+            <a:off x="6439820" y="5652970"/>
+            <a:ext cx="1439625" cy="276999"/>
+          </a:xfrm>
+          <a:prstGeom prst="rect">
+            <a:avLst/>
+          </a:prstGeom>
+          <a:noFill/>
+        </p:spPr>
+        <p:txBody>
+          <a:bodyPr wrap="none" rtlCol="0">
+            <a:spAutoFit/>
+          </a:bodyPr>
+          <a:lstStyle/>
+          <a:p>
+            <a:r>
+              <a:rPr lang="de-CH" sz="1200" b="1" dirty="0" err="1">
+                <a:latin typeface="Arial" panose="020B0604020202020204" pitchFamily="34" charset="0"/>
+                <a:cs typeface="Arial" panose="020B0604020202020204" pitchFamily="34" charset="0"/>
+              </a:rPr>
+              <a:t>Topography</a:t>
+            </a:r>
+            <a:r>
+              <a:rPr lang="de-CH" sz="1200" b="1" dirty="0">
+                <a:latin typeface="Arial" panose="020B0604020202020204" pitchFamily="34" charset="0"/>
+                <a:cs typeface="Arial" panose="020B0604020202020204" pitchFamily="34" charset="0"/>
+              </a:rPr>
+              <a:t> Data</a:t>
+            </a:r>
+          </a:p>
+        </p:txBody>
+      </p:sp>
+      <p:pic>
+        <p:nvPicPr>
+          <p:cNvPr id="162" name="Picture 161">
+            <a:extLst>
+              <a:ext uri="{FF2B5EF4-FFF2-40B4-BE49-F238E27FC236}">
+                <a16:creationId xmlns:a16="http://schemas.microsoft.com/office/drawing/2014/main" id="{0895A18C-D5A3-4EB4-A017-D7DEA7BFFDB2}"/>
+              </a:ext>
+            </a:extLst>
+          </p:cNvPr>
+          <p:cNvPicPr>
+            <a:picLocks noChangeAspect="1"/>
+          </p:cNvPicPr>
+          <p:nvPr/>
+        </p:nvPicPr>
+        <p:blipFill>
+          <a:blip r:embed="rId18">
+            <a:extLst>
+              <a:ext uri="{28A0092B-C50C-407E-A947-70E740481C1C}">
+                <a14:useLocalDpi xmlns:a14="http://schemas.microsoft.com/office/drawing/2010/main" val="0"/>
+              </a:ext>
+            </a:extLst>
+          </a:blip>
+          <a:stretch>
+            <a:fillRect/>
+          </a:stretch>
+        </p:blipFill>
+        <p:spPr>
+          <a:xfrm>
+            <a:off x="3767108" y="3847250"/>
+            <a:ext cx="307431" cy="307431"/>
+          </a:xfrm>
+          <a:prstGeom prst="rect">
+            <a:avLst/>
+          </a:prstGeom>
+        </p:spPr>
+      </p:pic>
+      <p:pic>
+        <p:nvPicPr>
+          <p:cNvPr id="163" name="Picture 162">
+            <a:extLst>
+              <a:ext uri="{FF2B5EF4-FFF2-40B4-BE49-F238E27FC236}">
+                <a16:creationId xmlns:a16="http://schemas.microsoft.com/office/drawing/2014/main" id="{9669B2E2-62F5-4BAA-A19D-3A5E8D2EC602}"/>
+              </a:ext>
+            </a:extLst>
+          </p:cNvPr>
+          <p:cNvPicPr>
+            <a:picLocks noChangeAspect="1"/>
+          </p:cNvPicPr>
+          <p:nvPr/>
+        </p:nvPicPr>
+        <p:blipFill>
+          <a:blip r:embed="rId18">
+            <a:extLst>
+              <a:ext uri="{28A0092B-C50C-407E-A947-70E740481C1C}">
+                <a14:useLocalDpi xmlns:a14="http://schemas.microsoft.com/office/drawing/2010/main" val="0"/>
+              </a:ext>
+            </a:extLst>
+          </a:blip>
+          <a:stretch>
+            <a:fillRect/>
+          </a:stretch>
+        </p:blipFill>
+        <p:spPr>
+          <a:xfrm>
+            <a:off x="4497764" y="3738187"/>
+            <a:ext cx="307431" cy="307431"/>
+          </a:xfrm>
+          <a:prstGeom prst="rect">
+            <a:avLst/>
+          </a:prstGeom>
+        </p:spPr>
+      </p:pic>
+      <p:pic>
+        <p:nvPicPr>
+          <p:cNvPr id="164" name="Picture 163">
+            <a:extLst>
+              <a:ext uri="{FF2B5EF4-FFF2-40B4-BE49-F238E27FC236}">
+                <a16:creationId xmlns:a16="http://schemas.microsoft.com/office/drawing/2014/main" id="{792BB05C-AA20-4358-8D83-4A26B1B7CC85}"/>
+              </a:ext>
+            </a:extLst>
+          </p:cNvPr>
+          <p:cNvPicPr>
+            <a:picLocks noChangeAspect="1"/>
+          </p:cNvPicPr>
+          <p:nvPr/>
+        </p:nvPicPr>
+        <p:blipFill>
+          <a:blip r:embed="rId18">
+            <a:extLst>
+              <a:ext uri="{28A0092B-C50C-407E-A947-70E740481C1C}">
+                <a14:useLocalDpi xmlns:a14="http://schemas.microsoft.com/office/drawing/2010/main" val="0"/>
+              </a:ext>
+            </a:extLst>
+          </a:blip>
+          <a:stretch>
+            <a:fillRect/>
+          </a:stretch>
+        </p:blipFill>
+        <p:spPr>
+          <a:xfrm>
+            <a:off x="4190333" y="4375325"/>
+            <a:ext cx="307431" cy="307431"/>
+          </a:xfrm>
+          <a:prstGeom prst="rect">
+            <a:avLst/>
+          </a:prstGeom>
+        </p:spPr>
+      </p:pic>
+      <p:pic>
+        <p:nvPicPr>
+          <p:cNvPr id="165" name="Picture 164">
+            <a:extLst>
+              <a:ext uri="{FF2B5EF4-FFF2-40B4-BE49-F238E27FC236}">
+                <a16:creationId xmlns:a16="http://schemas.microsoft.com/office/drawing/2014/main" id="{8BF4042B-6C9F-4FFF-9CA0-7CF0337CE23A}"/>
+              </a:ext>
+            </a:extLst>
+          </p:cNvPr>
+          <p:cNvPicPr>
+            <a:picLocks noChangeAspect="1"/>
+          </p:cNvPicPr>
+          <p:nvPr/>
+        </p:nvPicPr>
+        <p:blipFill>
+          <a:blip r:embed="rId18">
+            <a:extLst>
+              <a:ext uri="{28A0092B-C50C-407E-A947-70E740481C1C}">
+                <a14:useLocalDpi xmlns:a14="http://schemas.microsoft.com/office/drawing/2010/main" val="0"/>
+              </a:ext>
+            </a:extLst>
+          </a:blip>
+          <a:stretch>
+            <a:fillRect/>
+          </a:stretch>
+        </p:blipFill>
+        <p:spPr>
+          <a:xfrm>
+            <a:off x="4753030" y="4903072"/>
+            <a:ext cx="307431" cy="307431"/>
+          </a:xfrm>
+          <a:prstGeom prst="rect">
+            <a:avLst/>
+          </a:prstGeom>
+        </p:spPr>
+      </p:pic>
+      <p:pic>
+        <p:nvPicPr>
+          <p:cNvPr id="166" name="Picture 165">
+            <a:extLst>
+              <a:ext uri="{FF2B5EF4-FFF2-40B4-BE49-F238E27FC236}">
+                <a16:creationId xmlns:a16="http://schemas.microsoft.com/office/drawing/2014/main" id="{6F69D1F2-B9A5-4F33-BE26-A43FAE78534D}"/>
+              </a:ext>
+            </a:extLst>
+          </p:cNvPr>
+          <p:cNvPicPr>
+            <a:picLocks noChangeAspect="1"/>
+          </p:cNvPicPr>
+          <p:nvPr/>
+        </p:nvPicPr>
+        <p:blipFill>
+          <a:blip r:embed="rId18">
+            <a:extLst>
+              <a:ext uri="{28A0092B-C50C-407E-A947-70E740481C1C}">
+                <a14:useLocalDpi xmlns:a14="http://schemas.microsoft.com/office/drawing/2010/main" val="0"/>
+              </a:ext>
+            </a:extLst>
+          </a:blip>
+          <a:stretch>
+            <a:fillRect/>
+          </a:stretch>
+        </p:blipFill>
+        <p:spPr>
+          <a:xfrm>
+            <a:off x="4074539" y="5245781"/>
+            <a:ext cx="307431" cy="307431"/>
+          </a:xfrm>
+          <a:prstGeom prst="rect">
+            <a:avLst/>
+          </a:prstGeom>
+        </p:spPr>
+      </p:pic>
+      <p:pic>
+        <p:nvPicPr>
+          <p:cNvPr id="167" name="Picture 166">
+            <a:extLst>
+              <a:ext uri="{FF2B5EF4-FFF2-40B4-BE49-F238E27FC236}">
+                <a16:creationId xmlns:a16="http://schemas.microsoft.com/office/drawing/2014/main" id="{BBBEEE6C-3FED-42ED-9B23-2145B7990B98}"/>
+              </a:ext>
+            </a:extLst>
+          </p:cNvPr>
+          <p:cNvPicPr>
+            <a:picLocks noChangeAspect="1"/>
+          </p:cNvPicPr>
+          <p:nvPr/>
+        </p:nvPicPr>
+        <p:blipFill>
+          <a:blip r:embed="rId18">
+            <a:extLst>
+              <a:ext uri="{28A0092B-C50C-407E-A947-70E740481C1C}">
+                <a14:useLocalDpi xmlns:a14="http://schemas.microsoft.com/office/drawing/2010/main" val="0"/>
+              </a:ext>
+            </a:extLst>
+          </a:blip>
+          <a:stretch>
+            <a:fillRect/>
+          </a:stretch>
+        </p:blipFill>
+        <p:spPr>
+          <a:xfrm>
+            <a:off x="4785019" y="5869393"/>
+            <a:ext cx="307431" cy="307431"/>
+          </a:xfrm>
+          <a:prstGeom prst="rect">
+            <a:avLst/>
+          </a:prstGeom>
+        </p:spPr>
+      </p:pic>
+      <p:pic>
+        <p:nvPicPr>
+          <p:cNvPr id="168" name="Picture 167">
+            <a:extLst>
+              <a:ext uri="{FF2B5EF4-FFF2-40B4-BE49-F238E27FC236}">
+                <a16:creationId xmlns:a16="http://schemas.microsoft.com/office/drawing/2014/main" id="{7200649E-C4C8-4B1E-96B9-F4CA99B7EDB3}"/>
+              </a:ext>
+            </a:extLst>
+          </p:cNvPr>
+          <p:cNvPicPr>
+            <a:picLocks noChangeAspect="1"/>
+          </p:cNvPicPr>
+          <p:nvPr/>
+        </p:nvPicPr>
+        <p:blipFill>
+          <a:blip r:embed="rId18">
+            <a:extLst>
+              <a:ext uri="{28A0092B-C50C-407E-A947-70E740481C1C}">
+                <a14:useLocalDpi xmlns:a14="http://schemas.microsoft.com/office/drawing/2010/main" val="0"/>
+              </a:ext>
+            </a:extLst>
+          </a:blip>
+          <a:stretch>
+            <a:fillRect/>
+          </a:stretch>
+        </p:blipFill>
+        <p:spPr>
+          <a:xfrm>
+            <a:off x="4297509" y="5762089"/>
+            <a:ext cx="307431" cy="307431"/>
+          </a:xfrm>
+          <a:prstGeom prst="rect">
+            <a:avLst/>
+          </a:prstGeom>
+        </p:spPr>
+      </p:pic>
+      <p:pic>
+        <p:nvPicPr>
+          <p:cNvPr id="169" name="Picture 168">
+            <a:extLst>
+              <a:ext uri="{FF2B5EF4-FFF2-40B4-BE49-F238E27FC236}">
+                <a16:creationId xmlns:a16="http://schemas.microsoft.com/office/drawing/2014/main" id="{EC56A1F9-7E80-4FB4-BFDC-3041D590E8ED}"/>
+              </a:ext>
+            </a:extLst>
+          </p:cNvPr>
+          <p:cNvPicPr>
+            <a:picLocks noChangeAspect="1"/>
+          </p:cNvPicPr>
+          <p:nvPr/>
+        </p:nvPicPr>
+        <p:blipFill>
+          <a:blip r:embed="rId18">
+            <a:extLst>
+              <a:ext uri="{28A0092B-C50C-407E-A947-70E740481C1C}">
+                <a14:useLocalDpi xmlns:a14="http://schemas.microsoft.com/office/drawing/2010/main" val="0"/>
+              </a:ext>
+            </a:extLst>
+          </a:blip>
+          <a:stretch>
+            <a:fillRect/>
+          </a:stretch>
+        </p:blipFill>
+        <p:spPr>
+          <a:xfrm>
+            <a:off x="4660293" y="5413788"/>
+            <a:ext cx="307431" cy="307431"/>
+          </a:xfrm>
+          <a:prstGeom prst="rect">
+            <a:avLst/>
+          </a:prstGeom>
+        </p:spPr>
+      </p:pic>
+      <p:pic>
+        <p:nvPicPr>
+          <p:cNvPr id="170" name="Picture 169">
+            <a:extLst>
+              <a:ext uri="{FF2B5EF4-FFF2-40B4-BE49-F238E27FC236}">
+                <a16:creationId xmlns:a16="http://schemas.microsoft.com/office/drawing/2014/main" id="{9C3C1BEC-5CE6-4E82-A634-73721CA95E4B}"/>
+              </a:ext>
+            </a:extLst>
+          </p:cNvPr>
+          <p:cNvPicPr>
+            <a:picLocks noChangeAspect="1"/>
+          </p:cNvPicPr>
+          <p:nvPr/>
+        </p:nvPicPr>
+        <p:blipFill>
+          <a:blip r:embed="rId18">
+            <a:extLst>
+              <a:ext uri="{28A0092B-C50C-407E-A947-70E740481C1C}">
+                <a14:useLocalDpi xmlns:a14="http://schemas.microsoft.com/office/drawing/2010/main" val="0"/>
+              </a:ext>
+            </a:extLst>
+          </a:blip>
+          <a:stretch>
+            <a:fillRect/>
+          </a:stretch>
+        </p:blipFill>
+        <p:spPr>
+          <a:xfrm>
+            <a:off x="3824161" y="5971384"/>
+            <a:ext cx="307431" cy="307431"/>
+          </a:xfrm>
+          <a:prstGeom prst="rect">
+            <a:avLst/>
+          </a:prstGeom>
+        </p:spPr>
+      </p:pic>
+      <p:pic>
+        <p:nvPicPr>
+          <p:cNvPr id="171" name="Picture 170">
+            <a:extLst>
+              <a:ext uri="{FF2B5EF4-FFF2-40B4-BE49-F238E27FC236}">
+                <a16:creationId xmlns:a16="http://schemas.microsoft.com/office/drawing/2014/main" id="{C31C29BC-20EE-4BD6-AE19-EDE2B52A86D9}"/>
+              </a:ext>
+            </a:extLst>
+          </p:cNvPr>
+          <p:cNvPicPr>
+            <a:picLocks noChangeAspect="1"/>
+          </p:cNvPicPr>
+          <p:nvPr/>
+        </p:nvPicPr>
+        <p:blipFill>
+          <a:blip r:embed="rId18">
+            <a:extLst>
+              <a:ext uri="{28A0092B-C50C-407E-A947-70E740481C1C}">
+                <a14:useLocalDpi xmlns:a14="http://schemas.microsoft.com/office/drawing/2010/main" val="0"/>
+              </a:ext>
+            </a:extLst>
+          </a:blip>
+          <a:stretch>
+            <a:fillRect/>
+          </a:stretch>
+        </p:blipFill>
+        <p:spPr>
+          <a:xfrm>
+            <a:off x="4312915" y="4825855"/>
+            <a:ext cx="307431" cy="307431"/>
+          </a:xfrm>
+          <a:prstGeom prst="rect">
+            <a:avLst/>
+          </a:prstGeom>
+        </p:spPr>
+      </p:pic>
+      <p:pic>
+        <p:nvPicPr>
+          <p:cNvPr id="172" name="Picture 171">
+            <a:extLst>
+              <a:ext uri="{FF2B5EF4-FFF2-40B4-BE49-F238E27FC236}">
+                <a16:creationId xmlns:a16="http://schemas.microsoft.com/office/drawing/2014/main" id="{F572E25A-8F83-47C1-B4BE-B1E03C4CC260}"/>
+              </a:ext>
+            </a:extLst>
+          </p:cNvPr>
+          <p:cNvPicPr>
+            <a:picLocks noChangeAspect="1"/>
+          </p:cNvPicPr>
+          <p:nvPr/>
+        </p:nvPicPr>
+        <p:blipFill>
+          <a:blip r:embed="rId18">
+            <a:extLst>
+              <a:ext uri="{28A0092B-C50C-407E-A947-70E740481C1C}">
+                <a14:useLocalDpi xmlns:a14="http://schemas.microsoft.com/office/drawing/2010/main" val="0"/>
+              </a:ext>
+            </a:extLst>
+          </a:blip>
+          <a:stretch>
+            <a:fillRect/>
+          </a:stretch>
+        </p:blipFill>
+        <p:spPr>
+          <a:xfrm>
+            <a:off x="4814008" y="4120404"/>
+            <a:ext cx="307431" cy="307431"/>
+          </a:xfrm>
+          <a:prstGeom prst="rect">
+            <a:avLst/>
+          </a:prstGeom>
+        </p:spPr>
+      </p:pic>
+      <p:pic>
+        <p:nvPicPr>
+          <p:cNvPr id="173" name="Picture 172">
+            <a:extLst>
+              <a:ext uri="{FF2B5EF4-FFF2-40B4-BE49-F238E27FC236}">
+                <a16:creationId xmlns:a16="http://schemas.microsoft.com/office/drawing/2014/main" id="{0E7FA00A-6A19-4BD6-8928-5EFCB3F4EC1C}"/>
+              </a:ext>
+            </a:extLst>
+          </p:cNvPr>
+          <p:cNvPicPr>
+            <a:picLocks noChangeAspect="1"/>
+          </p:cNvPicPr>
+          <p:nvPr/>
+        </p:nvPicPr>
+        <p:blipFill>
+          <a:blip r:embed="rId17">
+            <a:extLst>
+              <a:ext uri="{28A0092B-C50C-407E-A947-70E740481C1C}">
+                <a14:useLocalDpi xmlns:a14="http://schemas.microsoft.com/office/drawing/2010/main" val="0"/>
+              </a:ext>
+            </a:extLst>
+          </a:blip>
+          <a:stretch>
+            <a:fillRect/>
+          </a:stretch>
+        </p:blipFill>
+        <p:spPr>
+          <a:xfrm>
+            <a:off x="4985618" y="3526972"/>
+            <a:ext cx="257424" cy="257424"/>
+          </a:xfrm>
+          <a:prstGeom prst="rect">
+            <a:avLst/>
+          </a:prstGeom>
+        </p:spPr>
+      </p:pic>
+      <p:pic>
+        <p:nvPicPr>
+          <p:cNvPr id="174" name="Picture 173">
+            <a:extLst>
+              <a:ext uri="{FF2B5EF4-FFF2-40B4-BE49-F238E27FC236}">
+                <a16:creationId xmlns:a16="http://schemas.microsoft.com/office/drawing/2014/main" id="{5C6D44B0-8DAB-4471-ABB6-457B89C9ACA5}"/>
+              </a:ext>
+            </a:extLst>
+          </p:cNvPr>
+          <p:cNvPicPr>
+            <a:picLocks noChangeAspect="1"/>
+          </p:cNvPicPr>
+          <p:nvPr/>
+        </p:nvPicPr>
+        <p:blipFill>
+          <a:blip r:embed="rId17">
+            <a:extLst>
+              <a:ext uri="{28A0092B-C50C-407E-A947-70E740481C1C}">
+                <a14:useLocalDpi xmlns:a14="http://schemas.microsoft.com/office/drawing/2010/main" val="0"/>
+              </a:ext>
+            </a:extLst>
+          </a:blip>
+          <a:stretch>
+            <a:fillRect/>
+          </a:stretch>
+        </p:blipFill>
+        <p:spPr>
+          <a:xfrm>
+            <a:off x="4476228" y="4169448"/>
+            <a:ext cx="257424" cy="257424"/>
+          </a:xfrm>
+          <a:prstGeom prst="rect">
+            <a:avLst/>
+          </a:prstGeom>
+        </p:spPr>
+      </p:pic>
+      <p:pic>
+        <p:nvPicPr>
+          <p:cNvPr id="175" name="Picture 174">
+            <a:extLst>
+              <a:ext uri="{FF2B5EF4-FFF2-40B4-BE49-F238E27FC236}">
+                <a16:creationId xmlns:a16="http://schemas.microsoft.com/office/drawing/2014/main" id="{7696AF80-30BF-4E00-B5F4-71FDD486768D}"/>
+              </a:ext>
+            </a:extLst>
+          </p:cNvPr>
+          <p:cNvPicPr>
+            <a:picLocks noChangeAspect="1"/>
+          </p:cNvPicPr>
+          <p:nvPr/>
+        </p:nvPicPr>
+        <p:blipFill>
+          <a:blip r:embed="rId17">
+            <a:extLst>
+              <a:ext uri="{28A0092B-C50C-407E-A947-70E740481C1C}">
+                <a14:useLocalDpi xmlns:a14="http://schemas.microsoft.com/office/drawing/2010/main" val="0"/>
+              </a:ext>
+            </a:extLst>
+          </a:blip>
+          <a:stretch>
+            <a:fillRect/>
+          </a:stretch>
+        </p:blipFill>
+        <p:spPr>
+          <a:xfrm>
+            <a:off x="3883584" y="4832767"/>
+            <a:ext cx="257424" cy="257424"/>
+          </a:xfrm>
+          <a:prstGeom prst="rect">
+            <a:avLst/>
+          </a:prstGeom>
+        </p:spPr>
+      </p:pic>
+      <p:pic>
+        <p:nvPicPr>
+          <p:cNvPr id="176" name="Picture 175">
+            <a:extLst>
+              <a:ext uri="{FF2B5EF4-FFF2-40B4-BE49-F238E27FC236}">
+                <a16:creationId xmlns:a16="http://schemas.microsoft.com/office/drawing/2014/main" id="{BE1006EE-B4C6-4CF3-82AA-6E57F1B92ABB}"/>
+              </a:ext>
+            </a:extLst>
+          </p:cNvPr>
+          <p:cNvPicPr>
+            <a:picLocks noChangeAspect="1"/>
+          </p:cNvPicPr>
+          <p:nvPr/>
+        </p:nvPicPr>
+        <p:blipFill>
+          <a:blip r:embed="rId17">
+            <a:extLst>
+              <a:ext uri="{28A0092B-C50C-407E-A947-70E740481C1C}">
+                <a14:useLocalDpi xmlns:a14="http://schemas.microsoft.com/office/drawing/2010/main" val="0"/>
+              </a:ext>
+            </a:extLst>
+          </a:blip>
+          <a:stretch>
+            <a:fillRect/>
+          </a:stretch>
+        </p:blipFill>
+        <p:spPr>
+          <a:xfrm>
+            <a:off x="5098235" y="5504665"/>
+            <a:ext cx="257424" cy="257424"/>
+          </a:xfrm>
+          <a:prstGeom prst="rect">
+            <a:avLst/>
+          </a:prstGeom>
+        </p:spPr>
+      </p:pic>
+      <p:pic>
+        <p:nvPicPr>
+          <p:cNvPr id="1028" name="Picture 4" descr="Data report - Free business icons">
+            <a:hlinkClick r:id="rId20"/>
+            <a:extLst>
+              <a:ext uri="{FF2B5EF4-FFF2-40B4-BE49-F238E27FC236}">
+                <a16:creationId xmlns:a16="http://schemas.microsoft.com/office/drawing/2014/main" id="{B4A2C9AB-90CD-4BA7-875F-AA385E8F479C}"/>
+              </a:ext>
+            </a:extLst>
+          </p:cNvPr>
+          <p:cNvPicPr>
+            <a:picLocks noChangeAspect="1" noChangeArrowheads="1"/>
+          </p:cNvPicPr>
+          <p:nvPr/>
+        </p:nvPicPr>
+        <p:blipFill>
+          <a:blip r:embed="rId21">
+            <a:extLst>
+              <a:ext uri="{28A0092B-C50C-407E-A947-70E740481C1C}">
+                <a14:useLocalDpi xmlns:a14="http://schemas.microsoft.com/office/drawing/2010/main" val="0"/>
+              </a:ext>
+            </a:extLst>
+          </a:blip>
+          <a:srcRect/>
+          <a:stretch>
+            <a:fillRect/>
+          </a:stretch>
+        </p:blipFill>
+        <p:spPr bwMode="auto">
+          <a:xfrm>
+            <a:off x="4055427" y="3483118"/>
+            <a:ext cx="350417" cy="350417"/>
+          </a:xfrm>
+          <a:prstGeom prst="rect">
+            <a:avLst/>
+          </a:prstGeom>
+          <a:noFill/>
+          <a:extLst>
+            <a:ext uri="{909E8E84-426E-40DD-AFC4-6F175D3DCCD1}">
+              <a14:hiddenFill xmlns:a14="http://schemas.microsoft.com/office/drawing/2010/main">
+                <a:solidFill>
+                  <a:srgbClr val="FFFFFF"/>
+                </a:solidFill>
+              </a14:hiddenFill>
+            </a:ext>
+          </a:extLst>
+        </p:spPr>
+      </p:pic>
+      <p:pic>
+        <p:nvPicPr>
+          <p:cNvPr id="178" name="Picture 4" descr="Data report - Free business icons">
+            <a:hlinkClick r:id="rId20"/>
+            <a:extLst>
+              <a:ext uri="{FF2B5EF4-FFF2-40B4-BE49-F238E27FC236}">
+                <a16:creationId xmlns:a16="http://schemas.microsoft.com/office/drawing/2014/main" id="{F7A868B0-C462-427A-8811-BA1ACE940E3A}"/>
+              </a:ext>
+            </a:extLst>
+          </p:cNvPr>
+          <p:cNvPicPr>
+            <a:picLocks noChangeAspect="1" noChangeArrowheads="1"/>
+          </p:cNvPicPr>
+          <p:nvPr/>
+        </p:nvPicPr>
+        <p:blipFill>
+          <a:blip r:embed="rId21">
+            <a:extLst>
+              <a:ext uri="{28A0092B-C50C-407E-A947-70E740481C1C}">
+                <a14:useLocalDpi xmlns:a14="http://schemas.microsoft.com/office/drawing/2010/main" val="0"/>
+              </a:ext>
+            </a:extLst>
+          </a:blip>
+          <a:srcRect/>
+          <a:stretch>
+            <a:fillRect/>
+          </a:stretch>
+        </p:blipFill>
+        <p:spPr bwMode="auto">
+          <a:xfrm>
+            <a:off x="5018322" y="4598399"/>
+            <a:ext cx="350417" cy="350417"/>
+          </a:xfrm>
+          <a:prstGeom prst="rect">
+            <a:avLst/>
+          </a:prstGeom>
+          <a:noFill/>
+          <a:extLst>
+            <a:ext uri="{909E8E84-426E-40DD-AFC4-6F175D3DCCD1}">
+              <a14:hiddenFill xmlns:a14="http://schemas.microsoft.com/office/drawing/2010/main">
+                <a:solidFill>
+                  <a:srgbClr val="FFFFFF"/>
+                </a:solidFill>
+              </a14:hiddenFill>
+            </a:ext>
+          </a:extLst>
+        </p:spPr>
+      </p:pic>
+      <p:pic>
+        <p:nvPicPr>
+          <p:cNvPr id="179" name="Picture 4" descr="Data report - Free business icons">
+            <a:hlinkClick r:id="rId20"/>
+            <a:extLst>
+              <a:ext uri="{FF2B5EF4-FFF2-40B4-BE49-F238E27FC236}">
+                <a16:creationId xmlns:a16="http://schemas.microsoft.com/office/drawing/2014/main" id="{E0759C9A-A934-4268-AB4A-6A745C7631E4}"/>
+              </a:ext>
+            </a:extLst>
+          </p:cNvPr>
+          <p:cNvPicPr>
+            <a:picLocks noChangeAspect="1" noChangeArrowheads="1"/>
+          </p:cNvPicPr>
+          <p:nvPr/>
+        </p:nvPicPr>
+        <p:blipFill>
+          <a:blip r:embed="rId21">
+            <a:extLst>
+              <a:ext uri="{28A0092B-C50C-407E-A947-70E740481C1C}">
+                <a14:useLocalDpi xmlns:a14="http://schemas.microsoft.com/office/drawing/2010/main" val="0"/>
+              </a:ext>
+            </a:extLst>
+          </a:blip>
+          <a:srcRect/>
+          <a:stretch>
+            <a:fillRect/>
+          </a:stretch>
+        </p:blipFill>
+        <p:spPr bwMode="auto">
+          <a:xfrm>
+            <a:off x="3785798" y="5533593"/>
+            <a:ext cx="350417" cy="350417"/>
+          </a:xfrm>
+          <a:prstGeom prst="rect">
+            <a:avLst/>
+          </a:prstGeom>
+          <a:noFill/>
+          <a:extLst>
+            <a:ext uri="{909E8E84-426E-40DD-AFC4-6F175D3DCCD1}">
+              <a14:hiddenFill xmlns:a14="http://schemas.microsoft.com/office/drawing/2010/main">
+                <a:solidFill>
+                  <a:srgbClr val="FFFFFF"/>
+                </a:solidFill>
+              </a14:hiddenFill>
+            </a:ext>
+          </a:extLst>
+        </p:spPr>
+      </p:pic>
     </p:spTree>
     <p:extLst>
       <p:ext uri="{BB962C8B-B14F-4D97-AF65-F5344CB8AC3E}">
-        <p14:creationId xmlns:p14="http://schemas.microsoft.com/office/powerpoint/2010/main" val="1309517343"/>
+        <p14:creationId xmlns:p14="http://schemas.microsoft.com/office/powerpoint/2010/main" val="755865796"/>
       </p:ext>
     </p:extLst>
   </p:cSld>
@@ -4155,7 +7710,7 @@
         <p:spPr>
           <a:xfrm>
             <a:off x="3592025" y="1357887"/>
-            <a:ext cx="2427524" cy="369332"/>
+            <a:ext cx="2193999" cy="369332"/>
           </a:xfrm>
           <a:prstGeom prst="rect">
             <a:avLst/>
@@ -4174,7 +7729,7 @@
                   <a:schemeClr val="bg1"/>
                 </a:solidFill>
               </a:rPr>
-              <a:t>Solar Information Portal</a:t>
+              <a:t>Investment Navigator</a:t>
             </a:r>
           </a:p>
         </p:txBody>
@@ -4229,7 +7784,7 @@
         <p:spPr>
           <a:xfrm>
             <a:off x="3768918" y="1993991"/>
-            <a:ext cx="5638800" cy="4102873"/>
+            <a:ext cx="4226072" cy="4102873"/>
           </a:xfrm>
           <a:prstGeom prst="rect">
             <a:avLst/>
@@ -4405,7 +7960,7 @@
         </p:nvSpPr>
         <p:spPr>
           <a:xfrm>
-            <a:off x="7145077" y="4469929"/>
+            <a:off x="6525039" y="4474267"/>
             <a:ext cx="849913" cy="369332"/>
           </a:xfrm>
           <a:prstGeom prst="rect">
@@ -5412,10 +8967,136 @@
           </a:p>
         </p:txBody>
       </p:sp>
+      <p:sp>
+        <p:nvSpPr>
+          <p:cNvPr id="44" name="Rectangle 43">
+            <a:extLst>
+              <a:ext uri="{FF2B5EF4-FFF2-40B4-BE49-F238E27FC236}">
+                <a16:creationId xmlns:a16="http://schemas.microsoft.com/office/drawing/2014/main" id="{122308A9-2FA1-44CF-8C8E-BAE5A892C59E}"/>
+              </a:ext>
+            </a:extLst>
+          </p:cNvPr>
+          <p:cNvSpPr/>
+          <p:nvPr/>
+        </p:nvSpPr>
+        <p:spPr>
+          <a:xfrm>
+            <a:off x="8114258" y="1993991"/>
+            <a:ext cx="3010942" cy="4158276"/>
+          </a:xfrm>
+          <a:prstGeom prst="rect">
+            <a:avLst/>
+          </a:prstGeom>
+        </p:spPr>
+        <p:style>
+          <a:lnRef idx="2">
+            <a:schemeClr val="accent1">
+              <a:shade val="50000"/>
+            </a:schemeClr>
+          </a:lnRef>
+          <a:fillRef idx="1">
+            <a:schemeClr val="accent1"/>
+          </a:fillRef>
+          <a:effectRef idx="0">
+            <a:schemeClr val="accent1"/>
+          </a:effectRef>
+          <a:fontRef idx="minor">
+            <a:schemeClr val="lt1"/>
+          </a:fontRef>
+        </p:style>
+        <p:txBody>
+          <a:bodyPr rtlCol="0" anchor="ctr"/>
+          <a:lstStyle/>
+          <a:p>
+            <a:pPr algn="ctr"/>
+            <a:endParaRPr lang="de-CH"/>
+          </a:p>
+        </p:txBody>
+      </p:sp>
+      <p:sp>
+        <p:nvSpPr>
+          <p:cNvPr id="45" name="TextBox 44">
+            <a:extLst>
+              <a:ext uri="{FF2B5EF4-FFF2-40B4-BE49-F238E27FC236}">
+                <a16:creationId xmlns:a16="http://schemas.microsoft.com/office/drawing/2014/main" id="{B9547F3D-FA88-4941-84F8-878EB11B841A}"/>
+              </a:ext>
+            </a:extLst>
+          </p:cNvPr>
+          <p:cNvSpPr txBox="1"/>
+          <p:nvPr/>
+        </p:nvSpPr>
+        <p:spPr>
+          <a:xfrm>
+            <a:off x="8518928" y="2891625"/>
+            <a:ext cx="2232183" cy="2031325"/>
+          </a:xfrm>
+          <a:prstGeom prst="rect">
+            <a:avLst/>
+          </a:prstGeom>
+          <a:noFill/>
+        </p:spPr>
+        <p:txBody>
+          <a:bodyPr wrap="square" rtlCol="0">
+            <a:spAutoFit/>
+          </a:bodyPr>
+          <a:lstStyle/>
+          <a:p>
+            <a:r>
+              <a:rPr lang="de-CH" dirty="0">
+                <a:solidFill>
+                  <a:schemeClr val="bg1"/>
+                </a:solidFill>
+              </a:rPr>
+              <a:t>CALC</a:t>
+            </a:r>
+          </a:p>
+          <a:p>
+            <a:endParaRPr lang="de-CH" dirty="0">
+              <a:solidFill>
+                <a:schemeClr val="bg1"/>
+              </a:solidFill>
+            </a:endParaRPr>
+          </a:p>
+          <a:p>
+            <a:r>
+              <a:rPr lang="de-CH" dirty="0">
+                <a:solidFill>
+                  <a:schemeClr val="bg1"/>
+                </a:solidFill>
+              </a:rPr>
+              <a:t>COST &amp; BENEFIT BREAKDOWN</a:t>
+            </a:r>
+          </a:p>
+          <a:p>
+            <a:endParaRPr lang="de-CH" dirty="0">
+              <a:solidFill>
+                <a:schemeClr val="bg1"/>
+              </a:solidFill>
+            </a:endParaRPr>
+          </a:p>
+          <a:p>
+            <a:endParaRPr lang="de-CH" dirty="0">
+              <a:solidFill>
+                <a:schemeClr val="bg1"/>
+              </a:solidFill>
+            </a:endParaRPr>
+          </a:p>
+          <a:p>
+            <a:r>
+              <a:rPr lang="de-CH" dirty="0">
+                <a:solidFill>
+                  <a:schemeClr val="bg1"/>
+                </a:solidFill>
+              </a:rPr>
+              <a:t>POTENTIAL PROFIT</a:t>
+            </a:r>
+          </a:p>
+        </p:txBody>
+      </p:sp>
     </p:spTree>
     <p:extLst>
       <p:ext uri="{BB962C8B-B14F-4D97-AF65-F5344CB8AC3E}">
-        <p14:creationId xmlns:p14="http://schemas.microsoft.com/office/powerpoint/2010/main" val="774240822"/>
+        <p14:creationId xmlns:p14="http://schemas.microsoft.com/office/powerpoint/2010/main" val="2104450236"/>
       </p:ext>
     </p:extLst>
   </p:cSld>
@@ -5684,7 +9365,42 @@
         <p:spPr>
           <a:xfrm>
             <a:off x="3592025" y="1357887"/>
-            <a:ext cx="2193999" cy="369332"/>
+            <a:ext cx="2988319" cy="369332"/>
+          </a:xfrm>
+          <a:prstGeom prst="rect">
+            <a:avLst/>
+          </a:prstGeom>
+          <a:noFill/>
+        </p:spPr>
+        <p:txBody>
+          <a:bodyPr wrap="none" rtlCol="0">
+            <a:spAutoFit/>
+          </a:bodyPr>
+          <a:lstStyle/>
+          <a:p>
+            <a:r>
+              <a:rPr lang="de-CH" dirty="0"/>
+              <a:t>Regional Investment Potential</a:t>
+            </a:r>
+          </a:p>
+        </p:txBody>
+      </p:sp>
+      <p:sp>
+        <p:nvSpPr>
+          <p:cNvPr id="12" name="TextBox 11">
+            <a:extLst>
+              <a:ext uri="{FF2B5EF4-FFF2-40B4-BE49-F238E27FC236}">
+                <a16:creationId xmlns:a16="http://schemas.microsoft.com/office/drawing/2014/main" id="{9000CE69-5A06-43A4-BA9C-D55296D90252}"/>
+              </a:ext>
+            </a:extLst>
+          </p:cNvPr>
+          <p:cNvSpPr txBox="1"/>
+          <p:nvPr/>
+        </p:nvSpPr>
+        <p:spPr>
+          <a:xfrm>
+            <a:off x="7225256" y="1346363"/>
+            <a:ext cx="1786708" cy="369332"/>
           </a:xfrm>
           <a:prstGeom prst="rect">
             <a:avLst/>
@@ -5703,41 +9419,6 @@
                   <a:schemeClr val="bg1"/>
                 </a:solidFill>
               </a:rPr>
-              <a:t>Investment Navigator</a:t>
-            </a:r>
-          </a:p>
-        </p:txBody>
-      </p:sp>
-      <p:sp>
-        <p:nvSpPr>
-          <p:cNvPr id="12" name="TextBox 11">
-            <a:extLst>
-              <a:ext uri="{FF2B5EF4-FFF2-40B4-BE49-F238E27FC236}">
-                <a16:creationId xmlns:a16="http://schemas.microsoft.com/office/drawing/2014/main" id="{9000CE69-5A06-43A4-BA9C-D55296D90252}"/>
-              </a:ext>
-            </a:extLst>
-          </p:cNvPr>
-          <p:cNvSpPr txBox="1"/>
-          <p:nvPr/>
-        </p:nvSpPr>
-        <p:spPr>
-          <a:xfrm>
-            <a:off x="7225256" y="1346363"/>
-            <a:ext cx="1786708" cy="369332"/>
-          </a:xfrm>
-          <a:prstGeom prst="rect">
-            <a:avLst/>
-          </a:prstGeom>
-          <a:noFill/>
-        </p:spPr>
-        <p:txBody>
-          <a:bodyPr wrap="none" rtlCol="0">
-            <a:spAutoFit/>
-          </a:bodyPr>
-          <a:lstStyle/>
-          <a:p>
-            <a:r>
-              <a:rPr lang="de-CH" dirty="0"/>
               <a:t>Tender Navigator</a:t>
             </a:r>
           </a:p>
@@ -5757,8 +9438,8 @@
         </p:nvSpPr>
         <p:spPr>
           <a:xfrm>
-            <a:off x="3768918" y="1993991"/>
-            <a:ext cx="4226072" cy="4102873"/>
+            <a:off x="3816625" y="1993991"/>
+            <a:ext cx="5591093" cy="4102873"/>
           </a:xfrm>
           <a:prstGeom prst="rect">
             <a:avLst/>
@@ -5803,8 +9484,8 @@
         </p:nvSpPr>
         <p:spPr>
           <a:xfrm>
-            <a:off x="764652" y="1993992"/>
-            <a:ext cx="2884998" cy="3818411"/>
+            <a:off x="764652" y="1993991"/>
+            <a:ext cx="2884998" cy="4102873"/>
           </a:xfrm>
           <a:prstGeom prst="rect">
             <a:avLst/>
@@ -5849,8 +9530,8 @@
         </p:nvSpPr>
         <p:spPr>
           <a:xfrm>
-            <a:off x="764652" y="2043484"/>
-            <a:ext cx="2757776" cy="970060"/>
+            <a:off x="764652" y="2035533"/>
+            <a:ext cx="2884998" cy="970060"/>
           </a:xfrm>
           <a:prstGeom prst="rect">
             <a:avLst/>
@@ -5883,88 +9564,10 @@
       </p:sp>
       <p:sp>
         <p:nvSpPr>
-          <p:cNvPr id="18" name="TextBox 17">
-            <a:extLst>
-              <a:ext uri="{FF2B5EF4-FFF2-40B4-BE49-F238E27FC236}">
-                <a16:creationId xmlns:a16="http://schemas.microsoft.com/office/drawing/2014/main" id="{EB4F5ECF-194A-4D24-AF22-9E96C8847682}"/>
-              </a:ext>
-            </a:extLst>
-          </p:cNvPr>
-          <p:cNvSpPr txBox="1"/>
-          <p:nvPr/>
-        </p:nvSpPr>
-        <p:spPr>
-          <a:xfrm>
-            <a:off x="6210691" y="3860761"/>
-            <a:ext cx="739305" cy="369332"/>
-          </a:xfrm>
-          <a:prstGeom prst="rect">
-            <a:avLst/>
-          </a:prstGeom>
-          <a:noFill/>
-        </p:spPr>
-        <p:txBody>
-          <a:bodyPr wrap="none" rtlCol="0">
-            <a:spAutoFit/>
-          </a:bodyPr>
-          <a:lstStyle/>
-          <a:p>
-            <a:r>
-              <a:rPr lang="de-CH" dirty="0">
-                <a:solidFill>
-                  <a:schemeClr val="bg1"/>
-                </a:solidFill>
-              </a:rPr>
-              <a:t>MAPS</a:t>
-            </a:r>
-          </a:p>
-        </p:txBody>
-      </p:sp>
-      <p:sp>
-        <p:nvSpPr>
-          <p:cNvPr id="20" name="TextBox 19">
-            <a:extLst>
-              <a:ext uri="{FF2B5EF4-FFF2-40B4-BE49-F238E27FC236}">
-                <a16:creationId xmlns:a16="http://schemas.microsoft.com/office/drawing/2014/main" id="{9ECC0B0C-5E83-4967-984C-A7D80FB3B331}"/>
-              </a:ext>
-            </a:extLst>
-          </p:cNvPr>
-          <p:cNvSpPr txBox="1"/>
-          <p:nvPr/>
-        </p:nvSpPr>
-        <p:spPr>
-          <a:xfrm>
-            <a:off x="6525039" y="4474267"/>
-            <a:ext cx="849913" cy="369332"/>
-          </a:xfrm>
-          <a:prstGeom prst="rect">
-            <a:avLst/>
-          </a:prstGeom>
-          <a:noFill/>
-        </p:spPr>
-        <p:txBody>
-          <a:bodyPr wrap="none" rtlCol="0">
-            <a:spAutoFit/>
-          </a:bodyPr>
-          <a:lstStyle/>
-          <a:p>
-            <a:r>
-              <a:rPr lang="de-CH" dirty="0">
-                <a:solidFill>
-                  <a:schemeClr val="bg1"/>
-                </a:solidFill>
-              </a:rPr>
-              <a:t>Shapes</a:t>
-            </a:r>
-          </a:p>
-        </p:txBody>
-      </p:sp>
-      <p:sp>
-        <p:nvSpPr>
-          <p:cNvPr id="21" name="Rectangle 20">
-            <a:extLst>
-              <a:ext uri="{FF2B5EF4-FFF2-40B4-BE49-F238E27FC236}">
-                <a16:creationId xmlns:a16="http://schemas.microsoft.com/office/drawing/2014/main" id="{40AA6523-B878-4414-9676-CE4089785900}"/>
+          <p:cNvPr id="17" name="Rectangle 16">
+            <a:extLst>
+              <a:ext uri="{FF2B5EF4-FFF2-40B4-BE49-F238E27FC236}">
+                <a16:creationId xmlns:a16="http://schemas.microsoft.com/office/drawing/2014/main" id="{834865B1-73B0-413B-9706-CE930F270787}"/>
               </a:ext>
             </a:extLst>
           </p:cNvPr>
@@ -5973,8 +9576,8 @@
         </p:nvSpPr>
         <p:spPr>
           <a:xfrm>
-            <a:off x="1178073" y="3943845"/>
-            <a:ext cx="2105816" cy="584424"/>
+            <a:off x="951179" y="3899541"/>
+            <a:ext cx="2534636" cy="369332"/>
           </a:xfrm>
           <a:prstGeom prst="rect">
             <a:avLst/>
@@ -6007,10 +9610,10 @@
       </p:sp>
       <p:sp>
         <p:nvSpPr>
-          <p:cNvPr id="22" name="TextBox 21">
-            <a:extLst>
-              <a:ext uri="{FF2B5EF4-FFF2-40B4-BE49-F238E27FC236}">
-                <a16:creationId xmlns:a16="http://schemas.microsoft.com/office/drawing/2014/main" id="{54831142-5318-481A-A5D3-0C6DB97E23DB}"/>
+          <p:cNvPr id="18" name="TextBox 17">
+            <a:extLst>
+              <a:ext uri="{FF2B5EF4-FFF2-40B4-BE49-F238E27FC236}">
+                <a16:creationId xmlns:a16="http://schemas.microsoft.com/office/drawing/2014/main" id="{EB4F5ECF-194A-4D24-AF22-9E96C8847682}"/>
               </a:ext>
             </a:extLst>
           </p:cNvPr>
@@ -6019,8 +9622,8 @@
         </p:nvSpPr>
         <p:spPr>
           <a:xfrm>
-            <a:off x="1885606" y="2522293"/>
-            <a:ext cx="666273" cy="369332"/>
+            <a:off x="5686990" y="3860761"/>
+            <a:ext cx="739305" cy="369332"/>
           </a:xfrm>
           <a:prstGeom prst="rect">
             <a:avLst/>
@@ -6039,7 +9642,7 @@
                   <a:schemeClr val="bg1"/>
                 </a:solidFill>
               </a:rPr>
-              <a:t>Filter</a:t>
+              <a:t>MAPS</a:t>
             </a:r>
           </a:p>
         </p:txBody>
@@ -6058,8 +9661,8 @@
         </p:nvSpPr>
         <p:spPr>
           <a:xfrm>
-            <a:off x="1275655" y="4054246"/>
-            <a:ext cx="1981120" cy="369332"/>
+            <a:off x="1733206" y="2369893"/>
+            <a:ext cx="1347357" cy="369332"/>
           </a:xfrm>
           <a:prstGeom prst="rect">
             <a:avLst/>
@@ -6078,17 +9681,61 @@
                   <a:schemeClr val="bg1"/>
                 </a:solidFill>
               </a:rPr>
-              <a:t>Radiation Sunshine</a:t>
-            </a:r>
-          </a:p>
-        </p:txBody>
-      </p:sp>
-      <p:sp>
-        <p:nvSpPr>
-          <p:cNvPr id="23" name="Rectangle 22">
-            <a:extLst>
-              <a:ext uri="{FF2B5EF4-FFF2-40B4-BE49-F238E27FC236}">
-                <a16:creationId xmlns:a16="http://schemas.microsoft.com/office/drawing/2014/main" id="{7F1B8DDA-E6B8-4CD9-BB74-BB1DC6951A70}"/>
+              <a:t>Search Filter</a:t>
+            </a:r>
+          </a:p>
+        </p:txBody>
+      </p:sp>
+      <p:sp>
+        <p:nvSpPr>
+          <p:cNvPr id="20" name="TextBox 19">
+            <a:extLst>
+              <a:ext uri="{FF2B5EF4-FFF2-40B4-BE49-F238E27FC236}">
+                <a16:creationId xmlns:a16="http://schemas.microsoft.com/office/drawing/2014/main" id="{F9B733E3-F12E-4870-8228-9AE8EDB5A0F6}"/>
+              </a:ext>
+            </a:extLst>
+          </p:cNvPr>
+          <p:cNvSpPr txBox="1"/>
+          <p:nvPr/>
+        </p:nvSpPr>
+        <p:spPr>
+          <a:xfrm>
+            <a:off x="1470056" y="3452567"/>
+            <a:ext cx="852285" cy="369332"/>
+          </a:xfrm>
+          <a:prstGeom prst="rect">
+            <a:avLst/>
+          </a:prstGeom>
+          <a:noFill/>
+        </p:spPr>
+        <p:txBody>
+          <a:bodyPr wrap="none" rtlCol="0">
+            <a:spAutoFit/>
+          </a:bodyPr>
+          <a:lstStyle/>
+          <a:p>
+            <a:r>
+              <a:rPr lang="de-CH" dirty="0" err="1">
+                <a:solidFill>
+                  <a:schemeClr val="bg1"/>
+                </a:solidFill>
+              </a:rPr>
+              <a:t>Results</a:t>
+            </a:r>
+            <a:endParaRPr lang="de-CH" dirty="0">
+              <a:solidFill>
+                <a:schemeClr val="bg1"/>
+              </a:solidFill>
+            </a:endParaRPr>
+          </a:p>
+        </p:txBody>
+      </p:sp>
+      <p:sp>
+        <p:nvSpPr>
+          <p:cNvPr id="21" name="Rectangle 20">
+            <a:extLst>
+              <a:ext uri="{FF2B5EF4-FFF2-40B4-BE49-F238E27FC236}">
+                <a16:creationId xmlns:a16="http://schemas.microsoft.com/office/drawing/2014/main" id="{D9D87DF3-2B13-4D2F-8A94-8FFB73AE8C17}"/>
               </a:ext>
             </a:extLst>
           </p:cNvPr>
@@ -6097,8 +9744,8 @@
         </p:nvSpPr>
         <p:spPr>
           <a:xfrm>
-            <a:off x="1186047" y="4690351"/>
-            <a:ext cx="2105816" cy="584424"/>
+            <a:off x="939833" y="5337025"/>
+            <a:ext cx="2534636" cy="369332"/>
           </a:xfrm>
           <a:prstGeom prst="rect">
             <a:avLst/>
@@ -6131,54 +9778,10 @@
       </p:sp>
       <p:sp>
         <p:nvSpPr>
-          <p:cNvPr id="24" name="TextBox 23">
-            <a:extLst>
-              <a:ext uri="{FF2B5EF4-FFF2-40B4-BE49-F238E27FC236}">
-                <a16:creationId xmlns:a16="http://schemas.microsoft.com/office/drawing/2014/main" id="{1E1D902F-B73F-4EFA-945A-944C9446987F}"/>
-              </a:ext>
-            </a:extLst>
-          </p:cNvPr>
-          <p:cNvSpPr txBox="1"/>
-          <p:nvPr/>
-        </p:nvSpPr>
-        <p:spPr>
-          <a:xfrm>
-            <a:off x="1225291" y="4769657"/>
-            <a:ext cx="1388585" cy="369332"/>
-          </a:xfrm>
-          <a:prstGeom prst="rect">
-            <a:avLst/>
-          </a:prstGeom>
-          <a:noFill/>
-        </p:spPr>
-        <p:txBody>
-          <a:bodyPr wrap="none" rtlCol="0">
-            <a:spAutoFit/>
-          </a:bodyPr>
-          <a:lstStyle/>
-          <a:p>
-            <a:r>
-              <a:rPr lang="de-CH" dirty="0" err="1">
-                <a:solidFill>
-                  <a:schemeClr val="bg1"/>
-                </a:solidFill>
-              </a:rPr>
-              <a:t>Temperature</a:t>
-            </a:r>
-            <a:endParaRPr lang="de-CH" dirty="0">
-              <a:solidFill>
-                <a:schemeClr val="bg1"/>
-              </a:solidFill>
-            </a:endParaRPr>
-          </a:p>
-        </p:txBody>
-      </p:sp>
-      <p:sp>
-        <p:nvSpPr>
-          <p:cNvPr id="27" name="Rectangle 26">
-            <a:extLst>
-              <a:ext uri="{FF2B5EF4-FFF2-40B4-BE49-F238E27FC236}">
-                <a16:creationId xmlns:a16="http://schemas.microsoft.com/office/drawing/2014/main" id="{2DD99DF3-D4E6-4FE1-AB44-C413494C60BE}"/>
+          <p:cNvPr id="22" name="Rectangle 21">
+            <a:extLst>
+              <a:ext uri="{FF2B5EF4-FFF2-40B4-BE49-F238E27FC236}">
+                <a16:creationId xmlns:a16="http://schemas.microsoft.com/office/drawing/2014/main" id="{0EDB9065-1CEB-48A8-B9FD-4BFE49325480}"/>
               </a:ext>
             </a:extLst>
           </p:cNvPr>
@@ -6187,8 +9790,8 @@
         </p:nvSpPr>
         <p:spPr>
           <a:xfrm>
-            <a:off x="1186047" y="5436857"/>
-            <a:ext cx="2105816" cy="584424"/>
+            <a:off x="939833" y="4623598"/>
+            <a:ext cx="2534636" cy="369332"/>
           </a:xfrm>
           <a:prstGeom prst="rect">
             <a:avLst/>
@@ -6221,49 +9824,10 @@
       </p:sp>
       <p:sp>
         <p:nvSpPr>
-          <p:cNvPr id="28" name="TextBox 27">
-            <a:extLst>
-              <a:ext uri="{FF2B5EF4-FFF2-40B4-BE49-F238E27FC236}">
-                <a16:creationId xmlns:a16="http://schemas.microsoft.com/office/drawing/2014/main" id="{76B7AAB2-FA3F-4880-A6E5-47E1CBC43947}"/>
-              </a:ext>
-            </a:extLst>
-          </p:cNvPr>
-          <p:cNvSpPr txBox="1"/>
-          <p:nvPr/>
-        </p:nvSpPr>
-        <p:spPr>
-          <a:xfrm>
-            <a:off x="1225291" y="5516163"/>
-            <a:ext cx="2078005" cy="369332"/>
-          </a:xfrm>
-          <a:prstGeom prst="rect">
-            <a:avLst/>
-          </a:prstGeom>
-          <a:noFill/>
-        </p:spPr>
-        <p:txBody>
-          <a:bodyPr wrap="none" rtlCol="0">
-            <a:spAutoFit/>
-          </a:bodyPr>
-          <a:lstStyle/>
-          <a:p>
-            <a:r>
-              <a:rPr lang="de-CH" dirty="0">
-                <a:solidFill>
-                  <a:schemeClr val="bg1"/>
-                </a:solidFill>
-              </a:rPr>
-              <a:t>Cloud / Air Pollution</a:t>
-            </a:r>
-          </a:p>
-        </p:txBody>
-      </p:sp>
-      <p:sp>
-        <p:nvSpPr>
-          <p:cNvPr id="29" name="Rectangle 28">
-            <a:extLst>
-              <a:ext uri="{FF2B5EF4-FFF2-40B4-BE49-F238E27FC236}">
-                <a16:creationId xmlns:a16="http://schemas.microsoft.com/office/drawing/2014/main" id="{E1CD29B8-6CBF-406D-8A99-75400993DDB7}"/>
+          <p:cNvPr id="23" name="Rectangle 22">
+            <a:extLst>
+              <a:ext uri="{FF2B5EF4-FFF2-40B4-BE49-F238E27FC236}">
+                <a16:creationId xmlns:a16="http://schemas.microsoft.com/office/drawing/2014/main" id="{9B9AC32F-FD66-4AC0-BA6F-5D0C71AEB42F}"/>
               </a:ext>
             </a:extLst>
           </p:cNvPr>
@@ -6272,8 +9836,8 @@
         </p:nvSpPr>
         <p:spPr>
           <a:xfrm>
-            <a:off x="879463" y="3113898"/>
-            <a:ext cx="2404427" cy="369333"/>
+            <a:off x="939833" y="4946519"/>
+            <a:ext cx="2534636" cy="369332"/>
           </a:xfrm>
           <a:prstGeom prst="rect">
             <a:avLst/>
@@ -6306,10 +9870,10 @@
       </p:sp>
       <p:sp>
         <p:nvSpPr>
-          <p:cNvPr id="30" name="Rectangle 29">
-            <a:extLst>
-              <a:ext uri="{FF2B5EF4-FFF2-40B4-BE49-F238E27FC236}">
-                <a16:creationId xmlns:a16="http://schemas.microsoft.com/office/drawing/2014/main" id="{32130AA3-3633-488F-ACF8-849C879B4FFE}"/>
+          <p:cNvPr id="24" name="Rectangle 23">
+            <a:extLst>
+              <a:ext uri="{FF2B5EF4-FFF2-40B4-BE49-F238E27FC236}">
+                <a16:creationId xmlns:a16="http://schemas.microsoft.com/office/drawing/2014/main" id="{97EF17EC-BB7D-42D7-B32A-95B9FC5BF066}"/>
               </a:ext>
             </a:extLst>
           </p:cNvPr>
@@ -6318,15 +9882,12 @@
         </p:nvSpPr>
         <p:spPr>
           <a:xfrm>
-            <a:off x="943753" y="3172409"/>
-            <a:ext cx="337065" cy="279982"/>
-          </a:xfrm>
-          <a:prstGeom prst="rect">
-            <a:avLst/>
-          </a:prstGeom>
-          <a:solidFill>
-            <a:schemeClr val="bg1"/>
-          </a:solidFill>
+            <a:off x="951179" y="3244334"/>
+            <a:ext cx="2534636" cy="369332"/>
+          </a:xfrm>
+          <a:prstGeom prst="rect">
+            <a:avLst/>
+          </a:prstGeom>
         </p:spPr>
         <p:style>
           <a:lnRef idx="2">
@@ -6355,105 +9916,10 @@
       </p:sp>
       <p:sp>
         <p:nvSpPr>
-          <p:cNvPr id="32" name="Rectangle 31">
-            <a:extLst>
-              <a:ext uri="{FF2B5EF4-FFF2-40B4-BE49-F238E27FC236}">
-                <a16:creationId xmlns:a16="http://schemas.microsoft.com/office/drawing/2014/main" id="{97A8247B-FFE4-4126-A2C4-FB2567CF8BB2}"/>
-              </a:ext>
-            </a:extLst>
-          </p:cNvPr>
-          <p:cNvSpPr/>
-          <p:nvPr/>
-        </p:nvSpPr>
-        <p:spPr>
-          <a:xfrm>
-            <a:off x="880789" y="3592301"/>
-            <a:ext cx="2404427" cy="369333"/>
-          </a:xfrm>
-          <a:prstGeom prst="rect">
-            <a:avLst/>
-          </a:prstGeom>
-        </p:spPr>
-        <p:style>
-          <a:lnRef idx="2">
-            <a:schemeClr val="accent1">
-              <a:shade val="50000"/>
-            </a:schemeClr>
-          </a:lnRef>
-          <a:fillRef idx="1">
-            <a:schemeClr val="accent1"/>
-          </a:fillRef>
-          <a:effectRef idx="0">
-            <a:schemeClr val="accent1"/>
-          </a:effectRef>
-          <a:fontRef idx="minor">
-            <a:schemeClr val="lt1"/>
-          </a:fontRef>
-        </p:style>
-        <p:txBody>
-          <a:bodyPr rtlCol="0" anchor="ctr"/>
-          <a:lstStyle/>
-          <a:p>
-            <a:pPr algn="ctr"/>
-            <a:endParaRPr lang="de-CH"/>
-          </a:p>
-        </p:txBody>
-      </p:sp>
-      <p:sp>
-        <p:nvSpPr>
-          <p:cNvPr id="33" name="Rectangle 32">
-            <a:extLst>
-              <a:ext uri="{FF2B5EF4-FFF2-40B4-BE49-F238E27FC236}">
-                <a16:creationId xmlns:a16="http://schemas.microsoft.com/office/drawing/2014/main" id="{907979E4-C9D3-4760-923D-FABBA4D1F778}"/>
-              </a:ext>
-            </a:extLst>
-          </p:cNvPr>
-          <p:cNvSpPr/>
-          <p:nvPr/>
-        </p:nvSpPr>
-        <p:spPr>
-          <a:xfrm>
-            <a:off x="945079" y="3650812"/>
-            <a:ext cx="337065" cy="279982"/>
-          </a:xfrm>
-          <a:prstGeom prst="rect">
-            <a:avLst/>
-          </a:prstGeom>
-          <a:solidFill>
-            <a:schemeClr val="bg1"/>
-          </a:solidFill>
-        </p:spPr>
-        <p:style>
-          <a:lnRef idx="2">
-            <a:schemeClr val="accent1">
-              <a:shade val="50000"/>
-            </a:schemeClr>
-          </a:lnRef>
-          <a:fillRef idx="1">
-            <a:schemeClr val="accent1"/>
-          </a:fillRef>
-          <a:effectRef idx="0">
-            <a:schemeClr val="accent1"/>
-          </a:effectRef>
-          <a:fontRef idx="minor">
-            <a:schemeClr val="lt1"/>
-          </a:fontRef>
-        </p:style>
-        <p:txBody>
-          <a:bodyPr rtlCol="0" anchor="ctr"/>
-          <a:lstStyle/>
-          <a:p>
-            <a:pPr algn="ctr"/>
-            <a:endParaRPr lang="de-CH"/>
-          </a:p>
-        </p:txBody>
-      </p:sp>
-      <p:sp>
-        <p:nvSpPr>
-          <p:cNvPr id="34" name="TextBox 33">
-            <a:extLst>
-              <a:ext uri="{FF2B5EF4-FFF2-40B4-BE49-F238E27FC236}">
-                <a16:creationId xmlns:a16="http://schemas.microsoft.com/office/drawing/2014/main" id="{690AD2BC-48F3-4893-ABAA-B899448B9F45}"/>
+          <p:cNvPr id="25" name="TextBox 24">
+            <a:extLst>
+              <a:ext uri="{FF2B5EF4-FFF2-40B4-BE49-F238E27FC236}">
+                <a16:creationId xmlns:a16="http://schemas.microsoft.com/office/drawing/2014/main" id="{8D313B50-C3B1-4A67-8726-D49B920D456F}"/>
               </a:ext>
             </a:extLst>
           </p:cNvPr>
@@ -6462,8 +9928,8 @@
         </p:nvSpPr>
         <p:spPr>
           <a:xfrm>
-            <a:off x="1280818" y="3611822"/>
-            <a:ext cx="1619931" cy="369332"/>
+            <a:off x="7145077" y="4469929"/>
+            <a:ext cx="950709" cy="369332"/>
           </a:xfrm>
           <a:prstGeom prst="rect">
             <a:avLst/>
@@ -6482,587 +9948,7 @@
                   <a:schemeClr val="bg1"/>
                 </a:solidFill>
               </a:rPr>
-              <a:t>Climate </a:t>
-            </a:r>
-            <a:r>
-              <a:rPr lang="de-CH" dirty="0" err="1">
-                <a:solidFill>
-                  <a:schemeClr val="bg1"/>
-                </a:solidFill>
-              </a:rPr>
-              <a:t>Factors</a:t>
-            </a:r>
-            <a:endParaRPr lang="de-CH" dirty="0">
-              <a:solidFill>
-                <a:schemeClr val="bg1"/>
-              </a:solidFill>
-            </a:endParaRPr>
-          </a:p>
-        </p:txBody>
-      </p:sp>
-      <p:sp>
-        <p:nvSpPr>
-          <p:cNvPr id="35" name="Rectangle 34">
-            <a:extLst>
-              <a:ext uri="{FF2B5EF4-FFF2-40B4-BE49-F238E27FC236}">
-                <a16:creationId xmlns:a16="http://schemas.microsoft.com/office/drawing/2014/main" id="{CE8E39CB-35AB-49A2-A3AE-47FCE5090D25}"/>
-              </a:ext>
-            </a:extLst>
-          </p:cNvPr>
-          <p:cNvSpPr/>
-          <p:nvPr/>
-        </p:nvSpPr>
-        <p:spPr>
-          <a:xfrm>
-            <a:off x="882115" y="6152267"/>
-            <a:ext cx="2404427" cy="369333"/>
-          </a:xfrm>
-          <a:prstGeom prst="rect">
-            <a:avLst/>
-          </a:prstGeom>
-        </p:spPr>
-        <p:style>
-          <a:lnRef idx="2">
-            <a:schemeClr val="accent1">
-              <a:shade val="50000"/>
-            </a:schemeClr>
-          </a:lnRef>
-          <a:fillRef idx="1">
-            <a:schemeClr val="accent1"/>
-          </a:fillRef>
-          <a:effectRef idx="0">
-            <a:schemeClr val="accent1"/>
-          </a:effectRef>
-          <a:fontRef idx="minor">
-            <a:schemeClr val="lt1"/>
-          </a:fontRef>
-        </p:style>
-        <p:txBody>
-          <a:bodyPr rtlCol="0" anchor="ctr"/>
-          <a:lstStyle/>
-          <a:p>
-            <a:pPr algn="ctr"/>
-            <a:endParaRPr lang="de-CH"/>
-          </a:p>
-        </p:txBody>
-      </p:sp>
-      <p:sp>
-        <p:nvSpPr>
-          <p:cNvPr id="36" name="Rectangle 35">
-            <a:extLst>
-              <a:ext uri="{FF2B5EF4-FFF2-40B4-BE49-F238E27FC236}">
-                <a16:creationId xmlns:a16="http://schemas.microsoft.com/office/drawing/2014/main" id="{6C042BC1-0433-4114-B5BD-313D4D4F9251}"/>
-              </a:ext>
-            </a:extLst>
-          </p:cNvPr>
-          <p:cNvSpPr/>
-          <p:nvPr/>
-        </p:nvSpPr>
-        <p:spPr>
-          <a:xfrm>
-            <a:off x="946405" y="6210778"/>
-            <a:ext cx="337065" cy="279982"/>
-          </a:xfrm>
-          <a:prstGeom prst="rect">
-            <a:avLst/>
-          </a:prstGeom>
-          <a:solidFill>
-            <a:schemeClr val="bg1"/>
-          </a:solidFill>
-        </p:spPr>
-        <p:style>
-          <a:lnRef idx="2">
-            <a:schemeClr val="accent1">
-              <a:shade val="50000"/>
-            </a:schemeClr>
-          </a:lnRef>
-          <a:fillRef idx="1">
-            <a:schemeClr val="accent1"/>
-          </a:fillRef>
-          <a:effectRef idx="0">
-            <a:schemeClr val="accent1"/>
-          </a:effectRef>
-          <a:fontRef idx="minor">
-            <a:schemeClr val="lt1"/>
-          </a:fontRef>
-        </p:style>
-        <p:txBody>
-          <a:bodyPr rtlCol="0" anchor="ctr"/>
-          <a:lstStyle/>
-          <a:p>
-            <a:pPr algn="ctr"/>
-            <a:endParaRPr lang="de-CH"/>
-          </a:p>
-        </p:txBody>
-      </p:sp>
-      <p:sp>
-        <p:nvSpPr>
-          <p:cNvPr id="37" name="TextBox 36">
-            <a:extLst>
-              <a:ext uri="{FF2B5EF4-FFF2-40B4-BE49-F238E27FC236}">
-                <a16:creationId xmlns:a16="http://schemas.microsoft.com/office/drawing/2014/main" id="{B2255B43-E820-401A-9210-B88081A717BB}"/>
-              </a:ext>
-            </a:extLst>
-          </p:cNvPr>
-          <p:cNvSpPr txBox="1"/>
-          <p:nvPr/>
-        </p:nvSpPr>
-        <p:spPr>
-          <a:xfrm>
-            <a:off x="1282144" y="6171788"/>
-            <a:ext cx="1813445" cy="369332"/>
-          </a:xfrm>
-          <a:prstGeom prst="rect">
-            <a:avLst/>
-          </a:prstGeom>
-          <a:noFill/>
-        </p:spPr>
-        <p:txBody>
-          <a:bodyPr wrap="none" rtlCol="0">
-            <a:spAutoFit/>
-          </a:bodyPr>
-          <a:lstStyle/>
-          <a:p>
-            <a:r>
-              <a:rPr lang="de-CH" dirty="0">
-                <a:solidFill>
-                  <a:schemeClr val="bg1"/>
-                </a:solidFill>
-              </a:rPr>
-              <a:t>Economic </a:t>
-            </a:r>
-            <a:r>
-              <a:rPr lang="de-CH" dirty="0" err="1">
-                <a:solidFill>
-                  <a:schemeClr val="bg1"/>
-                </a:solidFill>
-              </a:rPr>
-              <a:t>Factors</a:t>
-            </a:r>
-            <a:endParaRPr lang="de-CH" dirty="0">
-              <a:solidFill>
-                <a:schemeClr val="bg1"/>
-              </a:solidFill>
-            </a:endParaRPr>
-          </a:p>
-        </p:txBody>
-      </p:sp>
-      <p:sp>
-        <p:nvSpPr>
-          <p:cNvPr id="38" name="Rectangle 37">
-            <a:extLst>
-              <a:ext uri="{FF2B5EF4-FFF2-40B4-BE49-F238E27FC236}">
-                <a16:creationId xmlns:a16="http://schemas.microsoft.com/office/drawing/2014/main" id="{0A36707C-EA42-44F5-8766-3C7F85651EC6}"/>
-              </a:ext>
-            </a:extLst>
-          </p:cNvPr>
-          <p:cNvSpPr/>
-          <p:nvPr/>
-        </p:nvSpPr>
-        <p:spPr>
-          <a:xfrm>
-            <a:off x="1186047" y="6627408"/>
-            <a:ext cx="2105816" cy="584424"/>
-          </a:xfrm>
-          <a:prstGeom prst="rect">
-            <a:avLst/>
-          </a:prstGeom>
-        </p:spPr>
-        <p:style>
-          <a:lnRef idx="2">
-            <a:schemeClr val="accent1">
-              <a:shade val="50000"/>
-            </a:schemeClr>
-          </a:lnRef>
-          <a:fillRef idx="1">
-            <a:schemeClr val="accent1"/>
-          </a:fillRef>
-          <a:effectRef idx="0">
-            <a:schemeClr val="accent1"/>
-          </a:effectRef>
-          <a:fontRef idx="minor">
-            <a:schemeClr val="lt1"/>
-          </a:fontRef>
-        </p:style>
-        <p:txBody>
-          <a:bodyPr rtlCol="0" anchor="ctr"/>
-          <a:lstStyle/>
-          <a:p>
-            <a:pPr algn="ctr"/>
-            <a:endParaRPr lang="de-CH"/>
-          </a:p>
-        </p:txBody>
-      </p:sp>
-      <p:sp>
-        <p:nvSpPr>
-          <p:cNvPr id="39" name="TextBox 38">
-            <a:extLst>
-              <a:ext uri="{FF2B5EF4-FFF2-40B4-BE49-F238E27FC236}">
-                <a16:creationId xmlns:a16="http://schemas.microsoft.com/office/drawing/2014/main" id="{4E27D457-C24D-44EE-887C-9BCD94F9029A}"/>
-              </a:ext>
-            </a:extLst>
-          </p:cNvPr>
-          <p:cNvSpPr txBox="1"/>
-          <p:nvPr/>
-        </p:nvSpPr>
-        <p:spPr>
-          <a:xfrm>
-            <a:off x="1225291" y="6706714"/>
-            <a:ext cx="1431867" cy="369332"/>
-          </a:xfrm>
-          <a:prstGeom prst="rect">
-            <a:avLst/>
-          </a:prstGeom>
-          <a:noFill/>
-        </p:spPr>
-        <p:txBody>
-          <a:bodyPr wrap="none" rtlCol="0">
-            <a:spAutoFit/>
-          </a:bodyPr>
-          <a:lstStyle/>
-          <a:p>
-            <a:r>
-              <a:rPr lang="de-CH" dirty="0">
-                <a:solidFill>
-                  <a:schemeClr val="bg1"/>
-                </a:solidFill>
-              </a:rPr>
-              <a:t>Energy Prices</a:t>
-            </a:r>
-          </a:p>
-        </p:txBody>
-      </p:sp>
-      <p:sp>
-        <p:nvSpPr>
-          <p:cNvPr id="40" name="Rectangle 39">
-            <a:extLst>
-              <a:ext uri="{FF2B5EF4-FFF2-40B4-BE49-F238E27FC236}">
-                <a16:creationId xmlns:a16="http://schemas.microsoft.com/office/drawing/2014/main" id="{D36D3C79-6D31-48E9-AFDA-92BDD7E6D8D9}"/>
-              </a:ext>
-            </a:extLst>
-          </p:cNvPr>
-          <p:cNvSpPr/>
-          <p:nvPr/>
-        </p:nvSpPr>
-        <p:spPr>
-          <a:xfrm>
-            <a:off x="1186047" y="7298120"/>
-            <a:ext cx="2105816" cy="584424"/>
-          </a:xfrm>
-          <a:prstGeom prst="rect">
-            <a:avLst/>
-          </a:prstGeom>
-        </p:spPr>
-        <p:style>
-          <a:lnRef idx="2">
-            <a:schemeClr val="accent1">
-              <a:shade val="50000"/>
-            </a:schemeClr>
-          </a:lnRef>
-          <a:fillRef idx="1">
-            <a:schemeClr val="accent1"/>
-          </a:fillRef>
-          <a:effectRef idx="0">
-            <a:schemeClr val="accent1"/>
-          </a:effectRef>
-          <a:fontRef idx="minor">
-            <a:schemeClr val="lt1"/>
-          </a:fontRef>
-        </p:style>
-        <p:txBody>
-          <a:bodyPr rtlCol="0" anchor="ctr"/>
-          <a:lstStyle/>
-          <a:p>
-            <a:pPr algn="ctr"/>
-            <a:endParaRPr lang="de-CH"/>
-          </a:p>
-        </p:txBody>
-      </p:sp>
-      <p:sp>
-        <p:nvSpPr>
-          <p:cNvPr id="41" name="TextBox 40">
-            <a:extLst>
-              <a:ext uri="{FF2B5EF4-FFF2-40B4-BE49-F238E27FC236}">
-                <a16:creationId xmlns:a16="http://schemas.microsoft.com/office/drawing/2014/main" id="{DCE25DAB-82C0-484C-A8B3-DB50058FDDE8}"/>
-              </a:ext>
-            </a:extLst>
-          </p:cNvPr>
-          <p:cNvSpPr txBox="1"/>
-          <p:nvPr/>
-        </p:nvSpPr>
-        <p:spPr>
-          <a:xfrm>
-            <a:off x="1225291" y="7377426"/>
-            <a:ext cx="981359" cy="369332"/>
-          </a:xfrm>
-          <a:prstGeom prst="rect">
-            <a:avLst/>
-          </a:prstGeom>
-          <a:noFill/>
-        </p:spPr>
-        <p:txBody>
-          <a:bodyPr wrap="none" rtlCol="0">
-            <a:spAutoFit/>
-          </a:bodyPr>
-          <a:lstStyle/>
-          <a:p>
-            <a:r>
-              <a:rPr lang="de-CH" dirty="0">
-                <a:solidFill>
-                  <a:schemeClr val="bg1"/>
-                </a:solidFill>
-              </a:rPr>
-              <a:t>Demand</a:t>
-            </a:r>
-          </a:p>
-        </p:txBody>
-      </p:sp>
-      <p:sp>
-        <p:nvSpPr>
-          <p:cNvPr id="42" name="Rectangle 41">
-            <a:extLst>
-              <a:ext uri="{FF2B5EF4-FFF2-40B4-BE49-F238E27FC236}">
-                <a16:creationId xmlns:a16="http://schemas.microsoft.com/office/drawing/2014/main" id="{33BFDA4F-829B-43C0-989D-3C6D519C8C70}"/>
-              </a:ext>
-            </a:extLst>
-          </p:cNvPr>
-          <p:cNvSpPr/>
-          <p:nvPr/>
-        </p:nvSpPr>
-        <p:spPr>
-          <a:xfrm>
-            <a:off x="1186047" y="7961850"/>
-            <a:ext cx="2105816" cy="584424"/>
-          </a:xfrm>
-          <a:prstGeom prst="rect">
-            <a:avLst/>
-          </a:prstGeom>
-        </p:spPr>
-        <p:style>
-          <a:lnRef idx="2">
-            <a:schemeClr val="accent1">
-              <a:shade val="50000"/>
-            </a:schemeClr>
-          </a:lnRef>
-          <a:fillRef idx="1">
-            <a:schemeClr val="accent1"/>
-          </a:fillRef>
-          <a:effectRef idx="0">
-            <a:schemeClr val="accent1"/>
-          </a:effectRef>
-          <a:fontRef idx="minor">
-            <a:schemeClr val="lt1"/>
-          </a:fontRef>
-        </p:style>
-        <p:txBody>
-          <a:bodyPr rtlCol="0" anchor="ctr"/>
-          <a:lstStyle/>
-          <a:p>
-            <a:pPr algn="ctr"/>
-            <a:endParaRPr lang="de-CH"/>
-          </a:p>
-        </p:txBody>
-      </p:sp>
-      <p:sp>
-        <p:nvSpPr>
-          <p:cNvPr id="43" name="TextBox 42">
-            <a:extLst>
-              <a:ext uri="{FF2B5EF4-FFF2-40B4-BE49-F238E27FC236}">
-                <a16:creationId xmlns:a16="http://schemas.microsoft.com/office/drawing/2014/main" id="{4F59BEAD-C02F-4586-A50A-D496F586374F}"/>
-              </a:ext>
-            </a:extLst>
-          </p:cNvPr>
-          <p:cNvSpPr txBox="1"/>
-          <p:nvPr/>
-        </p:nvSpPr>
-        <p:spPr>
-          <a:xfrm>
-            <a:off x="1225291" y="8041156"/>
-            <a:ext cx="2177584" cy="369332"/>
-          </a:xfrm>
-          <a:prstGeom prst="rect">
-            <a:avLst/>
-          </a:prstGeom>
-          <a:noFill/>
-        </p:spPr>
-        <p:txBody>
-          <a:bodyPr wrap="none" rtlCol="0">
-            <a:spAutoFit/>
-          </a:bodyPr>
-          <a:lstStyle/>
-          <a:p>
-            <a:r>
-              <a:rPr lang="de-CH" dirty="0">
-                <a:solidFill>
-                  <a:schemeClr val="bg1"/>
-                </a:solidFill>
-              </a:rPr>
-              <a:t>Supply / Competition</a:t>
-            </a:r>
-          </a:p>
-        </p:txBody>
-      </p:sp>
-      <p:sp>
-        <p:nvSpPr>
-          <p:cNvPr id="46" name="TextBox 45">
-            <a:extLst>
-              <a:ext uri="{FF2B5EF4-FFF2-40B4-BE49-F238E27FC236}">
-                <a16:creationId xmlns:a16="http://schemas.microsoft.com/office/drawing/2014/main" id="{59582861-4E9B-491D-86FF-9054DC4FA66C}"/>
-              </a:ext>
-            </a:extLst>
-          </p:cNvPr>
-          <p:cNvSpPr txBox="1"/>
-          <p:nvPr/>
-        </p:nvSpPr>
-        <p:spPr>
-          <a:xfrm>
-            <a:off x="1333574" y="3104572"/>
-            <a:ext cx="1592359" cy="369332"/>
-          </a:xfrm>
-          <a:prstGeom prst="rect">
-            <a:avLst/>
-          </a:prstGeom>
-          <a:noFill/>
-        </p:spPr>
-        <p:txBody>
-          <a:bodyPr wrap="none" rtlCol="0">
-            <a:spAutoFit/>
-          </a:bodyPr>
-          <a:lstStyle/>
-          <a:p>
-            <a:r>
-              <a:rPr lang="de-CH" dirty="0">
-                <a:solidFill>
-                  <a:schemeClr val="bg1"/>
-                </a:solidFill>
-              </a:rPr>
-              <a:t>Potential Score</a:t>
-            </a:r>
-          </a:p>
-        </p:txBody>
-      </p:sp>
-      <p:sp>
-        <p:nvSpPr>
-          <p:cNvPr id="44" name="Rectangle 43">
-            <a:extLst>
-              <a:ext uri="{FF2B5EF4-FFF2-40B4-BE49-F238E27FC236}">
-                <a16:creationId xmlns:a16="http://schemas.microsoft.com/office/drawing/2014/main" id="{122308A9-2FA1-44CF-8C8E-BAE5A892C59E}"/>
-              </a:ext>
-            </a:extLst>
-          </p:cNvPr>
-          <p:cNvSpPr/>
-          <p:nvPr/>
-        </p:nvSpPr>
-        <p:spPr>
-          <a:xfrm>
-            <a:off x="8114258" y="1993991"/>
-            <a:ext cx="3010942" cy="4158276"/>
-          </a:xfrm>
-          <a:prstGeom prst="rect">
-            <a:avLst/>
-          </a:prstGeom>
-        </p:spPr>
-        <p:style>
-          <a:lnRef idx="2">
-            <a:schemeClr val="accent1">
-              <a:shade val="50000"/>
-            </a:schemeClr>
-          </a:lnRef>
-          <a:fillRef idx="1">
-            <a:schemeClr val="accent1"/>
-          </a:fillRef>
-          <a:effectRef idx="0">
-            <a:schemeClr val="accent1"/>
-          </a:effectRef>
-          <a:fontRef idx="minor">
-            <a:schemeClr val="lt1"/>
-          </a:fontRef>
-        </p:style>
-        <p:txBody>
-          <a:bodyPr rtlCol="0" anchor="ctr"/>
-          <a:lstStyle/>
-          <a:p>
-            <a:pPr algn="ctr"/>
-            <a:endParaRPr lang="de-CH"/>
-          </a:p>
-        </p:txBody>
-      </p:sp>
-      <p:sp>
-        <p:nvSpPr>
-          <p:cNvPr id="45" name="TextBox 44">
-            <a:extLst>
-              <a:ext uri="{FF2B5EF4-FFF2-40B4-BE49-F238E27FC236}">
-                <a16:creationId xmlns:a16="http://schemas.microsoft.com/office/drawing/2014/main" id="{B9547F3D-FA88-4941-84F8-878EB11B841A}"/>
-              </a:ext>
-            </a:extLst>
-          </p:cNvPr>
-          <p:cNvSpPr txBox="1"/>
-          <p:nvPr/>
-        </p:nvSpPr>
-        <p:spPr>
-          <a:xfrm>
-            <a:off x="8518928" y="2891625"/>
-            <a:ext cx="2232183" cy="2031325"/>
-          </a:xfrm>
-          <a:prstGeom prst="rect">
-            <a:avLst/>
-          </a:prstGeom>
-          <a:noFill/>
-        </p:spPr>
-        <p:txBody>
-          <a:bodyPr wrap="square" rtlCol="0">
-            <a:spAutoFit/>
-          </a:bodyPr>
-          <a:lstStyle/>
-          <a:p>
-            <a:r>
-              <a:rPr lang="de-CH" dirty="0">
-                <a:solidFill>
-                  <a:schemeClr val="bg1"/>
-                </a:solidFill>
-              </a:rPr>
-              <a:t>CALC</a:t>
-            </a:r>
-          </a:p>
-          <a:p>
-            <a:endParaRPr lang="de-CH" dirty="0">
-              <a:solidFill>
-                <a:schemeClr val="bg1"/>
-              </a:solidFill>
-            </a:endParaRPr>
-          </a:p>
-          <a:p>
-            <a:r>
-              <a:rPr lang="de-CH" dirty="0">
-                <a:solidFill>
-                  <a:schemeClr val="bg1"/>
-                </a:solidFill>
-              </a:rPr>
-              <a:t>COST &amp; BENEFIT BREAKDOWN</a:t>
-            </a:r>
-          </a:p>
-          <a:p>
-            <a:endParaRPr lang="de-CH" dirty="0">
-              <a:solidFill>
-                <a:schemeClr val="bg1"/>
-              </a:solidFill>
-            </a:endParaRPr>
-          </a:p>
-          <a:p>
-            <a:endParaRPr lang="de-CH" dirty="0">
-              <a:solidFill>
-                <a:schemeClr val="bg1"/>
-              </a:solidFill>
-            </a:endParaRPr>
-          </a:p>
-          <a:p>
-            <a:r>
-              <a:rPr lang="de-CH" dirty="0">
-                <a:solidFill>
-                  <a:schemeClr val="bg1"/>
-                </a:solidFill>
-              </a:rPr>
-              <a:t>POTENTIAL PROFIT</a:t>
+              <a:t>Markers</a:t>
             </a:r>
           </a:p>
         </p:txBody>
@@ -7070,7 +9956,7 @@
     </p:spTree>
     <p:extLst>
       <p:ext uri="{BB962C8B-B14F-4D97-AF65-F5344CB8AC3E}">
-        <p14:creationId xmlns:p14="http://schemas.microsoft.com/office/powerpoint/2010/main" val="2104450236"/>
+        <p14:creationId xmlns:p14="http://schemas.microsoft.com/office/powerpoint/2010/main" val="3500092138"/>
       </p:ext>
     </p:extLst>
   </p:cSld>
@@ -7080,7 +9966,7 @@
 </p:sld>
 </file>
 
-<file path=ppt/slides/slide12.xml><?xml version="1.0" encoding="utf-8"?>
+<file path=ppt/slides/slide2.xml><?xml version="1.0" encoding="utf-8"?>
 <p:sld xmlns:a="http://schemas.openxmlformats.org/drawingml/2006/main" xmlns:r="http://schemas.openxmlformats.org/officeDocument/2006/relationships" xmlns:p="http://schemas.openxmlformats.org/presentationml/2006/main">
   <p:cSld>
     <p:spTree>
@@ -7099,10 +9985,10 @@
       </p:grpSpPr>
       <p:sp>
         <p:nvSpPr>
-          <p:cNvPr id="6" name="Rectangle 5">
-            <a:extLst>
-              <a:ext uri="{FF2B5EF4-FFF2-40B4-BE49-F238E27FC236}">
-                <a16:creationId xmlns:a16="http://schemas.microsoft.com/office/drawing/2014/main" id="{817696D0-2D07-48F0-BF7B-F75475D42D9E}"/>
+          <p:cNvPr id="17" name="Rectangle 16">
+            <a:extLst>
+              <a:ext uri="{FF2B5EF4-FFF2-40B4-BE49-F238E27FC236}">
+                <a16:creationId xmlns:a16="http://schemas.microsoft.com/office/drawing/2014/main" id="{3C3D6B3A-1E47-4A30-8332-F24929504714}"/>
               </a:ext>
             </a:extLst>
           </p:cNvPr>
@@ -7111,12 +9997,15 @@
         </p:nvSpPr>
         <p:spPr>
           <a:xfrm>
-            <a:off x="764651" y="564543"/>
-            <a:ext cx="8643068" cy="834887"/>
-          </a:xfrm>
-          <a:prstGeom prst="rect">
-            <a:avLst/>
-          </a:prstGeom>
+            <a:off x="0" y="0"/>
+            <a:ext cx="12192000" cy="6858000"/>
+          </a:xfrm>
+          <a:prstGeom prst="rect">
+            <a:avLst/>
+          </a:prstGeom>
+          <a:solidFill>
+            <a:schemeClr val="tx1"/>
+          </a:solidFill>
         </p:spPr>
         <p:style>
           <a:lnRef idx="2">
@@ -7139,157 +10028,16 @@
           <a:lstStyle/>
           <a:p>
             <a:pPr algn="ctr"/>
-            <a:r>
-              <a:rPr lang="de-CH" dirty="0"/>
-              <a:t>BANNER</a:t>
-            </a:r>
-          </a:p>
-        </p:txBody>
-      </p:sp>
-      <p:sp>
-        <p:nvSpPr>
-          <p:cNvPr id="7" name="Rectangle 6">
-            <a:extLst>
-              <a:ext uri="{FF2B5EF4-FFF2-40B4-BE49-F238E27FC236}">
-                <a16:creationId xmlns:a16="http://schemas.microsoft.com/office/drawing/2014/main" id="{DB333D9A-A3FB-451A-AE2F-047FE63E1639}"/>
-              </a:ext>
-            </a:extLst>
-          </p:cNvPr>
-          <p:cNvSpPr/>
-          <p:nvPr/>
-        </p:nvSpPr>
-        <p:spPr>
-          <a:xfrm>
-            <a:off x="764651" y="1399431"/>
-            <a:ext cx="2582849" cy="286246"/>
-          </a:xfrm>
-          <a:prstGeom prst="rect">
-            <a:avLst/>
-          </a:prstGeom>
-        </p:spPr>
-        <p:style>
-          <a:lnRef idx="2">
-            <a:schemeClr val="accent1">
-              <a:shade val="50000"/>
-            </a:schemeClr>
-          </a:lnRef>
-          <a:fillRef idx="1">
-            <a:schemeClr val="accent1"/>
-          </a:fillRef>
-          <a:effectRef idx="0">
-            <a:schemeClr val="accent1"/>
-          </a:effectRef>
-          <a:fontRef idx="minor">
-            <a:schemeClr val="lt1"/>
-          </a:fontRef>
-        </p:style>
-        <p:txBody>
-          <a:bodyPr rtlCol="0" anchor="ctr"/>
-          <a:lstStyle/>
-          <a:p>
-            <a:pPr algn="ctr"/>
             <a:endParaRPr lang="de-CH"/>
           </a:p>
         </p:txBody>
       </p:sp>
       <p:sp>
         <p:nvSpPr>
-          <p:cNvPr id="8" name="Rectangle 7">
-            <a:extLst>
-              <a:ext uri="{FF2B5EF4-FFF2-40B4-BE49-F238E27FC236}">
-                <a16:creationId xmlns:a16="http://schemas.microsoft.com/office/drawing/2014/main" id="{4641BEC3-6550-4465-8BD1-E0977A5C0E03}"/>
-              </a:ext>
-            </a:extLst>
-          </p:cNvPr>
-          <p:cNvSpPr/>
-          <p:nvPr/>
-        </p:nvSpPr>
-        <p:spPr>
-          <a:xfrm>
-            <a:off x="3347500" y="1399430"/>
-            <a:ext cx="3477370" cy="286246"/>
-          </a:xfrm>
-          <a:prstGeom prst="rect">
-            <a:avLst/>
-          </a:prstGeom>
-        </p:spPr>
-        <p:style>
-          <a:lnRef idx="2">
-            <a:schemeClr val="accent1">
-              <a:shade val="50000"/>
-            </a:schemeClr>
-          </a:lnRef>
-          <a:fillRef idx="1">
-            <a:schemeClr val="accent1"/>
-          </a:fillRef>
-          <a:effectRef idx="0">
-            <a:schemeClr val="accent1"/>
-          </a:effectRef>
-          <a:fontRef idx="minor">
-            <a:schemeClr val="lt1"/>
-          </a:fontRef>
-        </p:style>
-        <p:txBody>
-          <a:bodyPr rtlCol="0" anchor="ctr"/>
-          <a:lstStyle/>
-          <a:p>
-            <a:pPr algn="ctr"/>
-            <a:endParaRPr lang="de-CH"/>
-          </a:p>
-        </p:txBody>
-      </p:sp>
-      <p:sp>
-        <p:nvSpPr>
-          <p:cNvPr id="9" name="Rectangle 8">
-            <a:extLst>
-              <a:ext uri="{FF2B5EF4-FFF2-40B4-BE49-F238E27FC236}">
-                <a16:creationId xmlns:a16="http://schemas.microsoft.com/office/drawing/2014/main" id="{5262697C-105E-469B-8FEC-31EA635C46CC}"/>
-              </a:ext>
-            </a:extLst>
-          </p:cNvPr>
-          <p:cNvSpPr/>
-          <p:nvPr/>
-        </p:nvSpPr>
-        <p:spPr>
-          <a:xfrm>
-            <a:off x="6827186" y="1399430"/>
-            <a:ext cx="2582849" cy="286246"/>
-          </a:xfrm>
-          <a:prstGeom prst="rect">
-            <a:avLst/>
-          </a:prstGeom>
-        </p:spPr>
-        <p:style>
-          <a:lnRef idx="2">
-            <a:schemeClr val="accent1">
-              <a:shade val="50000"/>
-            </a:schemeClr>
-          </a:lnRef>
-          <a:fillRef idx="1">
-            <a:schemeClr val="accent1"/>
-          </a:fillRef>
-          <a:effectRef idx="0">
-            <a:schemeClr val="accent1"/>
-          </a:effectRef>
-          <a:fontRef idx="minor">
-            <a:schemeClr val="lt1"/>
-          </a:fontRef>
-        </p:style>
-        <p:txBody>
-          <a:bodyPr rtlCol="0" anchor="ctr"/>
-          <a:lstStyle/>
-          <a:p>
-            <a:pPr algn="ctr"/>
-            <a:endParaRPr lang="de-CH"/>
-          </a:p>
-        </p:txBody>
-      </p:sp>
-      <p:sp>
-        <p:nvSpPr>
-          <p:cNvPr id="10" name="TextBox 9">
-            <a:extLst>
-              <a:ext uri="{FF2B5EF4-FFF2-40B4-BE49-F238E27FC236}">
-                <a16:creationId xmlns:a16="http://schemas.microsoft.com/office/drawing/2014/main" id="{29263E18-0C08-4337-B106-0D2A628A6C32}"/>
+          <p:cNvPr id="18" name="TextBox 17">
+            <a:extLst>
+              <a:ext uri="{FF2B5EF4-FFF2-40B4-BE49-F238E27FC236}">
+                <a16:creationId xmlns:a16="http://schemas.microsoft.com/office/drawing/2014/main" id="{AB84F5A7-AB1C-4142-9533-07AF62B0F607}"/>
               </a:ext>
             </a:extLst>
           </p:cNvPr>
@@ -7298,8 +10046,8 @@
         </p:nvSpPr>
         <p:spPr>
           <a:xfrm>
-            <a:off x="1141307" y="1316344"/>
-            <a:ext cx="1877245" cy="369332"/>
+            <a:off x="647621" y="2875002"/>
+            <a:ext cx="11544379" cy="1107996"/>
           </a:xfrm>
           <a:prstGeom prst="rect">
             <a:avLst/>
@@ -7313,616 +10061,12 @@
           <a:lstStyle/>
           <a:p>
             <a:r>
-              <a:rPr lang="de-CH" dirty="0"/>
-              <a:t>Projects </a:t>
-            </a:r>
-            <a:r>
-              <a:rPr lang="de-CH" dirty="0" err="1"/>
-              <a:t>Overview</a:t>
-            </a:r>
-            <a:endParaRPr lang="de-CH" dirty="0"/>
-          </a:p>
-        </p:txBody>
-      </p:sp>
-      <p:sp>
-        <p:nvSpPr>
-          <p:cNvPr id="11" name="TextBox 10">
-            <a:extLst>
-              <a:ext uri="{FF2B5EF4-FFF2-40B4-BE49-F238E27FC236}">
-                <a16:creationId xmlns:a16="http://schemas.microsoft.com/office/drawing/2014/main" id="{B2669C21-9586-4C09-BC0F-A0053AF0D575}"/>
-              </a:ext>
-            </a:extLst>
-          </p:cNvPr>
-          <p:cNvSpPr txBox="1"/>
-          <p:nvPr/>
-        </p:nvSpPr>
-        <p:spPr>
-          <a:xfrm>
-            <a:off x="3592025" y="1357887"/>
-            <a:ext cx="2988319" cy="369332"/>
-          </a:xfrm>
-          <a:prstGeom prst="rect">
-            <a:avLst/>
-          </a:prstGeom>
-          <a:noFill/>
-        </p:spPr>
-        <p:txBody>
-          <a:bodyPr wrap="none" rtlCol="0">
-            <a:spAutoFit/>
-          </a:bodyPr>
-          <a:lstStyle/>
-          <a:p>
-            <a:r>
-              <a:rPr lang="de-CH" dirty="0"/>
-              <a:t>Regional Investment Potential</a:t>
-            </a:r>
-          </a:p>
-        </p:txBody>
-      </p:sp>
-      <p:sp>
-        <p:nvSpPr>
-          <p:cNvPr id="12" name="TextBox 11">
-            <a:extLst>
-              <a:ext uri="{FF2B5EF4-FFF2-40B4-BE49-F238E27FC236}">
-                <a16:creationId xmlns:a16="http://schemas.microsoft.com/office/drawing/2014/main" id="{9000CE69-5A06-43A4-BA9C-D55296D90252}"/>
-              </a:ext>
-            </a:extLst>
-          </p:cNvPr>
-          <p:cNvSpPr txBox="1"/>
-          <p:nvPr/>
-        </p:nvSpPr>
-        <p:spPr>
-          <a:xfrm>
-            <a:off x="7225256" y="1346363"/>
-            <a:ext cx="1786708" cy="369332"/>
-          </a:xfrm>
-          <a:prstGeom prst="rect">
-            <a:avLst/>
-          </a:prstGeom>
-          <a:noFill/>
-        </p:spPr>
-        <p:txBody>
-          <a:bodyPr wrap="none" rtlCol="0">
-            <a:spAutoFit/>
-          </a:bodyPr>
-          <a:lstStyle/>
-          <a:p>
-            <a:r>
-              <a:rPr lang="de-CH" dirty="0">
+              <a:rPr lang="de-CH" sz="6600" b="1" dirty="0">
                 <a:solidFill>
                   <a:schemeClr val="bg1"/>
                 </a:solidFill>
               </a:rPr>
-              <a:t>Tender Navigator</a:t>
-            </a:r>
-          </a:p>
-        </p:txBody>
-      </p:sp>
-      <p:sp>
-        <p:nvSpPr>
-          <p:cNvPr id="2" name="Rectangle 1">
-            <a:extLst>
-              <a:ext uri="{FF2B5EF4-FFF2-40B4-BE49-F238E27FC236}">
-                <a16:creationId xmlns:a16="http://schemas.microsoft.com/office/drawing/2014/main" id="{50D30DA0-CD80-49C5-B003-0F2D4FCE4C15}"/>
-              </a:ext>
-            </a:extLst>
-          </p:cNvPr>
-          <p:cNvSpPr/>
-          <p:nvPr/>
-        </p:nvSpPr>
-        <p:spPr>
-          <a:xfrm>
-            <a:off x="3816625" y="1993991"/>
-            <a:ext cx="5591093" cy="4102873"/>
-          </a:xfrm>
-          <a:prstGeom prst="rect">
-            <a:avLst/>
-          </a:prstGeom>
-        </p:spPr>
-        <p:style>
-          <a:lnRef idx="2">
-            <a:schemeClr val="accent1">
-              <a:shade val="50000"/>
-            </a:schemeClr>
-          </a:lnRef>
-          <a:fillRef idx="1">
-            <a:schemeClr val="accent1"/>
-          </a:fillRef>
-          <a:effectRef idx="0">
-            <a:schemeClr val="accent1"/>
-          </a:effectRef>
-          <a:fontRef idx="minor">
-            <a:schemeClr val="lt1"/>
-          </a:fontRef>
-        </p:style>
-        <p:txBody>
-          <a:bodyPr rtlCol="0" anchor="ctr"/>
-          <a:lstStyle/>
-          <a:p>
-            <a:pPr algn="ctr"/>
-            <a:endParaRPr lang="de-CH"/>
-          </a:p>
-        </p:txBody>
-      </p:sp>
-      <p:sp>
-        <p:nvSpPr>
-          <p:cNvPr id="15" name="Rectangle 14">
-            <a:extLst>
-              <a:ext uri="{FF2B5EF4-FFF2-40B4-BE49-F238E27FC236}">
-                <a16:creationId xmlns:a16="http://schemas.microsoft.com/office/drawing/2014/main" id="{CD55C107-B7CC-4D5F-AD89-751C4D9C0BB1}"/>
-              </a:ext>
-            </a:extLst>
-          </p:cNvPr>
-          <p:cNvSpPr/>
-          <p:nvPr/>
-        </p:nvSpPr>
-        <p:spPr>
-          <a:xfrm>
-            <a:off x="764652" y="1993991"/>
-            <a:ext cx="2884998" cy="4102873"/>
-          </a:xfrm>
-          <a:prstGeom prst="rect">
-            <a:avLst/>
-          </a:prstGeom>
-        </p:spPr>
-        <p:style>
-          <a:lnRef idx="2">
-            <a:schemeClr val="accent1">
-              <a:shade val="50000"/>
-            </a:schemeClr>
-          </a:lnRef>
-          <a:fillRef idx="1">
-            <a:schemeClr val="accent1"/>
-          </a:fillRef>
-          <a:effectRef idx="0">
-            <a:schemeClr val="accent1"/>
-          </a:effectRef>
-          <a:fontRef idx="minor">
-            <a:schemeClr val="lt1"/>
-          </a:fontRef>
-        </p:style>
-        <p:txBody>
-          <a:bodyPr rtlCol="0" anchor="ctr"/>
-          <a:lstStyle/>
-          <a:p>
-            <a:pPr algn="ctr"/>
-            <a:endParaRPr lang="de-CH"/>
-          </a:p>
-        </p:txBody>
-      </p:sp>
-      <p:sp>
-        <p:nvSpPr>
-          <p:cNvPr id="16" name="Rectangle 15">
-            <a:extLst>
-              <a:ext uri="{FF2B5EF4-FFF2-40B4-BE49-F238E27FC236}">
-                <a16:creationId xmlns:a16="http://schemas.microsoft.com/office/drawing/2014/main" id="{D0A7862D-6DAC-425A-9E21-6F2BF8B33493}"/>
-              </a:ext>
-            </a:extLst>
-          </p:cNvPr>
-          <p:cNvSpPr/>
-          <p:nvPr/>
-        </p:nvSpPr>
-        <p:spPr>
-          <a:xfrm>
-            <a:off x="764652" y="2035533"/>
-            <a:ext cx="2884998" cy="970060"/>
-          </a:xfrm>
-          <a:prstGeom prst="rect">
-            <a:avLst/>
-          </a:prstGeom>
-        </p:spPr>
-        <p:style>
-          <a:lnRef idx="2">
-            <a:schemeClr val="accent1">
-              <a:shade val="50000"/>
-            </a:schemeClr>
-          </a:lnRef>
-          <a:fillRef idx="1">
-            <a:schemeClr val="accent1"/>
-          </a:fillRef>
-          <a:effectRef idx="0">
-            <a:schemeClr val="accent1"/>
-          </a:effectRef>
-          <a:fontRef idx="minor">
-            <a:schemeClr val="lt1"/>
-          </a:fontRef>
-        </p:style>
-        <p:txBody>
-          <a:bodyPr rtlCol="0" anchor="ctr"/>
-          <a:lstStyle/>
-          <a:p>
-            <a:pPr algn="ctr"/>
-            <a:endParaRPr lang="de-CH"/>
-          </a:p>
-        </p:txBody>
-      </p:sp>
-      <p:sp>
-        <p:nvSpPr>
-          <p:cNvPr id="17" name="Rectangle 16">
-            <a:extLst>
-              <a:ext uri="{FF2B5EF4-FFF2-40B4-BE49-F238E27FC236}">
-                <a16:creationId xmlns:a16="http://schemas.microsoft.com/office/drawing/2014/main" id="{834865B1-73B0-413B-9706-CE930F270787}"/>
-              </a:ext>
-            </a:extLst>
-          </p:cNvPr>
-          <p:cNvSpPr/>
-          <p:nvPr/>
-        </p:nvSpPr>
-        <p:spPr>
-          <a:xfrm>
-            <a:off x="951179" y="3899541"/>
-            <a:ext cx="2534636" cy="369332"/>
-          </a:xfrm>
-          <a:prstGeom prst="rect">
-            <a:avLst/>
-          </a:prstGeom>
-        </p:spPr>
-        <p:style>
-          <a:lnRef idx="2">
-            <a:schemeClr val="accent1">
-              <a:shade val="50000"/>
-            </a:schemeClr>
-          </a:lnRef>
-          <a:fillRef idx="1">
-            <a:schemeClr val="accent1"/>
-          </a:fillRef>
-          <a:effectRef idx="0">
-            <a:schemeClr val="accent1"/>
-          </a:effectRef>
-          <a:fontRef idx="minor">
-            <a:schemeClr val="lt1"/>
-          </a:fontRef>
-        </p:style>
-        <p:txBody>
-          <a:bodyPr rtlCol="0" anchor="ctr"/>
-          <a:lstStyle/>
-          <a:p>
-            <a:pPr algn="ctr"/>
-            <a:endParaRPr lang="de-CH"/>
-          </a:p>
-        </p:txBody>
-      </p:sp>
-      <p:sp>
-        <p:nvSpPr>
-          <p:cNvPr id="18" name="TextBox 17">
-            <a:extLst>
-              <a:ext uri="{FF2B5EF4-FFF2-40B4-BE49-F238E27FC236}">
-                <a16:creationId xmlns:a16="http://schemas.microsoft.com/office/drawing/2014/main" id="{EB4F5ECF-194A-4D24-AF22-9E96C8847682}"/>
-              </a:ext>
-            </a:extLst>
-          </p:cNvPr>
-          <p:cNvSpPr txBox="1"/>
-          <p:nvPr/>
-        </p:nvSpPr>
-        <p:spPr>
-          <a:xfrm>
-            <a:off x="5686990" y="3860761"/>
-            <a:ext cx="739305" cy="369332"/>
-          </a:xfrm>
-          <a:prstGeom prst="rect">
-            <a:avLst/>
-          </a:prstGeom>
-          <a:noFill/>
-        </p:spPr>
-        <p:txBody>
-          <a:bodyPr wrap="none" rtlCol="0">
-            <a:spAutoFit/>
-          </a:bodyPr>
-          <a:lstStyle/>
-          <a:p>
-            <a:r>
-              <a:rPr lang="de-CH" dirty="0">
-                <a:solidFill>
-                  <a:schemeClr val="bg1"/>
-                </a:solidFill>
-              </a:rPr>
-              <a:t>MAPS</a:t>
-            </a:r>
-          </a:p>
-        </p:txBody>
-      </p:sp>
-      <p:sp>
-        <p:nvSpPr>
-          <p:cNvPr id="19" name="TextBox 18">
-            <a:extLst>
-              <a:ext uri="{FF2B5EF4-FFF2-40B4-BE49-F238E27FC236}">
-                <a16:creationId xmlns:a16="http://schemas.microsoft.com/office/drawing/2014/main" id="{89424687-B726-41CE-8D41-9F06AD840A45}"/>
-              </a:ext>
-            </a:extLst>
-          </p:cNvPr>
-          <p:cNvSpPr txBox="1"/>
-          <p:nvPr/>
-        </p:nvSpPr>
-        <p:spPr>
-          <a:xfrm>
-            <a:off x="1733206" y="2369893"/>
-            <a:ext cx="1347357" cy="369332"/>
-          </a:xfrm>
-          <a:prstGeom prst="rect">
-            <a:avLst/>
-          </a:prstGeom>
-          <a:noFill/>
-        </p:spPr>
-        <p:txBody>
-          <a:bodyPr wrap="none" rtlCol="0">
-            <a:spAutoFit/>
-          </a:bodyPr>
-          <a:lstStyle/>
-          <a:p>
-            <a:r>
-              <a:rPr lang="de-CH" dirty="0">
-                <a:solidFill>
-                  <a:schemeClr val="bg1"/>
-                </a:solidFill>
-              </a:rPr>
-              <a:t>Search Filter</a:t>
-            </a:r>
-          </a:p>
-        </p:txBody>
-      </p:sp>
-      <p:sp>
-        <p:nvSpPr>
-          <p:cNvPr id="20" name="TextBox 19">
-            <a:extLst>
-              <a:ext uri="{FF2B5EF4-FFF2-40B4-BE49-F238E27FC236}">
-                <a16:creationId xmlns:a16="http://schemas.microsoft.com/office/drawing/2014/main" id="{F9B733E3-F12E-4870-8228-9AE8EDB5A0F6}"/>
-              </a:ext>
-            </a:extLst>
-          </p:cNvPr>
-          <p:cNvSpPr txBox="1"/>
-          <p:nvPr/>
-        </p:nvSpPr>
-        <p:spPr>
-          <a:xfrm>
-            <a:off x="1470056" y="3452567"/>
-            <a:ext cx="852285" cy="369332"/>
-          </a:xfrm>
-          <a:prstGeom prst="rect">
-            <a:avLst/>
-          </a:prstGeom>
-          <a:noFill/>
-        </p:spPr>
-        <p:txBody>
-          <a:bodyPr wrap="none" rtlCol="0">
-            <a:spAutoFit/>
-          </a:bodyPr>
-          <a:lstStyle/>
-          <a:p>
-            <a:r>
-              <a:rPr lang="de-CH" dirty="0" err="1">
-                <a:solidFill>
-                  <a:schemeClr val="bg1"/>
-                </a:solidFill>
-              </a:rPr>
-              <a:t>Results</a:t>
-            </a:r>
-            <a:endParaRPr lang="de-CH" dirty="0">
-              <a:solidFill>
-                <a:schemeClr val="bg1"/>
-              </a:solidFill>
-            </a:endParaRPr>
-          </a:p>
-        </p:txBody>
-      </p:sp>
-      <p:sp>
-        <p:nvSpPr>
-          <p:cNvPr id="21" name="Rectangle 20">
-            <a:extLst>
-              <a:ext uri="{FF2B5EF4-FFF2-40B4-BE49-F238E27FC236}">
-                <a16:creationId xmlns:a16="http://schemas.microsoft.com/office/drawing/2014/main" id="{D9D87DF3-2B13-4D2F-8A94-8FFB73AE8C17}"/>
-              </a:ext>
-            </a:extLst>
-          </p:cNvPr>
-          <p:cNvSpPr/>
-          <p:nvPr/>
-        </p:nvSpPr>
-        <p:spPr>
-          <a:xfrm>
-            <a:off x="939833" y="5337025"/>
-            <a:ext cx="2534636" cy="369332"/>
-          </a:xfrm>
-          <a:prstGeom prst="rect">
-            <a:avLst/>
-          </a:prstGeom>
-        </p:spPr>
-        <p:style>
-          <a:lnRef idx="2">
-            <a:schemeClr val="accent1">
-              <a:shade val="50000"/>
-            </a:schemeClr>
-          </a:lnRef>
-          <a:fillRef idx="1">
-            <a:schemeClr val="accent1"/>
-          </a:fillRef>
-          <a:effectRef idx="0">
-            <a:schemeClr val="accent1"/>
-          </a:effectRef>
-          <a:fontRef idx="minor">
-            <a:schemeClr val="lt1"/>
-          </a:fontRef>
-        </p:style>
-        <p:txBody>
-          <a:bodyPr rtlCol="0" anchor="ctr"/>
-          <a:lstStyle/>
-          <a:p>
-            <a:pPr algn="ctr"/>
-            <a:endParaRPr lang="de-CH"/>
-          </a:p>
-        </p:txBody>
-      </p:sp>
-      <p:sp>
-        <p:nvSpPr>
-          <p:cNvPr id="22" name="Rectangle 21">
-            <a:extLst>
-              <a:ext uri="{FF2B5EF4-FFF2-40B4-BE49-F238E27FC236}">
-                <a16:creationId xmlns:a16="http://schemas.microsoft.com/office/drawing/2014/main" id="{0EDB9065-1CEB-48A8-B9FD-4BFE49325480}"/>
-              </a:ext>
-            </a:extLst>
-          </p:cNvPr>
-          <p:cNvSpPr/>
-          <p:nvPr/>
-        </p:nvSpPr>
-        <p:spPr>
-          <a:xfrm>
-            <a:off x="939833" y="4623598"/>
-            <a:ext cx="2534636" cy="369332"/>
-          </a:xfrm>
-          <a:prstGeom prst="rect">
-            <a:avLst/>
-          </a:prstGeom>
-        </p:spPr>
-        <p:style>
-          <a:lnRef idx="2">
-            <a:schemeClr val="accent1">
-              <a:shade val="50000"/>
-            </a:schemeClr>
-          </a:lnRef>
-          <a:fillRef idx="1">
-            <a:schemeClr val="accent1"/>
-          </a:fillRef>
-          <a:effectRef idx="0">
-            <a:schemeClr val="accent1"/>
-          </a:effectRef>
-          <a:fontRef idx="minor">
-            <a:schemeClr val="lt1"/>
-          </a:fontRef>
-        </p:style>
-        <p:txBody>
-          <a:bodyPr rtlCol="0" anchor="ctr"/>
-          <a:lstStyle/>
-          <a:p>
-            <a:pPr algn="ctr"/>
-            <a:endParaRPr lang="de-CH"/>
-          </a:p>
-        </p:txBody>
-      </p:sp>
-      <p:sp>
-        <p:nvSpPr>
-          <p:cNvPr id="23" name="Rectangle 22">
-            <a:extLst>
-              <a:ext uri="{FF2B5EF4-FFF2-40B4-BE49-F238E27FC236}">
-                <a16:creationId xmlns:a16="http://schemas.microsoft.com/office/drawing/2014/main" id="{9B9AC32F-FD66-4AC0-BA6F-5D0C71AEB42F}"/>
-              </a:ext>
-            </a:extLst>
-          </p:cNvPr>
-          <p:cNvSpPr/>
-          <p:nvPr/>
-        </p:nvSpPr>
-        <p:spPr>
-          <a:xfrm>
-            <a:off x="939833" y="4946519"/>
-            <a:ext cx="2534636" cy="369332"/>
-          </a:xfrm>
-          <a:prstGeom prst="rect">
-            <a:avLst/>
-          </a:prstGeom>
-        </p:spPr>
-        <p:style>
-          <a:lnRef idx="2">
-            <a:schemeClr val="accent1">
-              <a:shade val="50000"/>
-            </a:schemeClr>
-          </a:lnRef>
-          <a:fillRef idx="1">
-            <a:schemeClr val="accent1"/>
-          </a:fillRef>
-          <a:effectRef idx="0">
-            <a:schemeClr val="accent1"/>
-          </a:effectRef>
-          <a:fontRef idx="minor">
-            <a:schemeClr val="lt1"/>
-          </a:fontRef>
-        </p:style>
-        <p:txBody>
-          <a:bodyPr rtlCol="0" anchor="ctr"/>
-          <a:lstStyle/>
-          <a:p>
-            <a:pPr algn="ctr"/>
-            <a:endParaRPr lang="de-CH"/>
-          </a:p>
-        </p:txBody>
-      </p:sp>
-      <p:sp>
-        <p:nvSpPr>
-          <p:cNvPr id="24" name="Rectangle 23">
-            <a:extLst>
-              <a:ext uri="{FF2B5EF4-FFF2-40B4-BE49-F238E27FC236}">
-                <a16:creationId xmlns:a16="http://schemas.microsoft.com/office/drawing/2014/main" id="{97EF17EC-BB7D-42D7-B32A-95B9FC5BF066}"/>
-              </a:ext>
-            </a:extLst>
-          </p:cNvPr>
-          <p:cNvSpPr/>
-          <p:nvPr/>
-        </p:nvSpPr>
-        <p:spPr>
-          <a:xfrm>
-            <a:off x="951179" y="3244334"/>
-            <a:ext cx="2534636" cy="369332"/>
-          </a:xfrm>
-          <a:prstGeom prst="rect">
-            <a:avLst/>
-          </a:prstGeom>
-        </p:spPr>
-        <p:style>
-          <a:lnRef idx="2">
-            <a:schemeClr val="accent1">
-              <a:shade val="50000"/>
-            </a:schemeClr>
-          </a:lnRef>
-          <a:fillRef idx="1">
-            <a:schemeClr val="accent1"/>
-          </a:fillRef>
-          <a:effectRef idx="0">
-            <a:schemeClr val="accent1"/>
-          </a:effectRef>
-          <a:fontRef idx="minor">
-            <a:schemeClr val="lt1"/>
-          </a:fontRef>
-        </p:style>
-        <p:txBody>
-          <a:bodyPr rtlCol="0" anchor="ctr"/>
-          <a:lstStyle/>
-          <a:p>
-            <a:pPr algn="ctr"/>
-            <a:endParaRPr lang="de-CH"/>
-          </a:p>
-        </p:txBody>
-      </p:sp>
-      <p:sp>
-        <p:nvSpPr>
-          <p:cNvPr id="25" name="TextBox 24">
-            <a:extLst>
-              <a:ext uri="{FF2B5EF4-FFF2-40B4-BE49-F238E27FC236}">
-                <a16:creationId xmlns:a16="http://schemas.microsoft.com/office/drawing/2014/main" id="{8D313B50-C3B1-4A67-8726-D49B920D456F}"/>
-              </a:ext>
-            </a:extLst>
-          </p:cNvPr>
-          <p:cNvSpPr txBox="1"/>
-          <p:nvPr/>
-        </p:nvSpPr>
-        <p:spPr>
-          <a:xfrm>
-            <a:off x="7145077" y="4469929"/>
-            <a:ext cx="950709" cy="369332"/>
-          </a:xfrm>
-          <a:prstGeom prst="rect">
-            <a:avLst/>
-          </a:prstGeom>
-          <a:noFill/>
-        </p:spPr>
-        <p:txBody>
-          <a:bodyPr wrap="none" rtlCol="0">
-            <a:spAutoFit/>
-          </a:bodyPr>
-          <a:lstStyle/>
-          <a:p>
-            <a:r>
-              <a:rPr lang="de-CH" dirty="0">
-                <a:solidFill>
-                  <a:schemeClr val="bg1"/>
-                </a:solidFill>
-              </a:rPr>
-              <a:t>Markers</a:t>
+              <a:t>DELIVERABLES FOR HACKATHON</a:t>
             </a:r>
           </a:p>
         </p:txBody>
@@ -7930,7 +10074,7 @@
     </p:spTree>
     <p:extLst>
       <p:ext uri="{BB962C8B-B14F-4D97-AF65-F5344CB8AC3E}">
-        <p14:creationId xmlns:p14="http://schemas.microsoft.com/office/powerpoint/2010/main" val="3500092138"/>
+        <p14:creationId xmlns:p14="http://schemas.microsoft.com/office/powerpoint/2010/main" val="1309517343"/>
       </p:ext>
     </p:extLst>
   </p:cSld>
@@ -7940,7 +10084,7 @@
 </p:sld>
 </file>
 
-<file path=ppt/slides/slide2.xml><?xml version="1.0" encoding="utf-8"?>
+<file path=ppt/slides/slide3.xml><?xml version="1.0" encoding="utf-8"?>
 <p:sld xmlns:a="http://schemas.openxmlformats.org/drawingml/2006/main" xmlns:r="http://schemas.openxmlformats.org/officeDocument/2006/relationships" xmlns:p="http://schemas.openxmlformats.org/presentationml/2006/main">
   <p:cSld>
     <p:spTree>
@@ -10823,7 +12967,7 @@
 </p:sld>
 </file>
 
-<file path=ppt/slides/slide3.xml><?xml version="1.0" encoding="utf-8"?>
+<file path=ppt/slides/slide4.xml><?xml version="1.0" encoding="utf-8"?>
 <p:sld xmlns:a="http://schemas.openxmlformats.org/drawingml/2006/main" xmlns:r="http://schemas.openxmlformats.org/officeDocument/2006/relationships" xmlns:p="http://schemas.openxmlformats.org/presentationml/2006/main">
   <p:cSld>
     <p:spTree>
@@ -10956,7 +13100,7 @@
 </p:sld>
 </file>
 
-<file path=ppt/slides/slide4.xml><?xml version="1.0" encoding="utf-8"?>
+<file path=ppt/slides/slide5.xml><?xml version="1.0" encoding="utf-8"?>
 <p:sld xmlns:a="http://schemas.openxmlformats.org/drawingml/2006/main" xmlns:r="http://schemas.openxmlformats.org/officeDocument/2006/relationships" xmlns:p="http://schemas.openxmlformats.org/presentationml/2006/main">
   <p:cSld>
     <p:spTree>
@@ -14182,148 +16326,46 @@
           </a:fontRef>
         </p:style>
       </p:cxnSp>
+      <p:pic>
+        <p:nvPicPr>
+          <p:cNvPr id="29" name="Picture 28">
+            <a:extLst>
+              <a:ext uri="{FF2B5EF4-FFF2-40B4-BE49-F238E27FC236}">
+                <a16:creationId xmlns:a16="http://schemas.microsoft.com/office/drawing/2014/main" id="{2D2087F5-03FF-44CC-B29A-74C06F2CB06C}"/>
+              </a:ext>
+            </a:extLst>
+          </p:cNvPr>
+          <p:cNvPicPr>
+            <a:picLocks noChangeAspect="1"/>
+          </p:cNvPicPr>
+          <p:nvPr/>
+        </p:nvPicPr>
+        <p:blipFill>
+          <a:blip r:embed="rId14">
+            <a:extLst>
+              <a:ext uri="{28A0092B-C50C-407E-A947-70E740481C1C}">
+                <a14:useLocalDpi xmlns:a14="http://schemas.microsoft.com/office/drawing/2010/main" val="0"/>
+              </a:ext>
+            </a:extLst>
+          </a:blip>
+          <a:stretch>
+            <a:fillRect/>
+          </a:stretch>
+        </p:blipFill>
+        <p:spPr>
+          <a:xfrm>
+            <a:off x="5004799" y="3487735"/>
+            <a:ext cx="702305" cy="702305"/>
+          </a:xfrm>
+          <a:prstGeom prst="rect">
+            <a:avLst/>
+          </a:prstGeom>
+        </p:spPr>
+      </p:pic>
     </p:spTree>
     <p:extLst>
       <p:ext uri="{BB962C8B-B14F-4D97-AF65-F5344CB8AC3E}">
         <p14:creationId xmlns:p14="http://schemas.microsoft.com/office/powerpoint/2010/main" val="2792789714"/>
-      </p:ext>
-    </p:extLst>
-  </p:cSld>
-  <p:clrMapOvr>
-    <a:masterClrMapping/>
-  </p:clrMapOvr>
-</p:sld>
-</file>
-
-<file path=ppt/slides/slide5.xml><?xml version="1.0" encoding="utf-8"?>
-<p:sld xmlns:a="http://schemas.openxmlformats.org/drawingml/2006/main" xmlns:r="http://schemas.openxmlformats.org/officeDocument/2006/relationships" xmlns:p="http://schemas.openxmlformats.org/presentationml/2006/main">
-  <p:cSld>
-    <p:spTree>
-      <p:nvGrpSpPr>
-        <p:cNvPr id="1" name=""/>
-        <p:cNvGrpSpPr/>
-        <p:nvPr/>
-      </p:nvGrpSpPr>
-      <p:grpSpPr>
-        <a:xfrm>
-          <a:off x="0" y="0"/>
-          <a:ext cx="0" cy="0"/>
-          <a:chOff x="0" y="0"/>
-          <a:chExt cx="0" cy="0"/>
-        </a:xfrm>
-      </p:grpSpPr>
-      <p:sp>
-        <p:nvSpPr>
-          <p:cNvPr id="19" name="Rectangle 1">
-            <a:extLst>
-              <a:ext uri="{FF2B5EF4-FFF2-40B4-BE49-F238E27FC236}">
-                <a16:creationId xmlns:a16="http://schemas.microsoft.com/office/drawing/2014/main" id="{FE4FD1BF-8831-496E-B5AE-8E686BB32105}"/>
-              </a:ext>
-            </a:extLst>
-          </p:cNvPr>
-          <p:cNvSpPr>
-            <a:spLocks noChangeArrowheads="1"/>
-          </p:cNvSpPr>
-          <p:nvPr/>
-        </p:nvSpPr>
-        <p:spPr bwMode="auto">
-          <a:xfrm>
-            <a:off x="177971" y="200752"/>
-            <a:ext cx="3724866" cy="661720"/>
-          </a:xfrm>
-          <a:prstGeom prst="rect">
-            <a:avLst/>
-          </a:prstGeom>
-          <a:noFill/>
-          <a:ln>
-            <a:noFill/>
-          </a:ln>
-          <a:effectLst/>
-          <a:extLst>
-            <a:ext uri="{909E8E84-426E-40DD-AFC4-6F175D3DCCD1}">
-              <a14:hiddenFill xmlns:a14="http://schemas.microsoft.com/office/drawing/2010/main">
-                <a:solidFill>
-                  <a:schemeClr val="accent1"/>
-                </a:solidFill>
-              </a14:hiddenFill>
-            </a:ext>
-            <a:ext uri="{91240B29-F687-4F45-9708-019B960494DF}">
-              <a14:hiddenLine xmlns:a14="http://schemas.microsoft.com/office/drawing/2010/main" w="9525">
-                <a:solidFill>
-                  <a:schemeClr val="tx1"/>
-                </a:solidFill>
-                <a:miter lim="800000"/>
-                <a:headEnd/>
-                <a:tailEnd/>
-              </a14:hiddenLine>
-            </a:ext>
-            <a:ext uri="{AF507438-7753-43E0-B8FC-AC1667EBCBE1}">
-              <a14:hiddenEffects xmlns:a14="http://schemas.microsoft.com/office/drawing/2010/main">
-                <a:effectLst>
-                  <a:outerShdw dist="35921" dir="2700000" algn="ctr" rotWithShape="0">
-                    <a:schemeClr val="bg2"/>
-                  </a:outerShdw>
-                </a:effectLst>
-              </a14:hiddenEffects>
-            </a:ext>
-          </a:extLst>
-        </p:spPr>
-        <p:txBody>
-          <a:bodyPr vert="horz" wrap="none" lIns="91440" tIns="45720" rIns="91440" bIns="0" numCol="1" anchor="ctr" anchorCtr="0" compatLnSpc="1">
-            <a:prstTxWarp prst="textNoShape">
-              <a:avLst/>
-            </a:prstTxWarp>
-            <a:spAutoFit/>
-          </a:bodyPr>
-          <a:lstStyle/>
-          <a:p>
-            <a:pPr marL="0" marR="0" lvl="0" indent="0" algn="l" defTabSz="914400" rtl="0" eaLnBrk="0" fontAlgn="base" latinLnBrk="0" hangingPunct="0">
-              <a:lnSpc>
-                <a:spcPct val="100000"/>
-              </a:lnSpc>
-              <a:spcBef>
-                <a:spcPct val="0"/>
-              </a:spcBef>
-              <a:spcAft>
-                <a:spcPct val="0"/>
-              </a:spcAft>
-              <a:buClrTx/>
-              <a:buSzTx/>
-              <a:buFontTx/>
-              <a:buNone/>
-              <a:tabLst/>
-            </a:pPr>
-            <a:r>
-              <a:rPr kumimoji="0" lang="de-CH" altLang="de-DE" sz="4000" b="1" i="0" u="none" strike="noStrike" cap="none" normalizeH="0" baseline="0" dirty="0">
-                <a:ln>
-                  <a:noFill/>
-                </a:ln>
-                <a:solidFill>
-                  <a:schemeClr val="tx1"/>
-                </a:solidFill>
-                <a:effectLst/>
-                <a:latin typeface="Arial" panose="020B0604020202020204" pitchFamily="34" charset="0"/>
-                <a:ea typeface="Arial" panose="020B0604020202020204" pitchFamily="34" charset="0"/>
-              </a:rPr>
-              <a:t>DATAMODELS</a:t>
-            </a:r>
-            <a:endParaRPr kumimoji="0" lang="de-CH" altLang="de-DE" sz="6000" b="0" i="0" u="none" strike="noStrike" cap="none" normalizeH="0" baseline="0" dirty="0">
-              <a:ln>
-                <a:noFill/>
-              </a:ln>
-              <a:solidFill>
-                <a:schemeClr val="tx1"/>
-              </a:solidFill>
-              <a:effectLst/>
-              <a:latin typeface="Arial" panose="020B0604020202020204" pitchFamily="34" charset="0"/>
-            </a:endParaRPr>
-          </a:p>
-        </p:txBody>
-      </p:sp>
-    </p:spTree>
-    <p:extLst>
-      <p:ext uri="{BB962C8B-B14F-4D97-AF65-F5344CB8AC3E}">
-        <p14:creationId xmlns:p14="http://schemas.microsoft.com/office/powerpoint/2010/main" val="813459963"/>
       </p:ext>
     </p:extLst>
   </p:cSld>
@@ -14352,140 +16394,96 @@
       </p:grpSpPr>
       <p:sp>
         <p:nvSpPr>
-          <p:cNvPr id="19" name="Rectangle 1">
-            <a:extLst>
-              <a:ext uri="{FF2B5EF4-FFF2-40B4-BE49-F238E27FC236}">
-                <a16:creationId xmlns:a16="http://schemas.microsoft.com/office/drawing/2014/main" id="{FE4FD1BF-8831-496E-B5AE-8E686BB32105}"/>
-              </a:ext>
-            </a:extLst>
-          </p:cNvPr>
-          <p:cNvSpPr>
-            <a:spLocks noChangeArrowheads="1"/>
-          </p:cNvSpPr>
-          <p:nvPr/>
-        </p:nvSpPr>
-        <p:spPr bwMode="auto">
-          <a:xfrm>
-            <a:off x="177971" y="-107024"/>
-            <a:ext cx="10636245" cy="1277273"/>
+          <p:cNvPr id="17" name="Rectangle 16">
+            <a:extLst>
+              <a:ext uri="{FF2B5EF4-FFF2-40B4-BE49-F238E27FC236}">
+                <a16:creationId xmlns:a16="http://schemas.microsoft.com/office/drawing/2014/main" id="{3C3D6B3A-1E47-4A30-8332-F24929504714}"/>
+              </a:ext>
+            </a:extLst>
+          </p:cNvPr>
+          <p:cNvSpPr/>
+          <p:nvPr/>
+        </p:nvSpPr>
+        <p:spPr>
+          <a:xfrm>
+            <a:off x="0" y="0"/>
+            <a:ext cx="12192000" cy="6858000"/>
+          </a:xfrm>
+          <a:prstGeom prst="rect">
+            <a:avLst/>
+          </a:prstGeom>
+          <a:solidFill>
+            <a:schemeClr val="tx1"/>
+          </a:solidFill>
+        </p:spPr>
+        <p:style>
+          <a:lnRef idx="2">
+            <a:schemeClr val="accent1">
+              <a:shade val="50000"/>
+            </a:schemeClr>
+          </a:lnRef>
+          <a:fillRef idx="1">
+            <a:schemeClr val="accent1"/>
+          </a:fillRef>
+          <a:effectRef idx="0">
+            <a:schemeClr val="accent1"/>
+          </a:effectRef>
+          <a:fontRef idx="minor">
+            <a:schemeClr val="lt1"/>
+          </a:fontRef>
+        </p:style>
+        <p:txBody>
+          <a:bodyPr rtlCol="0" anchor="ctr"/>
+          <a:lstStyle/>
+          <a:p>
+            <a:pPr algn="ctr"/>
+            <a:endParaRPr lang="de-CH"/>
+          </a:p>
+        </p:txBody>
+      </p:sp>
+      <p:sp>
+        <p:nvSpPr>
+          <p:cNvPr id="18" name="TextBox 17">
+            <a:extLst>
+              <a:ext uri="{FF2B5EF4-FFF2-40B4-BE49-F238E27FC236}">
+                <a16:creationId xmlns:a16="http://schemas.microsoft.com/office/drawing/2014/main" id="{AB84F5A7-AB1C-4142-9533-07AF62B0F607}"/>
+              </a:ext>
+            </a:extLst>
+          </p:cNvPr>
+          <p:cNvSpPr txBox="1"/>
+          <p:nvPr/>
+        </p:nvSpPr>
+        <p:spPr>
+          <a:xfrm>
+            <a:off x="4074625" y="2875002"/>
+            <a:ext cx="4603889" cy="1107996"/>
           </a:xfrm>
           <a:prstGeom prst="rect">
             <a:avLst/>
           </a:prstGeom>
           <a:noFill/>
-          <a:ln>
-            <a:noFill/>
-          </a:ln>
-          <a:effectLst/>
-          <a:extLst>
-            <a:ext uri="{909E8E84-426E-40DD-AFC4-6F175D3DCCD1}">
-              <a14:hiddenFill xmlns:a14="http://schemas.microsoft.com/office/drawing/2010/main">
-                <a:solidFill>
-                  <a:schemeClr val="accent1"/>
-                </a:solidFill>
-              </a14:hiddenFill>
-            </a:ext>
-            <a:ext uri="{91240B29-F687-4F45-9708-019B960494DF}">
-              <a14:hiddenLine xmlns:a14="http://schemas.microsoft.com/office/drawing/2010/main" w="9525">
-                <a:solidFill>
-                  <a:schemeClr val="tx1"/>
-                </a:solidFill>
-                <a:miter lim="800000"/>
-                <a:headEnd/>
-                <a:tailEnd/>
-              </a14:hiddenLine>
-            </a:ext>
-            <a:ext uri="{AF507438-7753-43E0-B8FC-AC1667EBCBE1}">
-              <a14:hiddenEffects xmlns:a14="http://schemas.microsoft.com/office/drawing/2010/main">
-                <a:effectLst>
-                  <a:outerShdw dist="35921" dir="2700000" algn="ctr" rotWithShape="0">
-                    <a:schemeClr val="bg2"/>
-                  </a:outerShdw>
-                </a:effectLst>
-              </a14:hiddenEffects>
-            </a:ext>
-          </a:extLst>
-        </p:spPr>
-        <p:txBody>
-          <a:bodyPr vert="horz" wrap="none" lIns="91440" tIns="45720" rIns="91440" bIns="0" numCol="1" anchor="ctr" anchorCtr="0" compatLnSpc="1">
-            <a:prstTxWarp prst="textNoShape">
-              <a:avLst/>
-            </a:prstTxWarp>
+        </p:spPr>
+        <p:txBody>
+          <a:bodyPr wrap="none" rtlCol="0">
             <a:spAutoFit/>
           </a:bodyPr>
           <a:lstStyle/>
           <a:p>
-            <a:pPr marL="0" marR="0" lvl="0" indent="0" algn="l" defTabSz="914400" rtl="0" eaLnBrk="0" fontAlgn="base" latinLnBrk="0" hangingPunct="0">
-              <a:lnSpc>
-                <a:spcPct val="100000"/>
-              </a:lnSpc>
-              <a:spcBef>
-                <a:spcPct val="0"/>
-              </a:spcBef>
-              <a:spcAft>
-                <a:spcPct val="0"/>
-              </a:spcAft>
-              <a:buClrTx/>
-              <a:buSzTx/>
-              <a:buFontTx/>
-              <a:buNone/>
-              <a:tabLst/>
-            </a:pPr>
-            <a:r>
-              <a:rPr kumimoji="0" lang="de-CH" altLang="de-DE" sz="4000" b="1" i="0" u="none" strike="noStrike" cap="none" normalizeH="0" baseline="0" dirty="0">
-                <a:ln>
-                  <a:noFill/>
-                </a:ln>
+            <a:r>
+              <a:rPr lang="de-CH" sz="6600" b="1" dirty="0">
                 <a:solidFill>
-                  <a:schemeClr val="tx1"/>
+                  <a:schemeClr val="bg1"/>
                 </a:solidFill>
-                <a:effectLst/>
-                <a:latin typeface="Arial" panose="020B0604020202020204" pitchFamily="34" charset="0"/>
-                <a:ea typeface="Arial" panose="020B0604020202020204" pitchFamily="34" charset="0"/>
               </a:rPr>
-              <a:t>PIPELINE FOR SCRAPING / TECHNOLOGY</a:t>
-            </a:r>
-          </a:p>
-          <a:p>
-            <a:pPr marL="0" marR="0" lvl="0" indent="0" algn="l" defTabSz="914400" rtl="0" eaLnBrk="0" fontAlgn="base" latinLnBrk="0" hangingPunct="0">
-              <a:lnSpc>
-                <a:spcPct val="100000"/>
-              </a:lnSpc>
-              <a:spcBef>
-                <a:spcPct val="0"/>
-              </a:spcBef>
-              <a:spcAft>
-                <a:spcPct val="0"/>
-              </a:spcAft>
-              <a:buClrTx/>
-              <a:buSzTx/>
-              <a:buFontTx/>
-              <a:buNone/>
-              <a:tabLst/>
-            </a:pPr>
-            <a:r>
-              <a:rPr lang="de-CH" altLang="de-DE" sz="4000" b="1" dirty="0">
-                <a:latin typeface="Arial" panose="020B0604020202020204" pitchFamily="34" charset="0"/>
-              </a:rPr>
-              <a:t>AGENTIC AI?</a:t>
-            </a:r>
-            <a:endParaRPr kumimoji="0" lang="de-CH" altLang="de-DE" sz="6000" b="0" i="0" u="none" strike="noStrike" cap="none" normalizeH="0" baseline="0" dirty="0">
-              <a:ln>
-                <a:noFill/>
-              </a:ln>
-              <a:solidFill>
-                <a:schemeClr val="tx1"/>
-              </a:solidFill>
-              <a:effectLst/>
-              <a:latin typeface="Arial" panose="020B0604020202020204" pitchFamily="34" charset="0"/>
-            </a:endParaRPr>
+              <a:t>UI &amp; DESIGN</a:t>
+            </a:r>
           </a:p>
         </p:txBody>
       </p:sp>
     </p:spTree>
     <p:extLst>
       <p:ext uri="{BB962C8B-B14F-4D97-AF65-F5344CB8AC3E}">
-        <p14:creationId xmlns:p14="http://schemas.microsoft.com/office/powerpoint/2010/main" val="3515486824"/>
+        <p14:creationId xmlns:p14="http://schemas.microsoft.com/office/powerpoint/2010/main" val="1542495621"/>
       </p:ext>
     </p:extLst>
   </p:cSld>
@@ -14514,10 +16512,10 @@
       </p:grpSpPr>
       <p:sp>
         <p:nvSpPr>
-          <p:cNvPr id="17" name="Rectangle 16">
-            <a:extLst>
-              <a:ext uri="{FF2B5EF4-FFF2-40B4-BE49-F238E27FC236}">
-                <a16:creationId xmlns:a16="http://schemas.microsoft.com/office/drawing/2014/main" id="{3C3D6B3A-1E47-4A30-8332-F24929504714}"/>
+          <p:cNvPr id="6" name="Rectangle 5">
+            <a:extLst>
+              <a:ext uri="{FF2B5EF4-FFF2-40B4-BE49-F238E27FC236}">
+                <a16:creationId xmlns:a16="http://schemas.microsoft.com/office/drawing/2014/main" id="{817696D0-2D07-48F0-BF7B-F75475D42D9E}"/>
               </a:ext>
             </a:extLst>
           </p:cNvPr>
@@ -14526,15 +16524,12 @@
         </p:nvSpPr>
         <p:spPr>
           <a:xfrm>
-            <a:off x="0" y="0"/>
-            <a:ext cx="12192000" cy="6858000"/>
-          </a:xfrm>
-          <a:prstGeom prst="rect">
-            <a:avLst/>
-          </a:prstGeom>
-          <a:solidFill>
-            <a:schemeClr val="tx1"/>
-          </a:solidFill>
+            <a:off x="764651" y="564543"/>
+            <a:ext cx="10880584" cy="834887"/>
+          </a:xfrm>
+          <a:prstGeom prst="rect">
+            <a:avLst/>
+          </a:prstGeom>
         </p:spPr>
         <p:style>
           <a:lnRef idx="2">
@@ -14557,16 +16552,157 @@
           <a:lstStyle/>
           <a:p>
             <a:pPr algn="ctr"/>
+            <a:r>
+              <a:rPr lang="de-CH" dirty="0"/>
+              <a:t>BANNER</a:t>
+            </a:r>
+          </a:p>
+        </p:txBody>
+      </p:sp>
+      <p:sp>
+        <p:nvSpPr>
+          <p:cNvPr id="7" name="Rectangle 6">
+            <a:extLst>
+              <a:ext uri="{FF2B5EF4-FFF2-40B4-BE49-F238E27FC236}">
+                <a16:creationId xmlns:a16="http://schemas.microsoft.com/office/drawing/2014/main" id="{DB333D9A-A3FB-451A-AE2F-047FE63E1639}"/>
+              </a:ext>
+            </a:extLst>
+          </p:cNvPr>
+          <p:cNvSpPr/>
+          <p:nvPr/>
+        </p:nvSpPr>
+        <p:spPr>
+          <a:xfrm>
+            <a:off x="764651" y="1399431"/>
+            <a:ext cx="2582849" cy="286246"/>
+          </a:xfrm>
+          <a:prstGeom prst="rect">
+            <a:avLst/>
+          </a:prstGeom>
+        </p:spPr>
+        <p:style>
+          <a:lnRef idx="2">
+            <a:schemeClr val="accent1">
+              <a:shade val="50000"/>
+            </a:schemeClr>
+          </a:lnRef>
+          <a:fillRef idx="1">
+            <a:schemeClr val="accent1"/>
+          </a:fillRef>
+          <a:effectRef idx="0">
+            <a:schemeClr val="accent1"/>
+          </a:effectRef>
+          <a:fontRef idx="minor">
+            <a:schemeClr val="lt1"/>
+          </a:fontRef>
+        </p:style>
+        <p:txBody>
+          <a:bodyPr rtlCol="0" anchor="ctr"/>
+          <a:lstStyle/>
+          <a:p>
+            <a:pPr algn="ctr"/>
             <a:endParaRPr lang="de-CH"/>
           </a:p>
         </p:txBody>
       </p:sp>
       <p:sp>
         <p:nvSpPr>
-          <p:cNvPr id="18" name="TextBox 17">
-            <a:extLst>
-              <a:ext uri="{FF2B5EF4-FFF2-40B4-BE49-F238E27FC236}">
-                <a16:creationId xmlns:a16="http://schemas.microsoft.com/office/drawing/2014/main" id="{AB84F5A7-AB1C-4142-9533-07AF62B0F607}"/>
+          <p:cNvPr id="8" name="Rectangle 7">
+            <a:extLst>
+              <a:ext uri="{FF2B5EF4-FFF2-40B4-BE49-F238E27FC236}">
+                <a16:creationId xmlns:a16="http://schemas.microsoft.com/office/drawing/2014/main" id="{4641BEC3-6550-4465-8BD1-E0977A5C0E03}"/>
+              </a:ext>
+            </a:extLst>
+          </p:cNvPr>
+          <p:cNvSpPr/>
+          <p:nvPr/>
+        </p:nvSpPr>
+        <p:spPr>
+          <a:xfrm>
+            <a:off x="3347500" y="1399430"/>
+            <a:ext cx="3477370" cy="286246"/>
+          </a:xfrm>
+          <a:prstGeom prst="rect">
+            <a:avLst/>
+          </a:prstGeom>
+        </p:spPr>
+        <p:style>
+          <a:lnRef idx="2">
+            <a:schemeClr val="accent1">
+              <a:shade val="50000"/>
+            </a:schemeClr>
+          </a:lnRef>
+          <a:fillRef idx="1">
+            <a:schemeClr val="accent1"/>
+          </a:fillRef>
+          <a:effectRef idx="0">
+            <a:schemeClr val="accent1"/>
+          </a:effectRef>
+          <a:fontRef idx="minor">
+            <a:schemeClr val="lt1"/>
+          </a:fontRef>
+        </p:style>
+        <p:txBody>
+          <a:bodyPr rtlCol="0" anchor="ctr"/>
+          <a:lstStyle/>
+          <a:p>
+            <a:pPr algn="ctr"/>
+            <a:endParaRPr lang="de-CH"/>
+          </a:p>
+        </p:txBody>
+      </p:sp>
+      <p:sp>
+        <p:nvSpPr>
+          <p:cNvPr id="9" name="Rectangle 8">
+            <a:extLst>
+              <a:ext uri="{FF2B5EF4-FFF2-40B4-BE49-F238E27FC236}">
+                <a16:creationId xmlns:a16="http://schemas.microsoft.com/office/drawing/2014/main" id="{5262697C-105E-469B-8FEC-31EA635C46CC}"/>
+              </a:ext>
+            </a:extLst>
+          </p:cNvPr>
+          <p:cNvSpPr/>
+          <p:nvPr/>
+        </p:nvSpPr>
+        <p:spPr>
+          <a:xfrm>
+            <a:off x="9062386" y="1399430"/>
+            <a:ext cx="2582849" cy="286246"/>
+          </a:xfrm>
+          <a:prstGeom prst="rect">
+            <a:avLst/>
+          </a:prstGeom>
+        </p:spPr>
+        <p:style>
+          <a:lnRef idx="2">
+            <a:schemeClr val="accent1">
+              <a:shade val="50000"/>
+            </a:schemeClr>
+          </a:lnRef>
+          <a:fillRef idx="1">
+            <a:schemeClr val="accent1"/>
+          </a:fillRef>
+          <a:effectRef idx="0">
+            <a:schemeClr val="accent1"/>
+          </a:effectRef>
+          <a:fontRef idx="minor">
+            <a:schemeClr val="lt1"/>
+          </a:fontRef>
+        </p:style>
+        <p:txBody>
+          <a:bodyPr rtlCol="0" anchor="ctr"/>
+          <a:lstStyle/>
+          <a:p>
+            <a:pPr algn="ctr"/>
+            <a:endParaRPr lang="de-CH"/>
+          </a:p>
+        </p:txBody>
+      </p:sp>
+      <p:sp>
+        <p:nvSpPr>
+          <p:cNvPr id="10" name="TextBox 9">
+            <a:extLst>
+              <a:ext uri="{FF2B5EF4-FFF2-40B4-BE49-F238E27FC236}">
+                <a16:creationId xmlns:a16="http://schemas.microsoft.com/office/drawing/2014/main" id="{29263E18-0C08-4337-B106-0D2A628A6C32}"/>
               </a:ext>
             </a:extLst>
           </p:cNvPr>
@@ -14575,8 +16711,8 @@
         </p:nvSpPr>
         <p:spPr>
           <a:xfrm>
-            <a:off x="4074625" y="2875002"/>
-            <a:ext cx="4603889" cy="1107996"/>
+            <a:off x="1141307" y="1316344"/>
+            <a:ext cx="1877245" cy="369332"/>
           </a:xfrm>
           <a:prstGeom prst="rect">
             <a:avLst/>
@@ -14590,12 +16726,672 @@
           <a:lstStyle/>
           <a:p>
             <a:r>
-              <a:rPr lang="de-CH" sz="6600" b="1" dirty="0">
-                <a:solidFill>
-                  <a:schemeClr val="bg1"/>
-                </a:solidFill>
-              </a:rPr>
-              <a:t>UI &amp; DESIGN</a:t>
+              <a:rPr lang="de-CH" dirty="0"/>
+              <a:t>Projects </a:t>
+            </a:r>
+            <a:r>
+              <a:rPr lang="de-CH" dirty="0" err="1"/>
+              <a:t>Overview</a:t>
+            </a:r>
+            <a:endParaRPr lang="de-CH" dirty="0"/>
+          </a:p>
+        </p:txBody>
+      </p:sp>
+      <p:sp>
+        <p:nvSpPr>
+          <p:cNvPr id="11" name="TextBox 10">
+            <a:extLst>
+              <a:ext uri="{FF2B5EF4-FFF2-40B4-BE49-F238E27FC236}">
+                <a16:creationId xmlns:a16="http://schemas.microsoft.com/office/drawing/2014/main" id="{B2669C21-9586-4C09-BC0F-A0053AF0D575}"/>
+              </a:ext>
+            </a:extLst>
+          </p:cNvPr>
+          <p:cNvSpPr txBox="1"/>
+          <p:nvPr/>
+        </p:nvSpPr>
+        <p:spPr>
+          <a:xfrm>
+            <a:off x="3592025" y="1357887"/>
+            <a:ext cx="2427524" cy="369332"/>
+          </a:xfrm>
+          <a:prstGeom prst="rect">
+            <a:avLst/>
+          </a:prstGeom>
+          <a:noFill/>
+        </p:spPr>
+        <p:txBody>
+          <a:bodyPr wrap="none" rtlCol="0">
+            <a:spAutoFit/>
+          </a:bodyPr>
+          <a:lstStyle/>
+          <a:p>
+            <a:r>
+              <a:rPr lang="de-CH" dirty="0"/>
+              <a:t>Solar Information Portal</a:t>
+            </a:r>
+          </a:p>
+        </p:txBody>
+      </p:sp>
+      <p:sp>
+        <p:nvSpPr>
+          <p:cNvPr id="12" name="TextBox 11">
+            <a:extLst>
+              <a:ext uri="{FF2B5EF4-FFF2-40B4-BE49-F238E27FC236}">
+                <a16:creationId xmlns:a16="http://schemas.microsoft.com/office/drawing/2014/main" id="{9000CE69-5A06-43A4-BA9C-D55296D90252}"/>
+              </a:ext>
+            </a:extLst>
+          </p:cNvPr>
+          <p:cNvSpPr txBox="1"/>
+          <p:nvPr/>
+        </p:nvSpPr>
+        <p:spPr>
+          <a:xfrm>
+            <a:off x="9460456" y="1346363"/>
+            <a:ext cx="1786708" cy="369332"/>
+          </a:xfrm>
+          <a:prstGeom prst="rect">
+            <a:avLst/>
+          </a:prstGeom>
+          <a:noFill/>
+        </p:spPr>
+        <p:txBody>
+          <a:bodyPr wrap="none" rtlCol="0">
+            <a:spAutoFit/>
+          </a:bodyPr>
+          <a:lstStyle/>
+          <a:p>
+            <a:r>
+              <a:rPr lang="de-CH" dirty="0"/>
+              <a:t>Tender Navigator</a:t>
+            </a:r>
+          </a:p>
+        </p:txBody>
+      </p:sp>
+      <p:sp>
+        <p:nvSpPr>
+          <p:cNvPr id="13" name="TextBox 12">
+            <a:extLst>
+              <a:ext uri="{FF2B5EF4-FFF2-40B4-BE49-F238E27FC236}">
+                <a16:creationId xmlns:a16="http://schemas.microsoft.com/office/drawing/2014/main" id="{2C1C86E9-6B04-43CE-9A50-9A788A0D8F43}"/>
+              </a:ext>
+            </a:extLst>
+          </p:cNvPr>
+          <p:cNvSpPr txBox="1"/>
+          <p:nvPr/>
+        </p:nvSpPr>
+        <p:spPr>
+          <a:xfrm>
+            <a:off x="608276" y="2192774"/>
+            <a:ext cx="5478448" cy="4247317"/>
+          </a:xfrm>
+          <a:prstGeom prst="rect">
+            <a:avLst/>
+          </a:prstGeom>
+          <a:noFill/>
+        </p:spPr>
+        <p:txBody>
+          <a:bodyPr wrap="square" rtlCol="0">
+            <a:spAutoFit/>
+          </a:bodyPr>
+          <a:lstStyle/>
+          <a:p>
+            <a:r>
+              <a:rPr lang="de-CH" b="1" u="sng" dirty="0"/>
+              <a:t>Users / Stakeholders</a:t>
+            </a:r>
+          </a:p>
+          <a:p>
+            <a:pPr marL="285750" indent="-285750">
+              <a:buFont typeface="Arial" panose="020B0604020202020204" pitchFamily="34" charset="0"/>
+              <a:buChar char="•"/>
+            </a:pPr>
+            <a:endParaRPr lang="de-CH" dirty="0"/>
+          </a:p>
+          <a:p>
+            <a:pPr marL="285750" indent="-285750">
+              <a:buFont typeface="Arial" panose="020B0604020202020204" pitchFamily="34" charset="0"/>
+              <a:buChar char="•"/>
+            </a:pPr>
+            <a:r>
+              <a:rPr lang="de-CH" dirty="0"/>
+              <a:t>Investors</a:t>
+            </a:r>
+          </a:p>
+          <a:p>
+            <a:pPr marL="285750" indent="-285750">
+              <a:buFont typeface="Arial" panose="020B0604020202020204" pitchFamily="34" charset="0"/>
+              <a:buChar char="•"/>
+            </a:pPr>
+            <a:r>
+              <a:rPr lang="de-CH" dirty="0"/>
+              <a:t>Operators</a:t>
+            </a:r>
+          </a:p>
+          <a:p>
+            <a:pPr marL="285750" indent="-285750">
+              <a:buFont typeface="Arial" panose="020B0604020202020204" pitchFamily="34" charset="0"/>
+              <a:buChar char="•"/>
+            </a:pPr>
+            <a:r>
+              <a:rPr lang="de-CH" dirty="0"/>
+              <a:t>Planners</a:t>
+            </a:r>
+          </a:p>
+          <a:p>
+            <a:pPr marL="285750" indent="-285750">
+              <a:buFont typeface="Arial" panose="020B0604020202020204" pitchFamily="34" charset="0"/>
+              <a:buChar char="•"/>
+            </a:pPr>
+            <a:endParaRPr lang="de-CH" dirty="0"/>
+          </a:p>
+          <a:p>
+            <a:pPr marL="285750" indent="-285750">
+              <a:buFont typeface="Arial" panose="020B0604020202020204" pitchFamily="34" charset="0"/>
+              <a:buChar char="•"/>
+            </a:pPr>
+            <a:endParaRPr lang="de-CH" dirty="0"/>
+          </a:p>
+          <a:p>
+            <a:pPr marL="285750" indent="-285750">
+              <a:buFont typeface="Arial" panose="020B0604020202020204" pitchFamily="34" charset="0"/>
+              <a:buChar char="•"/>
+            </a:pPr>
+            <a:r>
+              <a:rPr lang="de-CH" dirty="0"/>
+              <a:t>Government</a:t>
+            </a:r>
+          </a:p>
+          <a:p>
+            <a:pPr marL="285750" indent="-285750">
+              <a:buFont typeface="Arial" panose="020B0604020202020204" pitchFamily="34" charset="0"/>
+              <a:buChar char="•"/>
+            </a:pPr>
+            <a:r>
+              <a:rPr lang="de-CH" dirty="0"/>
+              <a:t>Commercial</a:t>
+            </a:r>
+          </a:p>
+          <a:p>
+            <a:pPr marL="742950" lvl="1" indent="-285750">
+              <a:buFont typeface="Arial" panose="020B0604020202020204" pitchFamily="34" charset="0"/>
+              <a:buChar char="•"/>
+            </a:pPr>
+            <a:r>
+              <a:rPr lang="de-CH" dirty="0" err="1"/>
+              <a:t>Suppliers</a:t>
+            </a:r>
+            <a:r>
+              <a:rPr lang="de-CH" dirty="0"/>
+              <a:t>: </a:t>
+            </a:r>
+            <a:r>
+              <a:rPr lang="de-CH" dirty="0" err="1"/>
+              <a:t>Manufacturers</a:t>
+            </a:r>
+            <a:r>
+              <a:rPr lang="de-CH" dirty="0"/>
+              <a:t> </a:t>
+            </a:r>
+            <a:r>
+              <a:rPr lang="de-CH" dirty="0" err="1"/>
+              <a:t>of</a:t>
+            </a:r>
+            <a:r>
+              <a:rPr lang="de-CH" dirty="0"/>
+              <a:t> Solar Panels</a:t>
+            </a:r>
+          </a:p>
+          <a:p>
+            <a:pPr marL="742950" lvl="1" indent="-285750">
+              <a:buFont typeface="Arial" panose="020B0604020202020204" pitchFamily="34" charset="0"/>
+              <a:buChar char="•"/>
+            </a:pPr>
+            <a:r>
+              <a:rPr lang="de-CH" dirty="0" err="1"/>
+              <a:t>Competitors</a:t>
+            </a:r>
+            <a:r>
+              <a:rPr lang="de-CH" dirty="0"/>
+              <a:t>: Operating </a:t>
+            </a:r>
+            <a:r>
+              <a:rPr lang="de-CH" dirty="0" err="1"/>
+              <a:t>Companys</a:t>
+            </a:r>
+            <a:endParaRPr lang="de-CH" dirty="0"/>
+          </a:p>
+          <a:p>
+            <a:pPr marL="1200150" lvl="2" indent="-285750">
+              <a:buFont typeface="Arial" panose="020B0604020202020204" pitchFamily="34" charset="0"/>
+              <a:buChar char="•"/>
+            </a:pPr>
+            <a:r>
+              <a:rPr lang="de-CH" dirty="0"/>
+              <a:t>Search for </a:t>
+            </a:r>
+            <a:r>
+              <a:rPr lang="de-CH" dirty="0" err="1"/>
+              <a:t>tenders</a:t>
+            </a:r>
+            <a:endParaRPr lang="de-CH" dirty="0"/>
+          </a:p>
+          <a:p>
+            <a:pPr marL="1200150" lvl="2" indent="-285750">
+              <a:buFont typeface="Arial" panose="020B0604020202020204" pitchFamily="34" charset="0"/>
+              <a:buChar char="•"/>
+            </a:pPr>
+            <a:r>
+              <a:rPr lang="de-CH" dirty="0"/>
+              <a:t>Search for </a:t>
+            </a:r>
+            <a:r>
+              <a:rPr lang="de-CH" dirty="0" err="1"/>
+              <a:t>opportunities</a:t>
+            </a:r>
+            <a:endParaRPr lang="de-CH" dirty="0"/>
+          </a:p>
+          <a:p>
+            <a:pPr marL="742950" lvl="1" indent="-285750">
+              <a:buFont typeface="Arial" panose="020B0604020202020204" pitchFamily="34" charset="0"/>
+              <a:buChar char="•"/>
+            </a:pPr>
+            <a:r>
+              <a:rPr lang="de-CH" dirty="0"/>
+              <a:t>Customer: Energy / Grid Companies</a:t>
+            </a:r>
+          </a:p>
+          <a:p>
+            <a:pPr marL="742950" lvl="1" indent="-285750">
+              <a:buFont typeface="Arial" panose="020B0604020202020204" pitchFamily="34" charset="0"/>
+              <a:buChar char="•"/>
+            </a:pPr>
+            <a:endParaRPr lang="de-CH" dirty="0"/>
+          </a:p>
+        </p:txBody>
+      </p:sp>
+      <p:sp>
+        <p:nvSpPr>
+          <p:cNvPr id="14" name="TextBox 13">
+            <a:extLst>
+              <a:ext uri="{FF2B5EF4-FFF2-40B4-BE49-F238E27FC236}">
+                <a16:creationId xmlns:a16="http://schemas.microsoft.com/office/drawing/2014/main" id="{C1C5F033-DA63-4D73-AF24-1E6CD22C017E}"/>
+              </a:ext>
+            </a:extLst>
+          </p:cNvPr>
+          <p:cNvSpPr txBox="1"/>
+          <p:nvPr/>
+        </p:nvSpPr>
+        <p:spPr>
+          <a:xfrm>
+            <a:off x="5929024" y="2234316"/>
+            <a:ext cx="6117202" cy="4247317"/>
+          </a:xfrm>
+          <a:prstGeom prst="rect">
+            <a:avLst/>
+          </a:prstGeom>
+          <a:noFill/>
+        </p:spPr>
+        <p:txBody>
+          <a:bodyPr wrap="square" rtlCol="0">
+            <a:spAutoFit/>
+          </a:bodyPr>
+          <a:lstStyle/>
+          <a:p>
+            <a:r>
+              <a:rPr lang="de-CH" b="1" u="sng" dirty="0"/>
+              <a:t>Users / Stakeholders</a:t>
+            </a:r>
+          </a:p>
+          <a:p>
+            <a:pPr marL="285750" indent="-285750">
+              <a:buFont typeface="Arial" panose="020B0604020202020204" pitchFamily="34" charset="0"/>
+              <a:buChar char="•"/>
+            </a:pPr>
+            <a:endParaRPr lang="de-CH" dirty="0"/>
+          </a:p>
+          <a:p>
+            <a:pPr marL="285750" indent="-285750">
+              <a:buFont typeface="Arial" panose="020B0604020202020204" pitchFamily="34" charset="0"/>
+              <a:buChar char="•"/>
+            </a:pPr>
+            <a:r>
+              <a:rPr lang="de-CH" dirty="0"/>
+              <a:t>Competition</a:t>
+            </a:r>
+          </a:p>
+          <a:p>
+            <a:pPr marL="285750" indent="-285750">
+              <a:buFont typeface="Arial" panose="020B0604020202020204" pitchFamily="34" charset="0"/>
+              <a:buChar char="•"/>
+            </a:pPr>
+            <a:r>
+              <a:rPr lang="de-CH" dirty="0" err="1"/>
+              <a:t>Where</a:t>
+            </a:r>
+            <a:r>
+              <a:rPr lang="de-CH" dirty="0"/>
+              <a:t> </a:t>
+            </a:r>
+            <a:r>
+              <a:rPr lang="de-CH" dirty="0" err="1"/>
+              <a:t>are</a:t>
+            </a:r>
+            <a:r>
+              <a:rPr lang="de-CH" dirty="0"/>
+              <a:t> </a:t>
+            </a:r>
+            <a:r>
+              <a:rPr lang="de-CH" dirty="0" err="1"/>
+              <a:t>current</a:t>
+            </a:r>
+            <a:r>
+              <a:rPr lang="de-CH" dirty="0"/>
+              <a:t> </a:t>
+            </a:r>
+            <a:r>
+              <a:rPr lang="de-CH" dirty="0" err="1"/>
+              <a:t>projects</a:t>
+            </a:r>
+            <a:endParaRPr lang="de-CH" dirty="0"/>
+          </a:p>
+          <a:p>
+            <a:pPr marL="285750" indent="-285750">
+              <a:buFont typeface="Arial" panose="020B0604020202020204" pitchFamily="34" charset="0"/>
+              <a:buChar char="•"/>
+            </a:pPr>
+            <a:endParaRPr lang="de-CH" dirty="0"/>
+          </a:p>
+          <a:p>
+            <a:pPr marL="285750" indent="-285750">
+              <a:buFont typeface="Arial" panose="020B0604020202020204" pitchFamily="34" charset="0"/>
+              <a:buChar char="•"/>
+            </a:pPr>
+            <a:r>
+              <a:rPr lang="de-CH" dirty="0" err="1"/>
+              <a:t>Opportunities</a:t>
+            </a:r>
+            <a:endParaRPr lang="de-CH" dirty="0"/>
+          </a:p>
+          <a:p>
+            <a:pPr marL="285750" indent="-285750">
+              <a:buFont typeface="Arial" panose="020B0604020202020204" pitchFamily="34" charset="0"/>
+              <a:buChar char="•"/>
+            </a:pPr>
+            <a:r>
+              <a:rPr lang="de-CH" dirty="0" err="1"/>
+              <a:t>Where</a:t>
+            </a:r>
+            <a:r>
+              <a:rPr lang="de-CH" dirty="0"/>
+              <a:t> </a:t>
+            </a:r>
+            <a:r>
+              <a:rPr lang="de-CH" dirty="0" err="1"/>
+              <a:t>are</a:t>
+            </a:r>
+            <a:r>
+              <a:rPr lang="de-CH" dirty="0"/>
+              <a:t> potential </a:t>
+            </a:r>
+            <a:r>
+              <a:rPr lang="de-CH" dirty="0" err="1"/>
+              <a:t>tenders</a:t>
+            </a:r>
+            <a:endParaRPr lang="de-CH" dirty="0"/>
+          </a:p>
+          <a:p>
+            <a:pPr marL="285750" indent="-285750">
+              <a:buFont typeface="Arial" panose="020B0604020202020204" pitchFamily="34" charset="0"/>
+              <a:buChar char="•"/>
+            </a:pPr>
+            <a:endParaRPr lang="de-CH" dirty="0"/>
+          </a:p>
+          <a:p>
+            <a:pPr marL="285750" indent="-285750">
+              <a:buFont typeface="Arial" panose="020B0604020202020204" pitchFamily="34" charset="0"/>
+              <a:buChar char="•"/>
+            </a:pPr>
+            <a:endParaRPr lang="de-CH" dirty="0"/>
+          </a:p>
+          <a:p>
+            <a:pPr marL="285750" indent="-285750">
+              <a:buFont typeface="Arial" panose="020B0604020202020204" pitchFamily="34" charset="0"/>
+              <a:buChar char="•"/>
+            </a:pPr>
+            <a:r>
+              <a:rPr lang="de-CH" dirty="0" err="1"/>
+              <a:t>How</a:t>
+            </a:r>
+            <a:r>
+              <a:rPr lang="de-CH" dirty="0"/>
+              <a:t> </a:t>
+            </a:r>
+            <a:r>
+              <a:rPr lang="de-CH" dirty="0" err="1"/>
+              <a:t>is</a:t>
+            </a:r>
+            <a:r>
+              <a:rPr lang="de-CH" dirty="0"/>
+              <a:t> the solar potential </a:t>
+            </a:r>
+            <a:r>
+              <a:rPr lang="de-CH" dirty="0" err="1"/>
+              <a:t>weather</a:t>
+            </a:r>
+            <a:r>
+              <a:rPr lang="de-CH" dirty="0"/>
+              <a:t> / </a:t>
+            </a:r>
+            <a:r>
+              <a:rPr lang="de-CH" dirty="0" err="1"/>
+              <a:t>climate</a:t>
+            </a:r>
+            <a:r>
+              <a:rPr lang="de-CH" dirty="0"/>
+              <a:t> </a:t>
+            </a:r>
+            <a:r>
+              <a:rPr lang="de-CH" dirty="0" err="1"/>
+              <a:t>conditions</a:t>
+            </a:r>
+            <a:endParaRPr lang="de-CH" dirty="0"/>
+          </a:p>
+          <a:p>
+            <a:pPr marL="285750" indent="-285750">
+              <a:buFont typeface="Arial" panose="020B0604020202020204" pitchFamily="34" charset="0"/>
+              <a:buChar char="•"/>
+            </a:pPr>
+            <a:r>
+              <a:rPr lang="de-CH" dirty="0" err="1"/>
+              <a:t>How</a:t>
+            </a:r>
+            <a:r>
+              <a:rPr lang="de-CH" dirty="0"/>
+              <a:t> </a:t>
+            </a:r>
+            <a:r>
+              <a:rPr lang="de-CH" dirty="0" err="1"/>
+              <a:t>is</a:t>
+            </a:r>
+            <a:r>
+              <a:rPr lang="de-CH" dirty="0"/>
+              <a:t> the </a:t>
+            </a:r>
+            <a:r>
+              <a:rPr lang="de-CH" dirty="0" err="1"/>
+              <a:t>market</a:t>
+            </a:r>
+            <a:r>
+              <a:rPr lang="de-CH" dirty="0"/>
+              <a:t> potential</a:t>
+            </a:r>
+            <a:br>
+              <a:rPr lang="de-CH" dirty="0"/>
+            </a:br>
+            <a:r>
+              <a:rPr lang="de-CH" dirty="0"/>
+              <a:t>(</a:t>
+            </a:r>
+            <a:r>
+              <a:rPr lang="de-CH" dirty="0" err="1"/>
+              <a:t>demand</a:t>
+            </a:r>
+            <a:r>
+              <a:rPr lang="de-CH" dirty="0"/>
+              <a:t> in the </a:t>
+            </a:r>
+            <a:r>
+              <a:rPr lang="de-CH" dirty="0" err="1"/>
+              <a:t>areas</a:t>
+            </a:r>
+            <a:r>
+              <a:rPr lang="de-CH" dirty="0"/>
+              <a:t>, </a:t>
+            </a:r>
+            <a:r>
+              <a:rPr lang="de-CH" dirty="0" err="1"/>
+              <a:t>energy</a:t>
+            </a:r>
+            <a:r>
+              <a:rPr lang="de-CH" dirty="0"/>
+              <a:t> </a:t>
+            </a:r>
+            <a:r>
+              <a:rPr lang="de-CH" dirty="0" err="1"/>
+              <a:t>prices</a:t>
+            </a:r>
+            <a:r>
+              <a:rPr lang="de-CH" dirty="0"/>
+              <a:t>, …)</a:t>
+            </a:r>
+          </a:p>
+          <a:p>
+            <a:pPr marL="285750" indent="-285750">
+              <a:buFont typeface="Arial" panose="020B0604020202020204" pitchFamily="34" charset="0"/>
+              <a:buChar char="•"/>
+            </a:pPr>
+            <a:r>
+              <a:rPr lang="de-CH" dirty="0"/>
+              <a:t>Potential </a:t>
+            </a:r>
+            <a:r>
+              <a:rPr lang="de-CH" dirty="0" err="1"/>
+              <a:t>customers</a:t>
+            </a:r>
+            <a:r>
+              <a:rPr lang="de-CH" dirty="0"/>
+              <a:t> (</a:t>
+            </a:r>
+            <a:r>
+              <a:rPr lang="de-CH" dirty="0" err="1"/>
+              <a:t>grid</a:t>
+            </a:r>
+            <a:r>
+              <a:rPr lang="de-CH" dirty="0"/>
+              <a:t> </a:t>
+            </a:r>
+            <a:r>
+              <a:rPr lang="de-CH" dirty="0" err="1"/>
+              <a:t>companies</a:t>
+            </a:r>
+            <a:r>
+              <a:rPr lang="de-CH" dirty="0"/>
+              <a:t>)</a:t>
+            </a:r>
+          </a:p>
+          <a:p>
+            <a:pPr marL="285750" indent="-285750">
+              <a:buFont typeface="Arial" panose="020B0604020202020204" pitchFamily="34" charset="0"/>
+              <a:buChar char="•"/>
+            </a:pPr>
+            <a:endParaRPr lang="de-CH" dirty="0"/>
+          </a:p>
+          <a:p>
+            <a:pPr marL="742950" lvl="1" indent="-285750">
+              <a:buFont typeface="Arial" panose="020B0604020202020204" pitchFamily="34" charset="0"/>
+              <a:buChar char="•"/>
+            </a:pPr>
+            <a:endParaRPr lang="de-CH" dirty="0"/>
+          </a:p>
+        </p:txBody>
+      </p:sp>
+      <p:sp>
+        <p:nvSpPr>
+          <p:cNvPr id="15" name="Rectangle 14">
+            <a:extLst>
+              <a:ext uri="{FF2B5EF4-FFF2-40B4-BE49-F238E27FC236}">
+                <a16:creationId xmlns:a16="http://schemas.microsoft.com/office/drawing/2014/main" id="{9A0A0B68-4A43-4500-90BB-F57E3EA969CC}"/>
+              </a:ext>
+            </a:extLst>
+          </p:cNvPr>
+          <p:cNvSpPr/>
+          <p:nvPr/>
+        </p:nvSpPr>
+        <p:spPr>
+          <a:xfrm>
+            <a:off x="6774467" y="1399430"/>
+            <a:ext cx="2582849" cy="286246"/>
+          </a:xfrm>
+          <a:prstGeom prst="rect">
+            <a:avLst/>
+          </a:prstGeom>
+        </p:spPr>
+        <p:style>
+          <a:lnRef idx="2">
+            <a:schemeClr val="accent1">
+              <a:shade val="50000"/>
+            </a:schemeClr>
+          </a:lnRef>
+          <a:fillRef idx="1">
+            <a:schemeClr val="accent1"/>
+          </a:fillRef>
+          <a:effectRef idx="0">
+            <a:schemeClr val="accent1"/>
+          </a:effectRef>
+          <a:fontRef idx="minor">
+            <a:schemeClr val="lt1"/>
+          </a:fontRef>
+        </p:style>
+        <p:txBody>
+          <a:bodyPr rtlCol="0" anchor="ctr"/>
+          <a:lstStyle/>
+          <a:p>
+            <a:pPr algn="ctr"/>
+            <a:endParaRPr lang="de-CH"/>
+          </a:p>
+        </p:txBody>
+      </p:sp>
+      <p:sp>
+        <p:nvSpPr>
+          <p:cNvPr id="16" name="TextBox 15">
+            <a:extLst>
+              <a:ext uri="{FF2B5EF4-FFF2-40B4-BE49-F238E27FC236}">
+                <a16:creationId xmlns:a16="http://schemas.microsoft.com/office/drawing/2014/main" id="{FC778D35-6E70-40B5-A2E6-48277414F2B2}"/>
+              </a:ext>
+            </a:extLst>
+          </p:cNvPr>
+          <p:cNvSpPr txBox="1"/>
+          <p:nvPr/>
+        </p:nvSpPr>
+        <p:spPr>
+          <a:xfrm>
+            <a:off x="7172537" y="1346363"/>
+            <a:ext cx="2193999" cy="369332"/>
+          </a:xfrm>
+          <a:prstGeom prst="rect">
+            <a:avLst/>
+          </a:prstGeom>
+          <a:noFill/>
+        </p:spPr>
+        <p:txBody>
+          <a:bodyPr wrap="none" rtlCol="0">
+            <a:spAutoFit/>
+          </a:bodyPr>
+          <a:lstStyle/>
+          <a:p>
+            <a:r>
+              <a:rPr lang="de-CH" dirty="0"/>
+              <a:t>Investment Navigator</a:t>
             </a:r>
           </a:p>
         </p:txBody>
@@ -14603,7 +17399,7 @@
     </p:spTree>
     <p:extLst>
       <p:ext uri="{BB962C8B-B14F-4D97-AF65-F5344CB8AC3E}">
-        <p14:creationId xmlns:p14="http://schemas.microsoft.com/office/powerpoint/2010/main" val="1542495621"/>
+        <p14:creationId xmlns:p14="http://schemas.microsoft.com/office/powerpoint/2010/main" val="745019083"/>
       </p:ext>
     </p:extLst>
   </p:cSld>
@@ -14645,7 +17441,7 @@
         <p:spPr>
           <a:xfrm>
             <a:off x="764651" y="564543"/>
-            <a:ext cx="10880584" cy="834887"/>
+            <a:ext cx="8643068" cy="834887"/>
           </a:xfrm>
           <a:prstGeom prst="rect">
             <a:avLst/>
@@ -14785,7 +17581,7 @@
         </p:nvSpPr>
         <p:spPr>
           <a:xfrm>
-            <a:off x="9062386" y="1399430"/>
+            <a:off x="6827186" y="1399430"/>
             <a:ext cx="2582849" cy="286246"/>
           </a:xfrm>
           <a:prstGeom prst="rect">
@@ -14846,14 +17642,26 @@
           <a:lstStyle/>
           <a:p>
             <a:r>
-              <a:rPr lang="de-CH" dirty="0"/>
+              <a:rPr lang="de-CH" dirty="0">
+                <a:solidFill>
+                  <a:schemeClr val="bg1"/>
+                </a:solidFill>
+              </a:rPr>
               <a:t>Projects </a:t>
             </a:r>
             <a:r>
-              <a:rPr lang="de-CH" dirty="0" err="1"/>
+              <a:rPr lang="de-CH" dirty="0" err="1">
+                <a:solidFill>
+                  <a:schemeClr val="bg1"/>
+                </a:solidFill>
+              </a:rPr>
               <a:t>Overview</a:t>
             </a:r>
-            <a:endParaRPr lang="de-CH" dirty="0"/>
+            <a:endParaRPr lang="de-CH" dirty="0">
+              <a:solidFill>
+                <a:schemeClr val="bg1"/>
+              </a:solidFill>
+            </a:endParaRPr>
           </a:p>
         </p:txBody>
       </p:sp>
@@ -14872,7 +17680,7 @@
         <p:spPr>
           <a:xfrm>
             <a:off x="3592025" y="1357887"/>
-            <a:ext cx="2427524" cy="369332"/>
+            <a:ext cx="2988319" cy="369332"/>
           </a:xfrm>
           <a:prstGeom prst="rect">
             <a:avLst/>
@@ -14887,7 +17695,7 @@
           <a:p>
             <a:r>
               <a:rPr lang="de-CH" dirty="0"/>
-              <a:t>Solar Information Portal</a:t>
+              <a:t>Regional Investment Potential</a:t>
             </a:r>
           </a:p>
         </p:txBody>
@@ -14906,7 +17714,7 @@
         </p:nvSpPr>
         <p:spPr>
           <a:xfrm>
-            <a:off x="9460456" y="1346363"/>
+            <a:off x="7225256" y="1346363"/>
             <a:ext cx="1786708" cy="369332"/>
           </a:xfrm>
           <a:prstGeom prst="rect">
@@ -14929,518 +17737,10 @@
       </p:sp>
       <p:sp>
         <p:nvSpPr>
-          <p:cNvPr id="13" name="TextBox 12">
-            <a:extLst>
-              <a:ext uri="{FF2B5EF4-FFF2-40B4-BE49-F238E27FC236}">
-                <a16:creationId xmlns:a16="http://schemas.microsoft.com/office/drawing/2014/main" id="{2C1C86E9-6B04-43CE-9A50-9A788A0D8F43}"/>
-              </a:ext>
-            </a:extLst>
-          </p:cNvPr>
-          <p:cNvSpPr txBox="1"/>
-          <p:nvPr/>
-        </p:nvSpPr>
-        <p:spPr>
-          <a:xfrm>
-            <a:off x="608276" y="2192774"/>
-            <a:ext cx="5478448" cy="4247317"/>
-          </a:xfrm>
-          <a:prstGeom prst="rect">
-            <a:avLst/>
-          </a:prstGeom>
-          <a:noFill/>
-        </p:spPr>
-        <p:txBody>
-          <a:bodyPr wrap="square" rtlCol="0">
-            <a:spAutoFit/>
-          </a:bodyPr>
-          <a:lstStyle/>
-          <a:p>
-            <a:r>
-              <a:rPr lang="de-CH" b="1" u="sng" dirty="0"/>
-              <a:t>Users / Stakeholders</a:t>
-            </a:r>
-          </a:p>
-          <a:p>
-            <a:pPr marL="285750" indent="-285750">
-              <a:buFont typeface="Arial" panose="020B0604020202020204" pitchFamily="34" charset="0"/>
-              <a:buChar char="•"/>
-            </a:pPr>
-            <a:endParaRPr lang="de-CH" dirty="0"/>
-          </a:p>
-          <a:p>
-            <a:pPr marL="285750" indent="-285750">
-              <a:buFont typeface="Arial" panose="020B0604020202020204" pitchFamily="34" charset="0"/>
-              <a:buChar char="•"/>
-            </a:pPr>
-            <a:r>
-              <a:rPr lang="de-CH" dirty="0"/>
-              <a:t>Investors</a:t>
-            </a:r>
-          </a:p>
-          <a:p>
-            <a:pPr marL="285750" indent="-285750">
-              <a:buFont typeface="Arial" panose="020B0604020202020204" pitchFamily="34" charset="0"/>
-              <a:buChar char="•"/>
-            </a:pPr>
-            <a:r>
-              <a:rPr lang="de-CH" dirty="0"/>
-              <a:t>Operators</a:t>
-            </a:r>
-          </a:p>
-          <a:p>
-            <a:pPr marL="285750" indent="-285750">
-              <a:buFont typeface="Arial" panose="020B0604020202020204" pitchFamily="34" charset="0"/>
-              <a:buChar char="•"/>
-            </a:pPr>
-            <a:r>
-              <a:rPr lang="de-CH" dirty="0"/>
-              <a:t>Planners</a:t>
-            </a:r>
-          </a:p>
-          <a:p>
-            <a:pPr marL="285750" indent="-285750">
-              <a:buFont typeface="Arial" panose="020B0604020202020204" pitchFamily="34" charset="0"/>
-              <a:buChar char="•"/>
-            </a:pPr>
-            <a:endParaRPr lang="de-CH" dirty="0"/>
-          </a:p>
-          <a:p>
-            <a:pPr marL="285750" indent="-285750">
-              <a:buFont typeface="Arial" panose="020B0604020202020204" pitchFamily="34" charset="0"/>
-              <a:buChar char="•"/>
-            </a:pPr>
-            <a:endParaRPr lang="de-CH" dirty="0"/>
-          </a:p>
-          <a:p>
-            <a:pPr marL="285750" indent="-285750">
-              <a:buFont typeface="Arial" panose="020B0604020202020204" pitchFamily="34" charset="0"/>
-              <a:buChar char="•"/>
-            </a:pPr>
-            <a:r>
-              <a:rPr lang="de-CH" dirty="0"/>
-              <a:t>Government</a:t>
-            </a:r>
-          </a:p>
-          <a:p>
-            <a:pPr marL="285750" indent="-285750">
-              <a:buFont typeface="Arial" panose="020B0604020202020204" pitchFamily="34" charset="0"/>
-              <a:buChar char="•"/>
-            </a:pPr>
-            <a:r>
-              <a:rPr lang="de-CH" dirty="0"/>
-              <a:t>Commercial</a:t>
-            </a:r>
-          </a:p>
-          <a:p>
-            <a:pPr marL="742950" lvl="1" indent="-285750">
-              <a:buFont typeface="Arial" panose="020B0604020202020204" pitchFamily="34" charset="0"/>
-              <a:buChar char="•"/>
-            </a:pPr>
-            <a:r>
-              <a:rPr lang="de-CH" dirty="0" err="1"/>
-              <a:t>Suppliers</a:t>
-            </a:r>
-            <a:r>
-              <a:rPr lang="de-CH" dirty="0"/>
-              <a:t>: </a:t>
-            </a:r>
-            <a:r>
-              <a:rPr lang="de-CH" dirty="0" err="1"/>
-              <a:t>Manufacturers</a:t>
-            </a:r>
-            <a:r>
-              <a:rPr lang="de-CH" dirty="0"/>
-              <a:t> </a:t>
-            </a:r>
-            <a:r>
-              <a:rPr lang="de-CH" dirty="0" err="1"/>
-              <a:t>of</a:t>
-            </a:r>
-            <a:r>
-              <a:rPr lang="de-CH" dirty="0"/>
-              <a:t> Solar Panels</a:t>
-            </a:r>
-          </a:p>
-          <a:p>
-            <a:pPr marL="742950" lvl="1" indent="-285750">
-              <a:buFont typeface="Arial" panose="020B0604020202020204" pitchFamily="34" charset="0"/>
-              <a:buChar char="•"/>
-            </a:pPr>
-            <a:r>
-              <a:rPr lang="de-CH" dirty="0" err="1"/>
-              <a:t>Competitors</a:t>
-            </a:r>
-            <a:r>
-              <a:rPr lang="de-CH" dirty="0"/>
-              <a:t>: Operating </a:t>
-            </a:r>
-            <a:r>
-              <a:rPr lang="de-CH" dirty="0" err="1"/>
-              <a:t>Companys</a:t>
-            </a:r>
-            <a:endParaRPr lang="de-CH" dirty="0"/>
-          </a:p>
-          <a:p>
-            <a:pPr marL="1200150" lvl="2" indent="-285750">
-              <a:buFont typeface="Arial" panose="020B0604020202020204" pitchFamily="34" charset="0"/>
-              <a:buChar char="•"/>
-            </a:pPr>
-            <a:r>
-              <a:rPr lang="de-CH" dirty="0"/>
-              <a:t>Search for </a:t>
-            </a:r>
-            <a:r>
-              <a:rPr lang="de-CH" dirty="0" err="1"/>
-              <a:t>tenders</a:t>
-            </a:r>
-            <a:endParaRPr lang="de-CH" dirty="0"/>
-          </a:p>
-          <a:p>
-            <a:pPr marL="1200150" lvl="2" indent="-285750">
-              <a:buFont typeface="Arial" panose="020B0604020202020204" pitchFamily="34" charset="0"/>
-              <a:buChar char="•"/>
-            </a:pPr>
-            <a:r>
-              <a:rPr lang="de-CH" dirty="0"/>
-              <a:t>Search for </a:t>
-            </a:r>
-            <a:r>
-              <a:rPr lang="de-CH" dirty="0" err="1"/>
-              <a:t>opportunities</a:t>
-            </a:r>
-            <a:endParaRPr lang="de-CH" dirty="0"/>
-          </a:p>
-          <a:p>
-            <a:pPr marL="742950" lvl="1" indent="-285750">
-              <a:buFont typeface="Arial" panose="020B0604020202020204" pitchFamily="34" charset="0"/>
-              <a:buChar char="•"/>
-            </a:pPr>
-            <a:r>
-              <a:rPr lang="de-CH" dirty="0"/>
-              <a:t>Customer: Energy / Grid Companies</a:t>
-            </a:r>
-          </a:p>
-          <a:p>
-            <a:pPr marL="742950" lvl="1" indent="-285750">
-              <a:buFont typeface="Arial" panose="020B0604020202020204" pitchFamily="34" charset="0"/>
-              <a:buChar char="•"/>
-            </a:pPr>
-            <a:endParaRPr lang="de-CH" dirty="0"/>
-          </a:p>
-        </p:txBody>
-      </p:sp>
-      <p:sp>
-        <p:nvSpPr>
-          <p:cNvPr id="14" name="TextBox 13">
-            <a:extLst>
-              <a:ext uri="{FF2B5EF4-FFF2-40B4-BE49-F238E27FC236}">
-                <a16:creationId xmlns:a16="http://schemas.microsoft.com/office/drawing/2014/main" id="{C1C5F033-DA63-4D73-AF24-1E6CD22C017E}"/>
-              </a:ext>
-            </a:extLst>
-          </p:cNvPr>
-          <p:cNvSpPr txBox="1"/>
-          <p:nvPr/>
-        </p:nvSpPr>
-        <p:spPr>
-          <a:xfrm>
-            <a:off x="5929024" y="2234316"/>
-            <a:ext cx="6117202" cy="4247317"/>
-          </a:xfrm>
-          <a:prstGeom prst="rect">
-            <a:avLst/>
-          </a:prstGeom>
-          <a:noFill/>
-        </p:spPr>
-        <p:txBody>
-          <a:bodyPr wrap="square" rtlCol="0">
-            <a:spAutoFit/>
-          </a:bodyPr>
-          <a:lstStyle/>
-          <a:p>
-            <a:r>
-              <a:rPr lang="de-CH" b="1" u="sng" dirty="0"/>
-              <a:t>Users / Stakeholders</a:t>
-            </a:r>
-          </a:p>
-          <a:p>
-            <a:pPr marL="285750" indent="-285750">
-              <a:buFont typeface="Arial" panose="020B0604020202020204" pitchFamily="34" charset="0"/>
-              <a:buChar char="•"/>
-            </a:pPr>
-            <a:endParaRPr lang="de-CH" dirty="0"/>
-          </a:p>
-          <a:p>
-            <a:pPr marL="285750" indent="-285750">
-              <a:buFont typeface="Arial" panose="020B0604020202020204" pitchFamily="34" charset="0"/>
-              <a:buChar char="•"/>
-            </a:pPr>
-            <a:r>
-              <a:rPr lang="de-CH" dirty="0"/>
-              <a:t>Competition</a:t>
-            </a:r>
-          </a:p>
-          <a:p>
-            <a:pPr marL="285750" indent="-285750">
-              <a:buFont typeface="Arial" panose="020B0604020202020204" pitchFamily="34" charset="0"/>
-              <a:buChar char="•"/>
-            </a:pPr>
-            <a:r>
-              <a:rPr lang="de-CH" dirty="0" err="1"/>
-              <a:t>Where</a:t>
-            </a:r>
-            <a:r>
-              <a:rPr lang="de-CH" dirty="0"/>
-              <a:t> </a:t>
-            </a:r>
-            <a:r>
-              <a:rPr lang="de-CH" dirty="0" err="1"/>
-              <a:t>are</a:t>
-            </a:r>
-            <a:r>
-              <a:rPr lang="de-CH" dirty="0"/>
-              <a:t> </a:t>
-            </a:r>
-            <a:r>
-              <a:rPr lang="de-CH" dirty="0" err="1"/>
-              <a:t>current</a:t>
-            </a:r>
-            <a:r>
-              <a:rPr lang="de-CH" dirty="0"/>
-              <a:t> </a:t>
-            </a:r>
-            <a:r>
-              <a:rPr lang="de-CH" dirty="0" err="1"/>
-              <a:t>projects</a:t>
-            </a:r>
-            <a:endParaRPr lang="de-CH" dirty="0"/>
-          </a:p>
-          <a:p>
-            <a:pPr marL="285750" indent="-285750">
-              <a:buFont typeface="Arial" panose="020B0604020202020204" pitchFamily="34" charset="0"/>
-              <a:buChar char="•"/>
-            </a:pPr>
-            <a:endParaRPr lang="de-CH" dirty="0"/>
-          </a:p>
-          <a:p>
-            <a:pPr marL="285750" indent="-285750">
-              <a:buFont typeface="Arial" panose="020B0604020202020204" pitchFamily="34" charset="0"/>
-              <a:buChar char="•"/>
-            </a:pPr>
-            <a:r>
-              <a:rPr lang="de-CH" dirty="0" err="1"/>
-              <a:t>Opportunities</a:t>
-            </a:r>
-            <a:endParaRPr lang="de-CH" dirty="0"/>
-          </a:p>
-          <a:p>
-            <a:pPr marL="285750" indent="-285750">
-              <a:buFont typeface="Arial" panose="020B0604020202020204" pitchFamily="34" charset="0"/>
-              <a:buChar char="•"/>
-            </a:pPr>
-            <a:r>
-              <a:rPr lang="de-CH" dirty="0" err="1"/>
-              <a:t>Where</a:t>
-            </a:r>
-            <a:r>
-              <a:rPr lang="de-CH" dirty="0"/>
-              <a:t> </a:t>
-            </a:r>
-            <a:r>
-              <a:rPr lang="de-CH" dirty="0" err="1"/>
-              <a:t>are</a:t>
-            </a:r>
-            <a:r>
-              <a:rPr lang="de-CH" dirty="0"/>
-              <a:t> potential </a:t>
-            </a:r>
-            <a:r>
-              <a:rPr lang="de-CH" dirty="0" err="1"/>
-              <a:t>tenders</a:t>
-            </a:r>
-            <a:endParaRPr lang="de-CH" dirty="0"/>
-          </a:p>
-          <a:p>
-            <a:pPr marL="285750" indent="-285750">
-              <a:buFont typeface="Arial" panose="020B0604020202020204" pitchFamily="34" charset="0"/>
-              <a:buChar char="•"/>
-            </a:pPr>
-            <a:endParaRPr lang="de-CH" dirty="0"/>
-          </a:p>
-          <a:p>
-            <a:pPr marL="285750" indent="-285750">
-              <a:buFont typeface="Arial" panose="020B0604020202020204" pitchFamily="34" charset="0"/>
-              <a:buChar char="•"/>
-            </a:pPr>
-            <a:endParaRPr lang="de-CH" dirty="0"/>
-          </a:p>
-          <a:p>
-            <a:pPr marL="285750" indent="-285750">
-              <a:buFont typeface="Arial" panose="020B0604020202020204" pitchFamily="34" charset="0"/>
-              <a:buChar char="•"/>
-            </a:pPr>
-            <a:r>
-              <a:rPr lang="de-CH" dirty="0" err="1"/>
-              <a:t>How</a:t>
-            </a:r>
-            <a:r>
-              <a:rPr lang="de-CH" dirty="0"/>
-              <a:t> </a:t>
-            </a:r>
-            <a:r>
-              <a:rPr lang="de-CH" dirty="0" err="1"/>
-              <a:t>is</a:t>
-            </a:r>
-            <a:r>
-              <a:rPr lang="de-CH" dirty="0"/>
-              <a:t> the solar potential </a:t>
-            </a:r>
-            <a:r>
-              <a:rPr lang="de-CH" dirty="0" err="1"/>
-              <a:t>weather</a:t>
-            </a:r>
-            <a:r>
-              <a:rPr lang="de-CH" dirty="0"/>
-              <a:t> / </a:t>
-            </a:r>
-            <a:r>
-              <a:rPr lang="de-CH" dirty="0" err="1"/>
-              <a:t>climate</a:t>
-            </a:r>
-            <a:r>
-              <a:rPr lang="de-CH" dirty="0"/>
-              <a:t> </a:t>
-            </a:r>
-            <a:r>
-              <a:rPr lang="de-CH" dirty="0" err="1"/>
-              <a:t>conditions</a:t>
-            </a:r>
-            <a:endParaRPr lang="de-CH" dirty="0"/>
-          </a:p>
-          <a:p>
-            <a:pPr marL="285750" indent="-285750">
-              <a:buFont typeface="Arial" panose="020B0604020202020204" pitchFamily="34" charset="0"/>
-              <a:buChar char="•"/>
-            </a:pPr>
-            <a:r>
-              <a:rPr lang="de-CH" dirty="0" err="1"/>
-              <a:t>How</a:t>
-            </a:r>
-            <a:r>
-              <a:rPr lang="de-CH" dirty="0"/>
-              <a:t> </a:t>
-            </a:r>
-            <a:r>
-              <a:rPr lang="de-CH" dirty="0" err="1"/>
-              <a:t>is</a:t>
-            </a:r>
-            <a:r>
-              <a:rPr lang="de-CH" dirty="0"/>
-              <a:t> the </a:t>
-            </a:r>
-            <a:r>
-              <a:rPr lang="de-CH" dirty="0" err="1"/>
-              <a:t>market</a:t>
-            </a:r>
-            <a:r>
-              <a:rPr lang="de-CH" dirty="0"/>
-              <a:t> potential</a:t>
-            </a:r>
-            <a:br>
-              <a:rPr lang="de-CH" dirty="0"/>
-            </a:br>
-            <a:r>
-              <a:rPr lang="de-CH" dirty="0"/>
-              <a:t>(</a:t>
-            </a:r>
-            <a:r>
-              <a:rPr lang="de-CH" dirty="0" err="1"/>
-              <a:t>demand</a:t>
-            </a:r>
-            <a:r>
-              <a:rPr lang="de-CH" dirty="0"/>
-              <a:t> in the </a:t>
-            </a:r>
-            <a:r>
-              <a:rPr lang="de-CH" dirty="0" err="1"/>
-              <a:t>areas</a:t>
-            </a:r>
-            <a:r>
-              <a:rPr lang="de-CH" dirty="0"/>
-              <a:t>, </a:t>
-            </a:r>
-            <a:r>
-              <a:rPr lang="de-CH" dirty="0" err="1"/>
-              <a:t>energy</a:t>
-            </a:r>
-            <a:r>
-              <a:rPr lang="de-CH" dirty="0"/>
-              <a:t> </a:t>
-            </a:r>
-            <a:r>
-              <a:rPr lang="de-CH" dirty="0" err="1"/>
-              <a:t>prices</a:t>
-            </a:r>
-            <a:r>
-              <a:rPr lang="de-CH" dirty="0"/>
-              <a:t>, …)</a:t>
-            </a:r>
-          </a:p>
-          <a:p>
-            <a:pPr marL="285750" indent="-285750">
-              <a:buFont typeface="Arial" panose="020B0604020202020204" pitchFamily="34" charset="0"/>
-              <a:buChar char="•"/>
-            </a:pPr>
-            <a:r>
-              <a:rPr lang="de-CH" dirty="0"/>
-              <a:t>Potential </a:t>
-            </a:r>
-            <a:r>
-              <a:rPr lang="de-CH" dirty="0" err="1"/>
-              <a:t>customers</a:t>
-            </a:r>
-            <a:r>
-              <a:rPr lang="de-CH" dirty="0"/>
-              <a:t> (</a:t>
-            </a:r>
-            <a:r>
-              <a:rPr lang="de-CH" dirty="0" err="1"/>
-              <a:t>grid</a:t>
-            </a:r>
-            <a:r>
-              <a:rPr lang="de-CH" dirty="0"/>
-              <a:t> </a:t>
-            </a:r>
-            <a:r>
-              <a:rPr lang="de-CH" dirty="0" err="1"/>
-              <a:t>companies</a:t>
-            </a:r>
-            <a:r>
-              <a:rPr lang="de-CH" dirty="0"/>
-              <a:t>)</a:t>
-            </a:r>
-          </a:p>
-          <a:p>
-            <a:pPr marL="285750" indent="-285750">
-              <a:buFont typeface="Arial" panose="020B0604020202020204" pitchFamily="34" charset="0"/>
-              <a:buChar char="•"/>
-            </a:pPr>
-            <a:endParaRPr lang="de-CH" dirty="0"/>
-          </a:p>
-          <a:p>
-            <a:pPr marL="742950" lvl="1" indent="-285750">
-              <a:buFont typeface="Arial" panose="020B0604020202020204" pitchFamily="34" charset="0"/>
-              <a:buChar char="•"/>
-            </a:pPr>
-            <a:endParaRPr lang="de-CH" dirty="0"/>
-          </a:p>
-        </p:txBody>
-      </p:sp>
-      <p:sp>
-        <p:nvSpPr>
-          <p:cNvPr id="15" name="Rectangle 14">
-            <a:extLst>
-              <a:ext uri="{FF2B5EF4-FFF2-40B4-BE49-F238E27FC236}">
-                <a16:creationId xmlns:a16="http://schemas.microsoft.com/office/drawing/2014/main" id="{9A0A0B68-4A43-4500-90BB-F57E3EA969CC}"/>
+          <p:cNvPr id="2" name="Rectangle 1">
+            <a:extLst>
+              <a:ext uri="{FF2B5EF4-FFF2-40B4-BE49-F238E27FC236}">
+                <a16:creationId xmlns:a16="http://schemas.microsoft.com/office/drawing/2014/main" id="{50D30DA0-CD80-49C5-B003-0F2D4FCE4C15}"/>
               </a:ext>
             </a:extLst>
           </p:cNvPr>
@@ -15449,8 +17749,8 @@
         </p:nvSpPr>
         <p:spPr>
           <a:xfrm>
-            <a:off x="6774467" y="1399430"/>
-            <a:ext cx="2582849" cy="286246"/>
+            <a:off x="5303520" y="1993991"/>
+            <a:ext cx="4104198" cy="4102873"/>
           </a:xfrm>
           <a:prstGeom prst="rect">
             <a:avLst/>
@@ -15483,10 +17783,102 @@
       </p:sp>
       <p:sp>
         <p:nvSpPr>
-          <p:cNvPr id="16" name="TextBox 15">
-            <a:extLst>
-              <a:ext uri="{FF2B5EF4-FFF2-40B4-BE49-F238E27FC236}">
-                <a16:creationId xmlns:a16="http://schemas.microsoft.com/office/drawing/2014/main" id="{FC778D35-6E70-40B5-A2E6-48277414F2B2}"/>
+          <p:cNvPr id="15" name="Rectangle 14">
+            <a:extLst>
+              <a:ext uri="{FF2B5EF4-FFF2-40B4-BE49-F238E27FC236}">
+                <a16:creationId xmlns:a16="http://schemas.microsoft.com/office/drawing/2014/main" id="{CD55C107-B7CC-4D5F-AD89-751C4D9C0BB1}"/>
+              </a:ext>
+            </a:extLst>
+          </p:cNvPr>
+          <p:cNvSpPr/>
+          <p:nvPr/>
+        </p:nvSpPr>
+        <p:spPr>
+          <a:xfrm>
+            <a:off x="764652" y="1993992"/>
+            <a:ext cx="2884998" cy="1099065"/>
+          </a:xfrm>
+          <a:prstGeom prst="rect">
+            <a:avLst/>
+          </a:prstGeom>
+        </p:spPr>
+        <p:style>
+          <a:lnRef idx="2">
+            <a:schemeClr val="accent1">
+              <a:shade val="50000"/>
+            </a:schemeClr>
+          </a:lnRef>
+          <a:fillRef idx="1">
+            <a:schemeClr val="accent1"/>
+          </a:fillRef>
+          <a:effectRef idx="0">
+            <a:schemeClr val="accent1"/>
+          </a:effectRef>
+          <a:fontRef idx="minor">
+            <a:schemeClr val="lt1"/>
+          </a:fontRef>
+        </p:style>
+        <p:txBody>
+          <a:bodyPr rtlCol="0" anchor="ctr"/>
+          <a:lstStyle/>
+          <a:p>
+            <a:pPr algn="ctr"/>
+            <a:endParaRPr lang="de-CH"/>
+          </a:p>
+        </p:txBody>
+      </p:sp>
+      <p:sp>
+        <p:nvSpPr>
+          <p:cNvPr id="16" name="Rectangle 15">
+            <a:extLst>
+              <a:ext uri="{FF2B5EF4-FFF2-40B4-BE49-F238E27FC236}">
+                <a16:creationId xmlns:a16="http://schemas.microsoft.com/office/drawing/2014/main" id="{D0A7862D-6DAC-425A-9E21-6F2BF8B33493}"/>
+              </a:ext>
+            </a:extLst>
+          </p:cNvPr>
+          <p:cNvSpPr/>
+          <p:nvPr/>
+        </p:nvSpPr>
+        <p:spPr>
+          <a:xfrm>
+            <a:off x="764652" y="2043484"/>
+            <a:ext cx="4467306" cy="970060"/>
+          </a:xfrm>
+          <a:prstGeom prst="rect">
+            <a:avLst/>
+          </a:prstGeom>
+        </p:spPr>
+        <p:style>
+          <a:lnRef idx="2">
+            <a:schemeClr val="accent1">
+              <a:shade val="50000"/>
+            </a:schemeClr>
+          </a:lnRef>
+          <a:fillRef idx="1">
+            <a:schemeClr val="accent1"/>
+          </a:fillRef>
+          <a:effectRef idx="0">
+            <a:schemeClr val="accent1"/>
+          </a:effectRef>
+          <a:fontRef idx="minor">
+            <a:schemeClr val="lt1"/>
+          </a:fontRef>
+        </p:style>
+        <p:txBody>
+          <a:bodyPr rtlCol="0" anchor="ctr"/>
+          <a:lstStyle/>
+          <a:p>
+            <a:pPr algn="ctr"/>
+            <a:endParaRPr lang="de-CH"/>
+          </a:p>
+        </p:txBody>
+      </p:sp>
+      <p:sp>
+        <p:nvSpPr>
+          <p:cNvPr id="18" name="TextBox 17">
+            <a:extLst>
+              <a:ext uri="{FF2B5EF4-FFF2-40B4-BE49-F238E27FC236}">
+                <a16:creationId xmlns:a16="http://schemas.microsoft.com/office/drawing/2014/main" id="{EB4F5ECF-194A-4D24-AF22-9E96C8847682}"/>
               </a:ext>
             </a:extLst>
           </p:cNvPr>
@@ -15495,8 +17887,8 @@
         </p:nvSpPr>
         <p:spPr>
           <a:xfrm>
-            <a:off x="7172537" y="1346363"/>
-            <a:ext cx="2193999" cy="369332"/>
+            <a:off x="5686990" y="3860761"/>
+            <a:ext cx="739305" cy="369332"/>
           </a:xfrm>
           <a:prstGeom prst="rect">
             <a:avLst/>
@@ -15510,8 +17902,242 @@
           <a:lstStyle/>
           <a:p>
             <a:r>
-              <a:rPr lang="de-CH" dirty="0"/>
-              <a:t>Investment Navigator</a:t>
+              <a:rPr lang="de-CH" dirty="0">
+                <a:solidFill>
+                  <a:schemeClr val="bg1"/>
+                </a:solidFill>
+              </a:rPr>
+              <a:t>MAPS</a:t>
+            </a:r>
+          </a:p>
+        </p:txBody>
+      </p:sp>
+      <p:sp>
+        <p:nvSpPr>
+          <p:cNvPr id="19" name="TextBox 18">
+            <a:extLst>
+              <a:ext uri="{FF2B5EF4-FFF2-40B4-BE49-F238E27FC236}">
+                <a16:creationId xmlns:a16="http://schemas.microsoft.com/office/drawing/2014/main" id="{89424687-B726-41CE-8D41-9F06AD840A45}"/>
+              </a:ext>
+            </a:extLst>
+          </p:cNvPr>
+          <p:cNvSpPr txBox="1"/>
+          <p:nvPr/>
+        </p:nvSpPr>
+        <p:spPr>
+          <a:xfrm>
+            <a:off x="1733206" y="2369893"/>
+            <a:ext cx="666273" cy="369332"/>
+          </a:xfrm>
+          <a:prstGeom prst="rect">
+            <a:avLst/>
+          </a:prstGeom>
+          <a:noFill/>
+        </p:spPr>
+        <p:txBody>
+          <a:bodyPr wrap="none" rtlCol="0">
+            <a:spAutoFit/>
+          </a:bodyPr>
+          <a:lstStyle/>
+          <a:p>
+            <a:r>
+              <a:rPr lang="de-CH" dirty="0">
+                <a:solidFill>
+                  <a:schemeClr val="bg1"/>
+                </a:solidFill>
+              </a:rPr>
+              <a:t>Filter</a:t>
+            </a:r>
+          </a:p>
+        </p:txBody>
+      </p:sp>
+      <p:sp>
+        <p:nvSpPr>
+          <p:cNvPr id="25" name="Rectangle 24">
+            <a:extLst>
+              <a:ext uri="{FF2B5EF4-FFF2-40B4-BE49-F238E27FC236}">
+                <a16:creationId xmlns:a16="http://schemas.microsoft.com/office/drawing/2014/main" id="{3CA10A0A-C859-4C95-A71A-390F5566B53D}"/>
+              </a:ext>
+            </a:extLst>
+          </p:cNvPr>
+          <p:cNvSpPr/>
+          <p:nvPr/>
+        </p:nvSpPr>
+        <p:spPr>
+          <a:xfrm>
+            <a:off x="764651" y="3212327"/>
+            <a:ext cx="4467305" cy="2884537"/>
+          </a:xfrm>
+          <a:prstGeom prst="rect">
+            <a:avLst/>
+          </a:prstGeom>
+        </p:spPr>
+        <p:style>
+          <a:lnRef idx="2">
+            <a:schemeClr val="accent1">
+              <a:shade val="50000"/>
+            </a:schemeClr>
+          </a:lnRef>
+          <a:fillRef idx="1">
+            <a:schemeClr val="accent1"/>
+          </a:fillRef>
+          <a:effectRef idx="0">
+            <a:schemeClr val="accent1"/>
+          </a:effectRef>
+          <a:fontRef idx="minor">
+            <a:schemeClr val="lt1"/>
+          </a:fontRef>
+        </p:style>
+        <p:txBody>
+          <a:bodyPr rtlCol="0" anchor="ctr"/>
+          <a:lstStyle/>
+          <a:p>
+            <a:pPr algn="ctr"/>
+            <a:endParaRPr lang="de-CH"/>
+          </a:p>
+        </p:txBody>
+      </p:sp>
+      <p:sp>
+        <p:nvSpPr>
+          <p:cNvPr id="26" name="TextBox 25">
+            <a:extLst>
+              <a:ext uri="{FF2B5EF4-FFF2-40B4-BE49-F238E27FC236}">
+                <a16:creationId xmlns:a16="http://schemas.microsoft.com/office/drawing/2014/main" id="{6844AC77-1FDF-46C4-BA97-B867D349BEDE}"/>
+              </a:ext>
+            </a:extLst>
+          </p:cNvPr>
+          <p:cNvSpPr txBox="1"/>
+          <p:nvPr/>
+        </p:nvSpPr>
+        <p:spPr>
+          <a:xfrm>
+            <a:off x="1006566" y="4395243"/>
+            <a:ext cx="2401170" cy="646331"/>
+          </a:xfrm>
+          <a:prstGeom prst="rect">
+            <a:avLst/>
+          </a:prstGeom>
+          <a:noFill/>
+        </p:spPr>
+        <p:txBody>
+          <a:bodyPr wrap="none" rtlCol="0">
+            <a:spAutoFit/>
+          </a:bodyPr>
+          <a:lstStyle/>
+          <a:p>
+            <a:r>
+              <a:rPr lang="de-CH" dirty="0">
+                <a:solidFill>
+                  <a:schemeClr val="bg1"/>
+                </a:solidFill>
+              </a:rPr>
+              <a:t>Bar Chart / Plots</a:t>
+            </a:r>
+            <a:br>
+              <a:rPr lang="de-CH" dirty="0">
+                <a:solidFill>
+                  <a:schemeClr val="bg1"/>
+                </a:solidFill>
+              </a:rPr>
+            </a:br>
+            <a:r>
+              <a:rPr lang="de-CH" dirty="0">
+                <a:solidFill>
+                  <a:schemeClr val="bg1"/>
+                </a:solidFill>
+              </a:rPr>
+              <a:t>About Energy </a:t>
+            </a:r>
+            <a:r>
+              <a:rPr lang="de-CH" dirty="0" err="1">
+                <a:solidFill>
+                  <a:schemeClr val="bg1"/>
+                </a:solidFill>
+              </a:rPr>
+              <a:t>Produced</a:t>
+            </a:r>
+            <a:endParaRPr lang="de-CH" dirty="0">
+              <a:solidFill>
+                <a:schemeClr val="bg1"/>
+              </a:solidFill>
+            </a:endParaRPr>
+          </a:p>
+        </p:txBody>
+      </p:sp>
+      <p:sp>
+        <p:nvSpPr>
+          <p:cNvPr id="27" name="TextBox 26">
+            <a:extLst>
+              <a:ext uri="{FF2B5EF4-FFF2-40B4-BE49-F238E27FC236}">
+                <a16:creationId xmlns:a16="http://schemas.microsoft.com/office/drawing/2014/main" id="{52EC58FE-0066-4F7D-B145-0A5847343A42}"/>
+              </a:ext>
+            </a:extLst>
+          </p:cNvPr>
+          <p:cNvSpPr txBox="1"/>
+          <p:nvPr/>
+        </p:nvSpPr>
+        <p:spPr>
+          <a:xfrm>
+            <a:off x="7145077" y="4469929"/>
+            <a:ext cx="950709" cy="369332"/>
+          </a:xfrm>
+          <a:prstGeom prst="rect">
+            <a:avLst/>
+          </a:prstGeom>
+          <a:noFill/>
+        </p:spPr>
+        <p:txBody>
+          <a:bodyPr wrap="none" rtlCol="0">
+            <a:spAutoFit/>
+          </a:bodyPr>
+          <a:lstStyle/>
+          <a:p>
+            <a:r>
+              <a:rPr lang="de-CH" dirty="0">
+                <a:solidFill>
+                  <a:schemeClr val="bg1"/>
+                </a:solidFill>
+              </a:rPr>
+              <a:t>Markers</a:t>
+            </a:r>
+          </a:p>
+        </p:txBody>
+      </p:sp>
+      <p:sp>
+        <p:nvSpPr>
+          <p:cNvPr id="17" name="TextBox 16">
+            <a:extLst>
+              <a:ext uri="{FF2B5EF4-FFF2-40B4-BE49-F238E27FC236}">
+                <a16:creationId xmlns:a16="http://schemas.microsoft.com/office/drawing/2014/main" id="{BB5FBE32-7EDC-4C3C-9432-B4B984EB1002}"/>
+              </a:ext>
+            </a:extLst>
+          </p:cNvPr>
+          <p:cNvSpPr txBox="1"/>
+          <p:nvPr/>
+        </p:nvSpPr>
+        <p:spPr>
+          <a:xfrm>
+            <a:off x="7225256" y="5064490"/>
+            <a:ext cx="2033762" cy="369332"/>
+          </a:xfrm>
+          <a:prstGeom prst="rect">
+            <a:avLst/>
+          </a:prstGeom>
+          <a:noFill/>
+        </p:spPr>
+        <p:txBody>
+          <a:bodyPr wrap="none" rtlCol="0">
+            <a:spAutoFit/>
+          </a:bodyPr>
+          <a:lstStyle/>
+          <a:p>
+            <a:r>
+              <a:rPr lang="de-CH" dirty="0">
+                <a:solidFill>
+                  <a:schemeClr val="bg1"/>
+                </a:solidFill>
+              </a:rPr>
+              <a:t>Colors = Companies</a:t>
             </a:r>
           </a:p>
         </p:txBody>
@@ -15519,7 +18145,7 @@
     </p:spTree>
     <p:extLst>
       <p:ext uri="{BB962C8B-B14F-4D97-AF65-F5344CB8AC3E}">
-        <p14:creationId xmlns:p14="http://schemas.microsoft.com/office/powerpoint/2010/main" val="745019083"/>
+        <p14:creationId xmlns:p14="http://schemas.microsoft.com/office/powerpoint/2010/main" val="1254334830"/>
       </p:ext>
     </p:extLst>
   </p:cSld>
@@ -15762,35 +18388,62 @@
           <a:lstStyle/>
           <a:p>
             <a:r>
+              <a:rPr lang="de-CH" dirty="0"/>
+              <a:t>Projects </a:t>
+            </a:r>
+            <a:r>
+              <a:rPr lang="de-CH" dirty="0" err="1"/>
+              <a:t>Overview</a:t>
+            </a:r>
+            <a:endParaRPr lang="de-CH" dirty="0"/>
+          </a:p>
+        </p:txBody>
+      </p:sp>
+      <p:sp>
+        <p:nvSpPr>
+          <p:cNvPr id="11" name="TextBox 10">
+            <a:extLst>
+              <a:ext uri="{FF2B5EF4-FFF2-40B4-BE49-F238E27FC236}">
+                <a16:creationId xmlns:a16="http://schemas.microsoft.com/office/drawing/2014/main" id="{B2669C21-9586-4C09-BC0F-A0053AF0D575}"/>
+              </a:ext>
+            </a:extLst>
+          </p:cNvPr>
+          <p:cNvSpPr txBox="1"/>
+          <p:nvPr/>
+        </p:nvSpPr>
+        <p:spPr>
+          <a:xfrm>
+            <a:off x="3592025" y="1357887"/>
+            <a:ext cx="2427524" cy="369332"/>
+          </a:xfrm>
+          <a:prstGeom prst="rect">
+            <a:avLst/>
+          </a:prstGeom>
+          <a:noFill/>
+        </p:spPr>
+        <p:txBody>
+          <a:bodyPr wrap="none" rtlCol="0">
+            <a:spAutoFit/>
+          </a:bodyPr>
+          <a:lstStyle/>
+          <a:p>
+            <a:r>
               <a:rPr lang="de-CH" dirty="0">
                 <a:solidFill>
                   <a:schemeClr val="bg1"/>
                 </a:solidFill>
               </a:rPr>
-              <a:t>Projects </a:t>
-            </a:r>
-            <a:r>
-              <a:rPr lang="de-CH" dirty="0" err="1">
-                <a:solidFill>
-                  <a:schemeClr val="bg1"/>
-                </a:solidFill>
-              </a:rPr>
-              <a:t>Overview</a:t>
-            </a:r>
-            <a:endParaRPr lang="de-CH" dirty="0">
-              <a:solidFill>
-                <a:schemeClr val="bg1"/>
-              </a:solidFill>
-            </a:endParaRPr>
-          </a:p>
-        </p:txBody>
-      </p:sp>
-      <p:sp>
-        <p:nvSpPr>
-          <p:cNvPr id="11" name="TextBox 10">
-            <a:extLst>
-              <a:ext uri="{FF2B5EF4-FFF2-40B4-BE49-F238E27FC236}">
-                <a16:creationId xmlns:a16="http://schemas.microsoft.com/office/drawing/2014/main" id="{B2669C21-9586-4C09-BC0F-A0053AF0D575}"/>
+              <a:t>Solar Information Portal</a:t>
+            </a:r>
+          </a:p>
+        </p:txBody>
+      </p:sp>
+      <p:sp>
+        <p:nvSpPr>
+          <p:cNvPr id="12" name="TextBox 11">
+            <a:extLst>
+              <a:ext uri="{FF2B5EF4-FFF2-40B4-BE49-F238E27FC236}">
+                <a16:creationId xmlns:a16="http://schemas.microsoft.com/office/drawing/2014/main" id="{9000CE69-5A06-43A4-BA9C-D55296D90252}"/>
               </a:ext>
             </a:extLst>
           </p:cNvPr>
@@ -15799,8 +18452,8 @@
         </p:nvSpPr>
         <p:spPr>
           <a:xfrm>
-            <a:off x="3592025" y="1357887"/>
-            <a:ext cx="2988319" cy="369332"/>
+            <a:off x="7225256" y="1346363"/>
+            <a:ext cx="1786708" cy="369332"/>
           </a:xfrm>
           <a:prstGeom prst="rect">
             <a:avLst/>
@@ -15815,41 +18468,6 @@
           <a:p>
             <a:r>
               <a:rPr lang="de-CH" dirty="0"/>
-              <a:t>Regional Investment Potential</a:t>
-            </a:r>
-          </a:p>
-        </p:txBody>
-      </p:sp>
-      <p:sp>
-        <p:nvSpPr>
-          <p:cNvPr id="12" name="TextBox 11">
-            <a:extLst>
-              <a:ext uri="{FF2B5EF4-FFF2-40B4-BE49-F238E27FC236}">
-                <a16:creationId xmlns:a16="http://schemas.microsoft.com/office/drawing/2014/main" id="{9000CE69-5A06-43A4-BA9C-D55296D90252}"/>
-              </a:ext>
-            </a:extLst>
-          </p:cNvPr>
-          <p:cNvSpPr txBox="1"/>
-          <p:nvPr/>
-        </p:nvSpPr>
-        <p:spPr>
-          <a:xfrm>
-            <a:off x="7225256" y="1346363"/>
-            <a:ext cx="1786708" cy="369332"/>
-          </a:xfrm>
-          <a:prstGeom prst="rect">
-            <a:avLst/>
-          </a:prstGeom>
-          <a:noFill/>
-        </p:spPr>
-        <p:txBody>
-          <a:bodyPr wrap="none" rtlCol="0">
-            <a:spAutoFit/>
-          </a:bodyPr>
-          <a:lstStyle/>
-          <a:p>
-            <a:r>
-              <a:rPr lang="de-CH" dirty="0"/>
               <a:t>Tender Navigator</a:t>
             </a:r>
           </a:p>
@@ -15869,8 +18487,8 @@
         </p:nvSpPr>
         <p:spPr>
           <a:xfrm>
-            <a:off x="5303520" y="1993991"/>
-            <a:ext cx="4104198" cy="4102873"/>
+            <a:off x="3768918" y="1993991"/>
+            <a:ext cx="5638800" cy="4102873"/>
           </a:xfrm>
           <a:prstGeom prst="rect">
             <a:avLst/>
@@ -15916,7 +18534,7 @@
         <p:spPr>
           <a:xfrm>
             <a:off x="764652" y="1993992"/>
-            <a:ext cx="2884998" cy="1099065"/>
+            <a:ext cx="2884998" cy="3818411"/>
           </a:xfrm>
           <a:prstGeom prst="rect">
             <a:avLst/>
@@ -15962,7 +18580,7 @@
         <p:spPr>
           <a:xfrm>
             <a:off x="764652" y="2043484"/>
-            <a:ext cx="4467306" cy="970060"/>
+            <a:ext cx="2757776" cy="970060"/>
           </a:xfrm>
           <a:prstGeom prst="rect">
             <a:avLst/>
@@ -16007,7 +18625,7 @@
         </p:nvSpPr>
         <p:spPr>
           <a:xfrm>
-            <a:off x="5686990" y="3860761"/>
+            <a:off x="6210691" y="3860761"/>
             <a:ext cx="739305" cy="369332"/>
           </a:xfrm>
           <a:prstGeom prst="rect">
@@ -16034,10 +18652,10 @@
       </p:sp>
       <p:sp>
         <p:nvSpPr>
-          <p:cNvPr id="19" name="TextBox 18">
-            <a:extLst>
-              <a:ext uri="{FF2B5EF4-FFF2-40B4-BE49-F238E27FC236}">
-                <a16:creationId xmlns:a16="http://schemas.microsoft.com/office/drawing/2014/main" id="{89424687-B726-41CE-8D41-9F06AD840A45}"/>
+          <p:cNvPr id="20" name="TextBox 19">
+            <a:extLst>
+              <a:ext uri="{FF2B5EF4-FFF2-40B4-BE49-F238E27FC236}">
+                <a16:creationId xmlns:a16="http://schemas.microsoft.com/office/drawing/2014/main" id="{9ECC0B0C-5E83-4967-984C-A7D80FB3B331}"/>
               </a:ext>
             </a:extLst>
           </p:cNvPr>
@@ -16046,8 +18664,8 @@
         </p:nvSpPr>
         <p:spPr>
           <a:xfrm>
-            <a:off x="1733206" y="2369893"/>
-            <a:ext cx="666273" cy="369332"/>
+            <a:off x="7145077" y="4469929"/>
+            <a:ext cx="849913" cy="369332"/>
           </a:xfrm>
           <a:prstGeom prst="rect">
             <a:avLst/>
@@ -16066,17 +18684,17 @@
                   <a:schemeClr val="bg1"/>
                 </a:solidFill>
               </a:rPr>
-              <a:t>Filter</a:t>
-            </a:r>
-          </a:p>
-        </p:txBody>
-      </p:sp>
-      <p:sp>
-        <p:nvSpPr>
-          <p:cNvPr id="25" name="Rectangle 24">
-            <a:extLst>
-              <a:ext uri="{FF2B5EF4-FFF2-40B4-BE49-F238E27FC236}">
-                <a16:creationId xmlns:a16="http://schemas.microsoft.com/office/drawing/2014/main" id="{3CA10A0A-C859-4C95-A71A-390F5566B53D}"/>
+              <a:t>Shapes</a:t>
+            </a:r>
+          </a:p>
+        </p:txBody>
+      </p:sp>
+      <p:sp>
+        <p:nvSpPr>
+          <p:cNvPr id="21" name="Rectangle 20">
+            <a:extLst>
+              <a:ext uri="{FF2B5EF4-FFF2-40B4-BE49-F238E27FC236}">
+                <a16:creationId xmlns:a16="http://schemas.microsoft.com/office/drawing/2014/main" id="{40AA6523-B878-4414-9676-CE4089785900}"/>
               </a:ext>
             </a:extLst>
           </p:cNvPr>
@@ -16085,8 +18703,8 @@
         </p:nvSpPr>
         <p:spPr>
           <a:xfrm>
-            <a:off x="764651" y="3212327"/>
-            <a:ext cx="4467305" cy="2884537"/>
+            <a:off x="1178073" y="3943845"/>
+            <a:ext cx="2105816" cy="584424"/>
           </a:xfrm>
           <a:prstGeom prst="rect">
             <a:avLst/>
@@ -16119,10 +18737,10 @@
       </p:sp>
       <p:sp>
         <p:nvSpPr>
-          <p:cNvPr id="26" name="TextBox 25">
-            <a:extLst>
-              <a:ext uri="{FF2B5EF4-FFF2-40B4-BE49-F238E27FC236}">
-                <a16:creationId xmlns:a16="http://schemas.microsoft.com/office/drawing/2014/main" id="{6844AC77-1FDF-46C4-BA97-B867D349BEDE}"/>
+          <p:cNvPr id="22" name="TextBox 21">
+            <a:extLst>
+              <a:ext uri="{FF2B5EF4-FFF2-40B4-BE49-F238E27FC236}">
+                <a16:creationId xmlns:a16="http://schemas.microsoft.com/office/drawing/2014/main" id="{54831142-5318-481A-A5D3-0C6DB97E23DB}"/>
               </a:ext>
             </a:extLst>
           </p:cNvPr>
@@ -16131,8 +18749,8 @@
         </p:nvSpPr>
         <p:spPr>
           <a:xfrm>
-            <a:off x="1006566" y="4395243"/>
-            <a:ext cx="2401170" cy="646331"/>
+            <a:off x="1885606" y="2522293"/>
+            <a:ext cx="666273" cy="369332"/>
           </a:xfrm>
           <a:prstGeom prst="rect">
             <a:avLst/>
@@ -16151,22 +18769,450 @@
                   <a:schemeClr val="bg1"/>
                 </a:solidFill>
               </a:rPr>
-              <a:t>Bar Chart / Plots</a:t>
-            </a:r>
-            <a:br>
+              <a:t>Filter</a:t>
+            </a:r>
+          </a:p>
+        </p:txBody>
+      </p:sp>
+      <p:sp>
+        <p:nvSpPr>
+          <p:cNvPr id="19" name="TextBox 18">
+            <a:extLst>
+              <a:ext uri="{FF2B5EF4-FFF2-40B4-BE49-F238E27FC236}">
+                <a16:creationId xmlns:a16="http://schemas.microsoft.com/office/drawing/2014/main" id="{89424687-B726-41CE-8D41-9F06AD840A45}"/>
+              </a:ext>
+            </a:extLst>
+          </p:cNvPr>
+          <p:cNvSpPr txBox="1"/>
+          <p:nvPr/>
+        </p:nvSpPr>
+        <p:spPr>
+          <a:xfrm>
+            <a:off x="1275655" y="4054246"/>
+            <a:ext cx="1981120" cy="369332"/>
+          </a:xfrm>
+          <a:prstGeom prst="rect">
+            <a:avLst/>
+          </a:prstGeom>
+          <a:noFill/>
+        </p:spPr>
+        <p:txBody>
+          <a:bodyPr wrap="none" rtlCol="0">
+            <a:spAutoFit/>
+          </a:bodyPr>
+          <a:lstStyle/>
+          <a:p>
+            <a:r>
               <a:rPr lang="de-CH" dirty="0">
                 <a:solidFill>
                   <a:schemeClr val="bg1"/>
                 </a:solidFill>
               </a:rPr>
-            </a:br>
+              <a:t>Radiation Sunshine</a:t>
+            </a:r>
+          </a:p>
+        </p:txBody>
+      </p:sp>
+      <p:sp>
+        <p:nvSpPr>
+          <p:cNvPr id="23" name="Rectangle 22">
+            <a:extLst>
+              <a:ext uri="{FF2B5EF4-FFF2-40B4-BE49-F238E27FC236}">
+                <a16:creationId xmlns:a16="http://schemas.microsoft.com/office/drawing/2014/main" id="{7F1B8DDA-E6B8-4CD9-BB74-BB1DC6951A70}"/>
+              </a:ext>
+            </a:extLst>
+          </p:cNvPr>
+          <p:cNvSpPr/>
+          <p:nvPr/>
+        </p:nvSpPr>
+        <p:spPr>
+          <a:xfrm>
+            <a:off x="1186047" y="4690351"/>
+            <a:ext cx="2105816" cy="584424"/>
+          </a:xfrm>
+          <a:prstGeom prst="rect">
+            <a:avLst/>
+          </a:prstGeom>
+        </p:spPr>
+        <p:style>
+          <a:lnRef idx="2">
+            <a:schemeClr val="accent1">
+              <a:shade val="50000"/>
+            </a:schemeClr>
+          </a:lnRef>
+          <a:fillRef idx="1">
+            <a:schemeClr val="accent1"/>
+          </a:fillRef>
+          <a:effectRef idx="0">
+            <a:schemeClr val="accent1"/>
+          </a:effectRef>
+          <a:fontRef idx="minor">
+            <a:schemeClr val="lt1"/>
+          </a:fontRef>
+        </p:style>
+        <p:txBody>
+          <a:bodyPr rtlCol="0" anchor="ctr"/>
+          <a:lstStyle/>
+          <a:p>
+            <a:pPr algn="ctr"/>
+            <a:endParaRPr lang="de-CH"/>
+          </a:p>
+        </p:txBody>
+      </p:sp>
+      <p:sp>
+        <p:nvSpPr>
+          <p:cNvPr id="24" name="TextBox 23">
+            <a:extLst>
+              <a:ext uri="{FF2B5EF4-FFF2-40B4-BE49-F238E27FC236}">
+                <a16:creationId xmlns:a16="http://schemas.microsoft.com/office/drawing/2014/main" id="{1E1D902F-B73F-4EFA-945A-944C9446987F}"/>
+              </a:ext>
+            </a:extLst>
+          </p:cNvPr>
+          <p:cNvSpPr txBox="1"/>
+          <p:nvPr/>
+        </p:nvSpPr>
+        <p:spPr>
+          <a:xfrm>
+            <a:off x="1225291" y="4769657"/>
+            <a:ext cx="1388585" cy="369332"/>
+          </a:xfrm>
+          <a:prstGeom prst="rect">
+            <a:avLst/>
+          </a:prstGeom>
+          <a:noFill/>
+        </p:spPr>
+        <p:txBody>
+          <a:bodyPr wrap="none" rtlCol="0">
+            <a:spAutoFit/>
+          </a:bodyPr>
+          <a:lstStyle/>
+          <a:p>
+            <a:r>
+              <a:rPr lang="de-CH" dirty="0" err="1">
+                <a:solidFill>
+                  <a:schemeClr val="bg1"/>
+                </a:solidFill>
+              </a:rPr>
+              <a:t>Temperature</a:t>
+            </a:r>
+            <a:endParaRPr lang="de-CH" dirty="0">
+              <a:solidFill>
+                <a:schemeClr val="bg1"/>
+              </a:solidFill>
+            </a:endParaRPr>
+          </a:p>
+        </p:txBody>
+      </p:sp>
+      <p:sp>
+        <p:nvSpPr>
+          <p:cNvPr id="27" name="Rectangle 26">
+            <a:extLst>
+              <a:ext uri="{FF2B5EF4-FFF2-40B4-BE49-F238E27FC236}">
+                <a16:creationId xmlns:a16="http://schemas.microsoft.com/office/drawing/2014/main" id="{2DD99DF3-D4E6-4FE1-AB44-C413494C60BE}"/>
+              </a:ext>
+            </a:extLst>
+          </p:cNvPr>
+          <p:cNvSpPr/>
+          <p:nvPr/>
+        </p:nvSpPr>
+        <p:spPr>
+          <a:xfrm>
+            <a:off x="1186047" y="5436857"/>
+            <a:ext cx="2105816" cy="584424"/>
+          </a:xfrm>
+          <a:prstGeom prst="rect">
+            <a:avLst/>
+          </a:prstGeom>
+        </p:spPr>
+        <p:style>
+          <a:lnRef idx="2">
+            <a:schemeClr val="accent1">
+              <a:shade val="50000"/>
+            </a:schemeClr>
+          </a:lnRef>
+          <a:fillRef idx="1">
+            <a:schemeClr val="accent1"/>
+          </a:fillRef>
+          <a:effectRef idx="0">
+            <a:schemeClr val="accent1"/>
+          </a:effectRef>
+          <a:fontRef idx="minor">
+            <a:schemeClr val="lt1"/>
+          </a:fontRef>
+        </p:style>
+        <p:txBody>
+          <a:bodyPr rtlCol="0" anchor="ctr"/>
+          <a:lstStyle/>
+          <a:p>
+            <a:pPr algn="ctr"/>
+            <a:endParaRPr lang="de-CH"/>
+          </a:p>
+        </p:txBody>
+      </p:sp>
+      <p:sp>
+        <p:nvSpPr>
+          <p:cNvPr id="28" name="TextBox 27">
+            <a:extLst>
+              <a:ext uri="{FF2B5EF4-FFF2-40B4-BE49-F238E27FC236}">
+                <a16:creationId xmlns:a16="http://schemas.microsoft.com/office/drawing/2014/main" id="{76B7AAB2-FA3F-4880-A6E5-47E1CBC43947}"/>
+              </a:ext>
+            </a:extLst>
+          </p:cNvPr>
+          <p:cNvSpPr txBox="1"/>
+          <p:nvPr/>
+        </p:nvSpPr>
+        <p:spPr>
+          <a:xfrm>
+            <a:off x="1225291" y="5516163"/>
+            <a:ext cx="2078005" cy="369332"/>
+          </a:xfrm>
+          <a:prstGeom prst="rect">
+            <a:avLst/>
+          </a:prstGeom>
+          <a:noFill/>
+        </p:spPr>
+        <p:txBody>
+          <a:bodyPr wrap="none" rtlCol="0">
+            <a:spAutoFit/>
+          </a:bodyPr>
+          <a:lstStyle/>
+          <a:p>
             <a:r>
               <a:rPr lang="de-CH" dirty="0">
                 <a:solidFill>
                   <a:schemeClr val="bg1"/>
                 </a:solidFill>
               </a:rPr>
-              <a:t>About Energy </a:t>
+              <a:t>Cloud / Air Pollution</a:t>
+            </a:r>
+          </a:p>
+        </p:txBody>
+      </p:sp>
+      <p:sp>
+        <p:nvSpPr>
+          <p:cNvPr id="29" name="Rectangle 28">
+            <a:extLst>
+              <a:ext uri="{FF2B5EF4-FFF2-40B4-BE49-F238E27FC236}">
+                <a16:creationId xmlns:a16="http://schemas.microsoft.com/office/drawing/2014/main" id="{E1CD29B8-6CBF-406D-8A99-75400993DDB7}"/>
+              </a:ext>
+            </a:extLst>
+          </p:cNvPr>
+          <p:cNvSpPr/>
+          <p:nvPr/>
+        </p:nvSpPr>
+        <p:spPr>
+          <a:xfrm>
+            <a:off x="879463" y="3113898"/>
+            <a:ext cx="2404427" cy="369333"/>
+          </a:xfrm>
+          <a:prstGeom prst="rect">
+            <a:avLst/>
+          </a:prstGeom>
+        </p:spPr>
+        <p:style>
+          <a:lnRef idx="2">
+            <a:schemeClr val="accent1">
+              <a:shade val="50000"/>
+            </a:schemeClr>
+          </a:lnRef>
+          <a:fillRef idx="1">
+            <a:schemeClr val="accent1"/>
+          </a:fillRef>
+          <a:effectRef idx="0">
+            <a:schemeClr val="accent1"/>
+          </a:effectRef>
+          <a:fontRef idx="minor">
+            <a:schemeClr val="lt1"/>
+          </a:fontRef>
+        </p:style>
+        <p:txBody>
+          <a:bodyPr rtlCol="0" anchor="ctr"/>
+          <a:lstStyle/>
+          <a:p>
+            <a:pPr algn="ctr"/>
+            <a:endParaRPr lang="de-CH"/>
+          </a:p>
+        </p:txBody>
+      </p:sp>
+      <p:sp>
+        <p:nvSpPr>
+          <p:cNvPr id="30" name="Rectangle 29">
+            <a:extLst>
+              <a:ext uri="{FF2B5EF4-FFF2-40B4-BE49-F238E27FC236}">
+                <a16:creationId xmlns:a16="http://schemas.microsoft.com/office/drawing/2014/main" id="{32130AA3-3633-488F-ACF8-849C879B4FFE}"/>
+              </a:ext>
+            </a:extLst>
+          </p:cNvPr>
+          <p:cNvSpPr/>
+          <p:nvPr/>
+        </p:nvSpPr>
+        <p:spPr>
+          <a:xfrm>
+            <a:off x="943753" y="3172409"/>
+            <a:ext cx="337065" cy="279982"/>
+          </a:xfrm>
+          <a:prstGeom prst="rect">
+            <a:avLst/>
+          </a:prstGeom>
+          <a:solidFill>
+            <a:schemeClr val="bg1"/>
+          </a:solidFill>
+        </p:spPr>
+        <p:style>
+          <a:lnRef idx="2">
+            <a:schemeClr val="accent1">
+              <a:shade val="50000"/>
+            </a:schemeClr>
+          </a:lnRef>
+          <a:fillRef idx="1">
+            <a:schemeClr val="accent1"/>
+          </a:fillRef>
+          <a:effectRef idx="0">
+            <a:schemeClr val="accent1"/>
+          </a:effectRef>
+          <a:fontRef idx="minor">
+            <a:schemeClr val="lt1"/>
+          </a:fontRef>
+        </p:style>
+        <p:txBody>
+          <a:bodyPr rtlCol="0" anchor="ctr"/>
+          <a:lstStyle/>
+          <a:p>
+            <a:pPr algn="ctr"/>
+            <a:endParaRPr lang="de-CH"/>
+          </a:p>
+        </p:txBody>
+      </p:sp>
+      <p:sp>
+        <p:nvSpPr>
+          <p:cNvPr id="32" name="Rectangle 31">
+            <a:extLst>
+              <a:ext uri="{FF2B5EF4-FFF2-40B4-BE49-F238E27FC236}">
+                <a16:creationId xmlns:a16="http://schemas.microsoft.com/office/drawing/2014/main" id="{97A8247B-FFE4-4126-A2C4-FB2567CF8BB2}"/>
+              </a:ext>
+            </a:extLst>
+          </p:cNvPr>
+          <p:cNvSpPr/>
+          <p:nvPr/>
+        </p:nvSpPr>
+        <p:spPr>
+          <a:xfrm>
+            <a:off x="880789" y="3592301"/>
+            <a:ext cx="2404427" cy="369333"/>
+          </a:xfrm>
+          <a:prstGeom prst="rect">
+            <a:avLst/>
+          </a:prstGeom>
+        </p:spPr>
+        <p:style>
+          <a:lnRef idx="2">
+            <a:schemeClr val="accent1">
+              <a:shade val="50000"/>
+            </a:schemeClr>
+          </a:lnRef>
+          <a:fillRef idx="1">
+            <a:schemeClr val="accent1"/>
+          </a:fillRef>
+          <a:effectRef idx="0">
+            <a:schemeClr val="accent1"/>
+          </a:effectRef>
+          <a:fontRef idx="minor">
+            <a:schemeClr val="lt1"/>
+          </a:fontRef>
+        </p:style>
+        <p:txBody>
+          <a:bodyPr rtlCol="0" anchor="ctr"/>
+          <a:lstStyle/>
+          <a:p>
+            <a:pPr algn="ctr"/>
+            <a:endParaRPr lang="de-CH"/>
+          </a:p>
+        </p:txBody>
+      </p:sp>
+      <p:sp>
+        <p:nvSpPr>
+          <p:cNvPr id="33" name="Rectangle 32">
+            <a:extLst>
+              <a:ext uri="{FF2B5EF4-FFF2-40B4-BE49-F238E27FC236}">
+                <a16:creationId xmlns:a16="http://schemas.microsoft.com/office/drawing/2014/main" id="{907979E4-C9D3-4760-923D-FABBA4D1F778}"/>
+              </a:ext>
+            </a:extLst>
+          </p:cNvPr>
+          <p:cNvSpPr/>
+          <p:nvPr/>
+        </p:nvSpPr>
+        <p:spPr>
+          <a:xfrm>
+            <a:off x="945079" y="3650812"/>
+            <a:ext cx="337065" cy="279982"/>
+          </a:xfrm>
+          <a:prstGeom prst="rect">
+            <a:avLst/>
+          </a:prstGeom>
+          <a:solidFill>
+            <a:schemeClr val="bg1"/>
+          </a:solidFill>
+        </p:spPr>
+        <p:style>
+          <a:lnRef idx="2">
+            <a:schemeClr val="accent1">
+              <a:shade val="50000"/>
+            </a:schemeClr>
+          </a:lnRef>
+          <a:fillRef idx="1">
+            <a:schemeClr val="accent1"/>
+          </a:fillRef>
+          <a:effectRef idx="0">
+            <a:schemeClr val="accent1"/>
+          </a:effectRef>
+          <a:fontRef idx="minor">
+            <a:schemeClr val="lt1"/>
+          </a:fontRef>
+        </p:style>
+        <p:txBody>
+          <a:bodyPr rtlCol="0" anchor="ctr"/>
+          <a:lstStyle/>
+          <a:p>
+            <a:pPr algn="ctr"/>
+            <a:endParaRPr lang="de-CH"/>
+          </a:p>
+        </p:txBody>
+      </p:sp>
+      <p:sp>
+        <p:nvSpPr>
+          <p:cNvPr id="34" name="TextBox 33">
+            <a:extLst>
+              <a:ext uri="{FF2B5EF4-FFF2-40B4-BE49-F238E27FC236}">
+                <a16:creationId xmlns:a16="http://schemas.microsoft.com/office/drawing/2014/main" id="{690AD2BC-48F3-4893-ABAA-B899448B9F45}"/>
+              </a:ext>
+            </a:extLst>
+          </p:cNvPr>
+          <p:cNvSpPr txBox="1"/>
+          <p:nvPr/>
+        </p:nvSpPr>
+        <p:spPr>
+          <a:xfrm>
+            <a:off x="1280818" y="3611822"/>
+            <a:ext cx="1619931" cy="369332"/>
+          </a:xfrm>
+          <a:prstGeom prst="rect">
+            <a:avLst/>
+          </a:prstGeom>
+          <a:noFill/>
+        </p:spPr>
+        <p:txBody>
+          <a:bodyPr wrap="none" rtlCol="0">
+            <a:spAutoFit/>
+          </a:bodyPr>
+          <a:lstStyle/>
+          <a:p>
+            <a:r>
+              <a:rPr lang="de-CH" dirty="0">
+                <a:solidFill>
+                  <a:schemeClr val="bg1"/>
+                </a:solidFill>
+              </a:rPr>
+              <a:t>Climate </a:t>
             </a:r>
             <a:r>
               <a:rPr lang="de-CH" dirty="0" err="1">
@@ -16174,7 +19220,7 @@
                   <a:schemeClr val="bg1"/>
                 </a:solidFill>
               </a:rPr>
-              <a:t>Produced</a:t>
+              <a:t>Factors</a:t>
             </a:r>
             <a:endParaRPr lang="de-CH" dirty="0">
               <a:solidFill>
@@ -16186,10 +19232,105 @@
       </p:sp>
       <p:sp>
         <p:nvSpPr>
-          <p:cNvPr id="27" name="TextBox 26">
-            <a:extLst>
-              <a:ext uri="{FF2B5EF4-FFF2-40B4-BE49-F238E27FC236}">
-                <a16:creationId xmlns:a16="http://schemas.microsoft.com/office/drawing/2014/main" id="{52EC58FE-0066-4F7D-B145-0A5847343A42}"/>
+          <p:cNvPr id="35" name="Rectangle 34">
+            <a:extLst>
+              <a:ext uri="{FF2B5EF4-FFF2-40B4-BE49-F238E27FC236}">
+                <a16:creationId xmlns:a16="http://schemas.microsoft.com/office/drawing/2014/main" id="{CE8E39CB-35AB-49A2-A3AE-47FCE5090D25}"/>
+              </a:ext>
+            </a:extLst>
+          </p:cNvPr>
+          <p:cNvSpPr/>
+          <p:nvPr/>
+        </p:nvSpPr>
+        <p:spPr>
+          <a:xfrm>
+            <a:off x="882115" y="6152267"/>
+            <a:ext cx="2404427" cy="369333"/>
+          </a:xfrm>
+          <a:prstGeom prst="rect">
+            <a:avLst/>
+          </a:prstGeom>
+        </p:spPr>
+        <p:style>
+          <a:lnRef idx="2">
+            <a:schemeClr val="accent1">
+              <a:shade val="50000"/>
+            </a:schemeClr>
+          </a:lnRef>
+          <a:fillRef idx="1">
+            <a:schemeClr val="accent1"/>
+          </a:fillRef>
+          <a:effectRef idx="0">
+            <a:schemeClr val="accent1"/>
+          </a:effectRef>
+          <a:fontRef idx="minor">
+            <a:schemeClr val="lt1"/>
+          </a:fontRef>
+        </p:style>
+        <p:txBody>
+          <a:bodyPr rtlCol="0" anchor="ctr"/>
+          <a:lstStyle/>
+          <a:p>
+            <a:pPr algn="ctr"/>
+            <a:endParaRPr lang="de-CH"/>
+          </a:p>
+        </p:txBody>
+      </p:sp>
+      <p:sp>
+        <p:nvSpPr>
+          <p:cNvPr id="36" name="Rectangle 35">
+            <a:extLst>
+              <a:ext uri="{FF2B5EF4-FFF2-40B4-BE49-F238E27FC236}">
+                <a16:creationId xmlns:a16="http://schemas.microsoft.com/office/drawing/2014/main" id="{6C042BC1-0433-4114-B5BD-313D4D4F9251}"/>
+              </a:ext>
+            </a:extLst>
+          </p:cNvPr>
+          <p:cNvSpPr/>
+          <p:nvPr/>
+        </p:nvSpPr>
+        <p:spPr>
+          <a:xfrm>
+            <a:off x="946405" y="6210778"/>
+            <a:ext cx="337065" cy="279982"/>
+          </a:xfrm>
+          <a:prstGeom prst="rect">
+            <a:avLst/>
+          </a:prstGeom>
+          <a:solidFill>
+            <a:schemeClr val="bg1"/>
+          </a:solidFill>
+        </p:spPr>
+        <p:style>
+          <a:lnRef idx="2">
+            <a:schemeClr val="accent1">
+              <a:shade val="50000"/>
+            </a:schemeClr>
+          </a:lnRef>
+          <a:fillRef idx="1">
+            <a:schemeClr val="accent1"/>
+          </a:fillRef>
+          <a:effectRef idx="0">
+            <a:schemeClr val="accent1"/>
+          </a:effectRef>
+          <a:fontRef idx="minor">
+            <a:schemeClr val="lt1"/>
+          </a:fontRef>
+        </p:style>
+        <p:txBody>
+          <a:bodyPr rtlCol="0" anchor="ctr"/>
+          <a:lstStyle/>
+          <a:p>
+            <a:pPr algn="ctr"/>
+            <a:endParaRPr lang="de-CH"/>
+          </a:p>
+        </p:txBody>
+      </p:sp>
+      <p:sp>
+        <p:nvSpPr>
+          <p:cNvPr id="37" name="TextBox 36">
+            <a:extLst>
+              <a:ext uri="{FF2B5EF4-FFF2-40B4-BE49-F238E27FC236}">
+                <a16:creationId xmlns:a16="http://schemas.microsoft.com/office/drawing/2014/main" id="{B2255B43-E820-401A-9210-B88081A717BB}"/>
               </a:ext>
             </a:extLst>
           </p:cNvPr>
@@ -16198,8 +19339,8 @@
         </p:nvSpPr>
         <p:spPr>
           <a:xfrm>
-            <a:off x="7145077" y="4469929"/>
-            <a:ext cx="950709" cy="369332"/>
+            <a:off x="1282144" y="6171788"/>
+            <a:ext cx="1813445" cy="369332"/>
           </a:xfrm>
           <a:prstGeom prst="rect">
             <a:avLst/>
@@ -16218,17 +19359,76 @@
                   <a:schemeClr val="bg1"/>
                 </a:solidFill>
               </a:rPr>
-              <a:t>Markers</a:t>
-            </a:r>
-          </a:p>
-        </p:txBody>
-      </p:sp>
-      <p:sp>
-        <p:nvSpPr>
-          <p:cNvPr id="17" name="TextBox 16">
-            <a:extLst>
-              <a:ext uri="{FF2B5EF4-FFF2-40B4-BE49-F238E27FC236}">
-                <a16:creationId xmlns:a16="http://schemas.microsoft.com/office/drawing/2014/main" id="{BB5FBE32-7EDC-4C3C-9432-B4B984EB1002}"/>
+              <a:t>Economic </a:t>
+            </a:r>
+            <a:r>
+              <a:rPr lang="de-CH" dirty="0" err="1">
+                <a:solidFill>
+                  <a:schemeClr val="bg1"/>
+                </a:solidFill>
+              </a:rPr>
+              <a:t>Factors</a:t>
+            </a:r>
+            <a:endParaRPr lang="de-CH" dirty="0">
+              <a:solidFill>
+                <a:schemeClr val="bg1"/>
+              </a:solidFill>
+            </a:endParaRPr>
+          </a:p>
+        </p:txBody>
+      </p:sp>
+      <p:sp>
+        <p:nvSpPr>
+          <p:cNvPr id="38" name="Rectangle 37">
+            <a:extLst>
+              <a:ext uri="{FF2B5EF4-FFF2-40B4-BE49-F238E27FC236}">
+                <a16:creationId xmlns:a16="http://schemas.microsoft.com/office/drawing/2014/main" id="{0A36707C-EA42-44F5-8766-3C7F85651EC6}"/>
+              </a:ext>
+            </a:extLst>
+          </p:cNvPr>
+          <p:cNvSpPr/>
+          <p:nvPr/>
+        </p:nvSpPr>
+        <p:spPr>
+          <a:xfrm>
+            <a:off x="1186047" y="6627408"/>
+            <a:ext cx="2105816" cy="584424"/>
+          </a:xfrm>
+          <a:prstGeom prst="rect">
+            <a:avLst/>
+          </a:prstGeom>
+        </p:spPr>
+        <p:style>
+          <a:lnRef idx="2">
+            <a:schemeClr val="accent1">
+              <a:shade val="50000"/>
+            </a:schemeClr>
+          </a:lnRef>
+          <a:fillRef idx="1">
+            <a:schemeClr val="accent1"/>
+          </a:fillRef>
+          <a:effectRef idx="0">
+            <a:schemeClr val="accent1"/>
+          </a:effectRef>
+          <a:fontRef idx="minor">
+            <a:schemeClr val="lt1"/>
+          </a:fontRef>
+        </p:style>
+        <p:txBody>
+          <a:bodyPr rtlCol="0" anchor="ctr"/>
+          <a:lstStyle/>
+          <a:p>
+            <a:pPr algn="ctr"/>
+            <a:endParaRPr lang="de-CH"/>
+          </a:p>
+        </p:txBody>
+      </p:sp>
+      <p:sp>
+        <p:nvSpPr>
+          <p:cNvPr id="39" name="TextBox 38">
+            <a:extLst>
+              <a:ext uri="{FF2B5EF4-FFF2-40B4-BE49-F238E27FC236}">
+                <a16:creationId xmlns:a16="http://schemas.microsoft.com/office/drawing/2014/main" id="{4E27D457-C24D-44EE-887C-9BCD94F9029A}"/>
               </a:ext>
             </a:extLst>
           </p:cNvPr>
@@ -16237,8 +19437,8 @@
         </p:nvSpPr>
         <p:spPr>
           <a:xfrm>
-            <a:off x="7225256" y="5064490"/>
-            <a:ext cx="2033762" cy="369332"/>
+            <a:off x="1225291" y="6706714"/>
+            <a:ext cx="1431867" cy="369332"/>
           </a:xfrm>
           <a:prstGeom prst="rect">
             <a:avLst/>
@@ -16257,7 +19457,216 @@
                   <a:schemeClr val="bg1"/>
                 </a:solidFill>
               </a:rPr>
-              <a:t>Colors = Companies</a:t>
+              <a:t>Energy Prices</a:t>
+            </a:r>
+          </a:p>
+        </p:txBody>
+      </p:sp>
+      <p:sp>
+        <p:nvSpPr>
+          <p:cNvPr id="40" name="Rectangle 39">
+            <a:extLst>
+              <a:ext uri="{FF2B5EF4-FFF2-40B4-BE49-F238E27FC236}">
+                <a16:creationId xmlns:a16="http://schemas.microsoft.com/office/drawing/2014/main" id="{D36D3C79-6D31-48E9-AFDA-92BDD7E6D8D9}"/>
+              </a:ext>
+            </a:extLst>
+          </p:cNvPr>
+          <p:cNvSpPr/>
+          <p:nvPr/>
+        </p:nvSpPr>
+        <p:spPr>
+          <a:xfrm>
+            <a:off x="1186047" y="7298120"/>
+            <a:ext cx="2105816" cy="584424"/>
+          </a:xfrm>
+          <a:prstGeom prst="rect">
+            <a:avLst/>
+          </a:prstGeom>
+        </p:spPr>
+        <p:style>
+          <a:lnRef idx="2">
+            <a:schemeClr val="accent1">
+              <a:shade val="50000"/>
+            </a:schemeClr>
+          </a:lnRef>
+          <a:fillRef idx="1">
+            <a:schemeClr val="accent1"/>
+          </a:fillRef>
+          <a:effectRef idx="0">
+            <a:schemeClr val="accent1"/>
+          </a:effectRef>
+          <a:fontRef idx="minor">
+            <a:schemeClr val="lt1"/>
+          </a:fontRef>
+        </p:style>
+        <p:txBody>
+          <a:bodyPr rtlCol="0" anchor="ctr"/>
+          <a:lstStyle/>
+          <a:p>
+            <a:pPr algn="ctr"/>
+            <a:endParaRPr lang="de-CH"/>
+          </a:p>
+        </p:txBody>
+      </p:sp>
+      <p:sp>
+        <p:nvSpPr>
+          <p:cNvPr id="41" name="TextBox 40">
+            <a:extLst>
+              <a:ext uri="{FF2B5EF4-FFF2-40B4-BE49-F238E27FC236}">
+                <a16:creationId xmlns:a16="http://schemas.microsoft.com/office/drawing/2014/main" id="{DCE25DAB-82C0-484C-A8B3-DB50058FDDE8}"/>
+              </a:ext>
+            </a:extLst>
+          </p:cNvPr>
+          <p:cNvSpPr txBox="1"/>
+          <p:nvPr/>
+        </p:nvSpPr>
+        <p:spPr>
+          <a:xfrm>
+            <a:off x="1225291" y="7377426"/>
+            <a:ext cx="981359" cy="369332"/>
+          </a:xfrm>
+          <a:prstGeom prst="rect">
+            <a:avLst/>
+          </a:prstGeom>
+          <a:noFill/>
+        </p:spPr>
+        <p:txBody>
+          <a:bodyPr wrap="none" rtlCol="0">
+            <a:spAutoFit/>
+          </a:bodyPr>
+          <a:lstStyle/>
+          <a:p>
+            <a:r>
+              <a:rPr lang="de-CH" dirty="0">
+                <a:solidFill>
+                  <a:schemeClr val="bg1"/>
+                </a:solidFill>
+              </a:rPr>
+              <a:t>Demand</a:t>
+            </a:r>
+          </a:p>
+        </p:txBody>
+      </p:sp>
+      <p:sp>
+        <p:nvSpPr>
+          <p:cNvPr id="42" name="Rectangle 41">
+            <a:extLst>
+              <a:ext uri="{FF2B5EF4-FFF2-40B4-BE49-F238E27FC236}">
+                <a16:creationId xmlns:a16="http://schemas.microsoft.com/office/drawing/2014/main" id="{33BFDA4F-829B-43C0-989D-3C6D519C8C70}"/>
+              </a:ext>
+            </a:extLst>
+          </p:cNvPr>
+          <p:cNvSpPr/>
+          <p:nvPr/>
+        </p:nvSpPr>
+        <p:spPr>
+          <a:xfrm>
+            <a:off x="1186047" y="7961850"/>
+            <a:ext cx="2105816" cy="584424"/>
+          </a:xfrm>
+          <a:prstGeom prst="rect">
+            <a:avLst/>
+          </a:prstGeom>
+        </p:spPr>
+        <p:style>
+          <a:lnRef idx="2">
+            <a:schemeClr val="accent1">
+              <a:shade val="50000"/>
+            </a:schemeClr>
+          </a:lnRef>
+          <a:fillRef idx="1">
+            <a:schemeClr val="accent1"/>
+          </a:fillRef>
+          <a:effectRef idx="0">
+            <a:schemeClr val="accent1"/>
+          </a:effectRef>
+          <a:fontRef idx="minor">
+            <a:schemeClr val="lt1"/>
+          </a:fontRef>
+        </p:style>
+        <p:txBody>
+          <a:bodyPr rtlCol="0" anchor="ctr"/>
+          <a:lstStyle/>
+          <a:p>
+            <a:pPr algn="ctr"/>
+            <a:endParaRPr lang="de-CH"/>
+          </a:p>
+        </p:txBody>
+      </p:sp>
+      <p:sp>
+        <p:nvSpPr>
+          <p:cNvPr id="43" name="TextBox 42">
+            <a:extLst>
+              <a:ext uri="{FF2B5EF4-FFF2-40B4-BE49-F238E27FC236}">
+                <a16:creationId xmlns:a16="http://schemas.microsoft.com/office/drawing/2014/main" id="{4F59BEAD-C02F-4586-A50A-D496F586374F}"/>
+              </a:ext>
+            </a:extLst>
+          </p:cNvPr>
+          <p:cNvSpPr txBox="1"/>
+          <p:nvPr/>
+        </p:nvSpPr>
+        <p:spPr>
+          <a:xfrm>
+            <a:off x="1225291" y="8041156"/>
+            <a:ext cx="2177584" cy="369332"/>
+          </a:xfrm>
+          <a:prstGeom prst="rect">
+            <a:avLst/>
+          </a:prstGeom>
+          <a:noFill/>
+        </p:spPr>
+        <p:txBody>
+          <a:bodyPr wrap="none" rtlCol="0">
+            <a:spAutoFit/>
+          </a:bodyPr>
+          <a:lstStyle/>
+          <a:p>
+            <a:r>
+              <a:rPr lang="de-CH" dirty="0">
+                <a:solidFill>
+                  <a:schemeClr val="bg1"/>
+                </a:solidFill>
+              </a:rPr>
+              <a:t>Supply / Competition</a:t>
+            </a:r>
+          </a:p>
+        </p:txBody>
+      </p:sp>
+      <p:sp>
+        <p:nvSpPr>
+          <p:cNvPr id="46" name="TextBox 45">
+            <a:extLst>
+              <a:ext uri="{FF2B5EF4-FFF2-40B4-BE49-F238E27FC236}">
+                <a16:creationId xmlns:a16="http://schemas.microsoft.com/office/drawing/2014/main" id="{59582861-4E9B-491D-86FF-9054DC4FA66C}"/>
+              </a:ext>
+            </a:extLst>
+          </p:cNvPr>
+          <p:cNvSpPr txBox="1"/>
+          <p:nvPr/>
+        </p:nvSpPr>
+        <p:spPr>
+          <a:xfrm>
+            <a:off x="1333574" y="3104572"/>
+            <a:ext cx="1592359" cy="369332"/>
+          </a:xfrm>
+          <a:prstGeom prst="rect">
+            <a:avLst/>
+          </a:prstGeom>
+          <a:noFill/>
+        </p:spPr>
+        <p:txBody>
+          <a:bodyPr wrap="none" rtlCol="0">
+            <a:spAutoFit/>
+          </a:bodyPr>
+          <a:lstStyle/>
+          <a:p>
+            <a:r>
+              <a:rPr lang="de-CH" dirty="0">
+                <a:solidFill>
+                  <a:schemeClr val="bg1"/>
+                </a:solidFill>
+              </a:rPr>
+              <a:t>Potential Score</a:t>
             </a:r>
           </a:p>
         </p:txBody>
@@ -16265,7 +19674,7 @@
     </p:spTree>
     <p:extLst>
       <p:ext uri="{BB962C8B-B14F-4D97-AF65-F5344CB8AC3E}">
-        <p14:creationId xmlns:p14="http://schemas.microsoft.com/office/powerpoint/2010/main" val="1254334830"/>
+        <p14:creationId xmlns:p14="http://schemas.microsoft.com/office/powerpoint/2010/main" val="774240822"/>
       </p:ext>
     </p:extLst>
   </p:cSld>

--- a/task_description/Brainstorming.pptx
+++ b/task_description/Brainstorming.pptx
@@ -3880,6 +3880,76 @@
       </p:grpSpPr>
       <p:sp>
         <p:nvSpPr>
+          <p:cNvPr id="4" name="Rectangle: Rounded Corners 3">
+            <a:extLst>
+              <a:ext uri="{FF2B5EF4-FFF2-40B4-BE49-F238E27FC236}">
+                <a16:creationId xmlns:a16="http://schemas.microsoft.com/office/drawing/2014/main" id="{5A7AFDB8-2306-455D-8C8B-87B44330C67B}"/>
+              </a:ext>
+            </a:extLst>
+          </p:cNvPr>
+          <p:cNvSpPr/>
+          <p:nvPr/>
+        </p:nvSpPr>
+        <p:spPr>
+          <a:xfrm>
+            <a:off x="12872" y="-158610"/>
+            <a:ext cx="12179127" cy="1310009"/>
+          </a:xfrm>
+          <a:prstGeom prst="roundRect">
+            <a:avLst/>
+          </a:prstGeom>
+          <a:gradFill flip="none" rotWithShape="1">
+            <a:gsLst>
+              <a:gs pos="0">
+                <a:srgbClr val="FFC000"/>
+              </a:gs>
+              <a:gs pos="100000">
+                <a:srgbClr val="FFFF00"/>
+              </a:gs>
+            </a:gsLst>
+            <a:path path="circle">
+              <a:fillToRect l="100000" t="100000"/>
+            </a:path>
+            <a:tileRect r="-100000" b="-100000"/>
+          </a:gradFill>
+          <a:ln>
+            <a:noFill/>
+          </a:ln>
+          <a:effectLst>
+            <a:outerShdw blurRad="50800" dist="38100" dir="5400000" algn="t" rotWithShape="0">
+              <a:prstClr val="black">
+                <a:alpha val="40000"/>
+              </a:prstClr>
+            </a:outerShdw>
+          </a:effectLst>
+        </p:spPr>
+        <p:style>
+          <a:lnRef idx="2">
+            <a:schemeClr val="accent1">
+              <a:shade val="50000"/>
+            </a:schemeClr>
+          </a:lnRef>
+          <a:fillRef idx="1">
+            <a:schemeClr val="accent1"/>
+          </a:fillRef>
+          <a:effectRef idx="0">
+            <a:schemeClr val="accent1"/>
+          </a:effectRef>
+          <a:fontRef idx="minor">
+            <a:schemeClr val="lt1"/>
+          </a:fontRef>
+        </p:style>
+        <p:txBody>
+          <a:bodyPr rtlCol="0" anchor="ctr"/>
+          <a:lstStyle/>
+          <a:p>
+            <a:pPr algn="ctr"/>
+            <a:endParaRPr lang="de-CH"/>
+          </a:p>
+        </p:txBody>
+      </p:sp>
+      <p:sp>
+        <p:nvSpPr>
           <p:cNvPr id="19" name="Rectangle 1">
             <a:extLst>
               <a:ext uri="{FF2B5EF4-FFF2-40B4-BE49-F238E27FC236}">
@@ -3894,8 +3964,8 @@
         </p:nvSpPr>
         <p:spPr bwMode="auto">
           <a:xfrm>
-            <a:off x="177971" y="200752"/>
-            <a:ext cx="5674951" cy="661720"/>
+            <a:off x="1858511" y="99600"/>
+            <a:ext cx="8872942" cy="754053"/>
           </a:xfrm>
           <a:prstGeom prst="rect">
             <a:avLst/>
@@ -3943,6 +4013,40 @@
           </a:bodyPr>
           <a:lstStyle/>
           <a:p>
+            <a:pPr lvl="0" eaLnBrk="0" fontAlgn="base" hangingPunct="0">
+              <a:spcBef>
+                <a:spcPct val="0"/>
+              </a:spcBef>
+              <a:spcAft>
+                <a:spcPct val="0"/>
+              </a:spcAft>
+            </a:pPr>
+            <a:r>
+              <a:rPr lang="en-US" sz="2800" dirty="0" err="1">
+                <a:latin typeface="Abadi" panose="020B0604020104020204" pitchFamily="34" charset="0"/>
+              </a:rPr>
+              <a:t>Mr</a:t>
+            </a:r>
+            <a:r>
+              <a:rPr lang="en-US" sz="2800" dirty="0">
+                <a:latin typeface="Abadi" panose="020B0604020104020204" pitchFamily="34" charset="0"/>
+              </a:rPr>
+              <a:t> Sunshine India – Mapping India’s Solar Infrastructure </a:t>
+            </a:r>
+            <a:endParaRPr kumimoji="0" lang="de-CH" altLang="de-DE" sz="2800" i="0" u="none" strike="noStrike" cap="none" normalizeH="0" baseline="0" dirty="0">
+              <a:ln>
+                <a:noFill/>
+              </a:ln>
+              <a:solidFill>
+                <a:schemeClr val="tx1"/>
+              </a:solidFill>
+              <a:effectLst/>
+              <a:latin typeface="Abadi" panose="020B0604020104020204" pitchFamily="34" charset="0"/>
+              <a:ea typeface="Arial" panose="020B0604020202020204" pitchFamily="34" charset="0"/>
+              <a:cs typeface="Arial" panose="020B0604020202020204" pitchFamily="34" charset="0"/>
+            </a:endParaRPr>
+          </a:p>
+          <a:p>
             <a:pPr marL="0" marR="0" lvl="0" indent="0" algn="l" defTabSz="914400" rtl="0" eaLnBrk="0" fontAlgn="base" latinLnBrk="0" hangingPunct="0">
               <a:lnSpc>
                 <a:spcPct val="100000"/>
@@ -3960,7 +4064,7 @@
               <a:tabLst/>
             </a:pPr>
             <a:r>
-              <a:rPr kumimoji="0" lang="de-CH" altLang="de-DE" sz="4000" b="1" i="0" u="none" strike="noStrike" cap="none" normalizeH="0" baseline="0" dirty="0" err="1">
+              <a:rPr kumimoji="0" lang="de-CH" altLang="de-DE" i="0" u="none" strike="noStrike" cap="none" normalizeH="0" baseline="0" dirty="0" err="1">
                 <a:ln>
                   <a:noFill/>
                 </a:ln>
@@ -3975,7 +4079,7 @@
               <a:t>Agentic</a:t>
             </a:r>
             <a:r>
-              <a:rPr kumimoji="0" lang="de-CH" altLang="de-DE" sz="4000" b="1" i="0" u="none" strike="noStrike" cap="none" normalizeH="0" baseline="0" dirty="0">
+              <a:rPr kumimoji="0" lang="de-CH" altLang="de-DE" i="0" u="none" strike="noStrike" cap="none" normalizeH="0" baseline="0" dirty="0">
                 <a:ln>
                   <a:noFill/>
                 </a:ln>
@@ -3990,7 +4094,7 @@
               <a:t> </a:t>
             </a:r>
             <a:r>
-              <a:rPr kumimoji="0" lang="de-CH" altLang="de-DE" sz="4000" b="1" i="0" u="none" strike="noStrike" cap="none" normalizeH="0" baseline="0" dirty="0" err="1">
+              <a:rPr kumimoji="0" lang="de-CH" altLang="de-DE" i="0" u="none" strike="noStrike" cap="none" normalizeH="0" baseline="0" dirty="0" err="1">
                 <a:ln>
                   <a:noFill/>
                 </a:ln>
@@ -4005,7 +4109,7 @@
               <a:t>Scraping</a:t>
             </a:r>
             <a:r>
-              <a:rPr kumimoji="0" lang="de-CH" altLang="de-DE" sz="4000" b="1" i="0" u="none" strike="noStrike" cap="none" normalizeH="0" baseline="0" dirty="0">
+              <a:rPr kumimoji="0" lang="de-CH" altLang="de-DE" i="0" u="none" strike="noStrike" cap="none" normalizeH="0" baseline="0" dirty="0">
                 <a:ln>
                   <a:noFill/>
                 </a:ln>
@@ -4019,7 +4123,7 @@
               </a:rPr>
               <a:t> Pipeline</a:t>
             </a:r>
-            <a:endParaRPr kumimoji="0" lang="de-CH" altLang="de-DE" sz="6000" b="0" i="0" u="none" strike="noStrike" cap="none" normalizeH="0" baseline="0" dirty="0">
+            <a:endParaRPr kumimoji="0" lang="de-CH" altLang="de-DE" sz="4400" i="0" u="none" strike="noStrike" cap="none" normalizeH="0" baseline="0" dirty="0">
               <a:ln>
                 <a:noFill/>
               </a:ln>
@@ -5552,7 +5656,7 @@
         </p:nvSpPr>
         <p:spPr>
           <a:xfrm>
-            <a:off x="5567299" y="2312705"/>
+            <a:off x="5976712" y="2093218"/>
             <a:ext cx="1142877" cy="415498"/>
           </a:xfrm>
           <a:prstGeom prst="rect">
@@ -7422,6 +7526,136 @@
           <a:xfrm>
             <a:off x="3785798" y="5533593"/>
             <a:ext cx="350417" cy="350417"/>
+          </a:xfrm>
+          <a:prstGeom prst="rect">
+            <a:avLst/>
+          </a:prstGeom>
+          <a:noFill/>
+          <a:extLst>
+            <a:ext uri="{909E8E84-426E-40DD-AFC4-6F175D3DCCD1}">
+              <a14:hiddenFill xmlns:a14="http://schemas.microsoft.com/office/drawing/2010/main">
+                <a:solidFill>
+                  <a:srgbClr val="FFFFFF"/>
+                </a:solidFill>
+              </a14:hiddenFill>
+            </a:ext>
+          </a:extLst>
+        </p:spPr>
+      </p:pic>
+      <p:pic>
+        <p:nvPicPr>
+          <p:cNvPr id="3" name="Picture 2">
+            <a:extLst>
+              <a:ext uri="{FF2B5EF4-FFF2-40B4-BE49-F238E27FC236}">
+                <a16:creationId xmlns:a16="http://schemas.microsoft.com/office/drawing/2014/main" id="{81E6A5D5-AE66-4708-89C6-6BC47F516C5D}"/>
+              </a:ext>
+            </a:extLst>
+          </p:cNvPr>
+          <p:cNvPicPr>
+            <a:picLocks noChangeAspect="1"/>
+          </p:cNvPicPr>
+          <p:nvPr/>
+        </p:nvPicPr>
+        <p:blipFill>
+          <a:blip r:embed="rId22">
+            <a:clrChange>
+              <a:clrFrom>
+                <a:srgbClr val="FFFFFF"/>
+              </a:clrFrom>
+              <a:clrTo>
+                <a:srgbClr val="FFFFFF">
+                  <a:alpha val="0"/>
+                </a:srgbClr>
+              </a:clrTo>
+            </a:clrChange>
+            <a:extLst>
+              <a:ext uri="{28A0092B-C50C-407E-A947-70E740481C1C}">
+                <a14:useLocalDpi xmlns:a14="http://schemas.microsoft.com/office/drawing/2010/main" val="0"/>
+              </a:ext>
+            </a:extLst>
+          </a:blip>
+          <a:stretch>
+            <a:fillRect/>
+          </a:stretch>
+        </p:blipFill>
+        <p:spPr>
+          <a:xfrm>
+            <a:off x="10676448" y="1414"/>
+            <a:ext cx="1019397" cy="1019397"/>
+          </a:xfrm>
+          <a:prstGeom prst="rect">
+            <a:avLst/>
+          </a:prstGeom>
+        </p:spPr>
+      </p:pic>
+      <p:pic>
+        <p:nvPicPr>
+          <p:cNvPr id="6" name="Picture 5">
+            <a:extLst>
+              <a:ext uri="{FF2B5EF4-FFF2-40B4-BE49-F238E27FC236}">
+                <a16:creationId xmlns:a16="http://schemas.microsoft.com/office/drawing/2014/main" id="{46E62692-29AF-4603-83F5-61592EBC3C74}"/>
+              </a:ext>
+            </a:extLst>
+          </p:cNvPr>
+          <p:cNvPicPr>
+            <a:picLocks noChangeAspect="1"/>
+          </p:cNvPicPr>
+          <p:nvPr/>
+        </p:nvPicPr>
+        <p:blipFill>
+          <a:blip r:embed="rId23">
+            <a:extLst>
+              <a:ext uri="{28A0092B-C50C-407E-A947-70E740481C1C}">
+                <a14:useLocalDpi xmlns:a14="http://schemas.microsoft.com/office/drawing/2010/main" val="0"/>
+              </a:ext>
+            </a:extLst>
+          </a:blip>
+          <a:stretch>
+            <a:fillRect/>
+          </a:stretch>
+        </p:blipFill>
+        <p:spPr>
+          <a:xfrm>
+            <a:off x="461200" y="57752"/>
+            <a:ext cx="926725" cy="926725"/>
+          </a:xfrm>
+          <a:prstGeom prst="rect">
+            <a:avLst/>
+          </a:prstGeom>
+        </p:spPr>
+      </p:pic>
+      <p:pic>
+        <p:nvPicPr>
+          <p:cNvPr id="1026" name="Picture 2" descr="Datei:Openstreetmap logo.svg – Wikipedia">
+            <a:hlinkClick r:id="rId24"/>
+            <a:extLst>
+              <a:ext uri="{FF2B5EF4-FFF2-40B4-BE49-F238E27FC236}">
+                <a16:creationId xmlns:a16="http://schemas.microsoft.com/office/drawing/2014/main" id="{F9B548C5-88FB-4FF5-82F6-D693809FB655}"/>
+              </a:ext>
+            </a:extLst>
+          </p:cNvPr>
+          <p:cNvPicPr>
+            <a:picLocks noChangeAspect="1" noChangeArrowheads="1"/>
+          </p:cNvPicPr>
+          <p:nvPr/>
+        </p:nvPicPr>
+        <p:blipFill>
+          <a:blip r:embed="rId25">
+            <a:extLst>
+              <a:ext uri="{28A0092B-C50C-407E-A947-70E740481C1C}">
+                <a14:useLocalDpi xmlns:a14="http://schemas.microsoft.com/office/drawing/2010/main" val="0"/>
+              </a:ext>
+            </a:extLst>
+          </a:blip>
+          <a:srcRect/>
+          <a:stretch>
+            <a:fillRect/>
+          </a:stretch>
+        </p:blipFill>
+        <p:spPr bwMode="auto">
+          <a:xfrm>
+            <a:off x="6641192" y="2648913"/>
+            <a:ext cx="385459" cy="385459"/>
           </a:xfrm>
           <a:prstGeom prst="rect">
             <a:avLst/>
